--- a/slides/Slides_Nhom8_LinCIR.pptx
+++ b/slides/Slides_Nhom8_LinCIR.pptx
@@ -9,18 +9,16 @@
   </p:notesMasterIdLst>
   <p:sldIdLst>
     <p:sldId id="256" r:id="rId2"/>
+    <p:sldId id="273" r:id="rId24"/>
     <p:sldId id="257" r:id="rId3"/>
-    <p:sldId id="258" r:id="rId4"/>
-    <p:sldId id="259" r:id="rId5"/>
     <p:sldId id="260" r:id="rId6"/>
-    <p:sldId id="261" r:id="rId7"/>
     <p:sldId id="262" r:id="rId8"/>
-    <p:sldId id="263" r:id="rId9"/>
-    <p:sldId id="264" r:id="rId10"/>
-    <p:sldId id="265" r:id="rId11"/>
     <p:sldId id="266" r:id="rId12"/>
     <p:sldId id="267" r:id="rId13"/>
+    <p:sldId id="259" r:id="rId5"/>
+    <p:sldId id="264" r:id="rId10"/>
     <p:sldId id="268" r:id="rId14"/>
+    <p:sldId id="265" r:id="rId11"/>
     <p:sldId id="269" r:id="rId15"/>
     <p:sldId id="270" r:id="rId16"/>
     <p:sldId id="271" r:id="rId17"/>
@@ -312,7 +310,7 @@
           <a:lstStyle/>
           <a:p>
             <a:r>
-              <a:t>[Tâm] Nhóm tái hiện phương pháp LinCIR, đề xuất hai cải tiến và kiểm chứng bằng kiểm định thống kê.</a:t>
+              <a:t>[Tâm] Giới thiệu đề tài, giảng viên và 5 thành viên. Đề tài: tái hiện và cải tiến phương pháp LinCIR, chứng minh cải tiến bằng kiểm định thống kê.</a:t>
             </a:r>
           </a:p>
         </p:txBody>
@@ -457,7 +455,7 @@
           <a:lstStyle/>
           <a:p>
             <a:r>
-              <a:t>[Trung] Cải tiến A thêm hàm mất mát đối sánh để mỗi câu phân biệt với 511 câu khác. Kết quả: không tốt hơn trên FashionIQ và kém hơn trên CIRCO; nguyên nhân trình bày ở slide 15.</a:t>
+              <a:t>[Trung] Cải tiến A sửa hàm mất mát vừa trình bày: thêm hàm mất mát đối sánh để mỗi câu phân biệt với 511 câu khác. Kết quả: không tốt hơn trên FashionIQ và kém hơn trên CIRCO; nguyên nhân trình bày ở slide 13.</a:t>
             </a:r>
           </a:p>
           <a:p>
@@ -532,7 +530,7 @@
           <a:lstStyle/>
           <a:p>
             <a:r>
-              <a:t>[Dũng] Cải tiến B cộng vào nhiễu vector Δ chỉ từ vùng văn bản sang vùng ảnh, để φ được huấn luyện gần với điều kiện khi suy luận.</a:t>
+              <a:t>[Dũng] Vector ảnh và vector văn bản của CLIP nằm ở hai vùng tách biệt; LinCIR thêm nhiễu u·ε không có hướng để φ chịu được độ lệch này. Cải tiến B cộng vào nhiễu vector Δ chỉ từ vùng văn bản sang vùng ảnh, để φ được huấn luyện gần với điều kiện khi suy luận.</a:t>
             </a:r>
           </a:p>
           <a:p>
@@ -682,7 +680,7 @@
           <a:lstStyle/>
           <a:p>
             <a:r>
-              <a:t>[Dũng] B cao nhất ở mọi cột và tốt hơn baseline có ý nghĩa thống kê; A và A+B kém hơn trên CIRCO.</a:t>
+              <a:t>[Tùng] B cao nhất ở mọi cột và tốt hơn baseline có ý nghĩa thống kê; A và A+B kém hơn trên CIRCO.</a:t>
             </a:r>
           </a:p>
           <a:p>
@@ -907,7 +905,12 @@
           <a:lstStyle/>
           <a:p>
             <a:r>
-              <a:t>[Cả nhóm] Cảm ơn cô và các bạn; mời đặt câu hỏi.</a:t>
+              <a:t>[Tâm] Cảm ơn cô và các bạn; mời đặt câu hỏi.</a:t>
+            </a:r>
+          </a:p>
+          <a:p>
+            <a:r>
+              <a:t>Chuyển câu hỏi: phương pháp, cải tiến A → Trung; tái hiện, bảng kết quả → Tùng; độ đo, kiểm định, cải tiến B, cơ chế → Dũng; bài toán, lý thuyết, ví dụ định tính → Nou; mã nguồn, Kaggle, thiết lập → Tâm.</a:t>
             </a:r>
           </a:p>
         </p:txBody>
@@ -923,6 +926,57 @@
           </p:nvPr>
         </p:nvSpPr>
         <p:spPr/>
+      </p:sp>
+    </p:spTree>
+  </p:cSld>
+  <p:clrMapOvr>
+    <a:masterClrMapping/>
+  </p:clrMapOvr>
+</p:notes>
+</file>
+
+<file path=ppt/notesSlides/notesSlide18.xml><?xml version="1.0" encoding="utf-8"?>
+<p:notes xmlns:a="http://schemas.openxmlformats.org/drawingml/2006/main" xmlns:p="http://schemas.openxmlformats.org/presentationml/2006/main" xmlns:r="http://schemas.openxmlformats.org/officeDocument/2006/relationships">
+  <p:cSld>
+    <p:spTree>
+      <p:nvGrpSpPr>
+        <p:cNvPr id="1" name=""/>
+        <p:cNvGrpSpPr/>
+        <p:nvPr/>
+      </p:nvGrpSpPr>
+      <p:grpSpPr>
+        <a:xfrm>
+          <a:off x="0" y="0"/>
+          <a:ext cx="0" cy="0"/>
+          <a:chOff x="0" y="0"/>
+          <a:chExt cx="0" cy="0"/>
+        </a:xfrm>
+      </p:grpSpPr>
+      <p:sp>
+        <p:nvSpPr>
+          <p:cNvPr id="3" name="Notes Placeholder 2"/>
+          <p:cNvSpPr>
+            <a:spLocks noGrp="1"/>
+          </p:cNvSpPr>
+          <p:nvPr>
+            <p:ph type="body" sz="quarter" idx="3"/>
+          </p:nvPr>
+        </p:nvSpPr>
+        <p:spPr/>
+        <p:txBody>
+          <a:bodyPr/>
+          <a:lstStyle/>
+          <a:p>
+            <a:r>
+              <a:t>[Tâm] Bài báo LinCIR (NAVER, CVPR 2024): bộ ba CIR gán nhãn tay đắt và nhỏ; Pic2Word, SEARLE cần ảnh khi huấn luyện và chỉ học câu mẫu cố định. LinCIR học mạng chiếu φ chỉ từ văn bản bằng Self-Masking Projection, thêm nhiễu để φ dùng được cho vector ảnh; tốt nhất trên 4 benchmark, huấn luyện nhanh hơn. Mã công khai nên nhóm dựng lại mã, tái hiện, chạy baseline, A, B, A+B trên Kaggle, kiểm định và phân tích. Nêu trước kết luận: B tốt hơn có ý nghĩa thống kê, A làm giảm hiệu năng.</a:t>
+            </a:r>
+          </a:p>
+          <a:p>
+            <a:r>
+              <a:t>Con số cần nêu: Nhanh hơn Pic2Word 6 lần, SEARLE 8,4 lần; kết quả nhóm: B tăng FashionIQ R@10 từ 25,90 lên 26,50, p = 0,006.</a:t>
+            </a:r>
+          </a:p>
+        </p:txBody>
       </p:sp>
     </p:spTree>
   </p:cSld>
@@ -977,82 +1031,12 @@
           <a:lstStyle/>
           <a:p>
             <a:r>
-              <a:t>[Nou] Truy vấn gồm một ảnh tham chiếu và một câu mô tả thay đổi; hệ thống phải tìm ảnh giữ đặc điểm của ảnh tham chiếu và áp dụng thay đổi.</a:t>
-            </a:r>
-          </a:p>
-        </p:txBody>
-      </p:sp>
-      <p:sp>
-        <p:nvSpPr>
-          <p:cNvPr id="4" name="Slide Number Placeholder 3"/>
-          <p:cNvSpPr>
-            <a:spLocks noGrp="1"/>
-          </p:cNvSpPr>
-          <p:nvPr>
-            <p:ph type="sldNum" sz="quarter" idx="5"/>
-          </p:nvPr>
-        </p:nvSpPr>
-        <p:spPr/>
-      </p:sp>
-    </p:spTree>
-  </p:cSld>
-  <p:clrMapOvr>
-    <a:masterClrMapping/>
-  </p:clrMapOvr>
-</p:notes>
-</file>
-
-<file path=ppt/notesSlides/notesSlide3.xml><?xml version="1.0" encoding="utf-8"?>
-<p:notes xmlns:a="http://schemas.openxmlformats.org/drawingml/2006/main" xmlns:r="http://schemas.openxmlformats.org/officeDocument/2006/relationships" xmlns:p="http://schemas.openxmlformats.org/presentationml/2006/main">
-  <p:cSld>
-    <p:spTree>
-      <p:nvGrpSpPr>
-        <p:cNvPr id="1" name=""/>
-        <p:cNvGrpSpPr/>
-        <p:nvPr/>
-      </p:nvGrpSpPr>
-      <p:grpSpPr>
-        <a:xfrm>
-          <a:off x="0" y="0"/>
-          <a:ext cx="0" cy="0"/>
-          <a:chOff x="0" y="0"/>
-          <a:chExt cx="0" cy="0"/>
-        </a:xfrm>
-      </p:grpSpPr>
-      <p:sp>
-        <p:nvSpPr>
-          <p:cNvPr id="2" name="Slide Image Placeholder 1"/>
-          <p:cNvSpPr>
-            <a:spLocks noGrp="1" noRot="1" noChangeAspect="1"/>
-          </p:cNvSpPr>
-          <p:nvPr>
-            <p:ph type="sldImg" idx="2"/>
-          </p:nvPr>
-        </p:nvSpPr>
-        <p:spPr/>
-      </p:sp>
-      <p:sp>
-        <p:nvSpPr>
-          <p:cNvPr id="3" name="Notes Placeholder 2"/>
-          <p:cNvSpPr>
-            <a:spLocks noGrp="1"/>
-          </p:cNvSpPr>
-          <p:nvPr>
-            <p:ph type="body" sz="quarter" idx="3"/>
-          </p:nvPr>
-        </p:nvSpPr>
-        <p:spPr/>
-        <p:txBody>
-          <a:bodyPr/>
-          <a:lstStyle/>
-          <a:p>
-            <a:r>
-              <a:t>[Nou] Huấn luyện có giám sát cần bộ ba do người gán nhãn, tốn kém và số lượng nhỏ. Zero-shot không dùng bộ ba nào khi huấn luyện.</a:t>
-            </a:r>
-          </a:p>
-          <a:p>
-            <a:r>
-              <a:t>Con số cần nêu: FashionIQ chỉ có 46,6 nghìn bộ ba, CIRR 28,8 nghìn — quá ít để tổng quát sang lĩnh vực khác.</a:t>
+              <a:t>[Nou] Truy vấn gồm một ảnh tham chiếu và một câu mô tả thay đổi; hệ thống phải tìm ảnh giữ đặc điểm của ảnh tham chiếu và áp dụng thay đổi. Bộ ba (ảnh tham chiếu, câu, ảnh đích) phải gán nhãn tay nên đắt và nhỏ, vì vậy cần zero-shot: không dùng bộ ba nào khi huấn luyện.</a:t>
+            </a:r>
+          </a:p>
+          <a:p>
+            <a:r>
+              <a:t>Con số cần nêu: FashionIQ chỉ có 46,6 nghìn bộ ba, CIRR 28,8 nghìn.</a:t>
             </a:r>
           </a:p>
         </p:txBody>
@@ -1122,7 +1106,7 @@
           <a:lstStyle/>
           <a:p>
             <a:r>
-              <a:t>[Nou] Bài toán vẫn là truy xuất có xếp hạng như chương I. R@K là Recall tính trên K kết quả đầu; mAP@K dùng khi có nhiều ảnh đúng. Khác chương I ở chỗ so khớp bằng vector thay vì từ khóa.</a:t>
+              <a:t>[Dũng] Bài toán vẫn là truy xuất có xếp hạng như chương I. R@K là Recall tính trên K kết quả đầu; mAP@K dùng khi có nhiều ảnh đúng. Khác chương I ở chỗ so khớp bằng vector thay vì từ khóa.</a:t>
             </a:r>
           </a:p>
           <a:p>
@@ -1197,82 +1181,7 @@
           <a:lstStyle/>
           <a:p>
             <a:r>
-              <a:t>[Trung] Ảnh tham chiếu được chuyển thành một token giả [$] và ghép vào câu “a photo of [$] that …”; bộ mã hóa văn bản tạo vector truy vấn để tìm ảnh. Chỉ cần huấn luyện mạng chiếu φ.</a:t>
-            </a:r>
-          </a:p>
-        </p:txBody>
-      </p:sp>
-      <p:sp>
-        <p:nvSpPr>
-          <p:cNvPr id="4" name="Slide Number Placeholder 3"/>
-          <p:cNvSpPr>
-            <a:spLocks noGrp="1"/>
-          </p:cNvSpPr>
-          <p:nvPr>
-            <p:ph type="sldNum" sz="quarter" idx="5"/>
-          </p:nvPr>
-        </p:nvSpPr>
-        <p:spPr/>
-      </p:sp>
-    </p:spTree>
-  </p:cSld>
-  <p:clrMapOvr>
-    <a:masterClrMapping/>
-  </p:clrMapOvr>
-</p:notes>
-</file>
-
-<file path=ppt/notesSlides/notesSlide6.xml><?xml version="1.0" encoding="utf-8"?>
-<p:notes xmlns:a="http://schemas.openxmlformats.org/drawingml/2006/main" xmlns:r="http://schemas.openxmlformats.org/officeDocument/2006/relationships" xmlns:p="http://schemas.openxmlformats.org/presentationml/2006/main">
-  <p:cSld>
-    <p:spTree>
-      <p:nvGrpSpPr>
-        <p:cNvPr id="1" name=""/>
-        <p:cNvGrpSpPr/>
-        <p:nvPr/>
-      </p:nvGrpSpPr>
-      <p:grpSpPr>
-        <a:xfrm>
-          <a:off x="0" y="0"/>
-          <a:ext cx="0" cy="0"/>
-          <a:chOff x="0" y="0"/>
-          <a:chExt cx="0" cy="0"/>
-        </a:xfrm>
-      </p:grpSpPr>
-      <p:sp>
-        <p:nvSpPr>
-          <p:cNvPr id="2" name="Slide Image Placeholder 1"/>
-          <p:cNvSpPr>
-            <a:spLocks noGrp="1" noRot="1" noChangeAspect="1"/>
-          </p:cNvSpPr>
-          <p:nvPr>
-            <p:ph type="sldImg" idx="2"/>
-          </p:nvPr>
-        </p:nvSpPr>
-        <p:spPr/>
-      </p:sp>
-      <p:sp>
-        <p:nvSpPr>
-          <p:cNvPr id="3" name="Notes Placeholder 2"/>
-          <p:cNvSpPr>
-            <a:spLocks noGrp="1"/>
-          </p:cNvSpPr>
-          <p:nvPr>
-            <p:ph type="body" sz="quarter" idx="3"/>
-          </p:nvPr>
-        </p:nvSpPr>
-        <p:spPr/>
-        <p:txBody>
-          <a:bodyPr/>
-          <a:lstStyle/>
-          <a:p>
-            <a:r>
-              <a:t>[Trung] Pic2Word và SEARLE chỉ huấn luyện với câu mẫu cố định và phải chạy bộ mã hóa ảnh khi huấn luyện.</a:t>
-            </a:r>
-          </a:p>
-          <a:p>
-            <a:r>
-              <a:t>Con số cần nêu: Ảnh CC3M khoảng 430 GB, chú thích chỉ 125 MB.</a:t>
+              <a:t>[Nou] Ảnh tham chiếu được chuyển thành một token giả [$] và ghép vào câu “a photo of [$] that …”; bộ mã hóa văn bản tạo vector truy vấn để tìm ảnh. Chỉ cần huấn luyện mạng chiếu φ.</a:t>
             </a:r>
           </a:p>
         </p:txBody>
@@ -1342,82 +1251,7 @@
           <a:lstStyle/>
           <a:p>
             <a:r>
-              <a:t>[Trung] LinCIR huấn luyện φ chỉ bằng văn bản: che các từ khóa của câu bằng [$] và yêu cầu câu đã che có cùng vector với câu gốc.</a:t>
-            </a:r>
-          </a:p>
-        </p:txBody>
-      </p:sp>
-      <p:sp>
-        <p:nvSpPr>
-          <p:cNvPr id="4" name="Slide Number Placeholder 3"/>
-          <p:cNvSpPr>
-            <a:spLocks noGrp="1"/>
-          </p:cNvSpPr>
-          <p:nvPr>
-            <p:ph type="sldNum" sz="quarter" idx="5"/>
-          </p:nvPr>
-        </p:nvSpPr>
-        <p:spPr/>
-      </p:sp>
-    </p:spTree>
-  </p:cSld>
-  <p:clrMapOvr>
-    <a:masterClrMapping/>
-  </p:clrMapOvr>
-</p:notes>
-</file>
-
-<file path=ppt/notesSlides/notesSlide8.xml><?xml version="1.0" encoding="utf-8"?>
-<p:notes xmlns:a="http://schemas.openxmlformats.org/drawingml/2006/main" xmlns:r="http://schemas.openxmlformats.org/officeDocument/2006/relationships" xmlns:p="http://schemas.openxmlformats.org/presentationml/2006/main">
-  <p:cSld>
-    <p:spTree>
-      <p:nvGrpSpPr>
-        <p:cNvPr id="1" name=""/>
-        <p:cNvGrpSpPr/>
-        <p:nvPr/>
-      </p:nvGrpSpPr>
-      <p:grpSpPr>
-        <a:xfrm>
-          <a:off x="0" y="0"/>
-          <a:ext cx="0" cy="0"/>
-          <a:chOff x="0" y="0"/>
-          <a:chExt cx="0" cy="0"/>
-        </a:xfrm>
-      </p:grpSpPr>
-      <p:sp>
-        <p:nvSpPr>
-          <p:cNvPr id="2" name="Slide Image Placeholder 1"/>
-          <p:cNvSpPr>
-            <a:spLocks noGrp="1" noRot="1" noChangeAspect="1"/>
-          </p:cNvSpPr>
-          <p:nvPr>
-            <p:ph type="sldImg" idx="2"/>
-          </p:nvPr>
-        </p:nvSpPr>
-        <p:spPr/>
-      </p:sp>
-      <p:sp>
-        <p:nvSpPr>
-          <p:cNvPr id="3" name="Notes Placeholder 2"/>
-          <p:cNvSpPr>
-            <a:spLocks noGrp="1"/>
-          </p:cNvSpPr>
-          <p:nvPr>
-            <p:ph type="body" sz="quarter" idx="3"/>
-          </p:nvPr>
-        </p:nvSpPr>
-        <p:spPr/>
-        <p:txBody>
-          <a:bodyPr/>
-          <a:lstStyle/>
-          <a:p>
-            <a:r>
-              <a:t>[Trung] Vector ảnh và vector văn bản của CLIP nằm ở hai vùng tách biệt. φ học trên văn bản nhưng khi dùng lại nhận ảnh, nên LinCIR thêm nhiễu khi huấn luyện.</a:t>
-            </a:r>
-          </a:p>
-          <a:p>
-            <a:r>
-              <a:t>Con số cần nêu: Ảnh và chú thích của chính nó chỉ có cosine 0,26 trên thang tối đa 1.</a:t>
+              <a:t>[Trung] Khác Pic2Word và SEARLE (cần ảnh, câu mẫu cố định), LinCIR huấn luyện φ chỉ bằng văn bản: che các từ khóa của câu bằng [$] và yêu cầu câu đã che có cùng vector với câu gốc.</a:t>
             </a:r>
           </a:p>
         </p:txBody>
@@ -5224,8 +5058,8 @@
         </p:nvSpPr>
         <p:spPr>
           <a:xfrm>
-            <a:off x="9875520" y="4480560"/>
-            <a:ext cx="3474720" cy="3474720"/>
+            <a:off x="9966960" y="4389120"/>
+            <a:ext cx="3566160" cy="3566160"/>
           </a:xfrm>
           <a:prstGeom prst="ellipse">
             <a:avLst/>
@@ -5269,7 +5103,7 @@
         </p:nvSpPr>
         <p:spPr>
           <a:xfrm>
-            <a:off x="11704320" y="3108960"/>
+            <a:off x="11704320" y="3657600"/>
             <a:ext cx="411480" cy="411480"/>
           </a:xfrm>
           <a:prstGeom prst="ellipse">
@@ -5340,7 +5174,7 @@
                 </a:solidFill>
                 <a:latin typeface="Helvetica"/>
               </a:rPr>
-              <a:t>Checkpoint chính thức tái hiện khớp bài báo, lệch tối đa 0,77 điểm</a:t>
+              <a:t>Mọi biến thể dùng cùng cấu hình, 3 seed và kiểm định theo truy vấn</a:t>
             </a:r>
           </a:p>
         </p:txBody>
@@ -5380,6 +5214,810 @@
                 <a:latin typeface="Helvetica"/>
               </a:rPr>
               <a:t>10</a:t>
+            </a:r>
+          </a:p>
+        </p:txBody>
+      </p:sp>
+      <p:sp>
+        <p:nvSpPr>
+          <p:cNvPr id="6" name="Rounded Rectangle 5"/>
+          <p:cNvSpPr/>
+          <p:nvPr/>
+        </p:nvSpPr>
+        <p:spPr>
+          <a:xfrm>
+            <a:off x="548640" y="1737360"/>
+            <a:ext cx="3566160" cy="3429000"/>
+          </a:xfrm>
+          <a:prstGeom prst="roundRect">
+            <a:avLst>
+              <a:gd name="adj" fmla="val 8000"/>
+            </a:avLst>
+          </a:prstGeom>
+          <a:solidFill>
+            <a:srgbClr val="EAF2FF"/>
+          </a:solidFill>
+          <a:ln>
+            <a:noFill/>
+          </a:ln>
+          <a:effectLst/>
+        </p:spPr>
+        <p:style>
+          <a:lnRef idx="1">
+            <a:schemeClr val="accent1"/>
+          </a:lnRef>
+          <a:fillRef idx="3">
+            <a:schemeClr val="accent1"/>
+          </a:fillRef>
+          <a:effectRef idx="2">
+            <a:schemeClr val="accent1"/>
+          </a:effectRef>
+          <a:fontRef idx="minor">
+            <a:schemeClr val="lt1"/>
+          </a:fontRef>
+        </p:style>
+        <p:txBody>
+          <a:bodyPr rtlCol="0" anchor="ctr"/>
+          <a:lstStyle/>
+          <a:p>
+            <a:pPr algn="ctr"/>
+            <a:endParaRPr/>
+          </a:p>
+        </p:txBody>
+      </p:sp>
+      <p:sp>
+        <p:nvSpPr>
+          <p:cNvPr id="7" name="TextBox 6"/>
+          <p:cNvSpPr txBox="1"/>
+          <p:nvPr/>
+        </p:nvSpPr>
+        <p:spPr>
+          <a:xfrm>
+            <a:off x="777240" y="1901952"/>
+            <a:ext cx="3108960" cy="502920"/>
+          </a:xfrm>
+          <a:prstGeom prst="rect">
+            <a:avLst/>
+          </a:prstGeom>
+          <a:noFill/>
+        </p:spPr>
+        <p:txBody>
+          <a:bodyPr wrap="square" lIns="45720" tIns="27432" rIns="45720" bIns="27432" anchor="t">
+            <a:spAutoFit/>
+          </a:bodyPr>
+          <a:lstStyle/>
+          <a:p>
+            <a:pPr algn="l">
+              <a:lnSpc>
+                <a:spcPct val="110000"/>
+              </a:lnSpc>
+            </a:pPr>
+            <a:r>
+              <a:rPr sz="2200" b="1" i="0">
+                <a:solidFill>
+                  <a:srgbClr val="144FB0"/>
+                </a:solidFill>
+                <a:latin typeface="Helvetica"/>
+              </a:rPr>
+              <a:t>Cấu hình</a:t>
+            </a:r>
+          </a:p>
+        </p:txBody>
+      </p:sp>
+      <p:sp>
+        <p:nvSpPr>
+          <p:cNvPr id="8" name="TextBox 7"/>
+          <p:cNvSpPr txBox="1"/>
+          <p:nvPr/>
+        </p:nvSpPr>
+        <p:spPr>
+          <a:xfrm>
+            <a:off x="777240" y="2468880"/>
+            <a:ext cx="3108960" cy="2240280"/>
+          </a:xfrm>
+          <a:prstGeom prst="rect">
+            <a:avLst/>
+          </a:prstGeom>
+          <a:noFill/>
+        </p:spPr>
+        <p:txBody>
+          <a:bodyPr wrap="square">
+            <a:spAutoFit/>
+          </a:bodyPr>
+          <a:lstStyle/>
+          <a:p>
+            <a:pPr marL="292608" indent="-292608">
+              <a:lnSpc>
+                <a:spcPct val="108000"/>
+              </a:lnSpc>
+              <a:spcAft>
+                <a:spcPts val="600"/>
+              </a:spcAft>
+              <a:buClr>
+                <a:srgbClr val="1E6FE8"/>
+              </a:buClr>
+              <a:buFont typeface="Helvetica"/>
+              <a:buChar char="•"/>
+            </a:pPr>
+            <a:r>
+              <a:rPr sz="2100" b="0" i="0">
+                <a:solidFill>
+                  <a:srgbClr val="0F1C3F"/>
+                </a:solidFill>
+                <a:latin typeface="Helvetica"/>
+              </a:rPr>
+              <a:t>4 biến thể: baseline, A, B, A+B</a:t>
+            </a:r>
+          </a:p>
+          <a:p>
+            <a:pPr marL="292608" indent="-292608">
+              <a:lnSpc>
+                <a:spcPct val="108000"/>
+              </a:lnSpc>
+              <a:spcAft>
+                <a:spcPts val="600"/>
+              </a:spcAft>
+              <a:buClr>
+                <a:srgbClr val="1E6FE8"/>
+              </a:buClr>
+              <a:buFont typeface="Helvetica"/>
+              <a:buChar char="•"/>
+            </a:pPr>
+            <a:r>
+              <a:rPr sz="2100" b="0" i="0">
+                <a:solidFill>
+                  <a:srgbClr val="0F1C3F"/>
+                </a:solidFill>
+                <a:latin typeface="Helvetica"/>
+              </a:rPr>
+              <a:t>CLIP ViT-L/14, batch 512</a:t>
+            </a:r>
+          </a:p>
+          <a:p>
+            <a:pPr marL="292608" indent="-292608">
+              <a:lnSpc>
+                <a:spcPct val="108000"/>
+              </a:lnSpc>
+              <a:spcAft>
+                <a:spcPts val="600"/>
+              </a:spcAft>
+              <a:buClr>
+                <a:srgbClr val="1E6FE8"/>
+              </a:buClr>
+              <a:buFont typeface="Helvetica"/>
+              <a:buChar char="•"/>
+            </a:pPr>
+            <a:r>
+              <a:rPr sz="2100" b="0" i="0">
+                <a:solidFill>
+                  <a:srgbClr val="0F1C3F"/>
+                </a:solidFill>
+                <a:latin typeface="Helvetica"/>
+              </a:rPr>
+              <a:t>5.000 bước, 3 seed mỗi biến thể</a:t>
+            </a:r>
+          </a:p>
+        </p:txBody>
+      </p:sp>
+      <p:sp>
+        <p:nvSpPr>
+          <p:cNvPr id="9" name="Rounded Rectangle 8"/>
+          <p:cNvSpPr/>
+          <p:nvPr/>
+        </p:nvSpPr>
+        <p:spPr>
+          <a:xfrm>
+            <a:off x="4343400" y="1737360"/>
+            <a:ext cx="3566160" cy="3429000"/>
+          </a:xfrm>
+          <a:prstGeom prst="roundRect">
+            <a:avLst>
+              <a:gd name="adj" fmla="val 8000"/>
+            </a:avLst>
+          </a:prstGeom>
+          <a:solidFill>
+            <a:srgbClr val="EAF2FF"/>
+          </a:solidFill>
+          <a:ln>
+            <a:noFill/>
+          </a:ln>
+          <a:effectLst/>
+        </p:spPr>
+        <p:style>
+          <a:lnRef idx="1">
+            <a:schemeClr val="accent1"/>
+          </a:lnRef>
+          <a:fillRef idx="3">
+            <a:schemeClr val="accent1"/>
+          </a:fillRef>
+          <a:effectRef idx="2">
+            <a:schemeClr val="accent1"/>
+          </a:effectRef>
+          <a:fontRef idx="minor">
+            <a:schemeClr val="lt1"/>
+          </a:fontRef>
+        </p:style>
+        <p:txBody>
+          <a:bodyPr rtlCol="0" anchor="ctr"/>
+          <a:lstStyle/>
+          <a:p>
+            <a:pPr algn="ctr"/>
+            <a:endParaRPr/>
+          </a:p>
+        </p:txBody>
+      </p:sp>
+      <p:sp>
+        <p:nvSpPr>
+          <p:cNvPr id="10" name="TextBox 9"/>
+          <p:cNvSpPr txBox="1"/>
+          <p:nvPr/>
+        </p:nvSpPr>
+        <p:spPr>
+          <a:xfrm>
+            <a:off x="4572000" y="1901952"/>
+            <a:ext cx="3108960" cy="502920"/>
+          </a:xfrm>
+          <a:prstGeom prst="rect">
+            <a:avLst/>
+          </a:prstGeom>
+          <a:noFill/>
+        </p:spPr>
+        <p:txBody>
+          <a:bodyPr wrap="square" lIns="45720" tIns="27432" rIns="45720" bIns="27432" anchor="t">
+            <a:spAutoFit/>
+          </a:bodyPr>
+          <a:lstStyle/>
+          <a:p>
+            <a:pPr algn="l">
+              <a:lnSpc>
+                <a:spcPct val="110000"/>
+              </a:lnSpc>
+            </a:pPr>
+            <a:r>
+              <a:rPr sz="2200" b="1" i="0">
+                <a:solidFill>
+                  <a:srgbClr val="144FB0"/>
+                </a:solidFill>
+                <a:latin typeface="Helvetica"/>
+              </a:rPr>
+              <a:t>Đánh giá</a:t>
+            </a:r>
+          </a:p>
+        </p:txBody>
+      </p:sp>
+      <p:sp>
+        <p:nvSpPr>
+          <p:cNvPr id="11" name="TextBox 10"/>
+          <p:cNvSpPr txBox="1"/>
+          <p:nvPr/>
+        </p:nvSpPr>
+        <p:spPr>
+          <a:xfrm>
+            <a:off x="4572000" y="2468880"/>
+            <a:ext cx="3108960" cy="2240280"/>
+          </a:xfrm>
+          <a:prstGeom prst="rect">
+            <a:avLst/>
+          </a:prstGeom>
+          <a:noFill/>
+        </p:spPr>
+        <p:txBody>
+          <a:bodyPr wrap="square">
+            <a:spAutoFit/>
+          </a:bodyPr>
+          <a:lstStyle/>
+          <a:p>
+            <a:pPr marL="292608" indent="-292608">
+              <a:lnSpc>
+                <a:spcPct val="108000"/>
+              </a:lnSpc>
+              <a:spcAft>
+                <a:spcPts val="600"/>
+              </a:spcAft>
+              <a:buClr>
+                <a:srgbClr val="1E6FE8"/>
+              </a:buClr>
+              <a:buFont typeface="Helvetica"/>
+              <a:buChar char="•"/>
+            </a:pPr>
+            <a:r>
+              <a:rPr sz="2100" b="0" i="0">
+                <a:solidFill>
+                  <a:srgbClr val="0F1C3F"/>
+                </a:solidFill>
+                <a:latin typeface="Helvetica"/>
+              </a:rPr>
+              <a:t>FashionIQ val (3 nhóm sản phẩm)</a:t>
+            </a:r>
+          </a:p>
+          <a:p>
+            <a:pPr marL="292608" indent="-292608">
+              <a:lnSpc>
+                <a:spcPct val="108000"/>
+              </a:lnSpc>
+              <a:spcAft>
+                <a:spcPts val="600"/>
+              </a:spcAft>
+              <a:buClr>
+                <a:srgbClr val="1E6FE8"/>
+              </a:buClr>
+              <a:buFont typeface="Helvetica"/>
+              <a:buChar char="•"/>
+            </a:pPr>
+            <a:r>
+              <a:rPr sz="2100" b="0" i="0">
+                <a:solidFill>
+                  <a:srgbClr val="0F1C3F"/>
+                </a:solidFill>
+                <a:latin typeface="Helvetica"/>
+              </a:rPr>
+              <a:t>CIRCO val (220 truy vấn)</a:t>
+            </a:r>
+          </a:p>
+          <a:p>
+            <a:pPr marL="292608" indent="-292608">
+              <a:lnSpc>
+                <a:spcPct val="108000"/>
+              </a:lnSpc>
+              <a:spcAft>
+                <a:spcPts val="600"/>
+              </a:spcAft>
+              <a:buClr>
+                <a:srgbClr val="1E6FE8"/>
+              </a:buClr>
+              <a:buFont typeface="Helvetica"/>
+              <a:buChar char="•"/>
+            </a:pPr>
+            <a:r>
+              <a:rPr sz="2100" b="0" i="0">
+                <a:solidFill>
+                  <a:srgbClr val="0F1C3F"/>
+                </a:solidFill>
+                <a:latin typeface="Helvetica"/>
+              </a:rPr>
+              <a:t>Kiểm định bootstrap và Wilcoxon theo từng truy vấn</a:t>
+            </a:r>
+          </a:p>
+        </p:txBody>
+      </p:sp>
+      <p:sp>
+        <p:nvSpPr>
+          <p:cNvPr id="12" name="Rounded Rectangle 11"/>
+          <p:cNvSpPr/>
+          <p:nvPr/>
+        </p:nvSpPr>
+        <p:spPr>
+          <a:xfrm>
+            <a:off x="8138160" y="1737360"/>
+            <a:ext cx="3566160" cy="3429000"/>
+          </a:xfrm>
+          <a:prstGeom prst="roundRect">
+            <a:avLst>
+              <a:gd name="adj" fmla="val 8000"/>
+            </a:avLst>
+          </a:prstGeom>
+          <a:solidFill>
+            <a:srgbClr val="D6E6FF"/>
+          </a:solidFill>
+          <a:ln>
+            <a:noFill/>
+          </a:ln>
+          <a:effectLst/>
+        </p:spPr>
+        <p:style>
+          <a:lnRef idx="1">
+            <a:schemeClr val="accent1"/>
+          </a:lnRef>
+          <a:fillRef idx="3">
+            <a:schemeClr val="accent1"/>
+          </a:fillRef>
+          <a:effectRef idx="2">
+            <a:schemeClr val="accent1"/>
+          </a:effectRef>
+          <a:fontRef idx="minor">
+            <a:schemeClr val="lt1"/>
+          </a:fontRef>
+        </p:style>
+        <p:txBody>
+          <a:bodyPr rtlCol="0" anchor="ctr"/>
+          <a:lstStyle/>
+          <a:p>
+            <a:pPr algn="ctr"/>
+            <a:endParaRPr/>
+          </a:p>
+        </p:txBody>
+      </p:sp>
+      <p:sp>
+        <p:nvSpPr>
+          <p:cNvPr id="13" name="TextBox 12"/>
+          <p:cNvSpPr txBox="1"/>
+          <p:nvPr/>
+        </p:nvSpPr>
+        <p:spPr>
+          <a:xfrm>
+            <a:off x="8366760" y="1901952"/>
+            <a:ext cx="3108960" cy="502920"/>
+          </a:xfrm>
+          <a:prstGeom prst="rect">
+            <a:avLst/>
+          </a:prstGeom>
+          <a:noFill/>
+        </p:spPr>
+        <p:txBody>
+          <a:bodyPr wrap="square" lIns="45720" tIns="27432" rIns="45720" bIns="27432" anchor="t">
+            <a:spAutoFit/>
+          </a:bodyPr>
+          <a:lstStyle/>
+          <a:p>
+            <a:pPr algn="l">
+              <a:lnSpc>
+                <a:spcPct val="110000"/>
+              </a:lnSpc>
+            </a:pPr>
+            <a:r>
+              <a:rPr sz="2200" b="1" i="0">
+                <a:solidFill>
+                  <a:srgbClr val="144FB0"/>
+                </a:solidFill>
+                <a:latin typeface="Helvetica"/>
+              </a:rPr>
+              <a:t>Vận hành Kaggle</a:t>
+            </a:r>
+          </a:p>
+        </p:txBody>
+      </p:sp>
+      <p:sp>
+        <p:nvSpPr>
+          <p:cNvPr id="14" name="TextBox 13"/>
+          <p:cNvSpPr txBox="1"/>
+          <p:nvPr/>
+        </p:nvSpPr>
+        <p:spPr>
+          <a:xfrm>
+            <a:off x="8366760" y="2468880"/>
+            <a:ext cx="3108960" cy="2240280"/>
+          </a:xfrm>
+          <a:prstGeom prst="rect">
+            <a:avLst/>
+          </a:prstGeom>
+          <a:noFill/>
+        </p:spPr>
+        <p:txBody>
+          <a:bodyPr wrap="square">
+            <a:spAutoFit/>
+          </a:bodyPr>
+          <a:lstStyle/>
+          <a:p>
+            <a:pPr marL="292608" indent="-292608">
+              <a:lnSpc>
+                <a:spcPct val="108000"/>
+              </a:lnSpc>
+              <a:spcAft>
+                <a:spcPts val="600"/>
+              </a:spcAft>
+              <a:buClr>
+                <a:srgbClr val="1E6FE8"/>
+              </a:buClr>
+              <a:buFont typeface="Helvetica"/>
+              <a:buChar char="•"/>
+            </a:pPr>
+            <a:r>
+              <a:rPr sz="2100" b="0" i="0">
+                <a:solidFill>
+                  <a:srgbClr val="0F1C3F"/>
+                </a:solidFill>
+                <a:latin typeface="Helvetica"/>
+              </a:rPr>
+              <a:t>2 GPU T4, mỗi GPU một lần chạy</a:t>
+            </a:r>
+          </a:p>
+          <a:p>
+            <a:pPr marL="292608" indent="-292608">
+              <a:lnSpc>
+                <a:spcPct val="108000"/>
+              </a:lnSpc>
+              <a:spcAft>
+                <a:spcPts val="600"/>
+              </a:spcAft>
+              <a:buClr>
+                <a:srgbClr val="1E6FE8"/>
+              </a:buClr>
+              <a:buFont typeface="Helvetica"/>
+              <a:buChar char="•"/>
+            </a:pPr>
+            <a:r>
+              <a:rPr sz="2100" b="0" i="0">
+                <a:solidFill>
+                  <a:srgbClr val="0F1C3F"/>
+                </a:solidFill>
+                <a:latin typeface="Helvetica"/>
+              </a:rPr>
+              <a:t>Không vượt 12 giờ mỗi phiên</a:t>
+            </a:r>
+          </a:p>
+          <a:p>
+            <a:pPr marL="292608" indent="-292608">
+              <a:lnSpc>
+                <a:spcPct val="108000"/>
+              </a:lnSpc>
+              <a:spcAft>
+                <a:spcPts val="600"/>
+              </a:spcAft>
+              <a:buClr>
+                <a:srgbClr val="1E6FE8"/>
+              </a:buClr>
+              <a:buFont typeface="Helvetica"/>
+              <a:buChar char="•"/>
+            </a:pPr>
+            <a:r>
+              <a:rPr sz="2100" b="0" i="0">
+                <a:solidFill>
+                  <a:srgbClr val="0F1C3F"/>
+                </a:solidFill>
+                <a:latin typeface="Helvetica"/>
+              </a:rPr>
+              <a:t>Nạp dữ liệu nhanh gấp 3,1 lần</a:t>
+            </a:r>
+          </a:p>
+        </p:txBody>
+      </p:sp>
+      <p:sp>
+        <p:nvSpPr>
+          <p:cNvPr id="15" name="TextBox 14"/>
+          <p:cNvSpPr txBox="1"/>
+          <p:nvPr/>
+        </p:nvSpPr>
+        <p:spPr>
+          <a:xfrm>
+            <a:off x="548640" y="5349240"/>
+            <a:ext cx="11064240" cy="822960"/>
+          </a:xfrm>
+          <a:prstGeom prst="rect">
+            <a:avLst/>
+          </a:prstGeom>
+          <a:noFill/>
+        </p:spPr>
+        <p:txBody>
+          <a:bodyPr wrap="square" lIns="45720" tIns="27432" rIns="45720" bIns="27432" anchor="t">
+            <a:spAutoFit/>
+          </a:bodyPr>
+          <a:lstStyle/>
+          <a:p>
+            <a:pPr algn="l">
+              <a:lnSpc>
+                <a:spcPct val="110000"/>
+              </a:lnSpc>
+            </a:pPr>
+            <a:r>
+              <a:rPr sz="2200" b="1" i="0">
+                <a:solidFill>
+                  <a:srgbClr val="144FB0"/>
+                </a:solidFill>
+                <a:latin typeface="Helvetica"/>
+              </a:rPr>
+              <a:t>Các biến thể chỉ khác đúng thành phần cải tiến</a:t>
+            </a:r>
+            <a:r>
+              <a:rPr sz="2200" b="0" i="0">
+                <a:solidFill>
+                  <a:srgbClr val="0F1C3F"/>
+                </a:solidFill>
+                <a:latin typeface="Helvetica"/>
+              </a:rPr>
+              <a:t>, nên chênh lệch kết quả là do cải tiến, không do cấu hình</a:t>
+            </a:r>
+          </a:p>
+        </p:txBody>
+      </p:sp>
+    </p:spTree>
+  </p:cSld>
+  <p:clrMapOvr>
+    <a:masterClrMapping/>
+  </p:clrMapOvr>
+  <mc:AlternateContent xmlns:mc="http://schemas.openxmlformats.org/markup-compatibility/2006" xmlns:p159="http://schemas.microsoft.com/office/powerpoint/2015/09/main">
+    <mc:Choice Requires="p159">
+      <p:transition xmlns:p14="http://schemas.microsoft.com/office/powerpoint/2010/main" spd="slow" p14:dur="1200">
+        <p159:morph option="byObject"/>
+      </p:transition>
+    </mc:Choice>
+    <mc:Fallback xmlns="">
+      <p:transition spd="slow">
+        <p:fade/>
+      </p:transition>
+    </mc:Fallback>
+  </mc:AlternateContent>
+</p:sld>
+</file>
+
+<file path=ppt/slides/slide11.xml><?xml version="1.0" encoding="utf-8"?>
+<p:sld xmlns:a="http://schemas.openxmlformats.org/drawingml/2006/main" xmlns:r="http://schemas.openxmlformats.org/officeDocument/2006/relationships" xmlns:p="http://schemas.openxmlformats.org/presentationml/2006/main">
+  <p:cSld>
+    <p:bg>
+      <p:bgPr>
+        <a:solidFill>
+          <a:srgbClr val="FFFFFF"/>
+        </a:solidFill>
+        <a:effectLst/>
+      </p:bgPr>
+    </p:bg>
+    <p:spTree>
+      <p:nvGrpSpPr>
+        <p:cNvPr id="1" name=""/>
+        <p:cNvGrpSpPr/>
+        <p:nvPr/>
+      </p:nvGrpSpPr>
+      <p:grpSpPr>
+        <a:xfrm>
+          <a:off x="0" y="0"/>
+          <a:ext cx="0" cy="0"/>
+          <a:chOff x="0" y="0"/>
+          <a:chExt cx="0" cy="0"/>
+        </a:xfrm>
+      </p:grpSpPr>
+      <p:sp>
+        <p:nvSpPr>
+          <p:cNvPr id="2" name="!!orb"/>
+          <p:cNvSpPr/>
+          <p:nvPr/>
+        </p:nvSpPr>
+        <p:spPr>
+          <a:xfrm>
+            <a:off x="9875520" y="4480560"/>
+            <a:ext cx="3474720" cy="3474720"/>
+          </a:xfrm>
+          <a:prstGeom prst="ellipse">
+            <a:avLst/>
+          </a:prstGeom>
+          <a:solidFill>
+            <a:srgbClr val="EAF2FF"/>
+          </a:solidFill>
+          <a:ln>
+            <a:noFill/>
+          </a:ln>
+          <a:effectLst/>
+        </p:spPr>
+        <p:style>
+          <a:lnRef idx="1">
+            <a:schemeClr val="accent1"/>
+          </a:lnRef>
+          <a:fillRef idx="3">
+            <a:schemeClr val="accent1"/>
+          </a:fillRef>
+          <a:effectRef idx="2">
+            <a:schemeClr val="accent1"/>
+          </a:effectRef>
+          <a:fontRef idx="minor">
+            <a:schemeClr val="lt1"/>
+          </a:fontRef>
+        </p:style>
+        <p:txBody>
+          <a:bodyPr rtlCol="0" anchor="ctr"/>
+          <a:lstStyle/>
+          <a:p>
+            <a:pPr algn="ctr"/>
+            <a:endParaRPr/>
+          </a:p>
+        </p:txBody>
+      </p:sp>
+      <p:sp>
+        <p:nvSpPr>
+          <p:cNvPr id="3" name="!!dot"/>
+          <p:cNvSpPr/>
+          <p:nvPr/>
+        </p:nvSpPr>
+        <p:spPr>
+          <a:xfrm>
+            <a:off x="11704320" y="3108960"/>
+            <a:ext cx="411480" cy="411480"/>
+          </a:xfrm>
+          <a:prstGeom prst="ellipse">
+            <a:avLst/>
+          </a:prstGeom>
+          <a:solidFill>
+            <a:srgbClr val="1E6FE8"/>
+          </a:solidFill>
+          <a:ln>
+            <a:noFill/>
+          </a:ln>
+          <a:effectLst/>
+        </p:spPr>
+        <p:style>
+          <a:lnRef idx="1">
+            <a:schemeClr val="accent1"/>
+          </a:lnRef>
+          <a:fillRef idx="3">
+            <a:schemeClr val="accent1"/>
+          </a:fillRef>
+          <a:effectRef idx="2">
+            <a:schemeClr val="accent1"/>
+          </a:effectRef>
+          <a:fontRef idx="minor">
+            <a:schemeClr val="lt1"/>
+          </a:fontRef>
+        </p:style>
+        <p:txBody>
+          <a:bodyPr rtlCol="0" anchor="ctr"/>
+          <a:lstStyle/>
+          <a:p>
+            <a:pPr algn="ctr"/>
+            <a:endParaRPr/>
+          </a:p>
+        </p:txBody>
+      </p:sp>
+      <p:sp>
+        <p:nvSpPr>
+          <p:cNvPr id="4" name="!!title"/>
+          <p:cNvSpPr txBox="1"/>
+          <p:nvPr/>
+        </p:nvSpPr>
+        <p:spPr>
+          <a:xfrm>
+            <a:off x="548640" y="347472"/>
+            <a:ext cx="10424160" cy="1143000"/>
+          </a:xfrm>
+          <a:prstGeom prst="rect">
+            <a:avLst/>
+          </a:prstGeom>
+          <a:noFill/>
+        </p:spPr>
+        <p:txBody>
+          <a:bodyPr wrap="square" lIns="45720" tIns="27432" rIns="45720" bIns="27432" anchor="ctr">
+            <a:spAutoFit/>
+          </a:bodyPr>
+          <a:lstStyle/>
+          <a:p>
+            <a:pPr algn="l">
+              <a:lnSpc>
+                <a:spcPct val="110000"/>
+              </a:lnSpc>
+            </a:pPr>
+            <a:r>
+              <a:rPr sz="3200" b="1" i="0">
+                <a:solidFill>
+                  <a:srgbClr val="0F1C3F"/>
+                </a:solidFill>
+                <a:latin typeface="Helvetica"/>
+              </a:rPr>
+              <a:t>Checkpoint chính thức tái hiện khớp bài báo, lệch tối đa 0,77 điểm</a:t>
+            </a:r>
+          </a:p>
+        </p:txBody>
+      </p:sp>
+      <p:sp>
+        <p:nvSpPr>
+          <p:cNvPr id="5" name="!!num"/>
+          <p:cNvSpPr txBox="1"/>
+          <p:nvPr/>
+        </p:nvSpPr>
+        <p:spPr>
+          <a:xfrm>
+            <a:off x="10881360" y="6236208"/>
+            <a:ext cx="914400" cy="457200"/>
+          </a:xfrm>
+          <a:prstGeom prst="rect">
+            <a:avLst/>
+          </a:prstGeom>
+          <a:noFill/>
+        </p:spPr>
+        <p:txBody>
+          <a:bodyPr wrap="square" lIns="45720" tIns="27432" rIns="45720" bIns="27432" anchor="t">
+            <a:spAutoFit/>
+          </a:bodyPr>
+          <a:lstStyle/>
+          <a:p>
+            <a:pPr algn="r">
+              <a:lnSpc>
+                <a:spcPct val="110000"/>
+              </a:lnSpc>
+            </a:pPr>
+            <a:r>
+              <a:rPr sz="2000" b="0" i="0">
+                <a:solidFill>
+                  <a:srgbClr val="5B6B82"/>
+                </a:solidFill>
+                <a:latin typeface="Helvetica"/>
+              </a:rPr>
+              <a:t>11</a:t>
             </a:r>
           </a:p>
         </p:txBody>
@@ -6186,7 +6824,7 @@
                 </a:solidFill>
                 <a:latin typeface="Helvetica"/>
               </a:rPr>
-              <a:t>điểm lệch lớn nhất</a:t>
+              <a:t>điểm lệch lớn nhất so với bài báo</a:t>
             </a:r>
           </a:p>
         </p:txBody>
@@ -6264,7 +6902,7 @@
                 </a:solidFill>
                 <a:latin typeface="Helvetica"/>
               </a:rPr>
-              <a:t>CIRCO val mAP@5 (mốc)</a:t>
+              <a:t>CIRCO val mAP@5 của checkpoint, dùng làm mốc</a:t>
             </a:r>
           </a:p>
         </p:txBody>
@@ -6342,686 +6980,7 @@
                 </a:solidFill>
                 <a:latin typeface="Helvetica"/>
               </a:rPr>
-              <a:t>thứ hạng giống hệt khi chạy lại</a:t>
-            </a:r>
-          </a:p>
-        </p:txBody>
-      </p:sp>
-    </p:spTree>
-  </p:cSld>
-  <p:clrMapOvr>
-    <a:masterClrMapping/>
-  </p:clrMapOvr>
-  <mc:AlternateContent xmlns:mc="http://schemas.openxmlformats.org/markup-compatibility/2006" xmlns:p159="http://schemas.microsoft.com/office/powerpoint/2015/09/main">
-    <mc:Choice Requires="p159">
-      <p:transition xmlns:p14="http://schemas.microsoft.com/office/powerpoint/2010/main" spd="slow" p14:dur="1200">
-        <p159:morph option="byObject"/>
-      </p:transition>
-    </mc:Choice>
-    <mc:Fallback xmlns="">
-      <p:transition spd="slow">
-        <p:fade/>
-      </p:transition>
-    </mc:Fallback>
-  </mc:AlternateContent>
-</p:sld>
-</file>
-
-<file path=ppt/slides/slide11.xml><?xml version="1.0" encoding="utf-8"?>
-<p:sld xmlns:a="http://schemas.openxmlformats.org/drawingml/2006/main" xmlns:r="http://schemas.openxmlformats.org/officeDocument/2006/relationships" xmlns:p="http://schemas.openxmlformats.org/presentationml/2006/main">
-  <p:cSld>
-    <p:bg>
-      <p:bgPr>
-        <a:solidFill>
-          <a:srgbClr val="FFFFFF"/>
-        </a:solidFill>
-        <a:effectLst/>
-      </p:bgPr>
-    </p:bg>
-    <p:spTree>
-      <p:nvGrpSpPr>
-        <p:cNvPr id="1" name=""/>
-        <p:cNvGrpSpPr/>
-        <p:nvPr/>
-      </p:nvGrpSpPr>
-      <p:grpSpPr>
-        <a:xfrm>
-          <a:off x="0" y="0"/>
-          <a:ext cx="0" cy="0"/>
-          <a:chOff x="0" y="0"/>
-          <a:chExt cx="0" cy="0"/>
-        </a:xfrm>
-      </p:grpSpPr>
-      <p:sp>
-        <p:nvSpPr>
-          <p:cNvPr id="2" name="!!orb"/>
-          <p:cNvSpPr/>
-          <p:nvPr/>
-        </p:nvSpPr>
-        <p:spPr>
-          <a:xfrm>
-            <a:off x="10058400" y="-2103120"/>
-            <a:ext cx="4023360" cy="4023360"/>
-          </a:xfrm>
-          <a:prstGeom prst="ellipse">
-            <a:avLst/>
-          </a:prstGeom>
-          <a:solidFill>
-            <a:srgbClr val="EAF2FF"/>
-          </a:solidFill>
-          <a:ln>
-            <a:noFill/>
-          </a:ln>
-          <a:effectLst/>
-        </p:spPr>
-        <p:style>
-          <a:lnRef idx="1">
-            <a:schemeClr val="accent1"/>
-          </a:lnRef>
-          <a:fillRef idx="3">
-            <a:schemeClr val="accent1"/>
-          </a:fillRef>
-          <a:effectRef idx="2">
-            <a:schemeClr val="accent1"/>
-          </a:effectRef>
-          <a:fontRef idx="minor">
-            <a:schemeClr val="lt1"/>
-          </a:fontRef>
-        </p:style>
-        <p:txBody>
-          <a:bodyPr rtlCol="0" anchor="ctr"/>
-          <a:lstStyle/>
-          <a:p>
-            <a:pPr algn="ctr"/>
-            <a:endParaRPr/>
-          </a:p>
-        </p:txBody>
-      </p:sp>
-      <p:sp>
-        <p:nvSpPr>
-          <p:cNvPr id="3" name="!!dot"/>
-          <p:cNvSpPr/>
-          <p:nvPr/>
-        </p:nvSpPr>
-        <p:spPr>
-          <a:xfrm>
-            <a:off x="11247120" y="502920"/>
-            <a:ext cx="411480" cy="411480"/>
-          </a:xfrm>
-          <a:prstGeom prst="ellipse">
-            <a:avLst/>
-          </a:prstGeom>
-          <a:solidFill>
-            <a:srgbClr val="1E6FE8"/>
-          </a:solidFill>
-          <a:ln>
-            <a:noFill/>
-          </a:ln>
-          <a:effectLst/>
-        </p:spPr>
-        <p:style>
-          <a:lnRef idx="1">
-            <a:schemeClr val="accent1"/>
-          </a:lnRef>
-          <a:fillRef idx="3">
-            <a:schemeClr val="accent1"/>
-          </a:fillRef>
-          <a:effectRef idx="2">
-            <a:schemeClr val="accent1"/>
-          </a:effectRef>
-          <a:fontRef idx="minor">
-            <a:schemeClr val="lt1"/>
-          </a:fontRef>
-        </p:style>
-        <p:txBody>
-          <a:bodyPr rtlCol="0" anchor="ctr"/>
-          <a:lstStyle/>
-          <a:p>
-            <a:pPr algn="ctr"/>
-            <a:endParaRPr/>
-          </a:p>
-        </p:txBody>
-      </p:sp>
-      <p:sp>
-        <p:nvSpPr>
-          <p:cNvPr id="4" name="!!title"/>
-          <p:cNvSpPr txBox="1"/>
-          <p:nvPr/>
-        </p:nvSpPr>
-        <p:spPr>
-          <a:xfrm>
-            <a:off x="548640" y="347472"/>
-            <a:ext cx="10424160" cy="1143000"/>
-          </a:xfrm>
-          <a:prstGeom prst="rect">
-            <a:avLst/>
-          </a:prstGeom>
-          <a:noFill/>
-        </p:spPr>
-        <p:txBody>
-          <a:bodyPr wrap="square" lIns="45720" tIns="27432" rIns="45720" bIns="27432" anchor="ctr">
-            <a:spAutoFit/>
-          </a:bodyPr>
-          <a:lstStyle/>
-          <a:p>
-            <a:pPr algn="l">
-              <a:lnSpc>
-                <a:spcPct val="110000"/>
-              </a:lnSpc>
-            </a:pPr>
-            <a:r>
-              <a:rPr sz="3200" b="1" i="0">
-                <a:solidFill>
-                  <a:srgbClr val="0F1C3F"/>
-                </a:solidFill>
-                <a:latin typeface="Helvetica"/>
-              </a:rPr>
-              <a:t>Cải tiến A: thêm InfoNCE để từ giả phân biệt được các câu</a:t>
-            </a:r>
-          </a:p>
-        </p:txBody>
-      </p:sp>
-      <p:sp>
-        <p:nvSpPr>
-          <p:cNvPr id="5" name="!!num"/>
-          <p:cNvSpPr txBox="1"/>
-          <p:nvPr/>
-        </p:nvSpPr>
-        <p:spPr>
-          <a:xfrm>
-            <a:off x="10881360" y="6236208"/>
-            <a:ext cx="914400" cy="457200"/>
-          </a:xfrm>
-          <a:prstGeom prst="rect">
-            <a:avLst/>
-          </a:prstGeom>
-          <a:noFill/>
-        </p:spPr>
-        <p:txBody>
-          <a:bodyPr wrap="square" lIns="45720" tIns="27432" rIns="45720" bIns="27432" anchor="t">
-            <a:spAutoFit/>
-          </a:bodyPr>
-          <a:lstStyle/>
-          <a:p>
-            <a:pPr algn="r">
-              <a:lnSpc>
-                <a:spcPct val="110000"/>
-              </a:lnSpc>
-            </a:pPr>
-            <a:r>
-              <a:rPr sz="2000" b="0" i="0">
-                <a:solidFill>
-                  <a:srgbClr val="5B6B82"/>
-                </a:solidFill>
-                <a:latin typeface="Helvetica"/>
-              </a:rPr>
-              <a:t>11</a:t>
-            </a:r>
-          </a:p>
-        </p:txBody>
-      </p:sp>
-      <p:sp>
-        <p:nvSpPr>
-          <p:cNvPr id="6" name="Rounded Rectangle 5"/>
-          <p:cNvSpPr/>
-          <p:nvPr/>
-        </p:nvSpPr>
-        <p:spPr>
-          <a:xfrm>
-            <a:off x="548640" y="1737360"/>
-            <a:ext cx="5577840" cy="2011680"/>
-          </a:xfrm>
-          <a:prstGeom prst="roundRect">
-            <a:avLst>
-              <a:gd name="adj" fmla="val 8000"/>
-            </a:avLst>
-          </a:prstGeom>
-          <a:solidFill>
-            <a:srgbClr val="EAF2FF"/>
-          </a:solidFill>
-          <a:ln>
-            <a:noFill/>
-          </a:ln>
-          <a:effectLst/>
-        </p:spPr>
-        <p:style>
-          <a:lnRef idx="1">
-            <a:schemeClr val="accent1"/>
-          </a:lnRef>
-          <a:fillRef idx="3">
-            <a:schemeClr val="accent1"/>
-          </a:fillRef>
-          <a:effectRef idx="2">
-            <a:schemeClr val="accent1"/>
-          </a:effectRef>
-          <a:fontRef idx="minor">
-            <a:schemeClr val="lt1"/>
-          </a:fontRef>
-        </p:style>
-        <p:txBody>
-          <a:bodyPr rtlCol="0" anchor="ctr"/>
-          <a:lstStyle/>
-          <a:p>
-            <a:pPr algn="ctr"/>
-            <a:endParaRPr/>
-          </a:p>
-        </p:txBody>
-      </p:sp>
-      <p:sp>
-        <p:nvSpPr>
-          <p:cNvPr id="7" name="TextBox 6"/>
-          <p:cNvSpPr txBox="1"/>
-          <p:nvPr/>
-        </p:nvSpPr>
-        <p:spPr>
-          <a:xfrm>
-            <a:off x="777240" y="1901952"/>
-            <a:ext cx="5120640" cy="502920"/>
-          </a:xfrm>
-          <a:prstGeom prst="rect">
-            <a:avLst/>
-          </a:prstGeom>
-          <a:noFill/>
-        </p:spPr>
-        <p:txBody>
-          <a:bodyPr wrap="square" lIns="45720" tIns="27432" rIns="45720" bIns="27432" anchor="t">
-            <a:spAutoFit/>
-          </a:bodyPr>
-          <a:lstStyle/>
-          <a:p>
-            <a:pPr algn="l">
-              <a:lnSpc>
-                <a:spcPct val="110000"/>
-              </a:lnSpc>
-            </a:pPr>
-            <a:r>
-              <a:rPr sz="2200" b="1" i="0">
-                <a:solidFill>
-                  <a:srgbClr val="144FB0"/>
-                </a:solidFill>
-                <a:latin typeface="Helvetica"/>
-              </a:rPr>
-              <a:t>Vấn đề</a:t>
-            </a:r>
-          </a:p>
-        </p:txBody>
-      </p:sp>
-      <p:sp>
-        <p:nvSpPr>
-          <p:cNvPr id="8" name="TextBox 7"/>
-          <p:cNvSpPr txBox="1"/>
-          <p:nvPr/>
-        </p:nvSpPr>
-        <p:spPr>
-          <a:xfrm>
-            <a:off x="777240" y="2468880"/>
-            <a:ext cx="5120640" cy="1143000"/>
-          </a:xfrm>
-          <a:prstGeom prst="rect">
-            <a:avLst/>
-          </a:prstGeom>
-          <a:noFill/>
-        </p:spPr>
-        <p:txBody>
-          <a:bodyPr wrap="square">
-            <a:spAutoFit/>
-          </a:bodyPr>
-          <a:lstStyle/>
-          <a:p>
-            <a:pPr marL="292608" indent="-292608">
-              <a:lnSpc>
-                <a:spcPct val="108000"/>
-              </a:lnSpc>
-              <a:spcAft>
-                <a:spcPts val="600"/>
-              </a:spcAft>
-              <a:buClr>
-                <a:srgbClr val="1E6FE8"/>
-              </a:buClr>
-              <a:buChar char="•"/>
-            </a:pPr>
-            <a:r>
-              <a:rPr sz="2100" b="0" i="0">
-                <a:solidFill>
-                  <a:srgbClr val="0F1C3F"/>
-                </a:solidFill>
-                <a:latin typeface="Helvetica"/>
-              </a:rPr>
-              <a:t>MSE không phạt việc gần câu khác</a:t>
-            </a:r>
-          </a:p>
-          <a:p>
-            <a:pPr marL="292608" indent="-292608">
-              <a:lnSpc>
-                <a:spcPct val="108000"/>
-              </a:lnSpc>
-              <a:spcAft>
-                <a:spcPts val="600"/>
-              </a:spcAft>
-              <a:buClr>
-                <a:srgbClr val="1E6FE8"/>
-              </a:buClr>
-              <a:buChar char="•"/>
-            </a:pPr>
-            <a:r>
-              <a:rPr sz="2100" b="0" i="0">
-                <a:solidFill>
-                  <a:srgbClr val="0F1C3F"/>
-                </a:solidFill>
-                <a:latin typeface="Helvetica"/>
-              </a:rPr>
-              <a:t>Đánh giá lại là xếp hạng</a:t>
-            </a:r>
-          </a:p>
-        </p:txBody>
-      </p:sp>
-      <p:sp>
-        <p:nvSpPr>
-          <p:cNvPr id="9" name="Rounded Rectangle 8"/>
-          <p:cNvSpPr/>
-          <p:nvPr/>
-        </p:nvSpPr>
-        <p:spPr>
-          <a:xfrm>
-            <a:off x="548640" y="3931920"/>
-            <a:ext cx="5577840" cy="2011680"/>
-          </a:xfrm>
-          <a:prstGeom prst="roundRect">
-            <a:avLst>
-              <a:gd name="adj" fmla="val 8000"/>
-            </a:avLst>
-          </a:prstGeom>
-          <a:solidFill>
-            <a:srgbClr val="D6E6FF"/>
-          </a:solidFill>
-          <a:ln>
-            <a:noFill/>
-          </a:ln>
-          <a:effectLst/>
-        </p:spPr>
-        <p:style>
-          <a:lnRef idx="1">
-            <a:schemeClr val="accent1"/>
-          </a:lnRef>
-          <a:fillRef idx="3">
-            <a:schemeClr val="accent1"/>
-          </a:fillRef>
-          <a:effectRef idx="2">
-            <a:schemeClr val="accent1"/>
-          </a:effectRef>
-          <a:fontRef idx="minor">
-            <a:schemeClr val="lt1"/>
-          </a:fontRef>
-        </p:style>
-        <p:txBody>
-          <a:bodyPr rtlCol="0" anchor="ctr"/>
-          <a:lstStyle/>
-          <a:p>
-            <a:pPr algn="ctr"/>
-            <a:endParaRPr/>
-          </a:p>
-        </p:txBody>
-      </p:sp>
-      <p:sp>
-        <p:nvSpPr>
-          <p:cNvPr id="10" name="TextBox 9"/>
-          <p:cNvSpPr txBox="1"/>
-          <p:nvPr/>
-        </p:nvSpPr>
-        <p:spPr>
-          <a:xfrm>
-            <a:off x="777240" y="4096511"/>
-            <a:ext cx="5120640" cy="502920"/>
-          </a:xfrm>
-          <a:prstGeom prst="rect">
-            <a:avLst/>
-          </a:prstGeom>
-          <a:noFill/>
-        </p:spPr>
-        <p:txBody>
-          <a:bodyPr wrap="square" lIns="45720" tIns="27432" rIns="45720" bIns="27432" anchor="t">
-            <a:spAutoFit/>
-          </a:bodyPr>
-          <a:lstStyle/>
-          <a:p>
-            <a:pPr algn="l">
-              <a:lnSpc>
-                <a:spcPct val="110000"/>
-              </a:lnSpc>
-            </a:pPr>
-            <a:r>
-              <a:rPr sz="2200" b="1" i="0">
-                <a:solidFill>
-                  <a:srgbClr val="144FB0"/>
-                </a:solidFill>
-                <a:latin typeface="Helvetica"/>
-              </a:rPr>
-              <a:t>Giải pháp</a:t>
-            </a:r>
-          </a:p>
-        </p:txBody>
-      </p:sp>
-      <p:sp>
-        <p:nvSpPr>
-          <p:cNvPr id="11" name="TextBox 10"/>
-          <p:cNvSpPr txBox="1"/>
-          <p:nvPr/>
-        </p:nvSpPr>
-        <p:spPr>
-          <a:xfrm>
-            <a:off x="777240" y="4663440"/>
-            <a:ext cx="5120640" cy="1143000"/>
-          </a:xfrm>
-          <a:prstGeom prst="rect">
-            <a:avLst/>
-          </a:prstGeom>
-          <a:noFill/>
-        </p:spPr>
-        <p:txBody>
-          <a:bodyPr wrap="square">
-            <a:spAutoFit/>
-          </a:bodyPr>
-          <a:lstStyle/>
-          <a:p>
-            <a:pPr marL="292608" indent="-292608">
-              <a:lnSpc>
-                <a:spcPct val="108000"/>
-              </a:lnSpc>
-              <a:spcAft>
-                <a:spcPts val="600"/>
-              </a:spcAft>
-              <a:buClr>
-                <a:srgbClr val="1E6FE8"/>
-              </a:buClr>
-              <a:buChar char="•"/>
-            </a:pPr>
-            <a:r>
-              <a:rPr sz="2100" b="1" i="0">
-                <a:solidFill>
-                  <a:srgbClr val="0F1C3F"/>
-                </a:solidFill>
-                <a:latin typeface="Helvetica"/>
-              </a:rPr>
-              <a:t>L = L_SMP + 0,5 · InfoNCE</a:t>
-            </a:r>
-          </a:p>
-          <a:p>
-            <a:pPr marL="292608" indent="-292608">
-              <a:lnSpc>
-                <a:spcPct val="108000"/>
-              </a:lnSpc>
-              <a:spcAft>
-                <a:spcPts val="600"/>
-              </a:spcAft>
-              <a:buClr>
-                <a:srgbClr val="1E6FE8"/>
-              </a:buClr>
-              <a:buChar char="•"/>
-            </a:pPr>
-            <a:r>
-              <a:rPr sz="2100" b="0" i="0">
-                <a:solidFill>
-                  <a:srgbClr val="0F1C3F"/>
-                </a:solidFill>
-                <a:latin typeface="Helvetica"/>
-              </a:rPr>
-              <a:t>τ = 0,07 · 511 mẫu âm trong batch</a:t>
-            </a:r>
-          </a:p>
-        </p:txBody>
-      </p:sp>
-      <p:sp>
-        <p:nvSpPr>
-          <p:cNvPr id="12" name="TextBox 11"/>
-          <p:cNvSpPr txBox="1"/>
-          <p:nvPr/>
-        </p:nvSpPr>
-        <p:spPr>
-          <a:xfrm>
-            <a:off x="6675120" y="1828800"/>
-            <a:ext cx="4754880" cy="868680"/>
-          </a:xfrm>
-          <a:prstGeom prst="rect">
-            <a:avLst/>
-          </a:prstGeom>
-          <a:noFill/>
-        </p:spPr>
-        <p:txBody>
-          <a:bodyPr wrap="square" lIns="45720" tIns="27432" rIns="45720" bIns="27432" anchor="t">
-            <a:spAutoFit/>
-          </a:bodyPr>
-          <a:lstStyle/>
-          <a:p>
-            <a:pPr algn="l">
-              <a:lnSpc>
-                <a:spcPct val="110000"/>
-              </a:lnSpc>
-            </a:pPr>
-            <a:r>
-              <a:rPr sz="4800" b="1" i="0">
-                <a:solidFill>
-                  <a:srgbClr val="1E6FE8"/>
-                </a:solidFill>
-                <a:latin typeface="Helvetica"/>
-              </a:rPr>
-              <a:t>+2%</a:t>
-            </a:r>
-          </a:p>
-        </p:txBody>
-      </p:sp>
-      <p:sp>
-        <p:nvSpPr>
-          <p:cNvPr id="13" name="TextBox 12"/>
-          <p:cNvSpPr txBox="1"/>
-          <p:nvPr/>
-        </p:nvSpPr>
-        <p:spPr>
-          <a:xfrm>
-            <a:off x="6675120" y="2697480"/>
-            <a:ext cx="4754880" cy="777240"/>
-          </a:xfrm>
-          <a:prstGeom prst="rect">
-            <a:avLst/>
-          </a:prstGeom>
-          <a:noFill/>
-        </p:spPr>
-        <p:txBody>
-          <a:bodyPr wrap="square" lIns="45720" tIns="27432" rIns="45720" bIns="27432" anchor="t">
-            <a:spAutoFit/>
-          </a:bodyPr>
-          <a:lstStyle/>
-          <a:p>
-            <a:pPr algn="l">
-              <a:lnSpc>
-                <a:spcPct val="110000"/>
-              </a:lnSpc>
-            </a:pPr>
-            <a:r>
-              <a:rPr sz="2000" b="0" i="0">
-                <a:solidFill>
-                  <a:srgbClr val="5B6B82"/>
-                </a:solidFill>
-                <a:latin typeface="Helvetica"/>
-              </a:rPr>
-              <a:t>thời gian mỗi bước (1,474 so với 1,448 giây)</a:t>
-            </a:r>
-          </a:p>
-        </p:txBody>
-      </p:sp>
-      <p:sp>
-        <p:nvSpPr>
-          <p:cNvPr id="14" name="TextBox 13"/>
-          <p:cNvSpPr txBox="1"/>
-          <p:nvPr/>
-        </p:nvSpPr>
-        <p:spPr>
-          <a:xfrm>
-            <a:off x="6675120" y="3931920"/>
-            <a:ext cx="4754880" cy="868680"/>
-          </a:xfrm>
-          <a:prstGeom prst="rect">
-            <a:avLst/>
-          </a:prstGeom>
-          <a:noFill/>
-        </p:spPr>
-        <p:txBody>
-          <a:bodyPr wrap="square" lIns="45720" tIns="27432" rIns="45720" bIns="27432" anchor="t">
-            <a:spAutoFit/>
-          </a:bodyPr>
-          <a:lstStyle/>
-          <a:p>
-            <a:pPr algn="l">
-              <a:lnSpc>
-                <a:spcPct val="110000"/>
-              </a:lnSpc>
-            </a:pPr>
-            <a:r>
-              <a:rPr sz="4800" b="1" i="0">
-                <a:solidFill>
-                  <a:srgbClr val="1E6FE8"/>
-                </a:solidFill>
-                <a:latin typeface="Helvetica"/>
-              </a:rPr>
-              <a:t>25,54</a:t>
-            </a:r>
-          </a:p>
-        </p:txBody>
-      </p:sp>
-      <p:sp>
-        <p:nvSpPr>
-          <p:cNvPr id="15" name="TextBox 14"/>
-          <p:cNvSpPr txBox="1"/>
-          <p:nvPr/>
-        </p:nvSpPr>
-        <p:spPr>
-          <a:xfrm>
-            <a:off x="6675120" y="4800600"/>
-            <a:ext cx="4754880" cy="777240"/>
-          </a:xfrm>
-          <a:prstGeom prst="rect">
-            <a:avLst/>
-          </a:prstGeom>
-          <a:noFill/>
-        </p:spPr>
-        <p:txBody>
-          <a:bodyPr wrap="square" lIns="45720" tIns="27432" rIns="45720" bIns="27432" anchor="t">
-            <a:spAutoFit/>
-          </a:bodyPr>
-          <a:lstStyle/>
-          <a:p>
-            <a:pPr algn="l">
-              <a:lnSpc>
-                <a:spcPct val="110000"/>
-              </a:lnSpc>
-            </a:pPr>
-            <a:r>
-              <a:rPr sz="2000" b="0" i="0">
-                <a:solidFill>
-                  <a:srgbClr val="5B6B82"/>
-                </a:solidFill>
-                <a:latin typeface="Helvetica"/>
-              </a:rPr>
-              <a:t>FashionIQ TB R@10 của A (baseline 25,90)</a:t>
+              <a:t>thứ hạng từng truy vấn giống hệt khi chạy lại</a:t>
             </a:r>
           </a:p>
         </p:txBody>
@@ -7079,8 +7038,8 @@
         </p:nvSpPr>
         <p:spPr>
           <a:xfrm>
-            <a:off x="-1828800" y="4114800"/>
-            <a:ext cx="3840480" cy="3840480"/>
+            <a:off x="10241280" y="-2194560"/>
+            <a:ext cx="4023360" cy="4023360"/>
           </a:xfrm>
           <a:prstGeom prst="ellipse">
             <a:avLst/>
@@ -7124,7 +7083,7 @@
         </p:nvSpPr>
         <p:spPr>
           <a:xfrm>
-            <a:off x="54864" y="6035040"/>
+            <a:off x="11247120" y="502920"/>
             <a:ext cx="411480" cy="411480"/>
           </a:xfrm>
           <a:prstGeom prst="ellipse">
@@ -7195,7 +7154,7 @@
                 </a:solidFill>
                 <a:latin typeface="Helvetica"/>
               </a:rPr>
-              <a:t>Cải tiến B: dịch nhiễu theo hướng của modality gap</a:t>
+              <a:t>Nhiễu có hướng (B) tốt hơn LinCIR, InfoNCE (A) làm giảm hiệu năng</a:t>
             </a:r>
           </a:p>
         </p:txBody>
@@ -7235,1480 +7194,6 @@
                 <a:latin typeface="Helvetica"/>
               </a:rPr>
               <a:t>12</a:t>
-            </a:r>
-          </a:p>
-        </p:txBody>
-      </p:sp>
-      <p:sp>
-        <p:nvSpPr>
-          <p:cNvPr id="6" name="Rounded Rectangle 5"/>
-          <p:cNvSpPr/>
-          <p:nvPr/>
-        </p:nvSpPr>
-        <p:spPr>
-          <a:xfrm>
-            <a:off x="548640" y="1737360"/>
-            <a:ext cx="5577840" cy="2011680"/>
-          </a:xfrm>
-          <a:prstGeom prst="roundRect">
-            <a:avLst>
-              <a:gd name="adj" fmla="val 8000"/>
-            </a:avLst>
-          </a:prstGeom>
-          <a:solidFill>
-            <a:srgbClr val="EAF2FF"/>
-          </a:solidFill>
-          <a:ln>
-            <a:noFill/>
-          </a:ln>
-          <a:effectLst/>
-        </p:spPr>
-        <p:style>
-          <a:lnRef idx="1">
-            <a:schemeClr val="accent1"/>
-          </a:lnRef>
-          <a:fillRef idx="3">
-            <a:schemeClr val="accent1"/>
-          </a:fillRef>
-          <a:effectRef idx="2">
-            <a:schemeClr val="accent1"/>
-          </a:effectRef>
-          <a:fontRef idx="minor">
-            <a:schemeClr val="lt1"/>
-          </a:fontRef>
-        </p:style>
-        <p:txBody>
-          <a:bodyPr rtlCol="0" anchor="ctr"/>
-          <a:lstStyle/>
-          <a:p>
-            <a:pPr algn="ctr"/>
-            <a:endParaRPr/>
-          </a:p>
-        </p:txBody>
-      </p:sp>
-      <p:sp>
-        <p:nvSpPr>
-          <p:cNvPr id="7" name="TextBox 6"/>
-          <p:cNvSpPr txBox="1"/>
-          <p:nvPr/>
-        </p:nvSpPr>
-        <p:spPr>
-          <a:xfrm>
-            <a:off x="777240" y="1901952"/>
-            <a:ext cx="5120640" cy="502920"/>
-          </a:xfrm>
-          <a:prstGeom prst="rect">
-            <a:avLst/>
-          </a:prstGeom>
-          <a:noFill/>
-        </p:spPr>
-        <p:txBody>
-          <a:bodyPr wrap="square" lIns="45720" tIns="27432" rIns="45720" bIns="27432" anchor="t">
-            <a:spAutoFit/>
-          </a:bodyPr>
-          <a:lstStyle/>
-          <a:p>
-            <a:pPr algn="l">
-              <a:lnSpc>
-                <a:spcPct val="110000"/>
-              </a:lnSpc>
-            </a:pPr>
-            <a:r>
-              <a:rPr sz="2200" b="1" i="0">
-                <a:solidFill>
-                  <a:srgbClr val="144FB0"/>
-                </a:solidFill>
-                <a:latin typeface="Helvetica"/>
-              </a:rPr>
-              <a:t>Nhiễu của LinCIR</a:t>
-            </a:r>
-          </a:p>
-        </p:txBody>
-      </p:sp>
-      <p:sp>
-        <p:nvSpPr>
-          <p:cNvPr id="8" name="TextBox 7"/>
-          <p:cNvSpPr txBox="1"/>
-          <p:nvPr/>
-        </p:nvSpPr>
-        <p:spPr>
-          <a:xfrm>
-            <a:off x="777240" y="2468880"/>
-            <a:ext cx="5120640" cy="1143000"/>
-          </a:xfrm>
-          <a:prstGeom prst="rect">
-            <a:avLst/>
-          </a:prstGeom>
-          <a:noFill/>
-        </p:spPr>
-        <p:txBody>
-          <a:bodyPr wrap="square">
-            <a:spAutoFit/>
-          </a:bodyPr>
-          <a:lstStyle/>
-          <a:p>
-            <a:pPr marL="292608" indent="-292608">
-              <a:lnSpc>
-                <a:spcPct val="108000"/>
-              </a:lnSpc>
-              <a:spcAft>
-                <a:spcPts val="600"/>
-              </a:spcAft>
-              <a:buClr>
-                <a:srgbClr val="1E6FE8"/>
-              </a:buClr>
-              <a:buChar char="•"/>
-            </a:pPr>
-            <a:r>
-              <a:rPr sz="2100" b="0" i="0">
-                <a:solidFill>
-                  <a:srgbClr val="0F1C3F"/>
-                </a:solidFill>
-                <a:latin typeface="Helvetica"/>
-              </a:rPr>
-              <a:t>Đẳng hướng: làm mờ vùng văn bản</a:t>
-            </a:r>
-          </a:p>
-          <a:p>
-            <a:pPr marL="292608" indent="-292608">
-              <a:lnSpc>
-                <a:spcPct val="108000"/>
-              </a:lnSpc>
-              <a:spcAft>
-                <a:spcPts val="600"/>
-              </a:spcAft>
-              <a:buClr>
-                <a:srgbClr val="1E6FE8"/>
-              </a:buClr>
-              <a:buChar char="•"/>
-            </a:pPr>
-            <a:r>
-              <a:rPr sz="2100" b="0" i="0">
-                <a:solidFill>
-                  <a:srgbClr val="0F1C3F"/>
-                </a:solidFill>
-                <a:latin typeface="Helvetica"/>
-              </a:rPr>
-              <a:t>Không hướng về vùng ảnh</a:t>
-            </a:r>
-          </a:p>
-        </p:txBody>
-      </p:sp>
-      <p:sp>
-        <p:nvSpPr>
-          <p:cNvPr id="9" name="Rounded Rectangle 8"/>
-          <p:cNvSpPr/>
-          <p:nvPr/>
-        </p:nvSpPr>
-        <p:spPr>
-          <a:xfrm>
-            <a:off x="548640" y="3931920"/>
-            <a:ext cx="5577840" cy="2011680"/>
-          </a:xfrm>
-          <a:prstGeom prst="roundRect">
-            <a:avLst>
-              <a:gd name="adj" fmla="val 8000"/>
-            </a:avLst>
-          </a:prstGeom>
-          <a:solidFill>
-            <a:srgbClr val="D6E6FF"/>
-          </a:solidFill>
-          <a:ln>
-            <a:noFill/>
-          </a:ln>
-          <a:effectLst/>
-        </p:spPr>
-        <p:style>
-          <a:lnRef idx="1">
-            <a:schemeClr val="accent1"/>
-          </a:lnRef>
-          <a:fillRef idx="3">
-            <a:schemeClr val="accent1"/>
-          </a:fillRef>
-          <a:effectRef idx="2">
-            <a:schemeClr val="accent1"/>
-          </a:effectRef>
-          <a:fontRef idx="minor">
-            <a:schemeClr val="lt1"/>
-          </a:fontRef>
-        </p:style>
-        <p:txBody>
-          <a:bodyPr rtlCol="0" anchor="ctr"/>
-          <a:lstStyle/>
-          <a:p>
-            <a:pPr algn="ctr"/>
-            <a:endParaRPr/>
-          </a:p>
-        </p:txBody>
-      </p:sp>
-      <p:sp>
-        <p:nvSpPr>
-          <p:cNvPr id="10" name="TextBox 9"/>
-          <p:cNvSpPr txBox="1"/>
-          <p:nvPr/>
-        </p:nvSpPr>
-        <p:spPr>
-          <a:xfrm>
-            <a:off x="777240" y="4096511"/>
-            <a:ext cx="5120640" cy="502920"/>
-          </a:xfrm>
-          <a:prstGeom prst="rect">
-            <a:avLst/>
-          </a:prstGeom>
-          <a:noFill/>
-        </p:spPr>
-        <p:txBody>
-          <a:bodyPr wrap="square" lIns="45720" tIns="27432" rIns="45720" bIns="27432" anchor="t">
-            <a:spAutoFit/>
-          </a:bodyPr>
-          <a:lstStyle/>
-          <a:p>
-            <a:pPr algn="l">
-              <a:lnSpc>
-                <a:spcPct val="110000"/>
-              </a:lnSpc>
-            </a:pPr>
-            <a:r>
-              <a:rPr sz="2200" b="1" i="0">
-                <a:solidFill>
-                  <a:srgbClr val="144FB0"/>
-                </a:solidFill>
-                <a:latin typeface="Helvetica"/>
-              </a:rPr>
-              <a:t>Nhiễu có hướng</a:t>
-            </a:r>
-          </a:p>
-        </p:txBody>
-      </p:sp>
-      <p:sp>
-        <p:nvSpPr>
-          <p:cNvPr id="11" name="TextBox 10"/>
-          <p:cNvSpPr txBox="1"/>
-          <p:nvPr/>
-        </p:nvSpPr>
-        <p:spPr>
-          <a:xfrm>
-            <a:off x="777240" y="4663440"/>
-            <a:ext cx="5120640" cy="1143000"/>
-          </a:xfrm>
-          <a:prstGeom prst="rect">
-            <a:avLst/>
-          </a:prstGeom>
-          <a:noFill/>
-        </p:spPr>
-        <p:txBody>
-          <a:bodyPr wrap="square">
-            <a:spAutoFit/>
-          </a:bodyPr>
-          <a:lstStyle/>
-          <a:p>
-            <a:pPr marL="292608" indent="-292608">
-              <a:lnSpc>
-                <a:spcPct val="108000"/>
-              </a:lnSpc>
-              <a:spcAft>
-                <a:spcPts val="600"/>
-              </a:spcAft>
-              <a:buClr>
-                <a:srgbClr val="1E6FE8"/>
-              </a:buClr>
-              <a:buChar char="•"/>
-            </a:pPr>
-            <a:r>
-              <a:rPr sz="2100" b="1" i="0">
-                <a:solidFill>
-                  <a:srgbClr val="0F1C3F"/>
-                </a:solidFill>
-                <a:latin typeface="Helvetica"/>
-              </a:rPr>
-              <a:t>n = 0,5 · Δ + u · ε</a:t>
-            </a:r>
-          </a:p>
-          <a:p>
-            <a:pPr marL="292608" indent="-292608">
-              <a:lnSpc>
-                <a:spcPct val="108000"/>
-              </a:lnSpc>
-              <a:spcAft>
-                <a:spcPts val="600"/>
-              </a:spcAft>
-              <a:buClr>
-                <a:srgbClr val="1E6FE8"/>
-              </a:buClr>
-              <a:buChar char="•"/>
-            </a:pPr>
-            <a:r>
-              <a:rPr sz="2100" b="0" i="0">
-                <a:solidFill>
-                  <a:srgbClr val="0F1C3F"/>
-                </a:solidFill>
-                <a:latin typeface="Helvetica"/>
-              </a:rPr>
-              <a:t>Δ = tâm ảnh − tâm văn bản</a:t>
-            </a:r>
-          </a:p>
-        </p:txBody>
-      </p:sp>
-      <p:sp>
-        <p:nvSpPr>
-          <p:cNvPr id="12" name="TextBox 11"/>
-          <p:cNvSpPr txBox="1"/>
-          <p:nvPr/>
-        </p:nvSpPr>
-        <p:spPr>
-          <a:xfrm>
-            <a:off x="6675120" y="1828800"/>
-            <a:ext cx="4754880" cy="868680"/>
-          </a:xfrm>
-          <a:prstGeom prst="rect">
-            <a:avLst/>
-          </a:prstGeom>
-          <a:noFill/>
-        </p:spPr>
-        <p:txBody>
-          <a:bodyPr wrap="square" lIns="45720" tIns="27432" rIns="45720" bIns="27432" anchor="t">
-            <a:spAutoFit/>
-          </a:bodyPr>
-          <a:lstStyle/>
-          <a:p>
-            <a:pPr algn="l">
-              <a:lnSpc>
-                <a:spcPct val="110000"/>
-              </a:lnSpc>
-            </a:pPr>
-            <a:r>
-              <a:rPr sz="4800" b="1" i="0">
-                <a:solidFill>
-                  <a:srgbClr val="1E6FE8"/>
-                </a:solidFill>
-                <a:latin typeface="Helvetica"/>
-              </a:rPr>
-              <a:t>13,87</a:t>
-            </a:r>
-          </a:p>
-        </p:txBody>
-      </p:sp>
-      <p:sp>
-        <p:nvSpPr>
-          <p:cNvPr id="13" name="TextBox 12"/>
-          <p:cNvSpPr txBox="1"/>
-          <p:nvPr/>
-        </p:nvSpPr>
-        <p:spPr>
-          <a:xfrm>
-            <a:off x="6675120" y="2697480"/>
-            <a:ext cx="4754880" cy="777240"/>
-          </a:xfrm>
-          <a:prstGeom prst="rect">
-            <a:avLst/>
-          </a:prstGeom>
-          <a:noFill/>
-        </p:spPr>
-        <p:txBody>
-          <a:bodyPr wrap="square" lIns="45720" tIns="27432" rIns="45720" bIns="27432" anchor="t">
-            <a:spAutoFit/>
-          </a:bodyPr>
-          <a:lstStyle/>
-          <a:p>
-            <a:pPr algn="l">
-              <a:lnSpc>
-                <a:spcPct val="110000"/>
-              </a:lnSpc>
-            </a:pPr>
-            <a:r>
-              <a:rPr sz="2000" b="0" i="0">
-                <a:solidFill>
-                  <a:srgbClr val="5B6B82"/>
-                </a:solidFill>
-                <a:latin typeface="Helvetica"/>
-              </a:rPr>
-              <a:t>độ lớn của Δ (5.000 cặp COCO)</a:t>
-            </a:r>
-          </a:p>
-        </p:txBody>
-      </p:sp>
-      <p:sp>
-        <p:nvSpPr>
-          <p:cNvPr id="14" name="TextBox 13"/>
-          <p:cNvSpPr txBox="1"/>
-          <p:nvPr/>
-        </p:nvSpPr>
-        <p:spPr>
-          <a:xfrm>
-            <a:off x="6675120" y="3931920"/>
-            <a:ext cx="4754880" cy="868680"/>
-          </a:xfrm>
-          <a:prstGeom prst="rect">
-            <a:avLst/>
-          </a:prstGeom>
-          <a:noFill/>
-        </p:spPr>
-        <p:txBody>
-          <a:bodyPr wrap="square" lIns="45720" tIns="27432" rIns="45720" bIns="27432" anchor="t">
-            <a:spAutoFit/>
-          </a:bodyPr>
-          <a:lstStyle/>
-          <a:p>
-            <a:pPr algn="l">
-              <a:lnSpc>
-                <a:spcPct val="110000"/>
-              </a:lnSpc>
-            </a:pPr>
-            <a:r>
-              <a:rPr sz="4800" b="1" i="0">
-                <a:solidFill>
-                  <a:srgbClr val="1E6FE8"/>
-                </a:solidFill>
-                <a:latin typeface="Helvetica"/>
-              </a:rPr>
-              <a:t>COCO val</a:t>
-            </a:r>
-          </a:p>
-        </p:txBody>
-      </p:sp>
-      <p:sp>
-        <p:nvSpPr>
-          <p:cNvPr id="15" name="TextBox 14"/>
-          <p:cNvSpPr txBox="1"/>
-          <p:nvPr/>
-        </p:nvSpPr>
-        <p:spPr>
-          <a:xfrm>
-            <a:off x="6675120" y="4800600"/>
-            <a:ext cx="4754880" cy="777240"/>
-          </a:xfrm>
-          <a:prstGeom prst="rect">
-            <a:avLst/>
-          </a:prstGeom>
-          <a:noFill/>
-        </p:spPr>
-        <p:txBody>
-          <a:bodyPr wrap="square" lIns="45720" tIns="27432" rIns="45720" bIns="27432" anchor="t">
-            <a:spAutoFit/>
-          </a:bodyPr>
-          <a:lstStyle/>
-          <a:p>
-            <a:pPr algn="l">
-              <a:lnSpc>
-                <a:spcPct val="110000"/>
-              </a:lnSpc>
-            </a:pPr>
-            <a:r>
-              <a:rPr sz="2000" b="0" i="0">
-                <a:solidFill>
-                  <a:srgbClr val="5B6B82"/>
-                </a:solidFill>
-                <a:latin typeface="Helvetica"/>
-              </a:rPr>
-              <a:t>độc lập với FashionIQ, CIRCO</a:t>
-            </a:r>
-          </a:p>
-        </p:txBody>
-      </p:sp>
-    </p:spTree>
-  </p:cSld>
-  <p:clrMapOvr>
-    <a:masterClrMapping/>
-  </p:clrMapOvr>
-  <mc:AlternateContent xmlns:mc="http://schemas.openxmlformats.org/markup-compatibility/2006" xmlns:p159="http://schemas.microsoft.com/office/powerpoint/2015/09/main">
-    <mc:Choice Requires="p159">
-      <p:transition xmlns:p14="http://schemas.microsoft.com/office/powerpoint/2010/main" spd="slow" p14:dur="1200">
-        <p159:morph option="byObject"/>
-      </p:transition>
-    </mc:Choice>
-    <mc:Fallback xmlns="">
-      <p:transition spd="slow">
-        <p:fade/>
-      </p:transition>
-    </mc:Fallback>
-  </mc:AlternateContent>
-</p:sld>
-</file>
-
-<file path=ppt/slides/slide13.xml><?xml version="1.0" encoding="utf-8"?>
-<p:sld xmlns:a="http://schemas.openxmlformats.org/drawingml/2006/main" xmlns:r="http://schemas.openxmlformats.org/officeDocument/2006/relationships" xmlns:p="http://schemas.openxmlformats.org/presentationml/2006/main">
-  <p:cSld>
-    <p:bg>
-      <p:bgPr>
-        <a:solidFill>
-          <a:srgbClr val="FFFFFF"/>
-        </a:solidFill>
-        <a:effectLst/>
-      </p:bgPr>
-    </p:bg>
-    <p:spTree>
-      <p:nvGrpSpPr>
-        <p:cNvPr id="1" name=""/>
-        <p:cNvGrpSpPr/>
-        <p:nvPr/>
-      </p:nvGrpSpPr>
-      <p:grpSpPr>
-        <a:xfrm>
-          <a:off x="0" y="0"/>
-          <a:ext cx="0" cy="0"/>
-          <a:chOff x="0" y="0"/>
-          <a:chExt cx="0" cy="0"/>
-        </a:xfrm>
-      </p:grpSpPr>
-      <p:sp>
-        <p:nvSpPr>
-          <p:cNvPr id="2" name="!!orb"/>
-          <p:cNvSpPr/>
-          <p:nvPr/>
-        </p:nvSpPr>
-        <p:spPr>
-          <a:xfrm>
-            <a:off x="9966960" y="4389120"/>
-            <a:ext cx="3566160" cy="3566160"/>
-          </a:xfrm>
-          <a:prstGeom prst="ellipse">
-            <a:avLst/>
-          </a:prstGeom>
-          <a:solidFill>
-            <a:srgbClr val="EAF2FF"/>
-          </a:solidFill>
-          <a:ln>
-            <a:noFill/>
-          </a:ln>
-          <a:effectLst/>
-        </p:spPr>
-        <p:style>
-          <a:lnRef idx="1">
-            <a:schemeClr val="accent1"/>
-          </a:lnRef>
-          <a:fillRef idx="3">
-            <a:schemeClr val="accent1"/>
-          </a:fillRef>
-          <a:effectRef idx="2">
-            <a:schemeClr val="accent1"/>
-          </a:effectRef>
-          <a:fontRef idx="minor">
-            <a:schemeClr val="lt1"/>
-          </a:fontRef>
-        </p:style>
-        <p:txBody>
-          <a:bodyPr rtlCol="0" anchor="ctr"/>
-          <a:lstStyle/>
-          <a:p>
-            <a:pPr algn="ctr"/>
-            <a:endParaRPr/>
-          </a:p>
-        </p:txBody>
-      </p:sp>
-      <p:sp>
-        <p:nvSpPr>
-          <p:cNvPr id="3" name="!!dot"/>
-          <p:cNvSpPr/>
-          <p:nvPr/>
-        </p:nvSpPr>
-        <p:spPr>
-          <a:xfrm>
-            <a:off x="11704320" y="3657600"/>
-            <a:ext cx="411480" cy="411480"/>
-          </a:xfrm>
-          <a:prstGeom prst="ellipse">
-            <a:avLst/>
-          </a:prstGeom>
-          <a:solidFill>
-            <a:srgbClr val="1E6FE8"/>
-          </a:solidFill>
-          <a:ln>
-            <a:noFill/>
-          </a:ln>
-          <a:effectLst/>
-        </p:spPr>
-        <p:style>
-          <a:lnRef idx="1">
-            <a:schemeClr val="accent1"/>
-          </a:lnRef>
-          <a:fillRef idx="3">
-            <a:schemeClr val="accent1"/>
-          </a:fillRef>
-          <a:effectRef idx="2">
-            <a:schemeClr val="accent1"/>
-          </a:effectRef>
-          <a:fontRef idx="minor">
-            <a:schemeClr val="lt1"/>
-          </a:fontRef>
-        </p:style>
-        <p:txBody>
-          <a:bodyPr rtlCol="0" anchor="ctr"/>
-          <a:lstStyle/>
-          <a:p>
-            <a:pPr algn="ctr"/>
-            <a:endParaRPr/>
-          </a:p>
-        </p:txBody>
-      </p:sp>
-      <p:sp>
-        <p:nvSpPr>
-          <p:cNvPr id="4" name="!!title"/>
-          <p:cNvSpPr txBox="1"/>
-          <p:nvPr/>
-        </p:nvSpPr>
-        <p:spPr>
-          <a:xfrm>
-            <a:off x="548640" y="347472"/>
-            <a:ext cx="10424160" cy="1143000"/>
-          </a:xfrm>
-          <a:prstGeom prst="rect">
-            <a:avLst/>
-          </a:prstGeom>
-          <a:noFill/>
-        </p:spPr>
-        <p:txBody>
-          <a:bodyPr wrap="square" lIns="45720" tIns="27432" rIns="45720" bIns="27432" anchor="ctr">
-            <a:spAutoFit/>
-          </a:bodyPr>
-          <a:lstStyle/>
-          <a:p>
-            <a:pPr algn="l">
-              <a:lnSpc>
-                <a:spcPct val="110000"/>
-              </a:lnSpc>
-            </a:pPr>
-            <a:r>
-              <a:rPr sz="3200" b="1" i="0">
-                <a:solidFill>
-                  <a:srgbClr val="0F1C3F"/>
-                </a:solidFill>
-                <a:latin typeface="Helvetica"/>
-              </a:rPr>
-              <a:t>Mọi biến thể dùng cùng cấu hình, 3 seed và kiểm định theo truy vấn</a:t>
-            </a:r>
-          </a:p>
-        </p:txBody>
-      </p:sp>
-      <p:sp>
-        <p:nvSpPr>
-          <p:cNvPr id="5" name="!!num"/>
-          <p:cNvSpPr txBox="1"/>
-          <p:nvPr/>
-        </p:nvSpPr>
-        <p:spPr>
-          <a:xfrm>
-            <a:off x="10881360" y="6236208"/>
-            <a:ext cx="914400" cy="457200"/>
-          </a:xfrm>
-          <a:prstGeom prst="rect">
-            <a:avLst/>
-          </a:prstGeom>
-          <a:noFill/>
-        </p:spPr>
-        <p:txBody>
-          <a:bodyPr wrap="square" lIns="45720" tIns="27432" rIns="45720" bIns="27432" anchor="t">
-            <a:spAutoFit/>
-          </a:bodyPr>
-          <a:lstStyle/>
-          <a:p>
-            <a:pPr algn="r">
-              <a:lnSpc>
-                <a:spcPct val="110000"/>
-              </a:lnSpc>
-            </a:pPr>
-            <a:r>
-              <a:rPr sz="2000" b="0" i="0">
-                <a:solidFill>
-                  <a:srgbClr val="5B6B82"/>
-                </a:solidFill>
-                <a:latin typeface="Helvetica"/>
-              </a:rPr>
-              <a:t>13</a:t>
-            </a:r>
-          </a:p>
-        </p:txBody>
-      </p:sp>
-      <p:sp>
-        <p:nvSpPr>
-          <p:cNvPr id="6" name="Rounded Rectangle 5"/>
-          <p:cNvSpPr/>
-          <p:nvPr/>
-        </p:nvSpPr>
-        <p:spPr>
-          <a:xfrm>
-            <a:off x="548640" y="1737360"/>
-            <a:ext cx="3566160" cy="3108960"/>
-          </a:xfrm>
-          <a:prstGeom prst="roundRect">
-            <a:avLst>
-              <a:gd name="adj" fmla="val 8000"/>
-            </a:avLst>
-          </a:prstGeom>
-          <a:solidFill>
-            <a:srgbClr val="EAF2FF"/>
-          </a:solidFill>
-          <a:ln>
-            <a:noFill/>
-          </a:ln>
-          <a:effectLst/>
-        </p:spPr>
-        <p:style>
-          <a:lnRef idx="1">
-            <a:schemeClr val="accent1"/>
-          </a:lnRef>
-          <a:fillRef idx="3">
-            <a:schemeClr val="accent1"/>
-          </a:fillRef>
-          <a:effectRef idx="2">
-            <a:schemeClr val="accent1"/>
-          </a:effectRef>
-          <a:fontRef idx="minor">
-            <a:schemeClr val="lt1"/>
-          </a:fontRef>
-        </p:style>
-        <p:txBody>
-          <a:bodyPr rtlCol="0" anchor="ctr"/>
-          <a:lstStyle/>
-          <a:p>
-            <a:pPr algn="ctr"/>
-            <a:endParaRPr/>
-          </a:p>
-        </p:txBody>
-      </p:sp>
-      <p:sp>
-        <p:nvSpPr>
-          <p:cNvPr id="7" name="TextBox 6"/>
-          <p:cNvSpPr txBox="1"/>
-          <p:nvPr/>
-        </p:nvSpPr>
-        <p:spPr>
-          <a:xfrm>
-            <a:off x="777240" y="1901952"/>
-            <a:ext cx="3108960" cy="502920"/>
-          </a:xfrm>
-          <a:prstGeom prst="rect">
-            <a:avLst/>
-          </a:prstGeom>
-          <a:noFill/>
-        </p:spPr>
-        <p:txBody>
-          <a:bodyPr wrap="square" lIns="45720" tIns="27432" rIns="45720" bIns="27432" anchor="t">
-            <a:spAutoFit/>
-          </a:bodyPr>
-          <a:lstStyle/>
-          <a:p>
-            <a:pPr algn="l">
-              <a:lnSpc>
-                <a:spcPct val="110000"/>
-              </a:lnSpc>
-            </a:pPr>
-            <a:r>
-              <a:rPr sz="2200" b="1" i="0">
-                <a:solidFill>
-                  <a:srgbClr val="144FB0"/>
-                </a:solidFill>
-                <a:latin typeface="Helvetica"/>
-              </a:rPr>
-              <a:t>Cấu hình</a:t>
-            </a:r>
-          </a:p>
-        </p:txBody>
-      </p:sp>
-      <p:sp>
-        <p:nvSpPr>
-          <p:cNvPr id="8" name="TextBox 7"/>
-          <p:cNvSpPr txBox="1"/>
-          <p:nvPr/>
-        </p:nvSpPr>
-        <p:spPr>
-          <a:xfrm>
-            <a:off x="777240" y="2468880"/>
-            <a:ext cx="3108960" cy="2240280"/>
-          </a:xfrm>
-          <a:prstGeom prst="rect">
-            <a:avLst/>
-          </a:prstGeom>
-          <a:noFill/>
-        </p:spPr>
-        <p:txBody>
-          <a:bodyPr wrap="square">
-            <a:spAutoFit/>
-          </a:bodyPr>
-          <a:lstStyle/>
-          <a:p>
-            <a:pPr marL="292608" indent="-292608">
-              <a:lnSpc>
-                <a:spcPct val="108000"/>
-              </a:lnSpc>
-              <a:spcAft>
-                <a:spcPts val="600"/>
-              </a:spcAft>
-              <a:buClr>
-                <a:srgbClr val="1E6FE8"/>
-              </a:buClr>
-              <a:buChar char="•"/>
-            </a:pPr>
-            <a:r>
-              <a:rPr sz="2100" b="0" i="0">
-                <a:solidFill>
-                  <a:srgbClr val="0F1C3F"/>
-                </a:solidFill>
-                <a:latin typeface="Helvetica"/>
-              </a:rPr>
-              <a:t>ViT-L/14, batch 512</a:t>
-            </a:r>
-          </a:p>
-          <a:p>
-            <a:pPr marL="292608" indent="-292608">
-              <a:lnSpc>
-                <a:spcPct val="108000"/>
-              </a:lnSpc>
-              <a:spcAft>
-                <a:spcPts val="600"/>
-              </a:spcAft>
-              <a:buClr>
-                <a:srgbClr val="1E6FE8"/>
-              </a:buClr>
-              <a:buChar char="•"/>
-            </a:pPr>
-            <a:r>
-              <a:rPr sz="2100" b="0" i="0">
-                <a:solidFill>
-                  <a:srgbClr val="0F1C3F"/>
-                </a:solidFill>
-                <a:latin typeface="Helvetica"/>
-              </a:rPr>
-              <a:t>5.000 bước</a:t>
-            </a:r>
-          </a:p>
-          <a:p>
-            <a:pPr marL="292608" indent="-292608">
-              <a:lnSpc>
-                <a:spcPct val="108000"/>
-              </a:lnSpc>
-              <a:spcAft>
-                <a:spcPts val="600"/>
-              </a:spcAft>
-              <a:buClr>
-                <a:srgbClr val="1E6FE8"/>
-              </a:buClr>
-              <a:buChar char="•"/>
-            </a:pPr>
-            <a:r>
-              <a:rPr sz="2100" b="0" i="0">
-                <a:solidFill>
-                  <a:srgbClr val="0F1C3F"/>
-                </a:solidFill>
-                <a:latin typeface="Helvetica"/>
-              </a:rPr>
-              <a:t>3 seed / biến thể</a:t>
-            </a:r>
-          </a:p>
-        </p:txBody>
-      </p:sp>
-      <p:sp>
-        <p:nvSpPr>
-          <p:cNvPr id="9" name="Rounded Rectangle 8"/>
-          <p:cNvSpPr/>
-          <p:nvPr/>
-        </p:nvSpPr>
-        <p:spPr>
-          <a:xfrm>
-            <a:off x="4343400" y="1737360"/>
-            <a:ext cx="3566160" cy="3108960"/>
-          </a:xfrm>
-          <a:prstGeom prst="roundRect">
-            <a:avLst>
-              <a:gd name="adj" fmla="val 8000"/>
-            </a:avLst>
-          </a:prstGeom>
-          <a:solidFill>
-            <a:srgbClr val="EAF2FF"/>
-          </a:solidFill>
-          <a:ln>
-            <a:noFill/>
-          </a:ln>
-          <a:effectLst/>
-        </p:spPr>
-        <p:style>
-          <a:lnRef idx="1">
-            <a:schemeClr val="accent1"/>
-          </a:lnRef>
-          <a:fillRef idx="3">
-            <a:schemeClr val="accent1"/>
-          </a:fillRef>
-          <a:effectRef idx="2">
-            <a:schemeClr val="accent1"/>
-          </a:effectRef>
-          <a:fontRef idx="minor">
-            <a:schemeClr val="lt1"/>
-          </a:fontRef>
-        </p:style>
-        <p:txBody>
-          <a:bodyPr rtlCol="0" anchor="ctr"/>
-          <a:lstStyle/>
-          <a:p>
-            <a:pPr algn="ctr"/>
-            <a:endParaRPr/>
-          </a:p>
-        </p:txBody>
-      </p:sp>
-      <p:sp>
-        <p:nvSpPr>
-          <p:cNvPr id="10" name="TextBox 9"/>
-          <p:cNvSpPr txBox="1"/>
-          <p:nvPr/>
-        </p:nvSpPr>
-        <p:spPr>
-          <a:xfrm>
-            <a:off x="4572000" y="1901952"/>
-            <a:ext cx="3108960" cy="502920"/>
-          </a:xfrm>
-          <a:prstGeom prst="rect">
-            <a:avLst/>
-          </a:prstGeom>
-          <a:noFill/>
-        </p:spPr>
-        <p:txBody>
-          <a:bodyPr wrap="square" lIns="45720" tIns="27432" rIns="45720" bIns="27432" anchor="t">
-            <a:spAutoFit/>
-          </a:bodyPr>
-          <a:lstStyle/>
-          <a:p>
-            <a:pPr algn="l">
-              <a:lnSpc>
-                <a:spcPct val="110000"/>
-              </a:lnSpc>
-            </a:pPr>
-            <a:r>
-              <a:rPr sz="2200" b="1" i="0">
-                <a:solidFill>
-                  <a:srgbClr val="144FB0"/>
-                </a:solidFill>
-                <a:latin typeface="Helvetica"/>
-              </a:rPr>
-              <a:t>Đánh giá</a:t>
-            </a:r>
-          </a:p>
-        </p:txBody>
-      </p:sp>
-      <p:sp>
-        <p:nvSpPr>
-          <p:cNvPr id="11" name="TextBox 10"/>
-          <p:cNvSpPr txBox="1"/>
-          <p:nvPr/>
-        </p:nvSpPr>
-        <p:spPr>
-          <a:xfrm>
-            <a:off x="4572000" y="2468880"/>
-            <a:ext cx="3108960" cy="2240280"/>
-          </a:xfrm>
-          <a:prstGeom prst="rect">
-            <a:avLst/>
-          </a:prstGeom>
-          <a:noFill/>
-        </p:spPr>
-        <p:txBody>
-          <a:bodyPr wrap="square">
-            <a:spAutoFit/>
-          </a:bodyPr>
-          <a:lstStyle/>
-          <a:p>
-            <a:pPr marL="292608" indent="-292608">
-              <a:lnSpc>
-                <a:spcPct val="108000"/>
-              </a:lnSpc>
-              <a:spcAft>
-                <a:spcPts val="600"/>
-              </a:spcAft>
-              <a:buClr>
-                <a:srgbClr val="1E6FE8"/>
-              </a:buClr>
-              <a:buChar char="•"/>
-            </a:pPr>
-            <a:r>
-              <a:rPr sz="2100" b="0" i="0">
-                <a:solidFill>
-                  <a:srgbClr val="0F1C3F"/>
-                </a:solidFill>
-                <a:latin typeface="Helvetica"/>
-              </a:rPr>
-              <a:t>FashionIQ val</a:t>
-            </a:r>
-          </a:p>
-          <a:p>
-            <a:pPr marL="292608" indent="-292608">
-              <a:lnSpc>
-                <a:spcPct val="108000"/>
-              </a:lnSpc>
-              <a:spcAft>
-                <a:spcPts val="600"/>
-              </a:spcAft>
-              <a:buClr>
-                <a:srgbClr val="1E6FE8"/>
-              </a:buClr>
-              <a:buChar char="•"/>
-            </a:pPr>
-            <a:r>
-              <a:rPr sz="2100" b="0" i="0">
-                <a:solidFill>
-                  <a:srgbClr val="0F1C3F"/>
-                </a:solidFill>
-                <a:latin typeface="Helvetica"/>
-              </a:rPr>
-              <a:t>CIRCO val</a:t>
-            </a:r>
-          </a:p>
-          <a:p>
-            <a:pPr marL="292608" indent="-292608">
-              <a:lnSpc>
-                <a:spcPct val="108000"/>
-              </a:lnSpc>
-              <a:spcAft>
-                <a:spcPts val="600"/>
-              </a:spcAft>
-              <a:buClr>
-                <a:srgbClr val="1E6FE8"/>
-              </a:buClr>
-              <a:buChar char="•"/>
-            </a:pPr>
-            <a:r>
-              <a:rPr sz="2100" b="0" i="0">
-                <a:solidFill>
-                  <a:srgbClr val="0F1C3F"/>
-                </a:solidFill>
-                <a:latin typeface="Helvetica"/>
-              </a:rPr>
-              <a:t>Bootstrap + Wilcoxon</a:t>
-            </a:r>
-          </a:p>
-        </p:txBody>
-      </p:sp>
-      <p:sp>
-        <p:nvSpPr>
-          <p:cNvPr id="12" name="Rounded Rectangle 11"/>
-          <p:cNvSpPr/>
-          <p:nvPr/>
-        </p:nvSpPr>
-        <p:spPr>
-          <a:xfrm>
-            <a:off x="8138160" y="1737360"/>
-            <a:ext cx="3566160" cy="3108960"/>
-          </a:xfrm>
-          <a:prstGeom prst="roundRect">
-            <a:avLst>
-              <a:gd name="adj" fmla="val 8000"/>
-            </a:avLst>
-          </a:prstGeom>
-          <a:solidFill>
-            <a:srgbClr val="D6E6FF"/>
-          </a:solidFill>
-          <a:ln>
-            <a:noFill/>
-          </a:ln>
-          <a:effectLst/>
-        </p:spPr>
-        <p:style>
-          <a:lnRef idx="1">
-            <a:schemeClr val="accent1"/>
-          </a:lnRef>
-          <a:fillRef idx="3">
-            <a:schemeClr val="accent1"/>
-          </a:fillRef>
-          <a:effectRef idx="2">
-            <a:schemeClr val="accent1"/>
-          </a:effectRef>
-          <a:fontRef idx="minor">
-            <a:schemeClr val="lt1"/>
-          </a:fontRef>
-        </p:style>
-        <p:txBody>
-          <a:bodyPr rtlCol="0" anchor="ctr"/>
-          <a:lstStyle/>
-          <a:p>
-            <a:pPr algn="ctr"/>
-            <a:endParaRPr/>
-          </a:p>
-        </p:txBody>
-      </p:sp>
-      <p:sp>
-        <p:nvSpPr>
-          <p:cNvPr id="13" name="TextBox 12"/>
-          <p:cNvSpPr txBox="1"/>
-          <p:nvPr/>
-        </p:nvSpPr>
-        <p:spPr>
-          <a:xfrm>
-            <a:off x="8366760" y="1901952"/>
-            <a:ext cx="3108960" cy="502920"/>
-          </a:xfrm>
-          <a:prstGeom prst="rect">
-            <a:avLst/>
-          </a:prstGeom>
-          <a:noFill/>
-        </p:spPr>
-        <p:txBody>
-          <a:bodyPr wrap="square" lIns="45720" tIns="27432" rIns="45720" bIns="27432" anchor="t">
-            <a:spAutoFit/>
-          </a:bodyPr>
-          <a:lstStyle/>
-          <a:p>
-            <a:pPr algn="l">
-              <a:lnSpc>
-                <a:spcPct val="110000"/>
-              </a:lnSpc>
-            </a:pPr>
-            <a:r>
-              <a:rPr sz="2200" b="1" i="0">
-                <a:solidFill>
-                  <a:srgbClr val="144FB0"/>
-                </a:solidFill>
-                <a:latin typeface="Helvetica"/>
-              </a:rPr>
-              <a:t>Vận hành Kaggle</a:t>
-            </a:r>
-          </a:p>
-        </p:txBody>
-      </p:sp>
-      <p:sp>
-        <p:nvSpPr>
-          <p:cNvPr id="14" name="TextBox 13"/>
-          <p:cNvSpPr txBox="1"/>
-          <p:nvPr/>
-        </p:nvSpPr>
-        <p:spPr>
-          <a:xfrm>
-            <a:off x="8366760" y="2468880"/>
-            <a:ext cx="3108960" cy="2240280"/>
-          </a:xfrm>
-          <a:prstGeom prst="rect">
-            <a:avLst/>
-          </a:prstGeom>
-          <a:noFill/>
-        </p:spPr>
-        <p:txBody>
-          <a:bodyPr wrap="square">
-            <a:spAutoFit/>
-          </a:bodyPr>
-          <a:lstStyle/>
-          <a:p>
-            <a:pPr marL="292608" indent="-292608">
-              <a:lnSpc>
-                <a:spcPct val="108000"/>
-              </a:lnSpc>
-              <a:spcAft>
-                <a:spcPts val="600"/>
-              </a:spcAft>
-              <a:buClr>
-                <a:srgbClr val="1E6FE8"/>
-              </a:buClr>
-              <a:buChar char="•"/>
-            </a:pPr>
-            <a:r>
-              <a:rPr sz="2100" b="0" i="0">
-                <a:solidFill>
-                  <a:srgbClr val="0F1C3F"/>
-                </a:solidFill>
-                <a:latin typeface="Helvetica"/>
-              </a:rPr>
-              <a:t>2 × T4, 2 run song song</a:t>
-            </a:r>
-          </a:p>
-          <a:p>
-            <a:pPr marL="292608" indent="-292608">
-              <a:lnSpc>
-                <a:spcPct val="108000"/>
-              </a:lnSpc>
-              <a:spcAft>
-                <a:spcPts val="600"/>
-              </a:spcAft>
-              <a:buClr>
-                <a:srgbClr val="1E6FE8"/>
-              </a:buClr>
-              <a:buChar char="•"/>
-            </a:pPr>
-            <a:r>
-              <a:rPr sz="2100" b="0" i="0">
-                <a:solidFill>
-                  <a:srgbClr val="0F1C3F"/>
-                </a:solidFill>
-                <a:latin typeface="Helvetica"/>
-              </a:rPr>
-              <a:t>Không vượt 12 giờ/phiên</a:t>
-            </a:r>
-          </a:p>
-          <a:p>
-            <a:pPr marL="292608" indent="-292608">
-              <a:lnSpc>
-                <a:spcPct val="108000"/>
-              </a:lnSpc>
-              <a:spcAft>
-                <a:spcPts val="600"/>
-              </a:spcAft>
-              <a:buClr>
-                <a:srgbClr val="1E6FE8"/>
-              </a:buClr>
-              <a:buChar char="•"/>
-            </a:pPr>
-            <a:r>
-              <a:rPr sz="2100" b="0" i="0">
-                <a:solidFill>
-                  <a:srgbClr val="0F1C3F"/>
-                </a:solidFill>
-                <a:latin typeface="Helvetica"/>
-              </a:rPr>
-              <a:t>Nạp dữ liệu nhanh ×3,1</a:t>
-            </a:r>
-          </a:p>
-        </p:txBody>
-      </p:sp>
-      <p:sp>
-        <p:nvSpPr>
-          <p:cNvPr id="15" name="TextBox 14"/>
-          <p:cNvSpPr txBox="1"/>
-          <p:nvPr/>
-        </p:nvSpPr>
-        <p:spPr>
-          <a:xfrm>
-            <a:off x="548640" y="5166360"/>
-            <a:ext cx="11064240" cy="822960"/>
-          </a:xfrm>
-          <a:prstGeom prst="rect">
-            <a:avLst/>
-          </a:prstGeom>
-          <a:noFill/>
-        </p:spPr>
-        <p:txBody>
-          <a:bodyPr wrap="square" lIns="45720" tIns="27432" rIns="45720" bIns="27432" anchor="t">
-            <a:spAutoFit/>
-          </a:bodyPr>
-          <a:lstStyle/>
-          <a:p>
-            <a:pPr algn="l">
-              <a:lnSpc>
-                <a:spcPct val="110000"/>
-              </a:lnSpc>
-            </a:pPr>
-            <a:r>
-              <a:rPr sz="2200" b="1" i="0">
-                <a:solidFill>
-                  <a:srgbClr val="144FB0"/>
-                </a:solidFill>
-                <a:latin typeface="Helvetica"/>
-              </a:rPr>
-              <a:t>Chỉ khác đúng thành phần cải tiến </a:t>
-            </a:r>
-            <a:r>
-              <a:rPr sz="2200" b="0" i="0">
-                <a:solidFill>
-                  <a:srgbClr val="0F1C3F"/>
-                </a:solidFill>
-                <a:latin typeface="Helvetica"/>
-              </a:rPr>
-              <a:t>→ chênh lệch là do cải tiến, không do cấu hình</a:t>
-            </a:r>
-          </a:p>
-        </p:txBody>
-      </p:sp>
-    </p:spTree>
-  </p:cSld>
-  <p:clrMapOvr>
-    <a:masterClrMapping/>
-  </p:clrMapOvr>
-  <mc:AlternateContent xmlns:mc="http://schemas.openxmlformats.org/markup-compatibility/2006" xmlns:p159="http://schemas.microsoft.com/office/powerpoint/2015/09/main">
-    <mc:Choice Requires="p159">
-      <p:transition xmlns:p14="http://schemas.microsoft.com/office/powerpoint/2010/main" spd="slow" p14:dur="1200">
-        <p159:morph option="byObject"/>
-      </p:transition>
-    </mc:Choice>
-    <mc:Fallback xmlns="">
-      <p:transition spd="slow">
-        <p:fade/>
-      </p:transition>
-    </mc:Fallback>
-  </mc:AlternateContent>
-</p:sld>
-</file>
-
-<file path=ppt/slides/slide14.xml><?xml version="1.0" encoding="utf-8"?>
-<p:sld xmlns:a="http://schemas.openxmlformats.org/drawingml/2006/main" xmlns:r="http://schemas.openxmlformats.org/officeDocument/2006/relationships" xmlns:p="http://schemas.openxmlformats.org/presentationml/2006/main">
-  <p:cSld>
-    <p:bg>
-      <p:bgPr>
-        <a:solidFill>
-          <a:srgbClr val="FFFFFF"/>
-        </a:solidFill>
-        <a:effectLst/>
-      </p:bgPr>
-    </p:bg>
-    <p:spTree>
-      <p:nvGrpSpPr>
-        <p:cNvPr id="1" name=""/>
-        <p:cNvGrpSpPr/>
-        <p:nvPr/>
-      </p:nvGrpSpPr>
-      <p:grpSpPr>
-        <a:xfrm>
-          <a:off x="0" y="0"/>
-          <a:ext cx="0" cy="0"/>
-          <a:chOff x="0" y="0"/>
-          <a:chExt cx="0" cy="0"/>
-        </a:xfrm>
-      </p:grpSpPr>
-      <p:sp>
-        <p:nvSpPr>
-          <p:cNvPr id="2" name="!!orb"/>
-          <p:cNvSpPr/>
-          <p:nvPr/>
-        </p:nvSpPr>
-        <p:spPr>
-          <a:xfrm>
-            <a:off x="10241280" y="-2194560"/>
-            <a:ext cx="4023360" cy="4023360"/>
-          </a:xfrm>
-          <a:prstGeom prst="ellipse">
-            <a:avLst/>
-          </a:prstGeom>
-          <a:solidFill>
-            <a:srgbClr val="EAF2FF"/>
-          </a:solidFill>
-          <a:ln>
-            <a:noFill/>
-          </a:ln>
-          <a:effectLst/>
-        </p:spPr>
-        <p:style>
-          <a:lnRef idx="1">
-            <a:schemeClr val="accent1"/>
-          </a:lnRef>
-          <a:fillRef idx="3">
-            <a:schemeClr val="accent1"/>
-          </a:fillRef>
-          <a:effectRef idx="2">
-            <a:schemeClr val="accent1"/>
-          </a:effectRef>
-          <a:fontRef idx="minor">
-            <a:schemeClr val="lt1"/>
-          </a:fontRef>
-        </p:style>
-        <p:txBody>
-          <a:bodyPr rtlCol="0" anchor="ctr"/>
-          <a:lstStyle/>
-          <a:p>
-            <a:pPr algn="ctr"/>
-            <a:endParaRPr/>
-          </a:p>
-        </p:txBody>
-      </p:sp>
-      <p:sp>
-        <p:nvSpPr>
-          <p:cNvPr id="3" name="!!dot"/>
-          <p:cNvSpPr/>
-          <p:nvPr/>
-        </p:nvSpPr>
-        <p:spPr>
-          <a:xfrm>
-            <a:off x="11247120" y="502920"/>
-            <a:ext cx="411480" cy="411480"/>
-          </a:xfrm>
-          <a:prstGeom prst="ellipse">
-            <a:avLst/>
-          </a:prstGeom>
-          <a:solidFill>
-            <a:srgbClr val="1E6FE8"/>
-          </a:solidFill>
-          <a:ln>
-            <a:noFill/>
-          </a:ln>
-          <a:effectLst/>
-        </p:spPr>
-        <p:style>
-          <a:lnRef idx="1">
-            <a:schemeClr val="accent1"/>
-          </a:lnRef>
-          <a:fillRef idx="3">
-            <a:schemeClr val="accent1"/>
-          </a:fillRef>
-          <a:effectRef idx="2">
-            <a:schemeClr val="accent1"/>
-          </a:effectRef>
-          <a:fontRef idx="minor">
-            <a:schemeClr val="lt1"/>
-          </a:fontRef>
-        </p:style>
-        <p:txBody>
-          <a:bodyPr rtlCol="0" anchor="ctr"/>
-          <a:lstStyle/>
-          <a:p>
-            <a:pPr algn="ctr"/>
-            <a:endParaRPr/>
-          </a:p>
-        </p:txBody>
-      </p:sp>
-      <p:sp>
-        <p:nvSpPr>
-          <p:cNvPr id="4" name="!!title"/>
-          <p:cNvSpPr txBox="1"/>
-          <p:nvPr/>
-        </p:nvSpPr>
-        <p:spPr>
-          <a:xfrm>
-            <a:off x="548640" y="347472"/>
-            <a:ext cx="10424160" cy="1143000"/>
-          </a:xfrm>
-          <a:prstGeom prst="rect">
-            <a:avLst/>
-          </a:prstGeom>
-          <a:noFill/>
-        </p:spPr>
-        <p:txBody>
-          <a:bodyPr wrap="square" lIns="45720" tIns="27432" rIns="45720" bIns="27432" anchor="ctr">
-            <a:spAutoFit/>
-          </a:bodyPr>
-          <a:lstStyle/>
-          <a:p>
-            <a:pPr algn="l">
-              <a:lnSpc>
-                <a:spcPct val="110000"/>
-              </a:lnSpc>
-            </a:pPr>
-            <a:r>
-              <a:rPr sz="3200" b="1" i="0">
-                <a:solidFill>
-                  <a:srgbClr val="0F1C3F"/>
-                </a:solidFill>
-                <a:latin typeface="Helvetica"/>
-              </a:rPr>
-              <a:t>Nhiễu có hướng (B) tốt hơn LinCIR, InfoNCE (A) làm giảm hiệu năng</a:t>
-            </a:r>
-          </a:p>
-        </p:txBody>
-      </p:sp>
-      <p:sp>
-        <p:nvSpPr>
-          <p:cNvPr id="5" name="!!num"/>
-          <p:cNvSpPr txBox="1"/>
-          <p:nvPr/>
-        </p:nvSpPr>
-        <p:spPr>
-          <a:xfrm>
-            <a:off x="10881360" y="6236208"/>
-            <a:ext cx="914400" cy="457200"/>
-          </a:xfrm>
-          <a:prstGeom prst="rect">
-            <a:avLst/>
-          </a:prstGeom>
-          <a:noFill/>
-        </p:spPr>
-        <p:txBody>
-          <a:bodyPr wrap="square" lIns="45720" tIns="27432" rIns="45720" bIns="27432" anchor="t">
-            <a:spAutoFit/>
-          </a:bodyPr>
-          <a:lstStyle/>
-          <a:p>
-            <a:pPr algn="r">
-              <a:lnSpc>
-                <a:spcPct val="110000"/>
-              </a:lnSpc>
-            </a:pPr>
-            <a:r>
-              <a:rPr sz="2000" b="0" i="0">
-                <a:solidFill>
-                  <a:srgbClr val="5B6B82"/>
-                </a:solidFill>
-                <a:latin typeface="Helvetica"/>
-              </a:rPr>
-              <a:t>14</a:t>
             </a:r>
           </a:p>
         </p:txBody>
@@ -8798,7 +7283,7 @@
                           </a:solidFill>
                           <a:latin typeface="Helvetica"/>
                         </a:rPr>
-                        <a:t>FIQ TB R@10</a:t>
+                        <a:t>FashionIQ R@10</a:t>
                       </a:r>
                     </a:p>
                   </a:txBody>
@@ -8821,7 +7306,7 @@
                           </a:solidFill>
                           <a:latin typeface="Helvetica"/>
                         </a:rPr>
-                        <a:t>FIQ TB R@50</a:t>
+                        <a:t>FashionIQ R@50</a:t>
                       </a:r>
                     </a:p>
                   </a:txBody>
@@ -9341,7 +7826,7 @@
                 </a:solidFill>
                 <a:latin typeface="Helvetica"/>
               </a:rPr>
-              <a:t>B: FashionIQ R@10 +0,60 (p = 0,006), R@50 +1,27 (p &lt; 0,001)</a:t>
+              <a:t>B tốt hơn baseline: FashionIQ R@10 +0,60 (p = 0,006), R@50 +1,27 (p &lt; 0,001)</a:t>
             </a:r>
           </a:p>
           <a:p>
@@ -9357,7 +7842,820 @@
                 </a:solidFill>
                 <a:latin typeface="Helvetica"/>
               </a:rPr>
-              <a:t>A: CIRCO mAP@5 −2,45, KTC 95% [−3,95; −1,07]; A+B tương tự</a:t>
+              <a:t>A kém hơn trên CIRCO: mAP@5 −2,45, khoảng tin cậy 95% [−3,95; −1,07] nằm dưới 0; A+B tương tự</a:t>
+            </a:r>
+          </a:p>
+        </p:txBody>
+      </p:sp>
+    </p:spTree>
+  </p:cSld>
+  <p:clrMapOvr>
+    <a:masterClrMapping/>
+  </p:clrMapOvr>
+  <mc:AlternateContent xmlns:mc="http://schemas.openxmlformats.org/markup-compatibility/2006" xmlns:p159="http://schemas.microsoft.com/office/powerpoint/2015/09/main">
+    <mc:Choice Requires="p159">
+      <p:transition xmlns:p14="http://schemas.microsoft.com/office/powerpoint/2010/main" spd="slow" p14:dur="1200">
+        <p159:morph option="byObject"/>
+      </p:transition>
+    </mc:Choice>
+    <mc:Fallback xmlns="">
+      <p:transition spd="slow">
+        <p:fade/>
+      </p:transition>
+    </mc:Fallback>
+  </mc:AlternateContent>
+</p:sld>
+</file>
+
+<file path=ppt/slides/slide13.xml><?xml version="1.0" encoding="utf-8"?>
+<p:sld xmlns:a="http://schemas.openxmlformats.org/drawingml/2006/main" xmlns:r="http://schemas.openxmlformats.org/officeDocument/2006/relationships" xmlns:p="http://schemas.openxmlformats.org/presentationml/2006/main">
+  <p:cSld>
+    <p:bg>
+      <p:bgPr>
+        <a:solidFill>
+          <a:srgbClr val="FFFFFF"/>
+        </a:solidFill>
+        <a:effectLst/>
+      </p:bgPr>
+    </p:bg>
+    <p:spTree>
+      <p:nvGrpSpPr>
+        <p:cNvPr id="1" name=""/>
+        <p:cNvGrpSpPr/>
+        <p:nvPr/>
+      </p:nvGrpSpPr>
+      <p:grpSpPr>
+        <a:xfrm>
+          <a:off x="0" y="0"/>
+          <a:ext cx="0" cy="0"/>
+          <a:chOff x="0" y="0"/>
+          <a:chExt cx="0" cy="0"/>
+        </a:xfrm>
+      </p:grpSpPr>
+      <p:sp>
+        <p:nvSpPr>
+          <p:cNvPr id="2" name="!!orb"/>
+          <p:cNvSpPr/>
+          <p:nvPr/>
+        </p:nvSpPr>
+        <p:spPr>
+          <a:xfrm>
+            <a:off x="-1737360" y="-2011680"/>
+            <a:ext cx="3657600" cy="3657600"/>
+          </a:xfrm>
+          <a:prstGeom prst="ellipse">
+            <a:avLst/>
+          </a:prstGeom>
+          <a:solidFill>
+            <a:srgbClr val="EAF2FF"/>
+          </a:solidFill>
+          <a:ln>
+            <a:noFill/>
+          </a:ln>
+          <a:effectLst/>
+        </p:spPr>
+        <p:style>
+          <a:lnRef idx="1">
+            <a:schemeClr val="accent1"/>
+          </a:lnRef>
+          <a:fillRef idx="3">
+            <a:schemeClr val="accent1"/>
+          </a:fillRef>
+          <a:effectRef idx="2">
+            <a:schemeClr val="accent1"/>
+          </a:effectRef>
+          <a:fontRef idx="minor">
+            <a:schemeClr val="lt1"/>
+          </a:fontRef>
+        </p:style>
+        <p:txBody>
+          <a:bodyPr rtlCol="0" anchor="ctr"/>
+          <a:lstStyle/>
+          <a:p>
+            <a:pPr algn="ctr"/>
+            <a:endParaRPr/>
+          </a:p>
+        </p:txBody>
+      </p:sp>
+      <p:sp>
+        <p:nvSpPr>
+          <p:cNvPr id="3" name="!!dot"/>
+          <p:cNvSpPr/>
+          <p:nvPr/>
+        </p:nvSpPr>
+        <p:spPr>
+          <a:xfrm>
+            <a:off x="54864" y="3291840"/>
+            <a:ext cx="411480" cy="411480"/>
+          </a:xfrm>
+          <a:prstGeom prst="ellipse">
+            <a:avLst/>
+          </a:prstGeom>
+          <a:solidFill>
+            <a:srgbClr val="1E6FE8"/>
+          </a:solidFill>
+          <a:ln>
+            <a:noFill/>
+          </a:ln>
+          <a:effectLst/>
+        </p:spPr>
+        <p:style>
+          <a:lnRef idx="1">
+            <a:schemeClr val="accent1"/>
+          </a:lnRef>
+          <a:fillRef idx="3">
+            <a:schemeClr val="accent1"/>
+          </a:fillRef>
+          <a:effectRef idx="2">
+            <a:schemeClr val="accent1"/>
+          </a:effectRef>
+          <a:fontRef idx="minor">
+            <a:schemeClr val="lt1"/>
+          </a:fontRef>
+        </p:style>
+        <p:txBody>
+          <a:bodyPr rtlCol="0" anchor="ctr"/>
+          <a:lstStyle/>
+          <a:p>
+            <a:pPr algn="ctr"/>
+            <a:endParaRPr/>
+          </a:p>
+        </p:txBody>
+      </p:sp>
+      <p:sp>
+        <p:nvSpPr>
+          <p:cNvPr id="4" name="!!title"/>
+          <p:cNvSpPr txBox="1"/>
+          <p:nvPr/>
+        </p:nvSpPr>
+        <p:spPr>
+          <a:xfrm>
+            <a:off x="548640" y="347472"/>
+            <a:ext cx="10424160" cy="1143000"/>
+          </a:xfrm>
+          <a:prstGeom prst="rect">
+            <a:avLst/>
+          </a:prstGeom>
+          <a:noFill/>
+        </p:spPr>
+        <p:txBody>
+          <a:bodyPr wrap="square" lIns="45720" tIns="27432" rIns="45720" bIns="27432" anchor="ctr">
+            <a:spAutoFit/>
+          </a:bodyPr>
+          <a:lstStyle/>
+          <a:p>
+            <a:pPr algn="l">
+              <a:lnSpc>
+                <a:spcPct val="110000"/>
+              </a:lnSpc>
+            </a:pPr>
+            <a:r>
+              <a:rPr sz="3200" b="1" i="0">
+                <a:solidFill>
+                  <a:srgbClr val="0F1C3F"/>
+                </a:solidFill>
+                <a:latin typeface="Helvetica"/>
+              </a:rPr>
+              <a:t>Vì sao: B làm φ nhất quán hơn giữa ảnh và văn bản, A làm ngược lại</a:t>
+            </a:r>
+          </a:p>
+        </p:txBody>
+      </p:sp>
+      <p:sp>
+        <p:nvSpPr>
+          <p:cNvPr id="5" name="!!num"/>
+          <p:cNvSpPr txBox="1"/>
+          <p:nvPr/>
+        </p:nvSpPr>
+        <p:spPr>
+          <a:xfrm>
+            <a:off x="10881360" y="6236208"/>
+            <a:ext cx="914400" cy="457200"/>
+          </a:xfrm>
+          <a:prstGeom prst="rect">
+            <a:avLst/>
+          </a:prstGeom>
+          <a:noFill/>
+        </p:spPr>
+        <p:txBody>
+          <a:bodyPr wrap="square" lIns="45720" tIns="27432" rIns="45720" bIns="27432" anchor="t">
+            <a:spAutoFit/>
+          </a:bodyPr>
+          <a:lstStyle/>
+          <a:p>
+            <a:pPr algn="r">
+              <a:lnSpc>
+                <a:spcPct val="110000"/>
+              </a:lnSpc>
+            </a:pPr>
+            <a:r>
+              <a:rPr sz="2000" b="0" i="0">
+                <a:solidFill>
+                  <a:srgbClr val="5B6B82"/>
+                </a:solidFill>
+                <a:latin typeface="Helvetica"/>
+              </a:rPr>
+              <a:t>13</a:t>
+            </a:r>
+          </a:p>
+        </p:txBody>
+      </p:sp>
+      <p:pic>
+        <p:nvPicPr>
+          <p:cNvPr id="10" name="Picture 9" descr="modality_gap_slide.png"/>
+          <p:cNvPicPr>
+            <a:picLocks noChangeAspect="1"/>
+          </p:cNvPicPr>
+          <p:nvPr/>
+        </p:nvPicPr>
+        <p:blipFill>
+          <a:blip r:embed="rId3"/>
+          <a:stretch>
+            <a:fillRect/>
+          </a:stretch>
+        </p:blipFill>
+        <p:spPr>
+          <a:xfrm>
+            <a:off x="548640" y="1783080"/>
+            <a:ext cx="5486400" cy="3716593"/>
+          </a:xfrm>
+          <a:prstGeom prst="rect">
+            <a:avLst/>
+          </a:prstGeom>
+        </p:spPr>
+      </p:pic>
+      <p:pic>
+        <p:nvPicPr>
+          <p:cNvPr id="11" name="Picture 10" descr="learning_curve_slide.png"/>
+          <p:cNvPicPr>
+            <a:picLocks noChangeAspect="1"/>
+          </p:cNvPicPr>
+          <p:nvPr/>
+        </p:nvPicPr>
+        <p:blipFill>
+          <a:blip r:embed="rId4"/>
+          <a:stretch>
+            <a:fillRect/>
+          </a:stretch>
+        </p:blipFill>
+        <p:spPr>
+          <a:xfrm>
+            <a:off x="6217920" y="1783080"/>
+            <a:ext cx="5486400" cy="3716593"/>
+          </a:xfrm>
+          <a:prstGeom prst="rect">
+            <a:avLst/>
+          </a:prstGeom>
+        </p:spPr>
+      </p:pic>
+    </p:spTree>
+  </p:cSld>
+  <p:clrMapOvr>
+    <a:masterClrMapping/>
+  </p:clrMapOvr>
+  <mc:AlternateContent xmlns:mc="http://schemas.openxmlformats.org/markup-compatibility/2006" xmlns:p159="http://schemas.microsoft.com/office/powerpoint/2015/09/main">
+    <mc:Choice Requires="p159">
+      <p:transition xmlns:p14="http://schemas.microsoft.com/office/powerpoint/2010/main" spd="slow" p14:dur="1200">
+        <p159:morph option="byObject"/>
+      </p:transition>
+    </mc:Choice>
+    <mc:Fallback xmlns="">
+      <p:transition spd="slow">
+        <p:fade/>
+      </p:transition>
+    </mc:Fallback>
+  </mc:AlternateContent>
+</p:sld>
+</file>
+
+<file path=ppt/slides/slide14.xml><?xml version="1.0" encoding="utf-8"?>
+<p:sld xmlns:a="http://schemas.openxmlformats.org/drawingml/2006/main" xmlns:r="http://schemas.openxmlformats.org/officeDocument/2006/relationships" xmlns:p="http://schemas.openxmlformats.org/presentationml/2006/main">
+  <p:cSld>
+    <p:bg>
+      <p:bgPr>
+        <a:solidFill>
+          <a:srgbClr val="FFFFFF"/>
+        </a:solidFill>
+        <a:effectLst/>
+      </p:bgPr>
+    </p:bg>
+    <p:spTree>
+      <p:nvGrpSpPr>
+        <p:cNvPr id="1" name=""/>
+        <p:cNvGrpSpPr/>
+        <p:nvPr/>
+      </p:nvGrpSpPr>
+      <p:grpSpPr>
+        <a:xfrm>
+          <a:off x="0" y="0"/>
+          <a:ext cx="0" cy="0"/>
+          <a:chOff x="0" y="0"/>
+          <a:chExt cx="0" cy="0"/>
+        </a:xfrm>
+      </p:grpSpPr>
+      <p:sp>
+        <p:nvSpPr>
+          <p:cNvPr id="2" name="!!orb"/>
+          <p:cNvSpPr/>
+          <p:nvPr/>
+        </p:nvSpPr>
+        <p:spPr>
+          <a:xfrm>
+            <a:off x="9875520" y="4297680"/>
+            <a:ext cx="3657600" cy="3657600"/>
+          </a:xfrm>
+          <a:prstGeom prst="ellipse">
+            <a:avLst/>
+          </a:prstGeom>
+          <a:solidFill>
+            <a:srgbClr val="EAF2FF"/>
+          </a:solidFill>
+          <a:ln>
+            <a:noFill/>
+          </a:ln>
+          <a:effectLst/>
+        </p:spPr>
+        <p:style>
+          <a:lnRef idx="1">
+            <a:schemeClr val="accent1"/>
+          </a:lnRef>
+          <a:fillRef idx="3">
+            <a:schemeClr val="accent1"/>
+          </a:fillRef>
+          <a:effectRef idx="2">
+            <a:schemeClr val="accent1"/>
+          </a:effectRef>
+          <a:fontRef idx="minor">
+            <a:schemeClr val="lt1"/>
+          </a:fontRef>
+        </p:style>
+        <p:txBody>
+          <a:bodyPr rtlCol="0" anchor="ctr"/>
+          <a:lstStyle/>
+          <a:p>
+            <a:pPr algn="ctr"/>
+            <a:endParaRPr/>
+          </a:p>
+        </p:txBody>
+      </p:sp>
+      <p:sp>
+        <p:nvSpPr>
+          <p:cNvPr id="3" name="!!dot"/>
+          <p:cNvSpPr/>
+          <p:nvPr/>
+        </p:nvSpPr>
+        <p:spPr>
+          <a:xfrm>
+            <a:off x="11704320" y="3474720"/>
+            <a:ext cx="411480" cy="411480"/>
+          </a:xfrm>
+          <a:prstGeom prst="ellipse">
+            <a:avLst/>
+          </a:prstGeom>
+          <a:solidFill>
+            <a:srgbClr val="1E6FE8"/>
+          </a:solidFill>
+          <a:ln>
+            <a:noFill/>
+          </a:ln>
+          <a:effectLst/>
+        </p:spPr>
+        <p:style>
+          <a:lnRef idx="1">
+            <a:schemeClr val="accent1"/>
+          </a:lnRef>
+          <a:fillRef idx="3">
+            <a:schemeClr val="accent1"/>
+          </a:fillRef>
+          <a:effectRef idx="2">
+            <a:schemeClr val="accent1"/>
+          </a:effectRef>
+          <a:fontRef idx="minor">
+            <a:schemeClr val="lt1"/>
+          </a:fontRef>
+        </p:style>
+        <p:txBody>
+          <a:bodyPr rtlCol="0" anchor="ctr"/>
+          <a:lstStyle/>
+          <a:p>
+            <a:pPr algn="ctr"/>
+            <a:endParaRPr/>
+          </a:p>
+        </p:txBody>
+      </p:sp>
+      <p:sp>
+        <p:nvSpPr>
+          <p:cNvPr id="4" name="!!title"/>
+          <p:cNvSpPr txBox="1"/>
+          <p:nvPr/>
+        </p:nvSpPr>
+        <p:spPr>
+          <a:xfrm>
+            <a:off x="548640" y="347472"/>
+            <a:ext cx="10424160" cy="1143000"/>
+          </a:xfrm>
+          <a:prstGeom prst="rect">
+            <a:avLst/>
+          </a:prstGeom>
+          <a:noFill/>
+        </p:spPr>
+        <p:txBody>
+          <a:bodyPr wrap="square" lIns="45720" tIns="27432" rIns="45720" bIns="27432" anchor="ctr">
+            <a:spAutoFit/>
+          </a:bodyPr>
+          <a:lstStyle/>
+          <a:p>
+            <a:pPr algn="l">
+              <a:lnSpc>
+                <a:spcPct val="110000"/>
+              </a:lnSpc>
+            </a:pPr>
+            <a:r>
+              <a:rPr sz="3200" b="1" i="0">
+                <a:solidFill>
+                  <a:srgbClr val="0F1C3F"/>
+                </a:solidFill>
+                <a:latin typeface="Helvetica"/>
+              </a:rPr>
+              <a:t>Kết luận: tính nhất quán qua modality gap quyết định chất lượng</a:t>
+            </a:r>
+          </a:p>
+        </p:txBody>
+      </p:sp>
+      <p:sp>
+        <p:nvSpPr>
+          <p:cNvPr id="5" name="!!num"/>
+          <p:cNvSpPr txBox="1"/>
+          <p:nvPr/>
+        </p:nvSpPr>
+        <p:spPr>
+          <a:xfrm>
+            <a:off x="10881360" y="6236208"/>
+            <a:ext cx="914400" cy="457200"/>
+          </a:xfrm>
+          <a:prstGeom prst="rect">
+            <a:avLst/>
+          </a:prstGeom>
+          <a:noFill/>
+        </p:spPr>
+        <p:txBody>
+          <a:bodyPr wrap="square" lIns="45720" tIns="27432" rIns="45720" bIns="27432" anchor="t">
+            <a:spAutoFit/>
+          </a:bodyPr>
+          <a:lstStyle/>
+          <a:p>
+            <a:pPr algn="r">
+              <a:lnSpc>
+                <a:spcPct val="110000"/>
+              </a:lnSpc>
+            </a:pPr>
+            <a:r>
+              <a:rPr sz="2000" b="0" i="0">
+                <a:solidFill>
+                  <a:srgbClr val="5B6B82"/>
+                </a:solidFill>
+                <a:latin typeface="Helvetica"/>
+              </a:rPr>
+              <a:t>14</a:t>
+            </a:r>
+          </a:p>
+        </p:txBody>
+      </p:sp>
+      <p:sp>
+        <p:nvSpPr>
+          <p:cNvPr id="6" name="Rounded Rectangle 5"/>
+          <p:cNvSpPr/>
+          <p:nvPr/>
+        </p:nvSpPr>
+        <p:spPr>
+          <a:xfrm>
+            <a:off x="548640" y="1737360"/>
+            <a:ext cx="5486400" cy="3291840"/>
+          </a:xfrm>
+          <a:prstGeom prst="roundRect">
+            <a:avLst>
+              <a:gd name="adj" fmla="val 8000"/>
+            </a:avLst>
+          </a:prstGeom>
+          <a:solidFill>
+            <a:srgbClr val="EAF2FF"/>
+          </a:solidFill>
+          <a:ln>
+            <a:noFill/>
+          </a:ln>
+          <a:effectLst/>
+        </p:spPr>
+        <p:style>
+          <a:lnRef idx="1">
+            <a:schemeClr val="accent1"/>
+          </a:lnRef>
+          <a:fillRef idx="3">
+            <a:schemeClr val="accent1"/>
+          </a:fillRef>
+          <a:effectRef idx="2">
+            <a:schemeClr val="accent1"/>
+          </a:effectRef>
+          <a:fontRef idx="minor">
+            <a:schemeClr val="lt1"/>
+          </a:fontRef>
+        </p:style>
+        <p:txBody>
+          <a:bodyPr rtlCol="0" anchor="ctr"/>
+          <a:lstStyle/>
+          <a:p>
+            <a:pPr algn="ctr"/>
+            <a:endParaRPr/>
+          </a:p>
+        </p:txBody>
+      </p:sp>
+      <p:sp>
+        <p:nvSpPr>
+          <p:cNvPr id="7" name="TextBox 6"/>
+          <p:cNvSpPr txBox="1"/>
+          <p:nvPr/>
+        </p:nvSpPr>
+        <p:spPr>
+          <a:xfrm>
+            <a:off x="822959" y="1965960"/>
+            <a:ext cx="4937760" cy="2834640"/>
+          </a:xfrm>
+          <a:prstGeom prst="rect">
+            <a:avLst/>
+          </a:prstGeom>
+          <a:noFill/>
+        </p:spPr>
+        <p:txBody>
+          <a:bodyPr wrap="square" lIns="45720" tIns="27432" rIns="45720" bIns="27432" anchor="t">
+            <a:spAutoFit/>
+          </a:bodyPr>
+          <a:lstStyle/>
+          <a:p>
+            <a:pPr algn="l">
+              <a:lnSpc>
+                <a:spcPct val="110000"/>
+              </a:lnSpc>
+            </a:pPr>
+            <a:r>
+              <a:rPr sz="2200" b="0" i="0">
+                <a:solidFill>
+                  <a:srgbClr val="0F1C3F"/>
+                </a:solidFill>
+                <a:latin typeface="Helvetica"/>
+              </a:rPr>
+              <a:t>Tái hiện khớp bài báo, lệch tối đa 0,77 điểm</a:t>
+            </a:r>
+          </a:p>
+          <a:p>
+            <a:pPr algn="l">
+              <a:lnSpc>
+                <a:spcPct val="110000"/>
+              </a:lnSpc>
+            </a:pPr>
+            <a:r>
+              <a:rPr sz="2200" b="0" i="0">
+                <a:solidFill>
+                  <a:srgbClr val="0F1C3F"/>
+                </a:solidFill>
+                <a:latin typeface="Helvetica"/>
+              </a:rPr>
+              <a:t>B tốt hơn có ý nghĩa thống kê, vượt cả checkpoint 20.000 bước</a:t>
+            </a:r>
+          </a:p>
+          <a:p>
+            <a:pPr algn="l">
+              <a:lnSpc>
+                <a:spcPct val="110000"/>
+              </a:lnSpc>
+            </a:pPr>
+            <a:r>
+              <a:rPr sz="2200" b="0" i="0">
+                <a:solidFill>
+                  <a:srgbClr val="0F1C3F"/>
+                </a:solidFill>
+                <a:latin typeface="Helvetica"/>
+              </a:rPr>
+              <a:t>A làm CIRCO mAP@5 giảm 2,45 điểm</a:t>
+            </a:r>
+          </a:p>
+          <a:p>
+            <a:pPr algn="l">
+              <a:lnSpc>
+                <a:spcPct val="110000"/>
+              </a:lnSpc>
+            </a:pPr>
+            <a:r>
+              <a:rPr sz="2200" b="0" i="0">
+                <a:solidFill>
+                  <a:srgbClr val="0F1C3F"/>
+                </a:solidFill>
+                <a:latin typeface="Helvetica"/>
+              </a:rPr>
+              <a:t>Yếu tố then chốt: φ xử lý ảnh nhất quán với văn bản</a:t>
+            </a:r>
+          </a:p>
+        </p:txBody>
+      </p:sp>
+      <p:sp>
+        <p:nvSpPr>
+          <p:cNvPr id="8" name="Rounded Rectangle 7"/>
+          <p:cNvSpPr/>
+          <p:nvPr/>
+        </p:nvSpPr>
+        <p:spPr>
+          <a:xfrm>
+            <a:off x="6309360" y="1737360"/>
+            <a:ext cx="5303520" cy="3291840"/>
+          </a:xfrm>
+          <a:prstGeom prst="roundRect">
+            <a:avLst>
+              <a:gd name="adj" fmla="val 8000"/>
+            </a:avLst>
+          </a:prstGeom>
+          <a:solidFill>
+            <a:srgbClr val="D6E6FF"/>
+          </a:solidFill>
+          <a:ln>
+            <a:noFill/>
+          </a:ln>
+          <a:effectLst/>
+        </p:spPr>
+        <p:style>
+          <a:lnRef idx="1">
+            <a:schemeClr val="accent1"/>
+          </a:lnRef>
+          <a:fillRef idx="3">
+            <a:schemeClr val="accent1"/>
+          </a:fillRef>
+          <a:effectRef idx="2">
+            <a:schemeClr val="accent1"/>
+          </a:effectRef>
+          <a:fontRef idx="minor">
+            <a:schemeClr val="lt1"/>
+          </a:fontRef>
+        </p:style>
+        <p:txBody>
+          <a:bodyPr rtlCol="0" anchor="ctr"/>
+          <a:lstStyle/>
+          <a:p>
+            <a:pPr algn="ctr"/>
+            <a:endParaRPr/>
+          </a:p>
+        </p:txBody>
+      </p:sp>
+      <p:sp>
+        <p:nvSpPr>
+          <p:cNvPr id="9" name="TextBox 8"/>
+          <p:cNvSpPr txBox="1"/>
+          <p:nvPr/>
+        </p:nvSpPr>
+        <p:spPr>
+          <a:xfrm>
+            <a:off x="6537960" y="1901952"/>
+            <a:ext cx="4846320" cy="502920"/>
+          </a:xfrm>
+          <a:prstGeom prst="rect">
+            <a:avLst/>
+          </a:prstGeom>
+          <a:noFill/>
+        </p:spPr>
+        <p:txBody>
+          <a:bodyPr wrap="square" lIns="45720" tIns="27432" rIns="45720" bIns="27432" anchor="t">
+            <a:spAutoFit/>
+          </a:bodyPr>
+          <a:lstStyle/>
+          <a:p>
+            <a:pPr algn="l">
+              <a:lnSpc>
+                <a:spcPct val="110000"/>
+              </a:lnSpc>
+            </a:pPr>
+            <a:r>
+              <a:rPr sz="2200" b="1" i="0">
+                <a:solidFill>
+                  <a:srgbClr val="144FB0"/>
+                </a:solidFill>
+                <a:latin typeface="Helvetica"/>
+              </a:rPr>
+              <a:t>Hạn chế và hướng phát triển</a:t>
+            </a:r>
+          </a:p>
+        </p:txBody>
+      </p:sp>
+      <p:sp>
+        <p:nvSpPr>
+          <p:cNvPr id="10" name="TextBox 9"/>
+          <p:cNvSpPr txBox="1"/>
+          <p:nvPr/>
+        </p:nvSpPr>
+        <p:spPr>
+          <a:xfrm>
+            <a:off x="6537960" y="2468880"/>
+            <a:ext cx="4846320" cy="2423160"/>
+          </a:xfrm>
+          <a:prstGeom prst="rect">
+            <a:avLst/>
+          </a:prstGeom>
+          <a:noFill/>
+        </p:spPr>
+        <p:txBody>
+          <a:bodyPr wrap="square">
+            <a:spAutoFit/>
+          </a:bodyPr>
+          <a:lstStyle/>
+          <a:p>
+            <a:pPr marL="292608" indent="-292608">
+              <a:lnSpc>
+                <a:spcPct val="108000"/>
+              </a:lnSpc>
+              <a:spcAft>
+                <a:spcPts val="600"/>
+              </a:spcAft>
+              <a:buClr>
+                <a:srgbClr val="1E6FE8"/>
+              </a:buClr>
+              <a:buFont typeface="Helvetica"/>
+              <a:buChar char="•"/>
+            </a:pPr>
+            <a:r>
+              <a:rPr sz="2100" b="0" i="0">
+                <a:solidFill>
+                  <a:srgbClr val="0F1C3F"/>
+                </a:solidFill>
+                <a:latin typeface="Helvetica"/>
+              </a:rPr>
+              <a:t>Mới huấn luyện 5.000 bước, cần đủ 20.000</a:t>
+            </a:r>
+          </a:p>
+          <a:p>
+            <a:pPr marL="292608" indent="-292608">
+              <a:lnSpc>
+                <a:spcPct val="108000"/>
+              </a:lnSpc>
+              <a:spcAft>
+                <a:spcPts val="600"/>
+              </a:spcAft>
+              <a:buClr>
+                <a:srgbClr val="1E6FE8"/>
+              </a:buClr>
+              <a:buFont typeface="Helvetica"/>
+              <a:buChar char="•"/>
+            </a:pPr>
+            <a:r>
+              <a:rPr sz="2100" b="0" i="0">
+                <a:solidFill>
+                  <a:srgbClr val="0F1C3F"/>
+                </a:solidFill>
+                <a:latin typeface="Helvetica"/>
+              </a:rPr>
+              <a:t>Chưa quét λ (A) và α (B)</a:t>
+            </a:r>
+          </a:p>
+          <a:p>
+            <a:pPr marL="292608" indent="-292608">
+              <a:lnSpc>
+                <a:spcPct val="108000"/>
+              </a:lnSpc>
+              <a:spcAft>
+                <a:spcPts val="600"/>
+              </a:spcAft>
+              <a:buClr>
+                <a:srgbClr val="1E6FE8"/>
+              </a:buClr>
+              <a:buFont typeface="Helvetica"/>
+              <a:buChar char="•"/>
+            </a:pPr>
+            <a:r>
+              <a:rPr sz="2100" b="0" i="0">
+                <a:solidFill>
+                  <a:srgbClr val="0F1C3F"/>
+                </a:solidFill>
+                <a:latin typeface="Helvetica"/>
+              </a:rPr>
+              <a:t>Chưa có CIRR, CIRCO test</a:t>
+            </a:r>
+          </a:p>
+          <a:p>
+            <a:pPr marL="292608" indent="-292608">
+              <a:lnSpc>
+                <a:spcPct val="108000"/>
+              </a:lnSpc>
+              <a:spcAft>
+                <a:spcPts val="600"/>
+              </a:spcAft>
+              <a:buClr>
+                <a:srgbClr val="1E6FE8"/>
+              </a:buClr>
+              <a:buFont typeface="Helvetica"/>
+              <a:buChar char="•"/>
+            </a:pPr>
+            <a:r>
+              <a:rPr sz="2100" b="0" i="0">
+                <a:solidFill>
+                  <a:srgbClr val="0F1C3F"/>
+                </a:solidFill>
+                <a:latin typeface="Helvetica"/>
+              </a:rPr>
+              <a:t>Hướng C: chọn từ khóa che theo IDF</a:t>
             </a:r>
           </a:p>
         </p:txBody>
@@ -9415,8 +8713,8 @@
         </p:nvSpPr>
         <p:spPr>
           <a:xfrm>
-            <a:off x="-1737360" y="-2011680"/>
-            <a:ext cx="3657600" cy="3657600"/>
+            <a:off x="-1783080" y="-4770120"/>
+            <a:ext cx="15758159" cy="15758159"/>
           </a:xfrm>
           <a:prstGeom prst="ellipse">
             <a:avLst/>
@@ -9460,8 +8758,8 @@
         </p:nvSpPr>
         <p:spPr>
           <a:xfrm>
-            <a:off x="54864" y="3291840"/>
-            <a:ext cx="411480" cy="411480"/>
+            <a:off x="5368065" y="1416270"/>
+            <a:ext cx="1960581" cy="1960581"/>
           </a:xfrm>
           <a:prstGeom prst="ellipse">
             <a:avLst/>
@@ -9505,815 +8803,6 @@
         </p:nvSpPr>
         <p:spPr>
           <a:xfrm>
-            <a:off x="548640" y="347472"/>
-            <a:ext cx="10424160" cy="1143000"/>
-          </a:xfrm>
-          <a:prstGeom prst="rect">
-            <a:avLst/>
-          </a:prstGeom>
-          <a:noFill/>
-        </p:spPr>
-        <p:txBody>
-          <a:bodyPr wrap="square" lIns="45720" tIns="27432" rIns="45720" bIns="27432" anchor="ctr">
-            <a:spAutoFit/>
-          </a:bodyPr>
-          <a:lstStyle/>
-          <a:p>
-            <a:pPr algn="l">
-              <a:lnSpc>
-                <a:spcPct val="110000"/>
-              </a:lnSpc>
-            </a:pPr>
-            <a:r>
-              <a:rPr sz="3200" b="1" i="0">
-                <a:solidFill>
-                  <a:srgbClr val="0F1C3F"/>
-                </a:solidFill>
-                <a:latin typeface="Helvetica"/>
-              </a:rPr>
-              <a:t>Vì sao: B làm φ nhất quán hơn giữa ảnh và văn bản, A làm ngược lại</a:t>
-            </a:r>
-          </a:p>
-        </p:txBody>
-      </p:sp>
-      <p:sp>
-        <p:nvSpPr>
-          <p:cNvPr id="5" name="!!num"/>
-          <p:cNvSpPr txBox="1"/>
-          <p:nvPr/>
-        </p:nvSpPr>
-        <p:spPr>
-          <a:xfrm>
-            <a:off x="10881360" y="6236208"/>
-            <a:ext cx="914400" cy="457200"/>
-          </a:xfrm>
-          <a:prstGeom prst="rect">
-            <a:avLst/>
-          </a:prstGeom>
-          <a:noFill/>
-        </p:spPr>
-        <p:txBody>
-          <a:bodyPr wrap="square" lIns="45720" tIns="27432" rIns="45720" bIns="27432" anchor="t">
-            <a:spAutoFit/>
-          </a:bodyPr>
-          <a:lstStyle/>
-          <a:p>
-            <a:pPr algn="r">
-              <a:lnSpc>
-                <a:spcPct val="110000"/>
-              </a:lnSpc>
-            </a:pPr>
-            <a:r>
-              <a:rPr sz="2000" b="0" i="0">
-                <a:solidFill>
-                  <a:srgbClr val="5B6B82"/>
-                </a:solidFill>
-                <a:latin typeface="Helvetica"/>
-              </a:rPr>
-              <a:t>15</a:t>
-            </a:r>
-          </a:p>
-        </p:txBody>
-      </p:sp>
-      <p:pic>
-        <p:nvPicPr>
-          <p:cNvPr id="10" name="Picture 9" descr="modality_gap_slide.png"/>
-          <p:cNvPicPr>
-            <a:picLocks noChangeAspect="1"/>
-          </p:cNvPicPr>
-          <p:nvPr/>
-        </p:nvPicPr>
-        <p:blipFill>
-          <a:blip r:embed="rId3"/>
-          <a:stretch>
-            <a:fillRect/>
-          </a:stretch>
-        </p:blipFill>
-        <p:spPr>
-          <a:xfrm>
-            <a:off x="548640" y="1783080"/>
-            <a:ext cx="5486400" cy="3716593"/>
-          </a:xfrm>
-          <a:prstGeom prst="rect">
-            <a:avLst/>
-          </a:prstGeom>
-        </p:spPr>
-      </p:pic>
-      <p:pic>
-        <p:nvPicPr>
-          <p:cNvPr id="11" name="Picture 10" descr="learning_curve_slide.png"/>
-          <p:cNvPicPr>
-            <a:picLocks noChangeAspect="1"/>
-          </p:cNvPicPr>
-          <p:nvPr/>
-        </p:nvPicPr>
-        <p:blipFill>
-          <a:blip r:embed="rId4"/>
-          <a:stretch>
-            <a:fillRect/>
-          </a:stretch>
-        </p:blipFill>
-        <p:spPr>
-          <a:xfrm>
-            <a:off x="6217920" y="1783080"/>
-            <a:ext cx="5486400" cy="3716593"/>
-          </a:xfrm>
-          <a:prstGeom prst="rect">
-            <a:avLst/>
-          </a:prstGeom>
-        </p:spPr>
-      </p:pic>
-    </p:spTree>
-  </p:cSld>
-  <p:clrMapOvr>
-    <a:masterClrMapping/>
-  </p:clrMapOvr>
-  <mc:AlternateContent xmlns:mc="http://schemas.openxmlformats.org/markup-compatibility/2006" xmlns:p159="http://schemas.microsoft.com/office/powerpoint/2015/09/main">
-    <mc:Choice Requires="p159">
-      <p:transition xmlns:p14="http://schemas.microsoft.com/office/powerpoint/2010/main" spd="slow" p14:dur="1200">
-        <p159:morph option="byObject"/>
-      </p:transition>
-    </mc:Choice>
-    <mc:Fallback xmlns="">
-      <p:transition spd="slow">
-        <p:fade/>
-      </p:transition>
-    </mc:Fallback>
-  </mc:AlternateContent>
-</p:sld>
-</file>
-
-<file path=ppt/slides/slide16.xml><?xml version="1.0" encoding="utf-8"?>
-<p:sld xmlns:a="http://schemas.openxmlformats.org/drawingml/2006/main" xmlns:r="http://schemas.openxmlformats.org/officeDocument/2006/relationships" xmlns:p="http://schemas.openxmlformats.org/presentationml/2006/main">
-  <p:cSld>
-    <p:bg>
-      <p:bgPr>
-        <a:solidFill>
-          <a:srgbClr val="FFFFFF"/>
-        </a:solidFill>
-        <a:effectLst/>
-      </p:bgPr>
-    </p:bg>
-    <p:spTree>
-      <p:nvGrpSpPr>
-        <p:cNvPr id="1" name=""/>
-        <p:cNvGrpSpPr/>
-        <p:nvPr/>
-      </p:nvGrpSpPr>
-      <p:grpSpPr>
-        <a:xfrm>
-          <a:off x="0" y="0"/>
-          <a:ext cx="0" cy="0"/>
-          <a:chOff x="0" y="0"/>
-          <a:chExt cx="0" cy="0"/>
-        </a:xfrm>
-      </p:grpSpPr>
-      <p:sp>
-        <p:nvSpPr>
-          <p:cNvPr id="2" name="!!orb"/>
-          <p:cNvSpPr/>
-          <p:nvPr/>
-        </p:nvSpPr>
-        <p:spPr>
-          <a:xfrm>
-            <a:off x="9875520" y="4297680"/>
-            <a:ext cx="3657600" cy="3657600"/>
-          </a:xfrm>
-          <a:prstGeom prst="ellipse">
-            <a:avLst/>
-          </a:prstGeom>
-          <a:solidFill>
-            <a:srgbClr val="EAF2FF"/>
-          </a:solidFill>
-          <a:ln>
-            <a:noFill/>
-          </a:ln>
-          <a:effectLst/>
-        </p:spPr>
-        <p:style>
-          <a:lnRef idx="1">
-            <a:schemeClr val="accent1"/>
-          </a:lnRef>
-          <a:fillRef idx="3">
-            <a:schemeClr val="accent1"/>
-          </a:fillRef>
-          <a:effectRef idx="2">
-            <a:schemeClr val="accent1"/>
-          </a:effectRef>
-          <a:fontRef idx="minor">
-            <a:schemeClr val="lt1"/>
-          </a:fontRef>
-        </p:style>
-        <p:txBody>
-          <a:bodyPr rtlCol="0" anchor="ctr"/>
-          <a:lstStyle/>
-          <a:p>
-            <a:pPr algn="ctr"/>
-            <a:endParaRPr/>
-          </a:p>
-        </p:txBody>
-      </p:sp>
-      <p:sp>
-        <p:nvSpPr>
-          <p:cNvPr id="3" name="!!dot"/>
-          <p:cNvSpPr/>
-          <p:nvPr/>
-        </p:nvSpPr>
-        <p:spPr>
-          <a:xfrm>
-            <a:off x="11704320" y="3474720"/>
-            <a:ext cx="411480" cy="411480"/>
-          </a:xfrm>
-          <a:prstGeom prst="ellipse">
-            <a:avLst/>
-          </a:prstGeom>
-          <a:solidFill>
-            <a:srgbClr val="1E6FE8"/>
-          </a:solidFill>
-          <a:ln>
-            <a:noFill/>
-          </a:ln>
-          <a:effectLst/>
-        </p:spPr>
-        <p:style>
-          <a:lnRef idx="1">
-            <a:schemeClr val="accent1"/>
-          </a:lnRef>
-          <a:fillRef idx="3">
-            <a:schemeClr val="accent1"/>
-          </a:fillRef>
-          <a:effectRef idx="2">
-            <a:schemeClr val="accent1"/>
-          </a:effectRef>
-          <a:fontRef idx="minor">
-            <a:schemeClr val="lt1"/>
-          </a:fontRef>
-        </p:style>
-        <p:txBody>
-          <a:bodyPr rtlCol="0" anchor="ctr"/>
-          <a:lstStyle/>
-          <a:p>
-            <a:pPr algn="ctr"/>
-            <a:endParaRPr/>
-          </a:p>
-        </p:txBody>
-      </p:sp>
-      <p:sp>
-        <p:nvSpPr>
-          <p:cNvPr id="4" name="!!title"/>
-          <p:cNvSpPr txBox="1"/>
-          <p:nvPr/>
-        </p:nvSpPr>
-        <p:spPr>
-          <a:xfrm>
-            <a:off x="548640" y="347472"/>
-            <a:ext cx="10424160" cy="1143000"/>
-          </a:xfrm>
-          <a:prstGeom prst="rect">
-            <a:avLst/>
-          </a:prstGeom>
-          <a:noFill/>
-        </p:spPr>
-        <p:txBody>
-          <a:bodyPr wrap="square" lIns="45720" tIns="27432" rIns="45720" bIns="27432" anchor="ctr">
-            <a:spAutoFit/>
-          </a:bodyPr>
-          <a:lstStyle/>
-          <a:p>
-            <a:pPr algn="l">
-              <a:lnSpc>
-                <a:spcPct val="110000"/>
-              </a:lnSpc>
-            </a:pPr>
-            <a:r>
-              <a:rPr sz="3200" b="1" i="0">
-                <a:solidFill>
-                  <a:srgbClr val="0F1C3F"/>
-                </a:solidFill>
-                <a:latin typeface="Helvetica"/>
-              </a:rPr>
-              <a:t>Kết luận: tính nhất quán qua modality gap quyết định chất lượng</a:t>
-            </a:r>
-          </a:p>
-        </p:txBody>
-      </p:sp>
-      <p:sp>
-        <p:nvSpPr>
-          <p:cNvPr id="5" name="!!num"/>
-          <p:cNvSpPr txBox="1"/>
-          <p:nvPr/>
-        </p:nvSpPr>
-        <p:spPr>
-          <a:xfrm>
-            <a:off x="10881360" y="6236208"/>
-            <a:ext cx="914400" cy="457200"/>
-          </a:xfrm>
-          <a:prstGeom prst="rect">
-            <a:avLst/>
-          </a:prstGeom>
-          <a:noFill/>
-        </p:spPr>
-        <p:txBody>
-          <a:bodyPr wrap="square" lIns="45720" tIns="27432" rIns="45720" bIns="27432" anchor="t">
-            <a:spAutoFit/>
-          </a:bodyPr>
-          <a:lstStyle/>
-          <a:p>
-            <a:pPr algn="r">
-              <a:lnSpc>
-                <a:spcPct val="110000"/>
-              </a:lnSpc>
-            </a:pPr>
-            <a:r>
-              <a:rPr sz="2000" b="0" i="0">
-                <a:solidFill>
-                  <a:srgbClr val="5B6B82"/>
-                </a:solidFill>
-                <a:latin typeface="Helvetica"/>
-              </a:rPr>
-              <a:t>16</a:t>
-            </a:r>
-          </a:p>
-        </p:txBody>
-      </p:sp>
-      <p:sp>
-        <p:nvSpPr>
-          <p:cNvPr id="6" name="Rounded Rectangle 5"/>
-          <p:cNvSpPr/>
-          <p:nvPr/>
-        </p:nvSpPr>
-        <p:spPr>
-          <a:xfrm>
-            <a:off x="548640" y="1737360"/>
-            <a:ext cx="5486400" cy="3291840"/>
-          </a:xfrm>
-          <a:prstGeom prst="roundRect">
-            <a:avLst>
-              <a:gd name="adj" fmla="val 8000"/>
-            </a:avLst>
-          </a:prstGeom>
-          <a:solidFill>
-            <a:srgbClr val="EAF2FF"/>
-          </a:solidFill>
-          <a:ln>
-            <a:noFill/>
-          </a:ln>
-          <a:effectLst/>
-        </p:spPr>
-        <p:style>
-          <a:lnRef idx="1">
-            <a:schemeClr val="accent1"/>
-          </a:lnRef>
-          <a:fillRef idx="3">
-            <a:schemeClr val="accent1"/>
-          </a:fillRef>
-          <a:effectRef idx="2">
-            <a:schemeClr val="accent1"/>
-          </a:effectRef>
-          <a:fontRef idx="minor">
-            <a:schemeClr val="lt1"/>
-          </a:fontRef>
-        </p:style>
-        <p:txBody>
-          <a:bodyPr rtlCol="0" anchor="ctr"/>
-          <a:lstStyle/>
-          <a:p>
-            <a:pPr algn="ctr"/>
-            <a:endParaRPr/>
-          </a:p>
-        </p:txBody>
-      </p:sp>
-      <p:sp>
-        <p:nvSpPr>
-          <p:cNvPr id="7" name="TextBox 6"/>
-          <p:cNvSpPr txBox="1"/>
-          <p:nvPr/>
-        </p:nvSpPr>
-        <p:spPr>
-          <a:xfrm>
-            <a:off x="822959" y="1965960"/>
-            <a:ext cx="4937760" cy="2834640"/>
-          </a:xfrm>
-          <a:prstGeom prst="rect">
-            <a:avLst/>
-          </a:prstGeom>
-          <a:noFill/>
-        </p:spPr>
-        <p:txBody>
-          <a:bodyPr wrap="square" lIns="45720" tIns="27432" rIns="45720" bIns="27432" anchor="t">
-            <a:spAutoFit/>
-          </a:bodyPr>
-          <a:lstStyle/>
-          <a:p>
-            <a:pPr algn="l">
-              <a:lnSpc>
-                <a:spcPct val="110000"/>
-              </a:lnSpc>
-            </a:pPr>
-            <a:r>
-              <a:rPr sz="2200" b="0" i="0">
-                <a:solidFill>
-                  <a:srgbClr val="0F1C3F"/>
-                </a:solidFill>
-                <a:latin typeface="Helvetica"/>
-              </a:rPr>
-              <a:t>Tái hiện khớp bài báo (lệch ≤ 0,77)</a:t>
-            </a:r>
-          </a:p>
-          <a:p>
-            <a:pPr algn="l">
-              <a:lnSpc>
-                <a:spcPct val="110000"/>
-              </a:lnSpc>
-            </a:pPr>
-            <a:r>
-              <a:rPr sz="2200" b="0" i="0">
-                <a:solidFill>
-                  <a:srgbClr val="0F1C3F"/>
-                </a:solidFill>
-                <a:latin typeface="Helvetica"/>
-              </a:rPr>
-              <a:t>B tốt hơn có ý nghĩa, vượt cả checkpoint 20.000 bước</a:t>
-            </a:r>
-          </a:p>
-          <a:p>
-            <a:pPr algn="l">
-              <a:lnSpc>
-                <a:spcPct val="110000"/>
-              </a:lnSpc>
-            </a:pPr>
-            <a:r>
-              <a:rPr sz="2200" b="0" i="0">
-                <a:solidFill>
-                  <a:srgbClr val="0F1C3F"/>
-                </a:solidFill>
-                <a:latin typeface="Helvetica"/>
-              </a:rPr>
-              <a:t>A giảm CIRCO mAP@5 2,45 điểm</a:t>
-            </a:r>
-          </a:p>
-          <a:p>
-            <a:pPr algn="l">
-              <a:lnSpc>
-                <a:spcPct val="110000"/>
-              </a:lnSpc>
-            </a:pPr>
-            <a:r>
-              <a:rPr sz="2200" b="0" i="0">
-                <a:solidFill>
-                  <a:srgbClr val="0F1C3F"/>
-                </a:solidFill>
-                <a:latin typeface="Helvetica"/>
-              </a:rPr>
-              <a:t>φ nhất quán ảnh – văn bản là yếu tố then chốt</a:t>
-            </a:r>
-          </a:p>
-        </p:txBody>
-      </p:sp>
-      <p:sp>
-        <p:nvSpPr>
-          <p:cNvPr id="8" name="Rounded Rectangle 7"/>
-          <p:cNvSpPr/>
-          <p:nvPr/>
-        </p:nvSpPr>
-        <p:spPr>
-          <a:xfrm>
-            <a:off x="6309360" y="1737360"/>
-            <a:ext cx="5303520" cy="3291840"/>
-          </a:xfrm>
-          <a:prstGeom prst="roundRect">
-            <a:avLst>
-              <a:gd name="adj" fmla="val 8000"/>
-            </a:avLst>
-          </a:prstGeom>
-          <a:solidFill>
-            <a:srgbClr val="D6E6FF"/>
-          </a:solidFill>
-          <a:ln>
-            <a:noFill/>
-          </a:ln>
-          <a:effectLst/>
-        </p:spPr>
-        <p:style>
-          <a:lnRef idx="1">
-            <a:schemeClr val="accent1"/>
-          </a:lnRef>
-          <a:fillRef idx="3">
-            <a:schemeClr val="accent1"/>
-          </a:fillRef>
-          <a:effectRef idx="2">
-            <a:schemeClr val="accent1"/>
-          </a:effectRef>
-          <a:fontRef idx="minor">
-            <a:schemeClr val="lt1"/>
-          </a:fontRef>
-        </p:style>
-        <p:txBody>
-          <a:bodyPr rtlCol="0" anchor="ctr"/>
-          <a:lstStyle/>
-          <a:p>
-            <a:pPr algn="ctr"/>
-            <a:endParaRPr/>
-          </a:p>
-        </p:txBody>
-      </p:sp>
-      <p:sp>
-        <p:nvSpPr>
-          <p:cNvPr id="9" name="TextBox 8"/>
-          <p:cNvSpPr txBox="1"/>
-          <p:nvPr/>
-        </p:nvSpPr>
-        <p:spPr>
-          <a:xfrm>
-            <a:off x="6537960" y="1901952"/>
-            <a:ext cx="4846320" cy="502920"/>
-          </a:xfrm>
-          <a:prstGeom prst="rect">
-            <a:avLst/>
-          </a:prstGeom>
-          <a:noFill/>
-        </p:spPr>
-        <p:txBody>
-          <a:bodyPr wrap="square" lIns="45720" tIns="27432" rIns="45720" bIns="27432" anchor="t">
-            <a:spAutoFit/>
-          </a:bodyPr>
-          <a:lstStyle/>
-          <a:p>
-            <a:pPr algn="l">
-              <a:lnSpc>
-                <a:spcPct val="110000"/>
-              </a:lnSpc>
-            </a:pPr>
-            <a:r>
-              <a:rPr sz="2200" b="1" i="0">
-                <a:solidFill>
-                  <a:srgbClr val="144FB0"/>
-                </a:solidFill>
-                <a:latin typeface="Helvetica"/>
-              </a:rPr>
-              <a:t>Hạn chế → hướng phát triển</a:t>
-            </a:r>
-          </a:p>
-        </p:txBody>
-      </p:sp>
-      <p:sp>
-        <p:nvSpPr>
-          <p:cNvPr id="10" name="TextBox 9"/>
-          <p:cNvSpPr txBox="1"/>
-          <p:nvPr/>
-        </p:nvSpPr>
-        <p:spPr>
-          <a:xfrm>
-            <a:off x="6537960" y="2468880"/>
-            <a:ext cx="4846320" cy="2423160"/>
-          </a:xfrm>
-          <a:prstGeom prst="rect">
-            <a:avLst/>
-          </a:prstGeom>
-          <a:noFill/>
-        </p:spPr>
-        <p:txBody>
-          <a:bodyPr wrap="square">
-            <a:spAutoFit/>
-          </a:bodyPr>
-          <a:lstStyle/>
-          <a:p>
-            <a:pPr marL="292608" indent="-292608">
-              <a:lnSpc>
-                <a:spcPct val="108000"/>
-              </a:lnSpc>
-              <a:spcAft>
-                <a:spcPts val="600"/>
-              </a:spcAft>
-              <a:buClr>
-                <a:srgbClr val="1E6FE8"/>
-              </a:buClr>
-              <a:buChar char="•"/>
-            </a:pPr>
-            <a:r>
-              <a:rPr sz="2100" b="0" i="0">
-                <a:solidFill>
-                  <a:srgbClr val="0F1C3F"/>
-                </a:solidFill>
-                <a:latin typeface="Helvetica"/>
-              </a:rPr>
-              <a:t>5.000 bước → đủ 20.000</a:t>
-            </a:r>
-          </a:p>
-          <a:p>
-            <a:pPr marL="292608" indent="-292608">
-              <a:lnSpc>
-                <a:spcPct val="108000"/>
-              </a:lnSpc>
-              <a:spcAft>
-                <a:spcPts val="600"/>
-              </a:spcAft>
-              <a:buClr>
-                <a:srgbClr val="1E6FE8"/>
-              </a:buClr>
-              <a:buChar char="•"/>
-            </a:pPr>
-            <a:r>
-              <a:rPr sz="2100" b="0" i="0">
-                <a:solidFill>
-                  <a:srgbClr val="0F1C3F"/>
-                </a:solidFill>
-                <a:latin typeface="Helvetica"/>
-              </a:rPr>
-              <a:t>Quét λ (A), α (B)</a:t>
-            </a:r>
-          </a:p>
-          <a:p>
-            <a:pPr marL="292608" indent="-292608">
-              <a:lnSpc>
-                <a:spcPct val="108000"/>
-              </a:lnSpc>
-              <a:spcAft>
-                <a:spcPts val="600"/>
-              </a:spcAft>
-              <a:buClr>
-                <a:srgbClr val="1E6FE8"/>
-              </a:buClr>
-              <a:buChar char="•"/>
-            </a:pPr>
-            <a:r>
-              <a:rPr sz="2100" b="0" i="0">
-                <a:solidFill>
-                  <a:srgbClr val="0F1C3F"/>
-                </a:solidFill>
-                <a:latin typeface="Helvetica"/>
-              </a:rPr>
-              <a:t>Thêm CIRR, CIRCO test</a:t>
-            </a:r>
-          </a:p>
-          <a:p>
-            <a:pPr marL="292608" indent="-292608">
-              <a:lnSpc>
-                <a:spcPct val="108000"/>
-              </a:lnSpc>
-              <a:spcAft>
-                <a:spcPts val="600"/>
-              </a:spcAft>
-              <a:buClr>
-                <a:srgbClr val="1E6FE8"/>
-              </a:buClr>
-              <a:buChar char="•"/>
-            </a:pPr>
-            <a:r>
-              <a:rPr sz="2100" b="0" i="0">
-                <a:solidFill>
-                  <a:srgbClr val="0F1C3F"/>
-                </a:solidFill>
-                <a:latin typeface="Helvetica"/>
-              </a:rPr>
-              <a:t>Hướng C: từ khóa theo IDF</a:t>
-            </a:r>
-          </a:p>
-        </p:txBody>
-      </p:sp>
-    </p:spTree>
-  </p:cSld>
-  <p:clrMapOvr>
-    <a:masterClrMapping/>
-  </p:clrMapOvr>
-  <mc:AlternateContent xmlns:mc="http://schemas.openxmlformats.org/markup-compatibility/2006" xmlns:p159="http://schemas.microsoft.com/office/powerpoint/2015/09/main">
-    <mc:Choice Requires="p159">
-      <p:transition xmlns:p14="http://schemas.microsoft.com/office/powerpoint/2010/main" spd="slow" p14:dur="1200">
-        <p159:morph option="byObject"/>
-      </p:transition>
-    </mc:Choice>
-    <mc:Fallback xmlns="">
-      <p:transition spd="slow">
-        <p:fade/>
-      </p:transition>
-    </mc:Fallback>
-  </mc:AlternateContent>
-</p:sld>
-</file>
-
-<file path=ppt/slides/slide17.xml><?xml version="1.0" encoding="utf-8"?>
-<p:sld xmlns:a="http://schemas.openxmlformats.org/drawingml/2006/main" xmlns:r="http://schemas.openxmlformats.org/officeDocument/2006/relationships" xmlns:p="http://schemas.openxmlformats.org/presentationml/2006/main">
-  <p:cSld>
-    <p:bg>
-      <p:bgPr>
-        <a:solidFill>
-          <a:srgbClr val="FFFFFF"/>
-        </a:solidFill>
-        <a:effectLst/>
-      </p:bgPr>
-    </p:bg>
-    <p:spTree>
-      <p:nvGrpSpPr>
-        <p:cNvPr id="1" name=""/>
-        <p:cNvGrpSpPr/>
-        <p:nvPr/>
-      </p:nvGrpSpPr>
-      <p:grpSpPr>
-        <a:xfrm>
-          <a:off x="0" y="0"/>
-          <a:ext cx="0" cy="0"/>
-          <a:chOff x="0" y="0"/>
-          <a:chExt cx="0" cy="0"/>
-        </a:xfrm>
-      </p:grpSpPr>
-      <p:sp>
-        <p:nvSpPr>
-          <p:cNvPr id="2" name="!!orb"/>
-          <p:cNvSpPr/>
-          <p:nvPr/>
-        </p:nvSpPr>
-        <p:spPr>
-          <a:xfrm>
-            <a:off x="-1783080" y="-4770120"/>
-            <a:ext cx="15758159" cy="15758159"/>
-          </a:xfrm>
-          <a:prstGeom prst="ellipse">
-            <a:avLst/>
-          </a:prstGeom>
-          <a:solidFill>
-            <a:srgbClr val="EAF2FF"/>
-          </a:solidFill>
-          <a:ln>
-            <a:noFill/>
-          </a:ln>
-          <a:effectLst/>
-        </p:spPr>
-        <p:style>
-          <a:lnRef idx="1">
-            <a:schemeClr val="accent1"/>
-          </a:lnRef>
-          <a:fillRef idx="3">
-            <a:schemeClr val="accent1"/>
-          </a:fillRef>
-          <a:effectRef idx="2">
-            <a:schemeClr val="accent1"/>
-          </a:effectRef>
-          <a:fontRef idx="minor">
-            <a:schemeClr val="lt1"/>
-          </a:fontRef>
-        </p:style>
-        <p:txBody>
-          <a:bodyPr rtlCol="0" anchor="ctr"/>
-          <a:lstStyle/>
-          <a:p>
-            <a:pPr algn="ctr"/>
-            <a:endParaRPr/>
-          </a:p>
-        </p:txBody>
-      </p:sp>
-      <p:sp>
-        <p:nvSpPr>
-          <p:cNvPr id="3" name="!!dot"/>
-          <p:cNvSpPr/>
-          <p:nvPr/>
-        </p:nvSpPr>
-        <p:spPr>
-          <a:xfrm>
-            <a:off x="5368065" y="1416270"/>
-            <a:ext cx="1960581" cy="1960581"/>
-          </a:xfrm>
-          <a:prstGeom prst="ellipse">
-            <a:avLst/>
-          </a:prstGeom>
-          <a:solidFill>
-            <a:srgbClr val="1E6FE8"/>
-          </a:solidFill>
-          <a:ln>
-            <a:noFill/>
-          </a:ln>
-          <a:effectLst/>
-        </p:spPr>
-        <p:style>
-          <a:lnRef idx="1">
-            <a:schemeClr val="accent1"/>
-          </a:lnRef>
-          <a:fillRef idx="3">
-            <a:schemeClr val="accent1"/>
-          </a:fillRef>
-          <a:effectRef idx="2">
-            <a:schemeClr val="accent1"/>
-          </a:effectRef>
-          <a:fontRef idx="minor">
-            <a:schemeClr val="lt1"/>
-          </a:fontRef>
-        </p:style>
-        <p:txBody>
-          <a:bodyPr rtlCol="0" anchor="ctr"/>
-          <a:lstStyle/>
-          <a:p>
-            <a:pPr algn="ctr"/>
-            <a:endParaRPr/>
-          </a:p>
-        </p:txBody>
-      </p:sp>
-      <p:sp>
-        <p:nvSpPr>
-          <p:cNvPr id="4" name="!!title"/>
-          <p:cNvSpPr txBox="1"/>
-          <p:nvPr/>
-        </p:nvSpPr>
-        <p:spPr>
-          <a:xfrm>
             <a:off x="731520" y="2011680"/>
             <a:ext cx="9601200" cy="769763"/>
           </a:xfrm>
@@ -10691,7 +9180,7 @@
                 </a:solidFill>
                 <a:latin typeface="Helvetica"/>
               </a:rPr>
-              <a:t>17</a:t>
+              <a:t>15</a:t>
             </a:r>
           </a:p>
         </p:txBody>
@@ -10717,7 +9206,7 @@
 </file>
 
 <file path=ppt/slides/slide2.xml><?xml version="1.0" encoding="utf-8"?>
-<p:sld xmlns:a="http://schemas.openxmlformats.org/drawingml/2006/main" xmlns:r="http://schemas.openxmlformats.org/officeDocument/2006/relationships" xmlns:p="http://schemas.openxmlformats.org/presentationml/2006/main">
+<p:sld xmlns:a="http://schemas.openxmlformats.org/drawingml/2006/main" xmlns:p="http://schemas.openxmlformats.org/presentationml/2006/main" xmlns:r="http://schemas.openxmlformats.org/officeDocument/2006/relationships">
   <p:cSld>
     <p:bg>
       <p:bgPr>
@@ -10733,14 +9222,7 @@
         <p:cNvGrpSpPr/>
         <p:nvPr/>
       </p:nvGrpSpPr>
-      <p:grpSpPr>
-        <a:xfrm>
-          <a:off x="0" y="0"/>
-          <a:ext cx="0" cy="0"/>
-          <a:chOff x="0" y="0"/>
-          <a:chExt cx="0" cy="0"/>
-        </a:xfrm>
-      </p:grpSpPr>
+      <p:grpSpPr/>
       <p:sp>
         <p:nvSpPr>
           <p:cNvPr id="2" name="!!orb"/>
@@ -10749,8 +9231,8 @@
         </p:nvSpPr>
         <p:spPr>
           <a:xfrm>
-            <a:off x="9692640" y="-2194560"/>
-            <a:ext cx="4206240" cy="4206240"/>
+            <a:off x="-1645920" y="4206240"/>
+            <a:ext cx="3657600" cy="3657600"/>
           </a:xfrm>
           <a:prstGeom prst="ellipse">
             <a:avLst/>
@@ -10782,7 +9264,6 @@
           <a:lstStyle/>
           <a:p>
             <a:pPr algn="ctr"/>
-            <a:endParaRPr/>
           </a:p>
         </p:txBody>
       </p:sp>
@@ -10794,7 +9275,7 @@
         </p:nvSpPr>
         <p:spPr>
           <a:xfrm>
-            <a:off x="11201400" y="502920"/>
+            <a:off x="54864" y="3108960"/>
             <a:ext cx="411480" cy="411480"/>
           </a:xfrm>
           <a:prstGeom prst="ellipse">
@@ -10827,7 +9308,6 @@
           <a:lstStyle/>
           <a:p>
             <a:pPr algn="ctr"/>
-            <a:endParaRPr/>
           </a:p>
         </p:txBody>
       </p:sp>
@@ -10848,7 +9328,7 @@
           <a:noFill/>
         </p:spPr>
         <p:txBody>
-          <a:bodyPr wrap="square" lIns="45720" tIns="27432" rIns="45720" bIns="27432" anchor="ctr">
+          <a:bodyPr wrap="square" anchor="ctr" lIns="45720" rIns="45720" tIns="27432" bIns="27432">
             <a:spAutoFit/>
           </a:bodyPr>
           <a:lstStyle/>
@@ -10865,7 +9345,7 @@
                 </a:solidFill>
                 <a:latin typeface="Helvetica"/>
               </a:rPr>
-              <a:t>Truy vấn gồm một ảnh tham chiếu và một câu mô tả thay đổi</a:t>
+              <a:t>Bài báo LinCIR: huấn luyện truy xuất ảnh kết hợp chỉ bằng văn bản</a:t>
             </a:r>
           </a:p>
         </p:txBody>
@@ -10887,7 +9367,7 @@
           <a:noFill/>
         </p:spPr>
         <p:txBody>
-          <a:bodyPr wrap="square" lIns="45720" tIns="27432" rIns="45720" bIns="27432" anchor="t">
+          <a:bodyPr wrap="square" anchor="t" lIns="45720" rIns="45720" tIns="27432" bIns="27432">
             <a:spAutoFit/>
           </a:bodyPr>
           <a:lstStyle/>
@@ -10909,40 +9389,16 @@
           </a:p>
         </p:txBody>
       </p:sp>
-      <p:pic>
-        <p:nvPicPr>
-          <p:cNvPr id="6" name="Picture 5" descr="cir_example_slide.png"/>
-          <p:cNvPicPr>
-            <a:picLocks noChangeAspect="1"/>
-          </p:cNvPicPr>
-          <p:nvPr/>
-        </p:nvPicPr>
-        <p:blipFill>
-          <a:blip r:embed="rId3"/>
-          <a:stretch>
-            <a:fillRect/>
-          </a:stretch>
-        </p:blipFill>
-        <p:spPr>
-          <a:xfrm>
-            <a:off x="548640" y="1691640"/>
-            <a:ext cx="7498079" cy="2665984"/>
-          </a:xfrm>
-          <a:prstGeom prst="rect">
-            <a:avLst/>
-          </a:prstGeom>
-        </p:spPr>
-      </p:pic>
-      <p:sp>
-        <p:nvSpPr>
-          <p:cNvPr id="7" name="Rounded Rectangle 6"/>
+      <p:sp>
+        <p:nvSpPr>
+          <p:cNvPr id="6" name="Rounded Rectangle 5"/>
           <p:cNvSpPr/>
           <p:nvPr/>
         </p:nvSpPr>
         <p:spPr>
           <a:xfrm>
-            <a:off x="8412480" y="1737360"/>
-            <a:ext cx="3200400" cy="4206240"/>
+            <a:off x="548640" y="1737360"/>
+            <a:ext cx="3520440" cy="3520440"/>
           </a:xfrm>
           <a:prstGeom prst="roundRect">
             <a:avLst>
@@ -10976,20 +9432,19 @@
           <a:lstStyle/>
           <a:p>
             <a:pPr algn="ctr"/>
-            <a:endParaRPr/>
-          </a:p>
-        </p:txBody>
-      </p:sp>
-      <p:sp>
-        <p:nvSpPr>
-          <p:cNvPr id="8" name="TextBox 7"/>
+          </a:p>
+        </p:txBody>
+      </p:sp>
+      <p:sp>
+        <p:nvSpPr>
+          <p:cNvPr id="7" name="TextBox 6"/>
           <p:cNvSpPr txBox="1"/>
           <p:nvPr/>
         </p:nvSpPr>
         <p:spPr>
           <a:xfrm>
-            <a:off x="8641080" y="1901952"/>
-            <a:ext cx="2743200" cy="502920"/>
+            <a:off x="777240" y="1901952"/>
+            <a:ext cx="3063240" cy="502920"/>
           </a:xfrm>
           <a:prstGeom prst="rect">
             <a:avLst/>
@@ -10997,7 +9452,7 @@
           <a:noFill/>
         </p:spPr>
         <p:txBody>
-          <a:bodyPr wrap="square" lIns="45720" tIns="27432" rIns="45720" bIns="27432" anchor="t">
+          <a:bodyPr wrap="square" anchor="t" lIns="45720" rIns="45720" tIns="27432" bIns="27432">
             <a:spAutoFit/>
           </a:bodyPr>
           <a:lstStyle/>
@@ -11014,21 +9469,21 @@
                 </a:solidFill>
                 <a:latin typeface="Helvetica"/>
               </a:rPr>
-              <a:t>CIR</a:t>
-            </a:r>
-          </a:p>
-        </p:txBody>
-      </p:sp>
-      <p:sp>
-        <p:nvSpPr>
-          <p:cNvPr id="9" name="TextBox 8"/>
+              <a:t>Vấn đề</a:t>
+            </a:r>
+          </a:p>
+        </p:txBody>
+      </p:sp>
+      <p:sp>
+        <p:nvSpPr>
+          <p:cNvPr id="8" name="TextBox 7"/>
           <p:cNvSpPr txBox="1"/>
           <p:nvPr/>
         </p:nvSpPr>
         <p:spPr>
           <a:xfrm>
-            <a:off x="8641080" y="2468880"/>
-            <a:ext cx="2743200" cy="3337559"/>
+            <a:off x="777240" y="2468880"/>
+            <a:ext cx="3063240" cy="2331720"/>
           </a:xfrm>
           <a:prstGeom prst="rect">
             <a:avLst/>
@@ -11051,16 +9506,17 @@
               <a:buClr>
                 <a:srgbClr val="1E6FE8"/>
               </a:buClr>
+              <a:buFont typeface="Helvetica"/>
               <a:buChar char="•"/>
             </a:pPr>
             <a:r>
-              <a:rPr sz="2100" b="0" i="0">
+              <a:rPr sz="2000" b="0" i="0">
                 <a:solidFill>
                   <a:srgbClr val="0F1C3F"/>
                 </a:solidFill>
                 <a:latin typeface="Helvetica"/>
               </a:rPr>
-              <a:t>Giữ đặc điểm của ảnh</a:t>
+              <a:t>Bộ ba ảnh – câu – ảnh đích phải gán nhãn tay: đắt và ít</a:t>
             </a:r>
           </a:p>
           <a:p>
@@ -11074,18 +9530,127 @@
               <a:buClr>
                 <a:srgbClr val="1E6FE8"/>
               </a:buClr>
+              <a:buFont typeface="Helvetica"/>
               <a:buChar char="•"/>
             </a:pPr>
             <a:r>
-              <a:rPr sz="2100" b="0" i="0">
+              <a:rPr sz="2000" b="0" i="0">
                 <a:solidFill>
                   <a:srgbClr val="0F1C3F"/>
                 </a:solidFill>
                 <a:latin typeface="Helvetica"/>
               </a:rPr>
-              <a:t>Áp dụng phần thay đổi</a:t>
-            </a:r>
-          </a:p>
+              <a:t>Pic2Word, SEARLE cần ảnh khi huấn luyện, chỉ học câu mẫu cố định</a:t>
+            </a:r>
+          </a:p>
+        </p:txBody>
+      </p:sp>
+      <p:sp>
+        <p:nvSpPr>
+          <p:cNvPr id="9" name="Rounded Rectangle 8"/>
+          <p:cNvSpPr/>
+          <p:nvPr/>
+        </p:nvSpPr>
+        <p:spPr>
+          <a:xfrm>
+            <a:off x="4343400" y="1737360"/>
+            <a:ext cx="3520440" cy="3520440"/>
+          </a:xfrm>
+          <a:prstGeom prst="roundRect">
+            <a:avLst>
+              <a:gd name="adj" fmla="val 8000"/>
+            </a:avLst>
+          </a:prstGeom>
+          <a:solidFill>
+            <a:srgbClr val="EAF2FF"/>
+          </a:solidFill>
+          <a:ln>
+            <a:noFill/>
+          </a:ln>
+          <a:effectLst/>
+        </p:spPr>
+        <p:style>
+          <a:lnRef idx="1">
+            <a:schemeClr val="accent1"/>
+          </a:lnRef>
+          <a:fillRef idx="3">
+            <a:schemeClr val="accent1"/>
+          </a:fillRef>
+          <a:effectRef idx="2">
+            <a:schemeClr val="accent1"/>
+          </a:effectRef>
+          <a:fontRef idx="minor">
+            <a:schemeClr val="lt1"/>
+          </a:fontRef>
+        </p:style>
+        <p:txBody>
+          <a:bodyPr rtlCol="0" anchor="ctr"/>
+          <a:lstStyle/>
+          <a:p>
+            <a:pPr algn="ctr"/>
+          </a:p>
+        </p:txBody>
+      </p:sp>
+      <p:sp>
+        <p:nvSpPr>
+          <p:cNvPr id="10" name="TextBox 9"/>
+          <p:cNvSpPr txBox="1"/>
+          <p:nvPr/>
+        </p:nvSpPr>
+        <p:spPr>
+          <a:xfrm>
+            <a:off x="4572000" y="1901952"/>
+            <a:ext cx="3063240" cy="502920"/>
+          </a:xfrm>
+          <a:prstGeom prst="rect">
+            <a:avLst/>
+          </a:prstGeom>
+          <a:noFill/>
+        </p:spPr>
+        <p:txBody>
+          <a:bodyPr wrap="square" anchor="t" lIns="45720" rIns="45720" tIns="27432" bIns="27432">
+            <a:spAutoFit/>
+          </a:bodyPr>
+          <a:lstStyle/>
+          <a:p>
+            <a:pPr algn="l">
+              <a:lnSpc>
+                <a:spcPct val="110000"/>
+              </a:lnSpc>
+            </a:pPr>
+            <a:r>
+              <a:rPr sz="2200" b="1" i="0">
+                <a:solidFill>
+                  <a:srgbClr val="144FB0"/>
+                </a:solidFill>
+                <a:latin typeface="Helvetica"/>
+              </a:rPr>
+              <a:t>Ý tưởng LinCIR</a:t>
+            </a:r>
+          </a:p>
+        </p:txBody>
+      </p:sp>
+      <p:sp>
+        <p:nvSpPr>
+          <p:cNvPr id="11" name="TextBox 10"/>
+          <p:cNvSpPr txBox="1"/>
+          <p:nvPr/>
+        </p:nvSpPr>
+        <p:spPr>
+          <a:xfrm>
+            <a:off x="4572000" y="2468880"/>
+            <a:ext cx="3063240" cy="2331720"/>
+          </a:xfrm>
+          <a:prstGeom prst="rect">
+            <a:avLst/>
+          </a:prstGeom>
+          <a:noFill/>
+        </p:spPr>
+        <p:txBody>
+          <a:bodyPr wrap="square">
+            <a:spAutoFit/>
+          </a:bodyPr>
+          <a:lstStyle/>
           <a:p>
             <a:pPr marL="292608" indent="-292608">
               <a:lnSpc>
@@ -11097,16 +9662,269 @@
               <a:buClr>
                 <a:srgbClr val="1E6FE8"/>
               </a:buClr>
+              <a:buFont typeface="Helvetica"/>
               <a:buChar char="•"/>
             </a:pPr>
             <a:r>
-              <a:rPr sz="2100" b="0" i="0">
+              <a:rPr sz="2000" b="0" i="0">
                 <a:solidFill>
                   <a:srgbClr val="0F1C3F"/>
                 </a:solidFill>
                 <a:latin typeface="Helvetica"/>
               </a:rPr>
-              <a:t>Trả về danh sách ảnh có xếp hạng</a:t>
+              <a:t>Self-Masking Projection: học φ chỉ từ văn bản, không cần ảnh</a:t>
+            </a:r>
+          </a:p>
+          <a:p>
+            <a:pPr marL="292608" indent="-292608">
+              <a:lnSpc>
+                <a:spcPct val="108000"/>
+              </a:lnSpc>
+              <a:spcAft>
+                <a:spcPts val="600"/>
+              </a:spcAft>
+              <a:buClr>
+                <a:srgbClr val="1E6FE8"/>
+              </a:buClr>
+              <a:buFont typeface="Helvetica"/>
+              <a:buChar char="•"/>
+            </a:pPr>
+            <a:r>
+              <a:rPr sz="2000" b="0" i="0">
+                <a:solidFill>
+                  <a:srgbClr val="0F1C3F"/>
+                </a:solidFill>
+                <a:latin typeface="Helvetica"/>
+              </a:rPr>
+              <a:t>Thêm nhiễu khi huấn luyện để φ dùng được cho vector ảnh</a:t>
+            </a:r>
+          </a:p>
+        </p:txBody>
+      </p:sp>
+      <p:sp>
+        <p:nvSpPr>
+          <p:cNvPr id="12" name="Rounded Rectangle 11"/>
+          <p:cNvSpPr/>
+          <p:nvPr/>
+        </p:nvSpPr>
+        <p:spPr>
+          <a:xfrm>
+            <a:off x="8138160" y="1737360"/>
+            <a:ext cx="3520440" cy="3520440"/>
+          </a:xfrm>
+          <a:prstGeom prst="roundRect">
+            <a:avLst>
+              <a:gd name="adj" fmla="val 8000"/>
+            </a:avLst>
+          </a:prstGeom>
+          <a:solidFill>
+            <a:srgbClr val="EAF2FF"/>
+          </a:solidFill>
+          <a:ln>
+            <a:noFill/>
+          </a:ln>
+          <a:effectLst/>
+        </p:spPr>
+        <p:style>
+          <a:lnRef idx="1">
+            <a:schemeClr val="accent1"/>
+          </a:lnRef>
+          <a:fillRef idx="3">
+            <a:schemeClr val="accent1"/>
+          </a:fillRef>
+          <a:effectRef idx="2">
+            <a:schemeClr val="accent1"/>
+          </a:effectRef>
+          <a:fontRef idx="minor">
+            <a:schemeClr val="lt1"/>
+          </a:fontRef>
+        </p:style>
+        <p:txBody>
+          <a:bodyPr rtlCol="0" anchor="ctr"/>
+          <a:lstStyle/>
+          <a:p>
+            <a:pPr algn="ctr"/>
+          </a:p>
+        </p:txBody>
+      </p:sp>
+      <p:sp>
+        <p:nvSpPr>
+          <p:cNvPr id="13" name="TextBox 12"/>
+          <p:cNvSpPr txBox="1"/>
+          <p:nvPr/>
+        </p:nvSpPr>
+        <p:spPr>
+          <a:xfrm>
+            <a:off x="8366760" y="1901952"/>
+            <a:ext cx="3063240" cy="502920"/>
+          </a:xfrm>
+          <a:prstGeom prst="rect">
+            <a:avLst/>
+          </a:prstGeom>
+          <a:noFill/>
+        </p:spPr>
+        <p:txBody>
+          <a:bodyPr wrap="square" anchor="t" lIns="45720" rIns="45720" tIns="27432" bIns="27432">
+            <a:spAutoFit/>
+          </a:bodyPr>
+          <a:lstStyle/>
+          <a:p>
+            <a:pPr algn="l">
+              <a:lnSpc>
+                <a:spcPct val="110000"/>
+              </a:lnSpc>
+            </a:pPr>
+            <a:r>
+              <a:rPr sz="2200" b="1" i="0">
+                <a:solidFill>
+                  <a:srgbClr val="144FB0"/>
+                </a:solidFill>
+                <a:latin typeface="Helvetica"/>
+              </a:rPr>
+              <a:t>Kết quả bài báo</a:t>
+            </a:r>
+          </a:p>
+        </p:txBody>
+      </p:sp>
+      <p:sp>
+        <p:nvSpPr>
+          <p:cNvPr id="14" name="TextBox 13"/>
+          <p:cNvSpPr txBox="1"/>
+          <p:nvPr/>
+        </p:nvSpPr>
+        <p:spPr>
+          <a:xfrm>
+            <a:off x="8366760" y="2468880"/>
+            <a:ext cx="3063240" cy="2331720"/>
+          </a:xfrm>
+          <a:prstGeom prst="rect">
+            <a:avLst/>
+          </a:prstGeom>
+          <a:noFill/>
+        </p:spPr>
+        <p:txBody>
+          <a:bodyPr wrap="square">
+            <a:spAutoFit/>
+          </a:bodyPr>
+          <a:lstStyle/>
+          <a:p>
+            <a:pPr marL="292608" indent="-292608">
+              <a:lnSpc>
+                <a:spcPct val="108000"/>
+              </a:lnSpc>
+              <a:spcAft>
+                <a:spcPts val="600"/>
+              </a:spcAft>
+              <a:buClr>
+                <a:srgbClr val="1E6FE8"/>
+              </a:buClr>
+              <a:buFont typeface="Helvetica"/>
+              <a:buChar char="•"/>
+            </a:pPr>
+            <a:r>
+              <a:rPr sz="2000" b="0" i="0">
+                <a:solidFill>
+                  <a:srgbClr val="0F1C3F"/>
+                </a:solidFill>
+                <a:latin typeface="Helvetica"/>
+              </a:rPr>
+              <a:t>Tốt nhất trên 4 bộ đánh giá</a:t>
+            </a:r>
+          </a:p>
+          <a:p>
+            <a:pPr marL="292608" indent="-292608">
+              <a:lnSpc>
+                <a:spcPct val="108000"/>
+              </a:lnSpc>
+              <a:spcAft>
+                <a:spcPts val="600"/>
+              </a:spcAft>
+              <a:buClr>
+                <a:srgbClr val="1E6FE8"/>
+              </a:buClr>
+              <a:buFont typeface="Helvetica"/>
+              <a:buChar char="•"/>
+            </a:pPr>
+            <a:r>
+              <a:rPr sz="2000" b="0" i="0">
+                <a:solidFill>
+                  <a:srgbClr val="0F1C3F"/>
+                </a:solidFill>
+                <a:latin typeface="Helvetica"/>
+              </a:rPr>
+              <a:t>Huấn luyện nhanh hơn Pic2Word 6 lần, SEARLE 8,4 lần</a:t>
+            </a:r>
+          </a:p>
+          <a:p>
+            <a:pPr marL="292608" indent="-292608">
+              <a:lnSpc>
+                <a:spcPct val="108000"/>
+              </a:lnSpc>
+              <a:spcAft>
+                <a:spcPts val="600"/>
+              </a:spcAft>
+              <a:buClr>
+                <a:srgbClr val="1E6FE8"/>
+              </a:buClr>
+              <a:buFont typeface="Helvetica"/>
+              <a:buChar char="•"/>
+            </a:pPr>
+            <a:r>
+              <a:rPr sz="2000" b="0" i="0">
+                <a:solidFill>
+                  <a:srgbClr val="0F1C3F"/>
+                </a:solidFill>
+                <a:latin typeface="Helvetica"/>
+              </a:rPr>
+              <a:t>Vượt cả phương pháp có giám sát (FashionIQ)</a:t>
+            </a:r>
+          </a:p>
+        </p:txBody>
+      </p:sp>
+      <p:sp>
+        <p:nvSpPr>
+          <p:cNvPr id="15" name="TextBox 14"/>
+          <p:cNvSpPr txBox="1"/>
+          <p:nvPr/>
+        </p:nvSpPr>
+        <p:spPr>
+          <a:xfrm>
+            <a:off x="548640" y="5394960"/>
+            <a:ext cx="11064240" cy="914400"/>
+          </a:xfrm>
+          <a:prstGeom prst="rect">
+            <a:avLst/>
+          </a:prstGeom>
+          <a:noFill/>
+        </p:spPr>
+        <p:txBody>
+          <a:bodyPr wrap="square" anchor="t" lIns="45720" rIns="45720" tIns="27432" bIns="27432">
+            <a:spAutoFit/>
+          </a:bodyPr>
+          <a:lstStyle/>
+          <a:p>
+            <a:pPr algn="l">
+              <a:lnSpc>
+                <a:spcPct val="110000"/>
+              </a:lnSpc>
+            </a:pPr>
+            <a:r>
+              <a:rPr sz="2000" b="0" i="0">
+                <a:solidFill>
+                  <a:srgbClr val="5B6B82"/>
+                </a:solidFill>
+                <a:latin typeface="Helvetica"/>
+              </a:rPr>
+              <a:t>Gu et al. (NAVER), CVPR 2024, mã nguồn công khai. </a:t>
+            </a:r>
+            <a:r>
+              <a:rPr sz="2000" b="1" i="0">
+                <a:solidFill>
+                  <a:srgbClr val="144FB0"/>
+                </a:solidFill>
+                <a:latin typeface="Helvetica"/>
+              </a:rPr>
+              <a:t>Nhóm dựng lại mã, tái hiện kết quả, chạy baseline, A, B, A+B trên Kaggle, kiểm định và phân tích nguyên nhân</a:t>
             </a:r>
           </a:p>
         </p:txBody>
@@ -11116,13 +9934,13 @@
   <p:clrMapOvr>
     <a:masterClrMapping/>
   </p:clrMapOvr>
-  <mc:AlternateContent xmlns:mc="http://schemas.openxmlformats.org/markup-compatibility/2006" xmlns:p159="http://schemas.microsoft.com/office/powerpoint/2015/09/main">
-    <mc:Choice Requires="p159">
-      <p:transition xmlns:p14="http://schemas.microsoft.com/office/powerpoint/2010/main" spd="slow" p14:dur="1200">
+  <mc:AlternateContent xmlns:mc="http://schemas.openxmlformats.org/markup-compatibility/2006">
+    <mc:Choice xmlns:p159="http://schemas.microsoft.com/office/powerpoint/2015/09/main" xmlns:p14="http://schemas.microsoft.com/office/powerpoint/2010/main" Requires="p159">
+      <p:transition spd="slow" p14:dur="1200">
         <p159:morph option="byObject"/>
       </p:transition>
     </mc:Choice>
-    <mc:Fallback xmlns="">
+    <mc:Fallback>
       <p:transition spd="slow">
         <p:fade/>
       </p:transition>
@@ -11164,8 +9982,8 @@
         </p:nvSpPr>
         <p:spPr>
           <a:xfrm>
-            <a:off x="-1099971" y="3983019"/>
-            <a:ext cx="3840480" cy="3840480"/>
+            <a:off x="9692640" y="-2194560"/>
+            <a:ext cx="4206240" cy="4206240"/>
           </a:xfrm>
           <a:prstGeom prst="ellipse">
             <a:avLst/>
@@ -11209,7 +10027,7 @@
         </p:nvSpPr>
         <p:spPr>
           <a:xfrm>
-            <a:off x="54864" y="6035040"/>
+            <a:off x="11201400" y="502920"/>
             <a:ext cx="411480" cy="411480"/>
           </a:xfrm>
           <a:prstGeom prst="ellipse">
@@ -11280,7 +10098,7 @@
                 </a:solidFill>
                 <a:latin typeface="Helvetica"/>
               </a:rPr>
-              <a:t>Dữ liệu bộ ba đắt và nhỏ nên cần CIR không cần mẫu</a:t>
+              <a:t>Truy vấn gồm một ảnh tham chiếu và một câu mô tả thay đổi</a:t>
             </a:r>
           </a:p>
         </p:txBody>
@@ -11324,250 +10142,40 @@
           </a:p>
         </p:txBody>
       </p:sp>
-      <p:sp>
-        <p:nvSpPr>
-          <p:cNvPr id="6" name="TextBox 5"/>
-          <p:cNvSpPr txBox="1"/>
-          <p:nvPr/>
-        </p:nvSpPr>
-        <p:spPr>
-          <a:xfrm>
-            <a:off x="731520" y="1828800"/>
-            <a:ext cx="3291840" cy="868680"/>
+      <p:pic>
+        <p:nvPicPr>
+          <p:cNvPr id="6" name="Picture 5" descr="cir_example_slide.png"/>
+          <p:cNvPicPr>
+            <a:picLocks noChangeAspect="1"/>
+          </p:cNvPicPr>
+          <p:nvPr/>
+        </p:nvPicPr>
+        <p:blipFill>
+          <a:blip r:embed="rId3"/>
+          <a:stretch>
+            <a:fillRect/>
+          </a:stretch>
+        </p:blipFill>
+        <p:spPr>
+          <a:xfrm>
+            <a:off x="548640" y="1691640"/>
+            <a:ext cx="7498079" cy="2665984"/>
           </a:xfrm>
           <a:prstGeom prst="rect">
             <a:avLst/>
           </a:prstGeom>
-          <a:noFill/>
-        </p:spPr>
-        <p:txBody>
-          <a:bodyPr wrap="square" lIns="45720" tIns="27432" rIns="45720" bIns="27432" anchor="t">
-            <a:spAutoFit/>
-          </a:bodyPr>
-          <a:lstStyle/>
-          <a:p>
-            <a:pPr algn="l">
-              <a:lnSpc>
-                <a:spcPct val="110000"/>
-              </a:lnSpc>
-            </a:pPr>
-            <a:r>
-              <a:rPr sz="4800" b="1" i="0">
-                <a:solidFill>
-                  <a:srgbClr val="1E6FE8"/>
-                </a:solidFill>
-                <a:latin typeface="Helvetica"/>
-              </a:rPr>
-              <a:t>46,6k</a:t>
-            </a:r>
-          </a:p>
-        </p:txBody>
-      </p:sp>
-      <p:sp>
-        <p:nvSpPr>
-          <p:cNvPr id="7" name="TextBox 6"/>
-          <p:cNvSpPr txBox="1"/>
-          <p:nvPr/>
-        </p:nvSpPr>
-        <p:spPr>
-          <a:xfrm>
-            <a:off x="731520" y="2697480"/>
-            <a:ext cx="3291840" cy="777240"/>
-          </a:xfrm>
-          <a:prstGeom prst="rect">
-            <a:avLst/>
-          </a:prstGeom>
-          <a:noFill/>
-        </p:spPr>
-        <p:txBody>
-          <a:bodyPr wrap="square" lIns="45720" tIns="27432" rIns="45720" bIns="27432" anchor="t">
-            <a:spAutoFit/>
-          </a:bodyPr>
-          <a:lstStyle/>
-          <a:p>
-            <a:pPr algn="l">
-              <a:lnSpc>
-                <a:spcPct val="110000"/>
-              </a:lnSpc>
-            </a:pPr>
-            <a:r>
-              <a:rPr sz="2000" b="0" i="0">
-                <a:solidFill>
-                  <a:srgbClr val="5B6B82"/>
-                </a:solidFill>
-                <a:latin typeface="Helvetica"/>
-              </a:rPr>
-              <a:t>bộ ba FashionIQ</a:t>
-            </a:r>
-          </a:p>
-        </p:txBody>
-      </p:sp>
-      <p:sp>
-        <p:nvSpPr>
-          <p:cNvPr id="8" name="TextBox 7"/>
-          <p:cNvSpPr txBox="1"/>
-          <p:nvPr/>
-        </p:nvSpPr>
-        <p:spPr>
-          <a:xfrm>
-            <a:off x="4114800" y="1828800"/>
-            <a:ext cx="3291840" cy="868680"/>
-          </a:xfrm>
-          <a:prstGeom prst="rect">
-            <a:avLst/>
-          </a:prstGeom>
-          <a:noFill/>
-        </p:spPr>
-        <p:txBody>
-          <a:bodyPr wrap="square" lIns="45720" tIns="27432" rIns="45720" bIns="27432" anchor="t">
-            <a:spAutoFit/>
-          </a:bodyPr>
-          <a:lstStyle/>
-          <a:p>
-            <a:pPr algn="l">
-              <a:lnSpc>
-                <a:spcPct val="110000"/>
-              </a:lnSpc>
-            </a:pPr>
-            <a:r>
-              <a:rPr sz="4800" b="1" i="0">
-                <a:solidFill>
-                  <a:srgbClr val="1E6FE8"/>
-                </a:solidFill>
-                <a:latin typeface="Helvetica"/>
-              </a:rPr>
-              <a:t>28,8k</a:t>
-            </a:r>
-          </a:p>
-        </p:txBody>
-      </p:sp>
-      <p:sp>
-        <p:nvSpPr>
-          <p:cNvPr id="9" name="TextBox 8"/>
-          <p:cNvSpPr txBox="1"/>
-          <p:nvPr/>
-        </p:nvSpPr>
-        <p:spPr>
-          <a:xfrm>
-            <a:off x="4114800" y="2697480"/>
-            <a:ext cx="3291840" cy="777240"/>
-          </a:xfrm>
-          <a:prstGeom prst="rect">
-            <a:avLst/>
-          </a:prstGeom>
-          <a:noFill/>
-        </p:spPr>
-        <p:txBody>
-          <a:bodyPr wrap="square" lIns="45720" tIns="27432" rIns="45720" bIns="27432" anchor="t">
-            <a:spAutoFit/>
-          </a:bodyPr>
-          <a:lstStyle/>
-          <a:p>
-            <a:pPr algn="l">
-              <a:lnSpc>
-                <a:spcPct val="110000"/>
-              </a:lnSpc>
-            </a:pPr>
-            <a:r>
-              <a:rPr sz="2000" b="0" i="0">
-                <a:solidFill>
-                  <a:srgbClr val="5B6B82"/>
-                </a:solidFill>
-                <a:latin typeface="Helvetica"/>
-              </a:rPr>
-              <a:t>bộ ba CIRR</a:t>
-            </a:r>
-          </a:p>
-        </p:txBody>
-      </p:sp>
-      <p:sp>
-        <p:nvSpPr>
-          <p:cNvPr id="10" name="TextBox 9"/>
-          <p:cNvSpPr txBox="1"/>
-          <p:nvPr/>
-        </p:nvSpPr>
-        <p:spPr>
-          <a:xfrm>
-            <a:off x="7498079" y="1828800"/>
-            <a:ext cx="3840480" cy="868680"/>
-          </a:xfrm>
-          <a:prstGeom prst="rect">
-            <a:avLst/>
-          </a:prstGeom>
-          <a:noFill/>
-        </p:spPr>
-        <p:txBody>
-          <a:bodyPr wrap="square" lIns="45720" tIns="27432" rIns="45720" bIns="27432" anchor="t">
-            <a:spAutoFit/>
-          </a:bodyPr>
-          <a:lstStyle/>
-          <a:p>
-            <a:pPr algn="l">
-              <a:lnSpc>
-                <a:spcPct val="110000"/>
-              </a:lnSpc>
-            </a:pPr>
-            <a:r>
-              <a:rPr sz="4800" b="1" i="0">
-                <a:solidFill>
-                  <a:srgbClr val="144FB0"/>
-                </a:solidFill>
-                <a:latin typeface="Helvetica"/>
-              </a:rPr>
-              <a:t>0</a:t>
-            </a:r>
-          </a:p>
-        </p:txBody>
-      </p:sp>
-      <p:sp>
-        <p:nvSpPr>
-          <p:cNvPr id="11" name="TextBox 10"/>
-          <p:cNvSpPr txBox="1"/>
-          <p:nvPr/>
-        </p:nvSpPr>
-        <p:spPr>
-          <a:xfrm>
-            <a:off x="7498079" y="2697480"/>
-            <a:ext cx="3840480" cy="777240"/>
-          </a:xfrm>
-          <a:prstGeom prst="rect">
-            <a:avLst/>
-          </a:prstGeom>
-          <a:noFill/>
-        </p:spPr>
-        <p:txBody>
-          <a:bodyPr wrap="square" lIns="45720" tIns="27432" rIns="45720" bIns="27432" anchor="t">
-            <a:spAutoFit/>
-          </a:bodyPr>
-          <a:lstStyle/>
-          <a:p>
-            <a:pPr algn="l">
-              <a:lnSpc>
-                <a:spcPct val="110000"/>
-              </a:lnSpc>
-            </a:pPr>
-            <a:r>
-              <a:rPr sz="2000" b="0" i="0">
-                <a:solidFill>
-                  <a:srgbClr val="5B6B82"/>
-                </a:solidFill>
-                <a:latin typeface="Helvetica"/>
-              </a:rPr>
-              <a:t>bộ ba dùng trong zero-shot CIR</a:t>
-            </a:r>
-          </a:p>
-        </p:txBody>
-      </p:sp>
-      <p:sp>
-        <p:nvSpPr>
-          <p:cNvPr id="12" name="Rounded Rectangle 11"/>
+        </p:spPr>
+      </p:pic>
+      <p:sp>
+        <p:nvSpPr>
+          <p:cNvPr id="7" name="Rounded Rectangle 6"/>
           <p:cNvSpPr/>
           <p:nvPr/>
         </p:nvSpPr>
         <p:spPr>
           <a:xfrm>
-            <a:off x="731520" y="3977639"/>
-            <a:ext cx="10698480" cy="1920240"/>
+            <a:off x="8412480" y="1737360"/>
+            <a:ext cx="3200400" cy="4206240"/>
           </a:xfrm>
           <a:prstGeom prst="roundRect">
             <a:avLst>
@@ -11607,14 +10215,14 @@
       </p:sp>
       <p:sp>
         <p:nvSpPr>
-          <p:cNvPr id="13" name="TextBox 12"/>
+          <p:cNvPr id="8" name="TextBox 7"/>
           <p:cNvSpPr txBox="1"/>
           <p:nvPr/>
         </p:nvSpPr>
         <p:spPr>
           <a:xfrm>
-            <a:off x="960120" y="4142231"/>
-            <a:ext cx="10241280" cy="502920"/>
+            <a:off x="8641080" y="1901952"/>
+            <a:ext cx="2743200" cy="502920"/>
           </a:xfrm>
           <a:prstGeom prst="rect">
             <a:avLst/>
@@ -11639,21 +10247,21 @@
                 </a:solidFill>
                 <a:latin typeface="Helvetica"/>
               </a:rPr>
-              <a:t>Hệ quả</a:t>
-            </a:r>
-          </a:p>
-        </p:txBody>
-      </p:sp>
-      <p:sp>
-        <p:nvSpPr>
-          <p:cNvPr id="14" name="TextBox 13"/>
+              <a:t>CIR</a:t>
+            </a:r>
+          </a:p>
+        </p:txBody>
+      </p:sp>
+      <p:sp>
+        <p:nvSpPr>
+          <p:cNvPr id="9" name="TextBox 8"/>
           <p:cNvSpPr txBox="1"/>
           <p:nvPr/>
         </p:nvSpPr>
         <p:spPr>
           <a:xfrm>
-            <a:off x="960120" y="4709159"/>
-            <a:ext cx="10241280" cy="1051560"/>
+            <a:off x="8641080" y="2468880"/>
+            <a:ext cx="2743200" cy="3337559"/>
           </a:xfrm>
           <a:prstGeom prst="rect">
             <a:avLst/>
@@ -11676,25 +10284,17 @@
               <a:buClr>
                 <a:srgbClr val="1E6FE8"/>
               </a:buClr>
+              <a:buFont typeface="Helvetica"/>
               <a:buChar char="•"/>
             </a:pPr>
             <a:r>
-              <a:rPr sz="2100" b="1" i="0">
+              <a:rPr sz="2100" b="0" i="0">
                 <a:solidFill>
                   <a:srgbClr val="0F1C3F"/>
                 </a:solidFill>
                 <a:latin typeface="Helvetica"/>
               </a:rPr>
-              <a:t>Có giám sát: </a:t>
-            </a:r>
-            <a:r>
-              <a:rPr sz="2100" b="0" i="0">
-                <a:solidFill>
-                  <a:srgbClr val="0F1C3F"/>
-                </a:solidFill>
-                <a:latin typeface="Helvetica"/>
-              </a:rPr>
-              <a:t>gán nhãn thủ công, khó mở rộng sang lĩnh vực mới</a:t>
+              <a:t>Giữ các đặc điểm của ảnh tham chiếu</a:t>
             </a:r>
           </a:p>
           <a:p>
@@ -11708,17 +10308,33 @@
               <a:buClr>
                 <a:srgbClr val="1E6FE8"/>
               </a:buClr>
+              <a:buFont typeface="Helvetica"/>
               <a:buChar char="•"/>
             </a:pPr>
             <a:r>
-              <a:rPr sz="2100" b="1" i="0">
+              <a:rPr sz="2100" b="0" i="0">
                 <a:solidFill>
                   <a:srgbClr val="0F1C3F"/>
                 </a:solidFill>
                 <a:latin typeface="Helvetica"/>
               </a:rPr>
-              <a:t>Zero-shot: </a:t>
-            </a:r>
+              <a:t>Thay đổi đúng như câu mô tả</a:t>
+            </a:r>
+          </a:p>
+          <a:p>
+            <a:pPr marL="292608" indent="-292608">
+              <a:lnSpc>
+                <a:spcPct val="108000"/>
+              </a:lnSpc>
+              <a:spcAft>
+                <a:spcPts val="600"/>
+              </a:spcAft>
+              <a:buClr>
+                <a:srgbClr val="1E6FE8"/>
+              </a:buClr>
+              <a:buFont typeface="Helvetica"/>
+              <a:buChar char="•"/>
+            </a:pPr>
             <a:r>
               <a:rPr sz="2100" b="0" i="0">
                 <a:solidFill>
@@ -11726,7 +10342,7 @@
                 </a:solidFill>
                 <a:latin typeface="Helvetica"/>
               </a:rPr>
-              <a:t>huấn luyện trên dữ liệu sẵn có, đánh giá trực tiếp trên bộ CIR</a:t>
+              <a:t>Trả về danh sách ảnh xếp hạng, đo bằng R@K và mAP@K</a:t>
             </a:r>
           </a:p>
         </p:txBody>
@@ -11784,8 +10400,8 @@
         </p:nvSpPr>
         <p:spPr>
           <a:xfrm>
-            <a:off x="9966960" y="4206240"/>
-            <a:ext cx="3657600" cy="3657600"/>
+            <a:off x="9692640" y="-2194560"/>
+            <a:ext cx="4206240" cy="4206240"/>
           </a:xfrm>
           <a:prstGeom prst="ellipse">
             <a:avLst/>
@@ -11829,7 +10445,7 @@
         </p:nvSpPr>
         <p:spPr>
           <a:xfrm>
-            <a:off x="11704320" y="3291840"/>
+            <a:off x="11201400" y="502920"/>
             <a:ext cx="411480" cy="411480"/>
           </a:xfrm>
           <a:prstGeom prst="ellipse">
@@ -11900,7 +10516,7 @@
                 </a:solidFill>
                 <a:latin typeface="Helvetica"/>
               </a:rPr>
-              <a:t>CIR là truy xuất có xếp hạng, đo bằng R@K và mAP@K</a:t>
+              <a:t>Ảnh được biến thành một “từ giả” [$] trong câu truy vấn</a:t>
             </a:r>
           </a:p>
         </p:txBody>
@@ -11944,533 +10560,30 @@
           </a:p>
         </p:txBody>
       </p:sp>
-      <p:sp>
-        <p:nvSpPr>
-          <p:cNvPr id="6" name="Rounded Rectangle 5"/>
-          <p:cNvSpPr/>
-          <p:nvPr/>
-        </p:nvSpPr>
-        <p:spPr>
-          <a:xfrm>
-            <a:off x="548640" y="1737360"/>
-            <a:ext cx="3566160" cy="3291840"/>
-          </a:xfrm>
-          <a:prstGeom prst="roundRect">
-            <a:avLst>
-              <a:gd name="adj" fmla="val 8000"/>
-            </a:avLst>
-          </a:prstGeom>
-          <a:solidFill>
-            <a:srgbClr val="EAF2FF"/>
-          </a:solidFill>
-          <a:ln>
-            <a:noFill/>
-          </a:ln>
-          <a:effectLst/>
-        </p:spPr>
-        <p:style>
-          <a:lnRef idx="1">
-            <a:schemeClr val="accent1"/>
-          </a:lnRef>
-          <a:fillRef idx="3">
-            <a:schemeClr val="accent1"/>
-          </a:fillRef>
-          <a:effectRef idx="2">
-            <a:schemeClr val="accent1"/>
-          </a:effectRef>
-          <a:fontRef idx="minor">
-            <a:schemeClr val="lt1"/>
-          </a:fontRef>
-        </p:style>
-        <p:txBody>
-          <a:bodyPr rtlCol="0" anchor="ctr"/>
-          <a:lstStyle/>
-          <a:p>
-            <a:pPr algn="ctr"/>
-            <a:endParaRPr/>
-          </a:p>
-        </p:txBody>
-      </p:sp>
-      <p:sp>
-        <p:nvSpPr>
-          <p:cNvPr id="7" name="TextBox 6"/>
-          <p:cNvSpPr txBox="1"/>
-          <p:nvPr/>
-        </p:nvSpPr>
-        <p:spPr>
-          <a:xfrm>
-            <a:off x="777240" y="1901952"/>
-            <a:ext cx="3108960" cy="502920"/>
+      <p:pic>
+        <p:nvPicPr>
+          <p:cNvPr id="6" name="Picture 5" descr="lincir_infer_slide.png"/>
+          <p:cNvPicPr>
+            <a:picLocks noChangeAspect="1"/>
+          </p:cNvPicPr>
+          <p:nvPr/>
+        </p:nvPicPr>
+        <p:blipFill>
+          <a:blip r:embed="rId3"/>
+          <a:stretch>
+            <a:fillRect/>
+          </a:stretch>
+        </p:blipFill>
+        <p:spPr>
+          <a:xfrm>
+            <a:off x="548640" y="1828800"/>
+            <a:ext cx="11064240" cy="3512236"/>
           </a:xfrm>
           <a:prstGeom prst="rect">
             <a:avLst/>
           </a:prstGeom>
-          <a:noFill/>
-        </p:spPr>
-        <p:txBody>
-          <a:bodyPr wrap="square" lIns="45720" tIns="27432" rIns="45720" bIns="27432" anchor="t">
-            <a:spAutoFit/>
-          </a:bodyPr>
-          <a:lstStyle/>
-          <a:p>
-            <a:pPr algn="l">
-              <a:lnSpc>
-                <a:spcPct val="110000"/>
-              </a:lnSpc>
-            </a:pPr>
-            <a:r>
-              <a:rPr sz="2200" b="1" i="0">
-                <a:solidFill>
-                  <a:srgbClr val="144FB0"/>
-                </a:solidFill>
-                <a:latin typeface="Helvetica"/>
-              </a:rPr>
-              <a:t>Chương I</a:t>
-            </a:r>
-          </a:p>
-        </p:txBody>
-      </p:sp>
-      <p:sp>
-        <p:nvSpPr>
-          <p:cNvPr id="8" name="TextBox 7"/>
-          <p:cNvSpPr txBox="1"/>
-          <p:nvPr/>
-        </p:nvSpPr>
-        <p:spPr>
-          <a:xfrm>
-            <a:off x="777240" y="2468880"/>
-            <a:ext cx="3108960" cy="2423160"/>
-          </a:xfrm>
-          <a:prstGeom prst="rect">
-            <a:avLst/>
-          </a:prstGeom>
-          <a:noFill/>
-        </p:spPr>
-        <p:txBody>
-          <a:bodyPr wrap="square">
-            <a:spAutoFit/>
-          </a:bodyPr>
-          <a:lstStyle/>
-          <a:p>
-            <a:pPr marL="292608" indent="-292608">
-              <a:lnSpc>
-                <a:spcPct val="108000"/>
-              </a:lnSpc>
-              <a:spcAft>
-                <a:spcPts val="600"/>
-              </a:spcAft>
-              <a:buClr>
-                <a:srgbClr val="1E6FE8"/>
-              </a:buClr>
-              <a:buChar char="•"/>
-            </a:pPr>
-            <a:r>
-              <a:rPr sz="2100" b="0" i="0">
-                <a:solidFill>
-                  <a:srgbClr val="0F1C3F"/>
-                </a:solidFill>
-                <a:latin typeface="Helvetica"/>
-              </a:rPr>
-              <a:t>Nhu cầu → truy vấn → xếp hạng</a:t>
-            </a:r>
-          </a:p>
-          <a:p>
-            <a:pPr marL="292608" indent="-292608">
-              <a:lnSpc>
-                <a:spcPct val="108000"/>
-              </a:lnSpc>
-              <a:spcAft>
-                <a:spcPts val="600"/>
-              </a:spcAft>
-              <a:buClr>
-                <a:srgbClr val="1E6FE8"/>
-              </a:buClr>
-              <a:buChar char="•"/>
-            </a:pPr>
-            <a:r>
-              <a:rPr sz="2100" b="0" i="0">
-                <a:solidFill>
-                  <a:srgbClr val="0F1C3F"/>
-                </a:solidFill>
-                <a:latin typeface="Helvetica"/>
-              </a:rPr>
-              <a:t>Precision, Recall</a:t>
-            </a:r>
-          </a:p>
-          <a:p>
-            <a:pPr marL="292608" indent="-292608">
-              <a:lnSpc>
-                <a:spcPct val="108000"/>
-              </a:lnSpc>
-              <a:spcAft>
-                <a:spcPts val="600"/>
-              </a:spcAft>
-              <a:buClr>
-                <a:srgbClr val="1E6FE8"/>
-              </a:buClr>
-              <a:buChar char="•"/>
-            </a:pPr>
-            <a:r>
-              <a:rPr sz="2100" b="0" i="0">
-                <a:solidFill>
-                  <a:srgbClr val="0F1C3F"/>
-                </a:solidFill>
-                <a:latin typeface="Helvetica"/>
-              </a:rPr>
-              <a:t>Boolean + chỉ mục ngược: khớp chính xác</a:t>
-            </a:r>
-          </a:p>
-        </p:txBody>
-      </p:sp>
-      <p:sp>
-        <p:nvSpPr>
-          <p:cNvPr id="9" name="Rounded Rectangle 8"/>
-          <p:cNvSpPr/>
-          <p:nvPr/>
-        </p:nvSpPr>
-        <p:spPr>
-          <a:xfrm>
-            <a:off x="4343400" y="1737360"/>
-            <a:ext cx="3566160" cy="3291840"/>
-          </a:xfrm>
-          <a:prstGeom prst="roundRect">
-            <a:avLst>
-              <a:gd name="adj" fmla="val 8000"/>
-            </a:avLst>
-          </a:prstGeom>
-          <a:solidFill>
-            <a:srgbClr val="EAF2FF"/>
-          </a:solidFill>
-          <a:ln>
-            <a:noFill/>
-          </a:ln>
-          <a:effectLst/>
-        </p:spPr>
-        <p:style>
-          <a:lnRef idx="1">
-            <a:schemeClr val="accent1"/>
-          </a:lnRef>
-          <a:fillRef idx="3">
-            <a:schemeClr val="accent1"/>
-          </a:fillRef>
-          <a:effectRef idx="2">
-            <a:schemeClr val="accent1"/>
-          </a:effectRef>
-          <a:fontRef idx="minor">
-            <a:schemeClr val="lt1"/>
-          </a:fontRef>
-        </p:style>
-        <p:txBody>
-          <a:bodyPr rtlCol="0" anchor="ctr"/>
-          <a:lstStyle/>
-          <a:p>
-            <a:pPr algn="ctr"/>
-            <a:endParaRPr/>
-          </a:p>
-        </p:txBody>
-      </p:sp>
-      <p:sp>
-        <p:nvSpPr>
-          <p:cNvPr id="10" name="TextBox 9"/>
-          <p:cNvSpPr txBox="1"/>
-          <p:nvPr/>
-        </p:nvSpPr>
-        <p:spPr>
-          <a:xfrm>
-            <a:off x="4572000" y="1901952"/>
-            <a:ext cx="3108960" cy="502920"/>
-          </a:xfrm>
-          <a:prstGeom prst="rect">
-            <a:avLst/>
-          </a:prstGeom>
-          <a:noFill/>
-        </p:spPr>
-        <p:txBody>
-          <a:bodyPr wrap="square" lIns="45720" tIns="27432" rIns="45720" bIns="27432" anchor="t">
-            <a:spAutoFit/>
-          </a:bodyPr>
-          <a:lstStyle/>
-          <a:p>
-            <a:pPr algn="l">
-              <a:lnSpc>
-                <a:spcPct val="110000"/>
-              </a:lnSpc>
-            </a:pPr>
-            <a:r>
-              <a:rPr sz="2200" b="1" i="0">
-                <a:solidFill>
-                  <a:srgbClr val="144FB0"/>
-                </a:solidFill>
-                <a:latin typeface="Helvetica"/>
-              </a:rPr>
-              <a:t>Độ đo của CIR</a:t>
-            </a:r>
-          </a:p>
-        </p:txBody>
-      </p:sp>
-      <p:sp>
-        <p:nvSpPr>
-          <p:cNvPr id="11" name="TextBox 10"/>
-          <p:cNvSpPr txBox="1"/>
-          <p:nvPr/>
-        </p:nvSpPr>
-        <p:spPr>
-          <a:xfrm>
-            <a:off x="4572000" y="2468880"/>
-            <a:ext cx="3108960" cy="2423160"/>
-          </a:xfrm>
-          <a:prstGeom prst="rect">
-            <a:avLst/>
-          </a:prstGeom>
-          <a:noFill/>
-        </p:spPr>
-        <p:txBody>
-          <a:bodyPr wrap="square">
-            <a:spAutoFit/>
-          </a:bodyPr>
-          <a:lstStyle/>
-          <a:p>
-            <a:pPr marL="292608" indent="-292608">
-              <a:lnSpc>
-                <a:spcPct val="108000"/>
-              </a:lnSpc>
-              <a:spcAft>
-                <a:spcPts val="600"/>
-              </a:spcAft>
-              <a:buClr>
-                <a:srgbClr val="1E6FE8"/>
-              </a:buClr>
-              <a:buChar char="•"/>
-            </a:pPr>
-            <a:r>
-              <a:rPr sz="2100" b="0" i="0">
-                <a:solidFill>
-                  <a:srgbClr val="0F1C3F"/>
-                </a:solidFill>
-                <a:latin typeface="Helvetica"/>
-              </a:rPr>
-              <a:t>R@K: ảnh đích nằm trong top-K</a:t>
-            </a:r>
-          </a:p>
-          <a:p>
-            <a:pPr marL="292608" indent="-292608">
-              <a:lnSpc>
-                <a:spcPct val="108000"/>
-              </a:lnSpc>
-              <a:spcAft>
-                <a:spcPts val="600"/>
-              </a:spcAft>
-              <a:buClr>
-                <a:srgbClr val="1E6FE8"/>
-              </a:buClr>
-              <a:buChar char="•"/>
-            </a:pPr>
-            <a:r>
-              <a:rPr sz="2100" b="0" i="0">
-                <a:solidFill>
-                  <a:srgbClr val="0F1C3F"/>
-                </a:solidFill>
-                <a:latin typeface="Helvetica"/>
-              </a:rPr>
-              <a:t>mAP@K: nhiều ảnh đúng, thưởng vị trí cao</a:t>
-            </a:r>
-          </a:p>
-        </p:txBody>
-      </p:sp>
-      <p:sp>
-        <p:nvSpPr>
-          <p:cNvPr id="12" name="Rounded Rectangle 11"/>
-          <p:cNvSpPr/>
-          <p:nvPr/>
-        </p:nvSpPr>
-        <p:spPr>
-          <a:xfrm>
-            <a:off x="8138160" y="1737360"/>
-            <a:ext cx="3566160" cy="3291840"/>
-          </a:xfrm>
-          <a:prstGeom prst="roundRect">
-            <a:avLst>
-              <a:gd name="adj" fmla="val 8000"/>
-            </a:avLst>
-          </a:prstGeom>
-          <a:solidFill>
-            <a:srgbClr val="D6E6FF"/>
-          </a:solidFill>
-          <a:ln>
-            <a:noFill/>
-          </a:ln>
-          <a:effectLst/>
-        </p:spPr>
-        <p:style>
-          <a:lnRef idx="1">
-            <a:schemeClr val="accent1"/>
-          </a:lnRef>
-          <a:fillRef idx="3">
-            <a:schemeClr val="accent1"/>
-          </a:fillRef>
-          <a:effectRef idx="2">
-            <a:schemeClr val="accent1"/>
-          </a:effectRef>
-          <a:fontRef idx="minor">
-            <a:schemeClr val="lt1"/>
-          </a:fontRef>
-        </p:style>
-        <p:txBody>
-          <a:bodyPr rtlCol="0" anchor="ctr"/>
-          <a:lstStyle/>
-          <a:p>
-            <a:pPr algn="ctr"/>
-            <a:endParaRPr/>
-          </a:p>
-        </p:txBody>
-      </p:sp>
-      <p:sp>
-        <p:nvSpPr>
-          <p:cNvPr id="13" name="TextBox 12"/>
-          <p:cNvSpPr txBox="1"/>
-          <p:nvPr/>
-        </p:nvSpPr>
-        <p:spPr>
-          <a:xfrm>
-            <a:off x="8366760" y="1901952"/>
-            <a:ext cx="3108960" cy="502920"/>
-          </a:xfrm>
-          <a:prstGeom prst="rect">
-            <a:avLst/>
-          </a:prstGeom>
-          <a:noFill/>
-        </p:spPr>
-        <p:txBody>
-          <a:bodyPr wrap="square" lIns="45720" tIns="27432" rIns="45720" bIns="27432" anchor="t">
-            <a:spAutoFit/>
-          </a:bodyPr>
-          <a:lstStyle/>
-          <a:p>
-            <a:pPr algn="l">
-              <a:lnSpc>
-                <a:spcPct val="110000"/>
-              </a:lnSpc>
-            </a:pPr>
-            <a:r>
-              <a:rPr sz="2200" b="1" i="0">
-                <a:solidFill>
-                  <a:srgbClr val="144FB0"/>
-                </a:solidFill>
-                <a:latin typeface="Helvetica"/>
-              </a:rPr>
-              <a:t>Tìm kiếm vector</a:t>
-            </a:r>
-          </a:p>
-        </p:txBody>
-      </p:sp>
-      <p:sp>
-        <p:nvSpPr>
-          <p:cNvPr id="14" name="TextBox 13"/>
-          <p:cNvSpPr txBox="1"/>
-          <p:nvPr/>
-        </p:nvSpPr>
-        <p:spPr>
-          <a:xfrm>
-            <a:off x="8366760" y="2468880"/>
-            <a:ext cx="3108960" cy="2423160"/>
-          </a:xfrm>
-          <a:prstGeom prst="rect">
-            <a:avLst/>
-          </a:prstGeom>
-          <a:noFill/>
-        </p:spPr>
-        <p:txBody>
-          <a:bodyPr wrap="square">
-            <a:spAutoFit/>
-          </a:bodyPr>
-          <a:lstStyle/>
-          <a:p>
-            <a:pPr marL="292608" indent="-292608">
-              <a:lnSpc>
-                <a:spcPct val="108000"/>
-              </a:lnSpc>
-              <a:spcAft>
-                <a:spcPts val="600"/>
-              </a:spcAft>
-              <a:buClr>
-                <a:srgbClr val="1E6FE8"/>
-              </a:buClr>
-              <a:buChar char="•"/>
-            </a:pPr>
-            <a:r>
-              <a:rPr sz="2100" b="0" i="0">
-                <a:solidFill>
-                  <a:srgbClr val="0F1C3F"/>
-                </a:solidFill>
-                <a:latin typeface="Helvetica"/>
-              </a:rPr>
-              <a:t>Ảnh, truy vấn → vector CLIP</a:t>
-            </a:r>
-          </a:p>
-          <a:p>
-            <a:pPr marL="292608" indent="-292608">
-              <a:lnSpc>
-                <a:spcPct val="108000"/>
-              </a:lnSpc>
-              <a:spcAft>
-                <a:spcPts val="600"/>
-              </a:spcAft>
-              <a:buClr>
-                <a:srgbClr val="1E6FE8"/>
-              </a:buClr>
-              <a:buChar char="•"/>
-            </a:pPr>
-            <a:r>
-              <a:rPr sz="2100" b="0" i="0">
-                <a:solidFill>
-                  <a:srgbClr val="0F1C3F"/>
-                </a:solidFill>
-                <a:latin typeface="Helvetica"/>
-              </a:rPr>
-              <a:t>Xếp hạng theo cosine</a:t>
-            </a:r>
-          </a:p>
-        </p:txBody>
-      </p:sp>
-      <p:sp>
-        <p:nvSpPr>
-          <p:cNvPr id="15" name="TextBox 14"/>
-          <p:cNvSpPr txBox="1"/>
-          <p:nvPr/>
-        </p:nvSpPr>
-        <p:spPr>
-          <a:xfrm>
-            <a:off x="548640" y="5303520"/>
-            <a:ext cx="11064240" cy="548640"/>
-          </a:xfrm>
-          <a:prstGeom prst="rect">
-            <a:avLst/>
-          </a:prstGeom>
-          <a:noFill/>
-        </p:spPr>
-        <p:txBody>
-          <a:bodyPr wrap="square" lIns="45720" tIns="27432" rIns="45720" bIns="27432" anchor="t">
-            <a:spAutoFit/>
-          </a:bodyPr>
-          <a:lstStyle/>
-          <a:p>
-            <a:pPr algn="l">
-              <a:lnSpc>
-                <a:spcPct val="110000"/>
-              </a:lnSpc>
-            </a:pPr>
-            <a:r>
-              <a:rPr sz="2200" b="1" i="0">
-                <a:solidFill>
-                  <a:srgbClr val="144FB0"/>
-                </a:solidFill>
-                <a:latin typeface="Helvetica"/>
-              </a:rPr>
-              <a:t>Nhóm báo cáo R@10, R@50 trên FashionIQ và mAP@K trên CIRCO</a:t>
-            </a:r>
-          </a:p>
-        </p:txBody>
-      </p:sp>
+        </p:spPr>
+      </p:pic>
     </p:spTree>
   </p:cSld>
   <p:clrMapOvr>
@@ -12524,8 +10637,8 @@
         </p:nvSpPr>
         <p:spPr>
           <a:xfrm>
-            <a:off x="9692640" y="-2194560"/>
-            <a:ext cx="4206240" cy="4206240"/>
+            <a:off x="9966960" y="4389120"/>
+            <a:ext cx="3474720" cy="3474720"/>
           </a:xfrm>
           <a:prstGeom prst="ellipse">
             <a:avLst/>
@@ -12569,7 +10682,7 @@
         </p:nvSpPr>
         <p:spPr>
           <a:xfrm>
-            <a:off x="11201400" y="502920"/>
+            <a:off x="11704320" y="3840480"/>
             <a:ext cx="411480" cy="411480"/>
           </a:xfrm>
           <a:prstGeom prst="ellipse">
@@ -12640,7 +10753,7 @@
                 </a:solidFill>
                 <a:latin typeface="Helvetica"/>
               </a:rPr>
-              <a:t>Ảnh được biến thành một “từ giả” [$] trong câu truy vấn</a:t>
+              <a:t>LinCIR học từ giả chỉ bằng văn bản nhờ Self-Masking Projection</a:t>
             </a:r>
           </a:p>
         </p:txBody>
@@ -12686,7 +10799,7 @@
       </p:sp>
       <p:pic>
         <p:nvPicPr>
-          <p:cNvPr id="6" name="Picture 5" descr="lincir_infer_slide.png"/>
+          <p:cNvPr id="6" name="Picture 5" descr="lincir_train_slide.png"/>
           <p:cNvPicPr>
             <a:picLocks noChangeAspect="1"/>
           </p:cNvPicPr>
@@ -12700,8 +10813,8 @@
         </p:blipFill>
         <p:spPr>
           <a:xfrm>
-            <a:off x="548640" y="1828800"/>
-            <a:ext cx="11064240" cy="3512236"/>
+            <a:off x="1097280" y="1600200"/>
+            <a:ext cx="9966960" cy="4705404"/>
           </a:xfrm>
           <a:prstGeom prst="rect">
             <a:avLst/>
@@ -12761,8 +10874,8 @@
         </p:nvSpPr>
         <p:spPr>
           <a:xfrm>
-            <a:off x="-1828800" y="-1828800"/>
-            <a:ext cx="3657600" cy="3657600"/>
+            <a:off x="10058400" y="-2103120"/>
+            <a:ext cx="4023360" cy="4023360"/>
           </a:xfrm>
           <a:prstGeom prst="ellipse">
             <a:avLst/>
@@ -12806,7 +10919,7 @@
         </p:nvSpPr>
         <p:spPr>
           <a:xfrm>
-            <a:off x="54864" y="3108960"/>
+            <a:off x="11247120" y="502920"/>
             <a:ext cx="411480" cy="411480"/>
           </a:xfrm>
           <a:prstGeom prst="ellipse">
@@ -12877,7 +10990,7 @@
                 </a:solidFill>
                 <a:latin typeface="Helvetica"/>
               </a:rPr>
-              <a:t>Pic2Word và SEARLE học với câu mẫu cố định và cần ảnh</a:t>
+              <a:t>Cải tiến A: thêm InfoNCE để từ giả phân biệt được các câu</a:t>
             </a:r>
           </a:p>
         </p:txBody>
@@ -12930,7 +11043,7 @@
         <p:spPr>
           <a:xfrm>
             <a:off x="548640" y="1737360"/>
-            <a:ext cx="5394960" cy="2743200"/>
+            <a:ext cx="5577840" cy="2011680"/>
           </a:xfrm>
           <a:prstGeom prst="roundRect">
             <a:avLst>
@@ -12977,7 +11090,7 @@
         <p:spPr>
           <a:xfrm>
             <a:off x="777240" y="1901952"/>
-            <a:ext cx="4937760" cy="502920"/>
+            <a:ext cx="5120640" cy="502920"/>
           </a:xfrm>
           <a:prstGeom prst="rect">
             <a:avLst/>
@@ -13002,7 +11115,7 @@
                 </a:solidFill>
                 <a:latin typeface="Helvetica"/>
               </a:rPr>
-              <a:t>Câu mẫu cố định</a:t>
+              <a:t>Vấn đề</a:t>
             </a:r>
           </a:p>
         </p:txBody>
@@ -13016,7 +11129,7 @@
         <p:spPr>
           <a:xfrm>
             <a:off x="777240" y="2468880"/>
-            <a:ext cx="4937760" cy="1874519"/>
+            <a:ext cx="5120640" cy="1143000"/>
           </a:xfrm>
           <a:prstGeom prst="rect">
             <a:avLst/>
@@ -13039,6 +11152,7 @@
               <a:buClr>
                 <a:srgbClr val="1E6FE8"/>
               </a:buClr>
+              <a:buFont typeface="Helvetica"/>
               <a:buChar char="•"/>
             </a:pPr>
             <a:r>
@@ -13048,7 +11162,7 @@
                 </a:solidFill>
                 <a:latin typeface="Helvetica"/>
               </a:rPr>
-              <a:t>Chỉ học trên “a photo of [$]”</a:t>
+              <a:t>MSE không phạt khi câu đã che gần cả các câu khác</a:t>
             </a:r>
           </a:p>
           <a:p>
@@ -13062,6 +11176,7 @@
               <a:buClr>
                 <a:srgbClr val="1E6FE8"/>
               </a:buClr>
+              <a:buFont typeface="Helvetica"/>
               <a:buChar char="•"/>
             </a:pPr>
             <a:r>
@@ -13071,9 +11186,118 @@
                 </a:solidFill>
                 <a:latin typeface="Helvetica"/>
               </a:rPr>
-              <a:t>Kém với câu điều chỉnh phức tạp</a:t>
-            </a:r>
-          </a:p>
+              <a:t>Nhưng đánh giá là bài toán xếp hạng</a:t>
+            </a:r>
+          </a:p>
+        </p:txBody>
+      </p:sp>
+      <p:sp>
+        <p:nvSpPr>
+          <p:cNvPr id="9" name="Rounded Rectangle 8"/>
+          <p:cNvSpPr/>
+          <p:nvPr/>
+        </p:nvSpPr>
+        <p:spPr>
+          <a:xfrm>
+            <a:off x="548640" y="3931920"/>
+            <a:ext cx="5577840" cy="2011680"/>
+          </a:xfrm>
+          <a:prstGeom prst="roundRect">
+            <a:avLst>
+              <a:gd name="adj" fmla="val 8000"/>
+            </a:avLst>
+          </a:prstGeom>
+          <a:solidFill>
+            <a:srgbClr val="D6E6FF"/>
+          </a:solidFill>
+          <a:ln>
+            <a:noFill/>
+          </a:ln>
+          <a:effectLst/>
+        </p:spPr>
+        <p:style>
+          <a:lnRef idx="1">
+            <a:schemeClr val="accent1"/>
+          </a:lnRef>
+          <a:fillRef idx="3">
+            <a:schemeClr val="accent1"/>
+          </a:fillRef>
+          <a:effectRef idx="2">
+            <a:schemeClr val="accent1"/>
+          </a:effectRef>
+          <a:fontRef idx="minor">
+            <a:schemeClr val="lt1"/>
+          </a:fontRef>
+        </p:style>
+        <p:txBody>
+          <a:bodyPr rtlCol="0" anchor="ctr"/>
+          <a:lstStyle/>
+          <a:p>
+            <a:pPr algn="ctr"/>
+            <a:endParaRPr/>
+          </a:p>
+        </p:txBody>
+      </p:sp>
+      <p:sp>
+        <p:nvSpPr>
+          <p:cNvPr id="10" name="TextBox 9"/>
+          <p:cNvSpPr txBox="1"/>
+          <p:nvPr/>
+        </p:nvSpPr>
+        <p:spPr>
+          <a:xfrm>
+            <a:off x="777240" y="4096511"/>
+            <a:ext cx="5120640" cy="502920"/>
+          </a:xfrm>
+          <a:prstGeom prst="rect">
+            <a:avLst/>
+          </a:prstGeom>
+          <a:noFill/>
+        </p:spPr>
+        <p:txBody>
+          <a:bodyPr wrap="square" lIns="45720" tIns="27432" rIns="45720" bIns="27432" anchor="t">
+            <a:spAutoFit/>
+          </a:bodyPr>
+          <a:lstStyle/>
+          <a:p>
+            <a:pPr algn="l">
+              <a:lnSpc>
+                <a:spcPct val="110000"/>
+              </a:lnSpc>
+            </a:pPr>
+            <a:r>
+              <a:rPr sz="2200" b="1" i="0">
+                <a:solidFill>
+                  <a:srgbClr val="144FB0"/>
+                </a:solidFill>
+                <a:latin typeface="Helvetica"/>
+              </a:rPr>
+              <a:t>Giải pháp</a:t>
+            </a:r>
+          </a:p>
+        </p:txBody>
+      </p:sp>
+      <p:sp>
+        <p:nvSpPr>
+          <p:cNvPr id="11" name="TextBox 10"/>
+          <p:cNvSpPr txBox="1"/>
+          <p:nvPr/>
+        </p:nvSpPr>
+        <p:spPr>
+          <a:xfrm>
+            <a:off x="777240" y="4663440"/>
+            <a:ext cx="5120640" cy="1143000"/>
+          </a:xfrm>
+          <a:prstGeom prst="rect">
+            <a:avLst/>
+          </a:prstGeom>
+          <a:noFill/>
+        </p:spPr>
+        <p:txBody>
+          <a:bodyPr wrap="square">
+            <a:spAutoFit/>
+          </a:bodyPr>
+          <a:lstStyle/>
           <a:p>
             <a:pPr marL="292608" indent="-292608">
               <a:lnSpc>
@@ -13085,127 +11309,19 @@
               <a:buClr>
                 <a:srgbClr val="1E6FE8"/>
               </a:buClr>
+              <a:buFont typeface="Helvetica"/>
               <a:buChar char="•"/>
             </a:pPr>
             <a:r>
-              <a:rPr sz="2100" b="0" i="0">
+              <a:rPr sz="2100" b="1" i="0">
                 <a:solidFill>
                   <a:srgbClr val="0F1C3F"/>
                 </a:solidFill>
                 <a:latin typeface="Helvetica"/>
               </a:rPr>
-              <a:t>Giảm khi tăng kích thước backbone</a:t>
-            </a:r>
-          </a:p>
-        </p:txBody>
-      </p:sp>
-      <p:sp>
-        <p:nvSpPr>
-          <p:cNvPr id="9" name="Rounded Rectangle 8"/>
-          <p:cNvSpPr/>
-          <p:nvPr/>
-        </p:nvSpPr>
-        <p:spPr>
-          <a:xfrm>
-            <a:off x="6217920" y="1737360"/>
-            <a:ext cx="5394960" cy="2743200"/>
-          </a:xfrm>
-          <a:prstGeom prst="roundRect">
-            <a:avLst>
-              <a:gd name="adj" fmla="val 8000"/>
-            </a:avLst>
-          </a:prstGeom>
-          <a:solidFill>
-            <a:srgbClr val="EAF2FF"/>
-          </a:solidFill>
-          <a:ln>
-            <a:noFill/>
-          </a:ln>
-          <a:effectLst/>
-        </p:spPr>
-        <p:style>
-          <a:lnRef idx="1">
-            <a:schemeClr val="accent1"/>
-          </a:lnRef>
-          <a:fillRef idx="3">
-            <a:schemeClr val="accent1"/>
-          </a:fillRef>
-          <a:effectRef idx="2">
-            <a:schemeClr val="accent1"/>
-          </a:effectRef>
-          <a:fontRef idx="minor">
-            <a:schemeClr val="lt1"/>
-          </a:fontRef>
-        </p:style>
-        <p:txBody>
-          <a:bodyPr rtlCol="0" anchor="ctr"/>
-          <a:lstStyle/>
-          <a:p>
-            <a:pPr algn="ctr"/>
-            <a:endParaRPr/>
-          </a:p>
-        </p:txBody>
-      </p:sp>
-      <p:sp>
-        <p:nvSpPr>
-          <p:cNvPr id="10" name="TextBox 9"/>
-          <p:cNvSpPr txBox="1"/>
-          <p:nvPr/>
-        </p:nvSpPr>
-        <p:spPr>
-          <a:xfrm>
-            <a:off x="6446520" y="1901952"/>
-            <a:ext cx="4937760" cy="502920"/>
-          </a:xfrm>
-          <a:prstGeom prst="rect">
-            <a:avLst/>
-          </a:prstGeom>
-          <a:noFill/>
-        </p:spPr>
-        <p:txBody>
-          <a:bodyPr wrap="square" lIns="45720" tIns="27432" rIns="45720" bIns="27432" anchor="t">
-            <a:spAutoFit/>
-          </a:bodyPr>
-          <a:lstStyle/>
-          <a:p>
-            <a:pPr algn="l">
-              <a:lnSpc>
-                <a:spcPct val="110000"/>
-              </a:lnSpc>
-            </a:pPr>
-            <a:r>
-              <a:rPr sz="2200" b="1" i="0">
-                <a:solidFill>
-                  <a:srgbClr val="144FB0"/>
-                </a:solidFill>
-                <a:latin typeface="Helvetica"/>
-              </a:rPr>
-              <a:t>Cần ảnh khi huấn luyện</a:t>
-            </a:r>
-          </a:p>
-        </p:txBody>
-      </p:sp>
-      <p:sp>
-        <p:nvSpPr>
-          <p:cNvPr id="11" name="TextBox 10"/>
-          <p:cNvSpPr txBox="1"/>
-          <p:nvPr/>
-        </p:nvSpPr>
-        <p:spPr>
-          <a:xfrm>
-            <a:off x="6446520" y="2468880"/>
-            <a:ext cx="4937760" cy="1874519"/>
-          </a:xfrm>
-          <a:prstGeom prst="rect">
-            <a:avLst/>
-          </a:prstGeom>
-          <a:noFill/>
-        </p:spPr>
-        <p:txBody>
-          <a:bodyPr wrap="square">
-            <a:spAutoFit/>
-          </a:bodyPr>
-          <a:lstStyle/>
+              <a:t>L = L_SMP + 0,5 · InfoNCE</a:t>
+            </a:r>
+          </a:p>
           <a:p>
             <a:pPr marL="292608" indent="-292608">
               <a:lnSpc>
@@ -13217,6 +11333,7 @@
               <a:buClr>
                 <a:srgbClr val="1E6FE8"/>
               </a:buClr>
+              <a:buFont typeface="Helvetica"/>
               <a:buChar char="•"/>
             </a:pPr>
             <a:r>
@@ -13226,30 +11343,7 @@
                 </a:solidFill>
                 <a:latin typeface="Helvetica"/>
               </a:rPr>
-              <a:t>Chạy bộ mã hóa ảnh mỗi bước</a:t>
-            </a:r>
-          </a:p>
-          <a:p>
-            <a:pPr marL="292608" indent="-292608">
-              <a:lnSpc>
-                <a:spcPct val="108000"/>
-              </a:lnSpc>
-              <a:spcAft>
-                <a:spcPts val="600"/>
-              </a:spcAft>
-              <a:buClr>
-                <a:srgbClr val="1E6FE8"/>
-              </a:buClr>
-              <a:buChar char="•"/>
-            </a:pPr>
-            <a:r>
-              <a:rPr sz="2100" b="0" i="0">
-                <a:solidFill>
-                  <a:srgbClr val="0F1C3F"/>
-                </a:solidFill>
-                <a:latin typeface="Helvetica"/>
-              </a:rPr>
-              <a:t>Ảnh CC3M ≈ 430 GB, chú thích 125 MB</a:t>
+              <a:t>InfoNCE kéo về câu gốc, đẩy xa 511 câu khác (τ = 0,07)</a:t>
             </a:r>
           </a:p>
         </p:txBody>
@@ -13262,8 +11356,8 @@
         </p:nvSpPr>
         <p:spPr>
           <a:xfrm>
-            <a:off x="548640" y="4846320"/>
-            <a:ext cx="11064240" cy="914400"/>
+            <a:off x="6675120" y="1828800"/>
+            <a:ext cx="4754880" cy="868680"/>
           </a:xfrm>
           <a:prstGeom prst="rect">
             <a:avLst/>
@@ -13282,22 +11376,130 @@
               </a:lnSpc>
             </a:pPr>
             <a:r>
-              <a:rPr sz="2400" b="1" i="0">
-                <a:solidFill>
-                  <a:srgbClr val="144FB0"/>
-                </a:solidFill>
-                <a:latin typeface="Helvetica"/>
-              </a:rPr>
-              <a:t>LinCIR bỏ cả hai hạn chế: </a:t>
-            </a:r>
-            <a:r>
-              <a:rPr sz="2400" b="0" i="0">
-                <a:solidFill>
-                  <a:srgbClr val="0F1C3F"/>
-                </a:solidFill>
-                <a:latin typeface="Helvetica"/>
-              </a:rPr>
-              <a:t>chỉ huấn luyện bằng văn bản tự nhiên đa dạng</a:t>
+              <a:rPr sz="4800" b="1" i="0">
+                <a:solidFill>
+                  <a:srgbClr val="1E6FE8"/>
+                </a:solidFill>
+                <a:latin typeface="Helvetica"/>
+              </a:rPr>
+              <a:t>+2%</a:t>
+            </a:r>
+          </a:p>
+        </p:txBody>
+      </p:sp>
+      <p:sp>
+        <p:nvSpPr>
+          <p:cNvPr id="13" name="TextBox 12"/>
+          <p:cNvSpPr txBox="1"/>
+          <p:nvPr/>
+        </p:nvSpPr>
+        <p:spPr>
+          <a:xfrm>
+            <a:off x="6675120" y="2697480"/>
+            <a:ext cx="4754880" cy="777240"/>
+          </a:xfrm>
+          <a:prstGeom prst="rect">
+            <a:avLst/>
+          </a:prstGeom>
+          <a:noFill/>
+        </p:spPr>
+        <p:txBody>
+          <a:bodyPr wrap="square" lIns="45720" tIns="27432" rIns="45720" bIns="27432" anchor="t">
+            <a:spAutoFit/>
+          </a:bodyPr>
+          <a:lstStyle/>
+          <a:p>
+            <a:pPr algn="l">
+              <a:lnSpc>
+                <a:spcPct val="110000"/>
+              </a:lnSpc>
+            </a:pPr>
+            <a:r>
+              <a:rPr sz="2000" b="0" i="0">
+                <a:solidFill>
+                  <a:srgbClr val="5B6B82"/>
+                </a:solidFill>
+                <a:latin typeface="Helvetica"/>
+              </a:rPr>
+              <a:t>thời gian mỗi bước tăng 2% (1,474 so với 1,448 giây)</a:t>
+            </a:r>
+          </a:p>
+        </p:txBody>
+      </p:sp>
+      <p:sp>
+        <p:nvSpPr>
+          <p:cNvPr id="14" name="TextBox 13"/>
+          <p:cNvSpPr txBox="1"/>
+          <p:nvPr/>
+        </p:nvSpPr>
+        <p:spPr>
+          <a:xfrm>
+            <a:off x="6675120" y="3931920"/>
+            <a:ext cx="4754880" cy="868680"/>
+          </a:xfrm>
+          <a:prstGeom prst="rect">
+            <a:avLst/>
+          </a:prstGeom>
+          <a:noFill/>
+        </p:spPr>
+        <p:txBody>
+          <a:bodyPr wrap="square" lIns="45720" tIns="27432" rIns="45720" bIns="27432" anchor="t">
+            <a:spAutoFit/>
+          </a:bodyPr>
+          <a:lstStyle/>
+          <a:p>
+            <a:pPr algn="l">
+              <a:lnSpc>
+                <a:spcPct val="110000"/>
+              </a:lnSpc>
+            </a:pPr>
+            <a:r>
+              <a:rPr sz="4800" b="1" i="0">
+                <a:solidFill>
+                  <a:srgbClr val="1E6FE8"/>
+                </a:solidFill>
+                <a:latin typeface="Helvetica"/>
+              </a:rPr>
+              <a:t>25,54</a:t>
+            </a:r>
+          </a:p>
+        </p:txBody>
+      </p:sp>
+      <p:sp>
+        <p:nvSpPr>
+          <p:cNvPr id="15" name="TextBox 14"/>
+          <p:cNvSpPr txBox="1"/>
+          <p:nvPr/>
+        </p:nvSpPr>
+        <p:spPr>
+          <a:xfrm>
+            <a:off x="6675120" y="4800600"/>
+            <a:ext cx="4754880" cy="777240"/>
+          </a:xfrm>
+          <a:prstGeom prst="rect">
+            <a:avLst/>
+          </a:prstGeom>
+          <a:noFill/>
+        </p:spPr>
+        <p:txBody>
+          <a:bodyPr wrap="square" lIns="45720" tIns="27432" rIns="45720" bIns="27432" anchor="t">
+            <a:spAutoFit/>
+          </a:bodyPr>
+          <a:lstStyle/>
+          <a:p>
+            <a:pPr algn="l">
+              <a:lnSpc>
+                <a:spcPct val="110000"/>
+              </a:lnSpc>
+            </a:pPr>
+            <a:r>
+              <a:rPr sz="2000" b="0" i="0">
+                <a:solidFill>
+                  <a:srgbClr val="5B6B82"/>
+                </a:solidFill>
+                <a:latin typeface="Helvetica"/>
+              </a:rPr>
+              <a:t>FashionIQ R@10 trung bình của A, thấp hơn baseline 25,90</a:t>
             </a:r>
           </a:p>
         </p:txBody>
@@ -13355,8 +11557,8 @@
         </p:nvSpPr>
         <p:spPr>
           <a:xfrm>
-            <a:off x="9966960" y="4389120"/>
-            <a:ext cx="3474720" cy="3474720"/>
+            <a:off x="-1828800" y="4114800"/>
+            <a:ext cx="3840480" cy="3840480"/>
           </a:xfrm>
           <a:prstGeom prst="ellipse">
             <a:avLst/>
@@ -13400,7 +11602,7 @@
         </p:nvSpPr>
         <p:spPr>
           <a:xfrm>
-            <a:off x="11704320" y="3840480"/>
+            <a:off x="54864" y="6035040"/>
             <a:ext cx="411480" cy="411480"/>
           </a:xfrm>
           <a:prstGeom prst="ellipse">
@@ -13471,7 +11673,7 @@
                 </a:solidFill>
                 <a:latin typeface="Helvetica"/>
               </a:rPr>
-              <a:t>LinCIR học từ giả chỉ bằng văn bản nhờ Self-Masking Projection</a:t>
+              <a:t>Cải tiến B: dịch nhiễu theo hướng của modality gap</a:t>
             </a:r>
           </a:p>
         </p:txBody>
@@ -13515,30 +11717,476 @@
           </a:p>
         </p:txBody>
       </p:sp>
-      <p:pic>
-        <p:nvPicPr>
-          <p:cNvPr id="6" name="Picture 5" descr="lincir_train_slide.png"/>
-          <p:cNvPicPr>
-            <a:picLocks noChangeAspect="1"/>
-          </p:cNvPicPr>
-          <p:nvPr/>
-        </p:nvPicPr>
-        <p:blipFill>
-          <a:blip r:embed="rId3"/>
-          <a:stretch>
-            <a:fillRect/>
-          </a:stretch>
-        </p:blipFill>
-        <p:spPr>
-          <a:xfrm>
-            <a:off x="1097280" y="1600200"/>
-            <a:ext cx="9966960" cy="4705404"/>
+      <p:sp>
+        <p:nvSpPr>
+          <p:cNvPr id="6" name="Rounded Rectangle 5"/>
+          <p:cNvSpPr/>
+          <p:nvPr/>
+        </p:nvSpPr>
+        <p:spPr>
+          <a:xfrm>
+            <a:off x="548640" y="1737360"/>
+            <a:ext cx="5577840" cy="2011680"/>
+          </a:xfrm>
+          <a:prstGeom prst="roundRect">
+            <a:avLst>
+              <a:gd name="adj" fmla="val 8000"/>
+            </a:avLst>
+          </a:prstGeom>
+          <a:solidFill>
+            <a:srgbClr val="EAF2FF"/>
+          </a:solidFill>
+          <a:ln>
+            <a:noFill/>
+          </a:ln>
+          <a:effectLst/>
+        </p:spPr>
+        <p:style>
+          <a:lnRef idx="1">
+            <a:schemeClr val="accent1"/>
+          </a:lnRef>
+          <a:fillRef idx="3">
+            <a:schemeClr val="accent1"/>
+          </a:fillRef>
+          <a:effectRef idx="2">
+            <a:schemeClr val="accent1"/>
+          </a:effectRef>
+          <a:fontRef idx="minor">
+            <a:schemeClr val="lt1"/>
+          </a:fontRef>
+        </p:style>
+        <p:txBody>
+          <a:bodyPr rtlCol="0" anchor="ctr"/>
+          <a:lstStyle/>
+          <a:p>
+            <a:pPr algn="ctr"/>
+            <a:endParaRPr/>
+          </a:p>
+        </p:txBody>
+      </p:sp>
+      <p:sp>
+        <p:nvSpPr>
+          <p:cNvPr id="7" name="TextBox 6"/>
+          <p:cNvSpPr txBox="1"/>
+          <p:nvPr/>
+        </p:nvSpPr>
+        <p:spPr>
+          <a:xfrm>
+            <a:off x="777240" y="1901952"/>
+            <a:ext cx="5120640" cy="502920"/>
           </a:xfrm>
           <a:prstGeom prst="rect">
             <a:avLst/>
           </a:prstGeom>
-        </p:spPr>
-      </p:pic>
+          <a:noFill/>
+        </p:spPr>
+        <p:txBody>
+          <a:bodyPr wrap="square" lIns="45720" tIns="27432" rIns="45720" bIns="27432" anchor="t">
+            <a:spAutoFit/>
+          </a:bodyPr>
+          <a:lstStyle/>
+          <a:p>
+            <a:pPr algn="l">
+              <a:lnSpc>
+                <a:spcPct val="110000"/>
+              </a:lnSpc>
+            </a:pPr>
+            <a:r>
+              <a:rPr sz="2200" b="1" i="0">
+                <a:solidFill>
+                  <a:srgbClr val="144FB0"/>
+                </a:solidFill>
+                <a:latin typeface="Helvetica"/>
+              </a:rPr>
+              <a:t>Nhiễu của LinCIR</a:t>
+            </a:r>
+          </a:p>
+        </p:txBody>
+      </p:sp>
+      <p:sp>
+        <p:nvSpPr>
+          <p:cNvPr id="8" name="TextBox 7"/>
+          <p:cNvSpPr txBox="1"/>
+          <p:nvPr/>
+        </p:nvSpPr>
+        <p:spPr>
+          <a:xfrm>
+            <a:off x="777240" y="2468880"/>
+            <a:ext cx="5120640" cy="1143000"/>
+          </a:xfrm>
+          <a:prstGeom prst="rect">
+            <a:avLst/>
+          </a:prstGeom>
+          <a:noFill/>
+        </p:spPr>
+        <p:txBody>
+          <a:bodyPr wrap="square">
+            <a:spAutoFit/>
+          </a:bodyPr>
+          <a:lstStyle/>
+          <a:p>
+            <a:pPr marL="292608" indent="-292608">
+              <a:lnSpc>
+                <a:spcPct val="108000"/>
+              </a:lnSpc>
+              <a:spcAft>
+                <a:spcPts val="600"/>
+              </a:spcAft>
+              <a:buClr>
+                <a:srgbClr val="1E6FE8"/>
+              </a:buClr>
+              <a:buFont typeface="Helvetica"/>
+              <a:buChar char="•"/>
+            </a:pPr>
+            <a:r>
+              <a:rPr sz="2100" b="0" i="0">
+                <a:solidFill>
+                  <a:srgbClr val="0F1C3F"/>
+                </a:solidFill>
+                <a:latin typeface="Helvetica"/>
+              </a:rPr>
+              <a:t>Nhiễu đều theo mọi hướng</a:t>
+            </a:r>
+          </a:p>
+          <a:p>
+            <a:pPr marL="292608" indent="-292608">
+              <a:lnSpc>
+                <a:spcPct val="108000"/>
+              </a:lnSpc>
+              <a:spcAft>
+                <a:spcPts val="600"/>
+              </a:spcAft>
+              <a:buClr>
+                <a:srgbClr val="1E6FE8"/>
+              </a:buClr>
+              <a:buFont typeface="Helvetica"/>
+              <a:buChar char="•"/>
+            </a:pPr>
+            <a:r>
+              <a:rPr sz="2100" b="0" i="0">
+                <a:solidFill>
+                  <a:srgbClr val="0F1C3F"/>
+                </a:solidFill>
+                <a:latin typeface="Helvetica"/>
+              </a:rPr>
+              <a:t>Không dịch về phía vùng ảnh</a:t>
+            </a:r>
+          </a:p>
+        </p:txBody>
+      </p:sp>
+      <p:sp>
+        <p:nvSpPr>
+          <p:cNvPr id="9" name="Rounded Rectangle 8"/>
+          <p:cNvSpPr/>
+          <p:nvPr/>
+        </p:nvSpPr>
+        <p:spPr>
+          <a:xfrm>
+            <a:off x="548640" y="3931920"/>
+            <a:ext cx="5577840" cy="2011680"/>
+          </a:xfrm>
+          <a:prstGeom prst="roundRect">
+            <a:avLst>
+              <a:gd name="adj" fmla="val 8000"/>
+            </a:avLst>
+          </a:prstGeom>
+          <a:solidFill>
+            <a:srgbClr val="D6E6FF"/>
+          </a:solidFill>
+          <a:ln>
+            <a:noFill/>
+          </a:ln>
+          <a:effectLst/>
+        </p:spPr>
+        <p:style>
+          <a:lnRef idx="1">
+            <a:schemeClr val="accent1"/>
+          </a:lnRef>
+          <a:fillRef idx="3">
+            <a:schemeClr val="accent1"/>
+          </a:fillRef>
+          <a:effectRef idx="2">
+            <a:schemeClr val="accent1"/>
+          </a:effectRef>
+          <a:fontRef idx="minor">
+            <a:schemeClr val="lt1"/>
+          </a:fontRef>
+        </p:style>
+        <p:txBody>
+          <a:bodyPr rtlCol="0" anchor="ctr"/>
+          <a:lstStyle/>
+          <a:p>
+            <a:pPr algn="ctr"/>
+            <a:endParaRPr/>
+          </a:p>
+        </p:txBody>
+      </p:sp>
+      <p:sp>
+        <p:nvSpPr>
+          <p:cNvPr id="10" name="TextBox 9"/>
+          <p:cNvSpPr txBox="1"/>
+          <p:nvPr/>
+        </p:nvSpPr>
+        <p:spPr>
+          <a:xfrm>
+            <a:off x="777240" y="4096511"/>
+            <a:ext cx="5120640" cy="502920"/>
+          </a:xfrm>
+          <a:prstGeom prst="rect">
+            <a:avLst/>
+          </a:prstGeom>
+          <a:noFill/>
+        </p:spPr>
+        <p:txBody>
+          <a:bodyPr wrap="square" lIns="45720" tIns="27432" rIns="45720" bIns="27432" anchor="t">
+            <a:spAutoFit/>
+          </a:bodyPr>
+          <a:lstStyle/>
+          <a:p>
+            <a:pPr algn="l">
+              <a:lnSpc>
+                <a:spcPct val="110000"/>
+              </a:lnSpc>
+            </a:pPr>
+            <a:r>
+              <a:rPr sz="2200" b="1" i="0">
+                <a:solidFill>
+                  <a:srgbClr val="144FB0"/>
+                </a:solidFill>
+                <a:latin typeface="Helvetica"/>
+              </a:rPr>
+              <a:t>Nhiễu có hướng</a:t>
+            </a:r>
+          </a:p>
+        </p:txBody>
+      </p:sp>
+      <p:sp>
+        <p:nvSpPr>
+          <p:cNvPr id="11" name="TextBox 10"/>
+          <p:cNvSpPr txBox="1"/>
+          <p:nvPr/>
+        </p:nvSpPr>
+        <p:spPr>
+          <a:xfrm>
+            <a:off x="777240" y="4663440"/>
+            <a:ext cx="5120640" cy="1143000"/>
+          </a:xfrm>
+          <a:prstGeom prst="rect">
+            <a:avLst/>
+          </a:prstGeom>
+          <a:noFill/>
+        </p:spPr>
+        <p:txBody>
+          <a:bodyPr wrap="square">
+            <a:spAutoFit/>
+          </a:bodyPr>
+          <a:lstStyle/>
+          <a:p>
+            <a:pPr marL="292608" indent="-292608">
+              <a:lnSpc>
+                <a:spcPct val="108000"/>
+              </a:lnSpc>
+              <a:spcAft>
+                <a:spcPts val="600"/>
+              </a:spcAft>
+              <a:buClr>
+                <a:srgbClr val="1E6FE8"/>
+              </a:buClr>
+              <a:buFont typeface="Helvetica"/>
+              <a:buChar char="•"/>
+            </a:pPr>
+            <a:r>
+              <a:rPr sz="2100" b="1" i="0">
+                <a:solidFill>
+                  <a:srgbClr val="0F1C3F"/>
+                </a:solidFill>
+                <a:latin typeface="Helvetica"/>
+              </a:rPr>
+              <a:t>n = 0,5 · Δ + u · ε</a:t>
+            </a:r>
+          </a:p>
+          <a:p>
+            <a:pPr marL="292608" indent="-292608">
+              <a:lnSpc>
+                <a:spcPct val="108000"/>
+              </a:lnSpc>
+              <a:spcAft>
+                <a:spcPts val="600"/>
+              </a:spcAft>
+              <a:buClr>
+                <a:srgbClr val="1E6FE8"/>
+              </a:buClr>
+              <a:buFont typeface="Helvetica"/>
+              <a:buChar char="•"/>
+            </a:pPr>
+            <a:r>
+              <a:rPr sz="2100" b="0" i="0">
+                <a:solidFill>
+                  <a:srgbClr val="0F1C3F"/>
+                </a:solidFill>
+                <a:latin typeface="Helvetica"/>
+              </a:rPr>
+              <a:t>Δ = tâm ảnh − tâm văn bản</a:t>
+            </a:r>
+          </a:p>
+        </p:txBody>
+      </p:sp>
+      <p:sp>
+        <p:nvSpPr>
+          <p:cNvPr id="12" name="TextBox 11"/>
+          <p:cNvSpPr txBox="1"/>
+          <p:nvPr/>
+        </p:nvSpPr>
+        <p:spPr>
+          <a:xfrm>
+            <a:off x="6675120" y="1828800"/>
+            <a:ext cx="4754880" cy="868680"/>
+          </a:xfrm>
+          <a:prstGeom prst="rect">
+            <a:avLst/>
+          </a:prstGeom>
+          <a:noFill/>
+        </p:spPr>
+        <p:txBody>
+          <a:bodyPr wrap="square" lIns="45720" tIns="27432" rIns="45720" bIns="27432" anchor="t">
+            <a:spAutoFit/>
+          </a:bodyPr>
+          <a:lstStyle/>
+          <a:p>
+            <a:pPr algn="l">
+              <a:lnSpc>
+                <a:spcPct val="110000"/>
+              </a:lnSpc>
+            </a:pPr>
+            <a:r>
+              <a:rPr sz="4800" b="1" i="0">
+                <a:solidFill>
+                  <a:srgbClr val="1E6FE8"/>
+                </a:solidFill>
+                <a:latin typeface="Helvetica"/>
+              </a:rPr>
+              <a:t>13,87</a:t>
+            </a:r>
+          </a:p>
+        </p:txBody>
+      </p:sp>
+      <p:sp>
+        <p:nvSpPr>
+          <p:cNvPr id="13" name="TextBox 12"/>
+          <p:cNvSpPr txBox="1"/>
+          <p:nvPr/>
+        </p:nvSpPr>
+        <p:spPr>
+          <a:xfrm>
+            <a:off x="6675120" y="2697480"/>
+            <a:ext cx="4754880" cy="777240"/>
+          </a:xfrm>
+          <a:prstGeom prst="rect">
+            <a:avLst/>
+          </a:prstGeom>
+          <a:noFill/>
+        </p:spPr>
+        <p:txBody>
+          <a:bodyPr wrap="square" lIns="45720" tIns="27432" rIns="45720" bIns="27432" anchor="t">
+            <a:spAutoFit/>
+          </a:bodyPr>
+          <a:lstStyle/>
+          <a:p>
+            <a:pPr algn="l">
+              <a:lnSpc>
+                <a:spcPct val="110000"/>
+              </a:lnSpc>
+            </a:pPr>
+            <a:r>
+              <a:rPr sz="2000" b="0" i="0">
+                <a:solidFill>
+                  <a:srgbClr val="5B6B82"/>
+                </a:solidFill>
+                <a:latin typeface="Helvetica"/>
+              </a:rPr>
+              <a:t>độ lớn của Δ, tính trên 5.000 cặp ảnh – chú thích COCO</a:t>
+            </a:r>
+          </a:p>
+        </p:txBody>
+      </p:sp>
+      <p:sp>
+        <p:nvSpPr>
+          <p:cNvPr id="14" name="TextBox 13"/>
+          <p:cNvSpPr txBox="1"/>
+          <p:nvPr/>
+        </p:nvSpPr>
+        <p:spPr>
+          <a:xfrm>
+            <a:off x="6675120" y="3931920"/>
+            <a:ext cx="4754880" cy="868680"/>
+          </a:xfrm>
+          <a:prstGeom prst="rect">
+            <a:avLst/>
+          </a:prstGeom>
+          <a:noFill/>
+        </p:spPr>
+        <p:txBody>
+          <a:bodyPr wrap="square" lIns="45720" tIns="27432" rIns="45720" bIns="27432" anchor="t">
+            <a:spAutoFit/>
+          </a:bodyPr>
+          <a:lstStyle/>
+          <a:p>
+            <a:pPr algn="l">
+              <a:lnSpc>
+                <a:spcPct val="110000"/>
+              </a:lnSpc>
+            </a:pPr>
+            <a:r>
+              <a:rPr sz="4800" b="1" i="0">
+                <a:solidFill>
+                  <a:srgbClr val="1E6FE8"/>
+                </a:solidFill>
+                <a:latin typeface="Helvetica"/>
+              </a:rPr>
+              <a:t>COCO val</a:t>
+            </a:r>
+          </a:p>
+        </p:txBody>
+      </p:sp>
+      <p:sp>
+        <p:nvSpPr>
+          <p:cNvPr id="15" name="TextBox 14"/>
+          <p:cNvSpPr txBox="1"/>
+          <p:nvPr/>
+        </p:nvSpPr>
+        <p:spPr>
+          <a:xfrm>
+            <a:off x="6675120" y="4800600"/>
+            <a:ext cx="4754880" cy="777240"/>
+          </a:xfrm>
+          <a:prstGeom prst="rect">
+            <a:avLst/>
+          </a:prstGeom>
+          <a:noFill/>
+        </p:spPr>
+        <p:txBody>
+          <a:bodyPr wrap="square" lIns="45720" tIns="27432" rIns="45720" bIns="27432" anchor="t">
+            <a:spAutoFit/>
+          </a:bodyPr>
+          <a:lstStyle/>
+          <a:p>
+            <a:pPr algn="l">
+              <a:lnSpc>
+                <a:spcPct val="110000"/>
+              </a:lnSpc>
+            </a:pPr>
+            <a:r>
+              <a:rPr sz="2000" b="0" i="0">
+                <a:solidFill>
+                  <a:srgbClr val="5B6B82"/>
+                </a:solidFill>
+                <a:latin typeface="Helvetica"/>
+              </a:rPr>
+              <a:t>tập ảnh khác hẳn ảnh dùng để đánh giá (FashionIQ, CIRCO)</a:t>
+            </a:r>
+          </a:p>
+        </p:txBody>
+      </p:sp>
     </p:spTree>
   </p:cSld>
   <p:clrMapOvr>
@@ -13592,8 +12240,8 @@
         </p:nvSpPr>
         <p:spPr>
           <a:xfrm>
-            <a:off x="10241280" y="-2011680"/>
-            <a:ext cx="3840480" cy="3840480"/>
+            <a:off x="9966960" y="4206240"/>
+            <a:ext cx="3657600" cy="3657600"/>
           </a:xfrm>
           <a:prstGeom prst="ellipse">
             <a:avLst/>
@@ -13637,7 +12285,7 @@
         </p:nvSpPr>
         <p:spPr>
           <a:xfrm>
-            <a:off x="11247120" y="502920"/>
+            <a:off x="11704320" y="3291840"/>
             <a:ext cx="411480" cy="411480"/>
           </a:xfrm>
           <a:prstGeom prst="ellipse">
@@ -13708,7 +12356,7 @@
                 </a:solidFill>
                 <a:latin typeface="Helvetica"/>
               </a:rPr>
-              <a:t>Nhiễu giúp φ dùng được vector ảnh dù hai miền lệch nhau</a:t>
+              <a:t>CIR là truy xuất có xếp hạng, đo bằng R@K và mAP@K</a:t>
             </a:r>
           </a:p>
         </p:txBody>
@@ -13754,170 +12402,14 @@
       </p:sp>
       <p:sp>
         <p:nvSpPr>
-          <p:cNvPr id="6" name="TextBox 5"/>
-          <p:cNvSpPr txBox="1"/>
-          <p:nvPr/>
-        </p:nvSpPr>
-        <p:spPr>
-          <a:xfrm>
-            <a:off x="731520" y="1828800"/>
-            <a:ext cx="3474720" cy="868680"/>
-          </a:xfrm>
-          <a:prstGeom prst="rect">
-            <a:avLst/>
-          </a:prstGeom>
-          <a:noFill/>
-        </p:spPr>
-        <p:txBody>
-          <a:bodyPr wrap="square" lIns="45720" tIns="27432" rIns="45720" bIns="27432" anchor="t">
-            <a:spAutoFit/>
-          </a:bodyPr>
-          <a:lstStyle/>
-          <a:p>
-            <a:pPr algn="l">
-              <a:lnSpc>
-                <a:spcPct val="110000"/>
-              </a:lnSpc>
-            </a:pPr>
-            <a:r>
-              <a:rPr sz="4800" b="1" i="0">
-                <a:solidFill>
-                  <a:srgbClr val="1E6FE8"/>
-                </a:solidFill>
-                <a:latin typeface="Helvetica"/>
-              </a:rPr>
-              <a:t>0,82</a:t>
-            </a:r>
-          </a:p>
-        </p:txBody>
-      </p:sp>
-      <p:sp>
-        <p:nvSpPr>
-          <p:cNvPr id="7" name="TextBox 6"/>
-          <p:cNvSpPr txBox="1"/>
-          <p:nvPr/>
-        </p:nvSpPr>
-        <p:spPr>
-          <a:xfrm>
-            <a:off x="731520" y="2697480"/>
-            <a:ext cx="3474720" cy="777240"/>
-          </a:xfrm>
-          <a:prstGeom prst="rect">
-            <a:avLst/>
-          </a:prstGeom>
-          <a:noFill/>
-        </p:spPr>
-        <p:txBody>
-          <a:bodyPr wrap="square" lIns="45720" tIns="27432" rIns="45720" bIns="27432" anchor="t">
-            <a:spAutoFit/>
-          </a:bodyPr>
-          <a:lstStyle/>
-          <a:p>
-            <a:pPr algn="l">
-              <a:lnSpc>
-                <a:spcPct val="110000"/>
-              </a:lnSpc>
-            </a:pPr>
-            <a:r>
-              <a:rPr sz="2000" b="0" i="0">
-                <a:solidFill>
-                  <a:srgbClr val="5B6B82"/>
-                </a:solidFill>
-                <a:latin typeface="Helvetica"/>
-              </a:rPr>
-              <a:t>khoảng cách tâm ảnh – văn bản</a:t>
-            </a:r>
-          </a:p>
-        </p:txBody>
-      </p:sp>
-      <p:sp>
-        <p:nvSpPr>
-          <p:cNvPr id="8" name="TextBox 7"/>
-          <p:cNvSpPr txBox="1"/>
-          <p:nvPr/>
-        </p:nvSpPr>
-        <p:spPr>
-          <a:xfrm>
-            <a:off x="4297680" y="1828800"/>
-            <a:ext cx="3474720" cy="868680"/>
-          </a:xfrm>
-          <a:prstGeom prst="rect">
-            <a:avLst/>
-          </a:prstGeom>
-          <a:noFill/>
-        </p:spPr>
-        <p:txBody>
-          <a:bodyPr wrap="square" lIns="45720" tIns="27432" rIns="45720" bIns="27432" anchor="t">
-            <a:spAutoFit/>
-          </a:bodyPr>
-          <a:lstStyle/>
-          <a:p>
-            <a:pPr algn="l">
-              <a:lnSpc>
-                <a:spcPct val="110000"/>
-              </a:lnSpc>
-            </a:pPr>
-            <a:r>
-              <a:rPr sz="4800" b="1" i="0">
-                <a:solidFill>
-                  <a:srgbClr val="1E6FE8"/>
-                </a:solidFill>
-                <a:latin typeface="Helvetica"/>
-              </a:rPr>
-              <a:t>0,26</a:t>
-            </a:r>
-          </a:p>
-        </p:txBody>
-      </p:sp>
-      <p:sp>
-        <p:nvSpPr>
-          <p:cNvPr id="9" name="TextBox 8"/>
-          <p:cNvSpPr txBox="1"/>
-          <p:nvPr/>
-        </p:nvSpPr>
-        <p:spPr>
-          <a:xfrm>
-            <a:off x="4297680" y="2697480"/>
-            <a:ext cx="3474720" cy="777240"/>
-          </a:xfrm>
-          <a:prstGeom prst="rect">
-            <a:avLst/>
-          </a:prstGeom>
-          <a:noFill/>
-        </p:spPr>
-        <p:txBody>
-          <a:bodyPr wrap="square" lIns="45720" tIns="27432" rIns="45720" bIns="27432" anchor="t">
-            <a:spAutoFit/>
-          </a:bodyPr>
-          <a:lstStyle/>
-          <a:p>
-            <a:pPr algn="l">
-              <a:lnSpc>
-                <a:spcPct val="110000"/>
-              </a:lnSpc>
-            </a:pPr>
-            <a:r>
-              <a:rPr sz="2000" b="0" i="0">
-                <a:solidFill>
-                  <a:srgbClr val="5B6B82"/>
-                </a:solidFill>
-                <a:latin typeface="Helvetica"/>
-              </a:rPr>
-              <a:t>cosine trung bình cặp ảnh – chú thích</a:t>
-            </a:r>
-          </a:p>
-        </p:txBody>
-      </p:sp>
-      <p:sp>
-        <p:nvSpPr>
-          <p:cNvPr id="10" name="Rounded Rectangle 9"/>
+          <p:cNvPr id="6" name="Rounded Rectangle 5"/>
           <p:cNvSpPr/>
           <p:nvPr/>
         </p:nvSpPr>
         <p:spPr>
           <a:xfrm>
-            <a:off x="7863840" y="1737360"/>
-            <a:ext cx="3749039" cy="2103120"/>
+            <a:off x="548640" y="1737360"/>
+            <a:ext cx="3566160" cy="3520440"/>
           </a:xfrm>
           <a:prstGeom prst="roundRect">
             <a:avLst>
@@ -13957,14 +12449,14 @@
       </p:sp>
       <p:sp>
         <p:nvSpPr>
-          <p:cNvPr id="11" name="TextBox 10"/>
+          <p:cNvPr id="7" name="TextBox 6"/>
           <p:cNvSpPr txBox="1"/>
           <p:nvPr/>
         </p:nvSpPr>
         <p:spPr>
           <a:xfrm>
-            <a:off x="8092440" y="1901952"/>
-            <a:ext cx="3291839" cy="502920"/>
+            <a:off x="777240" y="1901952"/>
+            <a:ext cx="3108960" cy="502920"/>
           </a:xfrm>
           <a:prstGeom prst="rect">
             <a:avLst/>
@@ -13989,21 +12481,21 @@
                 </a:solidFill>
                 <a:latin typeface="Helvetica"/>
               </a:rPr>
-              <a:t>Nhiễu của LinCIR</a:t>
-            </a:r>
-          </a:p>
-        </p:txBody>
-      </p:sp>
-      <p:sp>
-        <p:nvSpPr>
-          <p:cNvPr id="12" name="TextBox 11"/>
+              <a:t>Chương I</a:t>
+            </a:r>
+          </a:p>
+        </p:txBody>
+      </p:sp>
+      <p:sp>
+        <p:nvSpPr>
+          <p:cNvPr id="8" name="TextBox 7"/>
           <p:cNvSpPr txBox="1"/>
           <p:nvPr/>
         </p:nvSpPr>
         <p:spPr>
           <a:xfrm>
-            <a:off x="8092440" y="2468880"/>
-            <a:ext cx="3291839" cy="1234439"/>
+            <a:off x="777240" y="2468880"/>
+            <a:ext cx="3108960" cy="2423160"/>
           </a:xfrm>
           <a:prstGeom prst="rect">
             <a:avLst/>
@@ -14026,16 +12518,17 @@
               <a:buClr>
                 <a:srgbClr val="1E6FE8"/>
               </a:buClr>
+              <a:buFont typeface="Helvetica"/>
               <a:buChar char="•"/>
             </a:pPr>
             <a:r>
-              <a:rPr sz="2400" b="1" i="0">
+              <a:rPr sz="2100" b="0" i="0">
                 <a:solidFill>
                   <a:srgbClr val="0F1C3F"/>
                 </a:solidFill>
                 <a:latin typeface="Helvetica"/>
               </a:rPr>
-              <a:t>n = u · ε</a:t>
+              <a:t>Nhu cầu › truy vấn › danh sách xếp hạng</a:t>
             </a:r>
           </a:p>
           <a:p>
@@ -14049,6 +12542,7 @@
               <a:buClr>
                 <a:srgbClr val="1E6FE8"/>
               </a:buClr>
+              <a:buFont typeface="Helvetica"/>
               <a:buChar char="•"/>
             </a:pPr>
             <a:r>
@@ -14058,118 +12552,9 @@
                 </a:solidFill>
                 <a:latin typeface="Helvetica"/>
               </a:rPr>
-              <a:t>u ~ U(0,1), ε ~ N(0, I)</a:t>
-            </a:r>
-          </a:p>
-        </p:txBody>
-      </p:sp>
-      <p:sp>
-        <p:nvSpPr>
-          <p:cNvPr id="13" name="Rounded Rectangle 12"/>
-          <p:cNvSpPr/>
-          <p:nvPr/>
-        </p:nvSpPr>
-        <p:spPr>
-          <a:xfrm>
-            <a:off x="731520" y="4114800"/>
-            <a:ext cx="10881360" cy="1737360"/>
-          </a:xfrm>
-          <a:prstGeom prst="roundRect">
-            <a:avLst>
-              <a:gd name="adj" fmla="val 8000"/>
-            </a:avLst>
-          </a:prstGeom>
-          <a:solidFill>
-            <a:srgbClr val="EAF2FF"/>
-          </a:solidFill>
-          <a:ln>
-            <a:noFill/>
-          </a:ln>
-          <a:effectLst/>
-        </p:spPr>
-        <p:style>
-          <a:lnRef idx="1">
-            <a:schemeClr val="accent1"/>
-          </a:lnRef>
-          <a:fillRef idx="3">
-            <a:schemeClr val="accent1"/>
-          </a:fillRef>
-          <a:effectRef idx="2">
-            <a:schemeClr val="accent1"/>
-          </a:effectRef>
-          <a:fontRef idx="minor">
-            <a:schemeClr val="lt1"/>
-          </a:fontRef>
-        </p:style>
-        <p:txBody>
-          <a:bodyPr rtlCol="0" anchor="ctr"/>
-          <a:lstStyle/>
-          <a:p>
-            <a:pPr algn="ctr"/>
-            <a:endParaRPr/>
-          </a:p>
-        </p:txBody>
-      </p:sp>
-      <p:sp>
-        <p:nvSpPr>
-          <p:cNvPr id="14" name="TextBox 13"/>
-          <p:cNvSpPr txBox="1"/>
-          <p:nvPr/>
-        </p:nvSpPr>
-        <p:spPr>
-          <a:xfrm>
-            <a:off x="960120" y="4279392"/>
-            <a:ext cx="10424160" cy="502920"/>
-          </a:xfrm>
-          <a:prstGeom prst="rect">
-            <a:avLst/>
-          </a:prstGeom>
-          <a:noFill/>
-        </p:spPr>
-        <p:txBody>
-          <a:bodyPr wrap="square" lIns="45720" tIns="27432" rIns="45720" bIns="27432" anchor="t">
-            <a:spAutoFit/>
-          </a:bodyPr>
-          <a:lstStyle/>
-          <a:p>
-            <a:pPr algn="l">
-              <a:lnSpc>
-                <a:spcPct val="110000"/>
-              </a:lnSpc>
-            </a:pPr>
-            <a:r>
-              <a:rPr sz="2200" b="1" i="0">
-                <a:solidFill>
-                  <a:srgbClr val="144FB0"/>
-                </a:solidFill>
-                <a:latin typeface="Helvetica"/>
-              </a:rPr>
-              <a:t>Ý nghĩa</a:t>
-            </a:r>
-          </a:p>
-        </p:txBody>
-      </p:sp>
-      <p:sp>
-        <p:nvSpPr>
-          <p:cNvPr id="15" name="TextBox 14"/>
-          <p:cNvSpPr txBox="1"/>
-          <p:nvPr/>
-        </p:nvSpPr>
-        <p:spPr>
-          <a:xfrm>
-            <a:off x="960120" y="4846320"/>
-            <a:ext cx="10424160" cy="868680"/>
-          </a:xfrm>
-          <a:prstGeom prst="rect">
-            <a:avLst/>
-          </a:prstGeom>
-          <a:noFill/>
-        </p:spPr>
-        <p:txBody>
-          <a:bodyPr wrap="square">
-            <a:spAutoFit/>
-          </a:bodyPr>
-          <a:lstStyle/>
+              <a:t>Đánh giá: Precision, Recall</a:t>
+            </a:r>
+          </a:p>
           <a:p>
             <a:pPr marL="292608" indent="-292608">
               <a:lnSpc>
@@ -14181,6 +12566,7 @@
               <a:buClr>
                 <a:srgbClr val="1E6FE8"/>
               </a:buClr>
+              <a:buFont typeface="Helvetica"/>
               <a:buChar char="•"/>
             </a:pPr>
             <a:r>
@@ -14190,7 +12576,360 @@
                 </a:solidFill>
                 <a:latin typeface="Helvetica"/>
               </a:rPr>
-              <a:t>φ học trên vector văn bản có nhiễu nên vẫn hoạt động khi nhận vector ảnh</a:t>
+              <a:t>Boolean, chỉ mục ngược: khớp từ chính xác</a:t>
+            </a:r>
+          </a:p>
+        </p:txBody>
+      </p:sp>
+      <p:sp>
+        <p:nvSpPr>
+          <p:cNvPr id="9" name="Rounded Rectangle 8"/>
+          <p:cNvSpPr/>
+          <p:nvPr/>
+        </p:nvSpPr>
+        <p:spPr>
+          <a:xfrm>
+            <a:off x="4343400" y="1737360"/>
+            <a:ext cx="3566160" cy="3520440"/>
+          </a:xfrm>
+          <a:prstGeom prst="roundRect">
+            <a:avLst>
+              <a:gd name="adj" fmla="val 8000"/>
+            </a:avLst>
+          </a:prstGeom>
+          <a:solidFill>
+            <a:srgbClr val="EAF2FF"/>
+          </a:solidFill>
+          <a:ln>
+            <a:noFill/>
+          </a:ln>
+          <a:effectLst/>
+        </p:spPr>
+        <p:style>
+          <a:lnRef idx="1">
+            <a:schemeClr val="accent1"/>
+          </a:lnRef>
+          <a:fillRef idx="3">
+            <a:schemeClr val="accent1"/>
+          </a:fillRef>
+          <a:effectRef idx="2">
+            <a:schemeClr val="accent1"/>
+          </a:effectRef>
+          <a:fontRef idx="minor">
+            <a:schemeClr val="lt1"/>
+          </a:fontRef>
+        </p:style>
+        <p:txBody>
+          <a:bodyPr rtlCol="0" anchor="ctr"/>
+          <a:lstStyle/>
+          <a:p>
+            <a:pPr algn="ctr"/>
+            <a:endParaRPr/>
+          </a:p>
+        </p:txBody>
+      </p:sp>
+      <p:sp>
+        <p:nvSpPr>
+          <p:cNvPr id="10" name="TextBox 9"/>
+          <p:cNvSpPr txBox="1"/>
+          <p:nvPr/>
+        </p:nvSpPr>
+        <p:spPr>
+          <a:xfrm>
+            <a:off x="4572000" y="1901952"/>
+            <a:ext cx="3108960" cy="502920"/>
+          </a:xfrm>
+          <a:prstGeom prst="rect">
+            <a:avLst/>
+          </a:prstGeom>
+          <a:noFill/>
+        </p:spPr>
+        <p:txBody>
+          <a:bodyPr wrap="square" lIns="45720" tIns="27432" rIns="45720" bIns="27432" anchor="t">
+            <a:spAutoFit/>
+          </a:bodyPr>
+          <a:lstStyle/>
+          <a:p>
+            <a:pPr algn="l">
+              <a:lnSpc>
+                <a:spcPct val="110000"/>
+              </a:lnSpc>
+            </a:pPr>
+            <a:r>
+              <a:rPr sz="2200" b="1" i="0">
+                <a:solidFill>
+                  <a:srgbClr val="144FB0"/>
+                </a:solidFill>
+                <a:latin typeface="Helvetica"/>
+              </a:rPr>
+              <a:t>Độ đo của CIR</a:t>
+            </a:r>
+          </a:p>
+        </p:txBody>
+      </p:sp>
+      <p:sp>
+        <p:nvSpPr>
+          <p:cNvPr id="11" name="TextBox 10"/>
+          <p:cNvSpPr txBox="1"/>
+          <p:nvPr/>
+        </p:nvSpPr>
+        <p:spPr>
+          <a:xfrm>
+            <a:off x="4572000" y="2468880"/>
+            <a:ext cx="3108960" cy="2423160"/>
+          </a:xfrm>
+          <a:prstGeom prst="rect">
+            <a:avLst/>
+          </a:prstGeom>
+          <a:noFill/>
+        </p:spPr>
+        <p:txBody>
+          <a:bodyPr wrap="square">
+            <a:spAutoFit/>
+          </a:bodyPr>
+          <a:lstStyle/>
+          <a:p>
+            <a:pPr marL="292608" indent="-292608">
+              <a:lnSpc>
+                <a:spcPct val="108000"/>
+              </a:lnSpc>
+              <a:spcAft>
+                <a:spcPts val="600"/>
+              </a:spcAft>
+              <a:buClr>
+                <a:srgbClr val="1E6FE8"/>
+              </a:buClr>
+              <a:buFont typeface="Helvetica"/>
+              <a:buChar char="•"/>
+            </a:pPr>
+            <a:r>
+              <a:rPr sz="2100" b="0" i="0">
+                <a:solidFill>
+                  <a:srgbClr val="0F1C3F"/>
+                </a:solidFill>
+                <a:latin typeface="Helvetica"/>
+              </a:rPr>
+              <a:t>R@K: tỉ lệ truy vấn có ảnh đích trong K kết quả đầu</a:t>
+            </a:r>
+          </a:p>
+          <a:p>
+            <a:pPr marL="292608" indent="-292608">
+              <a:lnSpc>
+                <a:spcPct val="108000"/>
+              </a:lnSpc>
+              <a:spcAft>
+                <a:spcPts val="600"/>
+              </a:spcAft>
+              <a:buClr>
+                <a:srgbClr val="1E6FE8"/>
+              </a:buClr>
+              <a:buFont typeface="Helvetica"/>
+              <a:buChar char="•"/>
+            </a:pPr>
+            <a:r>
+              <a:rPr sz="2100" b="0" i="0">
+                <a:solidFill>
+                  <a:srgbClr val="0F1C3F"/>
+                </a:solidFill>
+                <a:latin typeface="Helvetica"/>
+              </a:rPr>
+              <a:t>mAP@K: có nhiều ảnh đúng, thưởng ảnh đúng xếp cao</a:t>
+            </a:r>
+          </a:p>
+        </p:txBody>
+      </p:sp>
+      <p:sp>
+        <p:nvSpPr>
+          <p:cNvPr id="12" name="Rounded Rectangle 11"/>
+          <p:cNvSpPr/>
+          <p:nvPr/>
+        </p:nvSpPr>
+        <p:spPr>
+          <a:xfrm>
+            <a:off x="8138160" y="1737360"/>
+            <a:ext cx="3566160" cy="3520440"/>
+          </a:xfrm>
+          <a:prstGeom prst="roundRect">
+            <a:avLst>
+              <a:gd name="adj" fmla="val 8000"/>
+            </a:avLst>
+          </a:prstGeom>
+          <a:solidFill>
+            <a:srgbClr val="D6E6FF"/>
+          </a:solidFill>
+          <a:ln>
+            <a:noFill/>
+          </a:ln>
+          <a:effectLst/>
+        </p:spPr>
+        <p:style>
+          <a:lnRef idx="1">
+            <a:schemeClr val="accent1"/>
+          </a:lnRef>
+          <a:fillRef idx="3">
+            <a:schemeClr val="accent1"/>
+          </a:fillRef>
+          <a:effectRef idx="2">
+            <a:schemeClr val="accent1"/>
+          </a:effectRef>
+          <a:fontRef idx="minor">
+            <a:schemeClr val="lt1"/>
+          </a:fontRef>
+        </p:style>
+        <p:txBody>
+          <a:bodyPr rtlCol="0" anchor="ctr"/>
+          <a:lstStyle/>
+          <a:p>
+            <a:pPr algn="ctr"/>
+            <a:endParaRPr/>
+          </a:p>
+        </p:txBody>
+      </p:sp>
+      <p:sp>
+        <p:nvSpPr>
+          <p:cNvPr id="13" name="TextBox 12"/>
+          <p:cNvSpPr txBox="1"/>
+          <p:nvPr/>
+        </p:nvSpPr>
+        <p:spPr>
+          <a:xfrm>
+            <a:off x="8366760" y="1901952"/>
+            <a:ext cx="3108960" cy="502920"/>
+          </a:xfrm>
+          <a:prstGeom prst="rect">
+            <a:avLst/>
+          </a:prstGeom>
+          <a:noFill/>
+        </p:spPr>
+        <p:txBody>
+          <a:bodyPr wrap="square" lIns="45720" tIns="27432" rIns="45720" bIns="27432" anchor="t">
+            <a:spAutoFit/>
+          </a:bodyPr>
+          <a:lstStyle/>
+          <a:p>
+            <a:pPr algn="l">
+              <a:lnSpc>
+                <a:spcPct val="110000"/>
+              </a:lnSpc>
+            </a:pPr>
+            <a:r>
+              <a:rPr sz="2200" b="1" i="0">
+                <a:solidFill>
+                  <a:srgbClr val="144FB0"/>
+                </a:solidFill>
+                <a:latin typeface="Helvetica"/>
+              </a:rPr>
+              <a:t>Tìm kiếm vector</a:t>
+            </a:r>
+          </a:p>
+        </p:txBody>
+      </p:sp>
+      <p:sp>
+        <p:nvSpPr>
+          <p:cNvPr id="14" name="TextBox 13"/>
+          <p:cNvSpPr txBox="1"/>
+          <p:nvPr/>
+        </p:nvSpPr>
+        <p:spPr>
+          <a:xfrm>
+            <a:off x="8366760" y="2468880"/>
+            <a:ext cx="3108960" cy="2423160"/>
+          </a:xfrm>
+          <a:prstGeom prst="rect">
+            <a:avLst/>
+          </a:prstGeom>
+          <a:noFill/>
+        </p:spPr>
+        <p:txBody>
+          <a:bodyPr wrap="square">
+            <a:spAutoFit/>
+          </a:bodyPr>
+          <a:lstStyle/>
+          <a:p>
+            <a:pPr marL="292608" indent="-292608">
+              <a:lnSpc>
+                <a:spcPct val="108000"/>
+              </a:lnSpc>
+              <a:spcAft>
+                <a:spcPts val="600"/>
+              </a:spcAft>
+              <a:buClr>
+                <a:srgbClr val="1E6FE8"/>
+              </a:buClr>
+              <a:buFont typeface="Helvetica"/>
+              <a:buChar char="•"/>
+            </a:pPr>
+            <a:r>
+              <a:rPr sz="2100" b="0" i="0">
+                <a:solidFill>
+                  <a:srgbClr val="0F1C3F"/>
+                </a:solidFill>
+                <a:latin typeface="Helvetica"/>
+              </a:rPr>
+              <a:t>Ảnh và truy vấn được mã hóa thành vector CLIP</a:t>
+            </a:r>
+          </a:p>
+          <a:p>
+            <a:pPr marL="292608" indent="-292608">
+              <a:lnSpc>
+                <a:spcPct val="108000"/>
+              </a:lnSpc>
+              <a:spcAft>
+                <a:spcPts val="600"/>
+              </a:spcAft>
+              <a:buClr>
+                <a:srgbClr val="1E6FE8"/>
+              </a:buClr>
+              <a:buFont typeface="Helvetica"/>
+              <a:buChar char="•"/>
+            </a:pPr>
+            <a:r>
+              <a:rPr sz="2100" b="0" i="0">
+                <a:solidFill>
+                  <a:srgbClr val="0F1C3F"/>
+                </a:solidFill>
+                <a:latin typeface="Helvetica"/>
+              </a:rPr>
+              <a:t>Xếp hạng ảnh theo độ tương đồng cosine</a:t>
+            </a:r>
+          </a:p>
+        </p:txBody>
+      </p:sp>
+      <p:sp>
+        <p:nvSpPr>
+          <p:cNvPr id="15" name="TextBox 14"/>
+          <p:cNvSpPr txBox="1"/>
+          <p:nvPr/>
+        </p:nvSpPr>
+        <p:spPr>
+          <a:xfrm>
+            <a:off x="548640" y="5440680"/>
+            <a:ext cx="11064240" cy="548640"/>
+          </a:xfrm>
+          <a:prstGeom prst="rect">
+            <a:avLst/>
+          </a:prstGeom>
+          <a:noFill/>
+        </p:spPr>
+        <p:txBody>
+          <a:bodyPr wrap="square" lIns="45720" tIns="27432" rIns="45720" bIns="27432" anchor="t">
+            <a:spAutoFit/>
+          </a:bodyPr>
+          <a:lstStyle/>
+          <a:p>
+            <a:pPr algn="l">
+              <a:lnSpc>
+                <a:spcPct val="110000"/>
+              </a:lnSpc>
+            </a:pPr>
+            <a:r>
+              <a:rPr sz="2200" b="1" i="0">
+                <a:solidFill>
+                  <a:srgbClr val="144FB0"/>
+                </a:solidFill>
+                <a:latin typeface="Helvetica"/>
+              </a:rPr>
+              <a:t>Nhóm báo cáo R@10, R@50 trên FashionIQ và mAP@K trên CIRCO</a:t>
             </a:r>
           </a:p>
         </p:txBody>
@@ -14481,7 +13220,7 @@
                 </a:solidFill>
                 <a:latin typeface="Helvetica"/>
               </a:rPr>
-              <a:t>sai lệch so với CLIP gốc</a:t>
+              <a:t>sai lệch giữa encoder viết lại và CLIP gốc</a:t>
             </a:r>
           </a:p>
         </p:txBody>
@@ -14559,7 +13298,7 @@
                 </a:solidFill>
                 <a:latin typeface="Helvetica"/>
               </a:rPr>
-              <a:t>lỗi mã gốc đã sửa</a:t>
+              <a:t>lỗi trong mã gốc đã được sửa</a:t>
             </a:r>
           </a:p>
         </p:txBody>
@@ -14682,6 +13421,7 @@
               <a:buClr>
                 <a:srgbClr val="1E6FE8"/>
               </a:buClr>
+              <a:buFont typeface="Helvetica"/>
               <a:buChar char="•"/>
             </a:pPr>
             <a:r>
@@ -14691,7 +13431,7 @@
                 </a:solidFill>
                 <a:latin typeface="Helvetica"/>
               </a:rPr>
-              <a:t>Viết lại encoder văn bản</a:t>
+              <a:t>Viết lại encoder văn bản cho thư viện mới</a:t>
             </a:r>
           </a:p>
           <a:p>
@@ -14705,6 +13445,7 @@
               <a:buClr>
                 <a:srgbClr val="1E6FE8"/>
               </a:buClr>
+              <a:buFont typeface="Helvetica"/>
               <a:buChar char="•"/>
             </a:pPr>
             <a:r>
@@ -14714,7 +13455,7 @@
                 </a:solidFill>
                 <a:latin typeface="Helvetica"/>
               </a:rPr>
-              <a:t>Thay tokenizer, “$” = 259</a:t>
+              <a:t>Thay tokenizer; token “$” có mã 259</a:t>
             </a:r>
           </a:p>
           <a:p>
@@ -14728,6 +13469,7 @@
               <a:buClr>
                 <a:srgbClr val="1E6FE8"/>
               </a:buClr>
+              <a:buFont typeface="Helvetica"/>
               <a:buChar char="•"/>
             </a:pPr>
             <a:r>
@@ -14737,7 +13479,7 @@
                 </a:solidFill>
                 <a:latin typeface="Helvetica"/>
               </a:rPr>
-              <a:t>Kiểm chứng ViT-B/32, ViT-L/14</a:t>
+              <a:t>Kiểm chứng trên ViT-B/32 và ViT-L/14</a:t>
             </a:r>
           </a:p>
         </p:txBody>
@@ -14860,6 +13602,7 @@
               <a:buClr>
                 <a:srgbClr val="1E6FE8"/>
               </a:buClr>
+              <a:buFont typeface="Helvetica"/>
               <a:buChar char="•"/>
             </a:pPr>
             <a:r>
@@ -14869,7 +13612,7 @@
                 </a:solidFill>
                 <a:latin typeface="Helvetica"/>
               </a:rPr>
-              <a:t>φ không có LayerNorm</a:t>
+              <a:t>Mạng φ trong mã không có LayerNorm</a:t>
             </a:r>
           </a:p>
           <a:p>
@@ -14883,6 +13626,7 @@
               <a:buClr>
                 <a:srgbClr val="1E6FE8"/>
               </a:buClr>
+              <a:buFont typeface="Helvetica"/>
               <a:buChar char="•"/>
             </a:pPr>
             <a:r>
@@ -14892,7 +13636,7 @@
                 </a:solidFill>
                 <a:latin typeface="Helvetica"/>
               </a:rPr>
-              <a:t>Thêm prompt Midjourney</a:t>
+              <a:t>Dữ liệu có thêm câu prompt Midjourney</a:t>
             </a:r>
           </a:p>
           <a:p>
@@ -14906,6 +13650,7 @@
               <a:buClr>
                 <a:srgbClr val="1E6FE8"/>
               </a:buClr>
+              <a:buFont typeface="Helvetica"/>
               <a:buChar char="•"/>
             </a:pPr>
             <a:r>
@@ -14915,7 +13660,7 @@
                 </a:solidFill>
                 <a:latin typeface="Helvetica"/>
               </a:rPr>
-              <a:t>Từ khóa giữ cả từ hạn định</a:t>
+              <a:t>Cụm từ khóa bị che gồm cả từ hạn định</a:t>
             </a:r>
           </a:p>
         </p:txBody>
@@ -14983,7 +13728,7 @@
     </a:clrScheme>
     <a:fontScheme name="Office">
       <a:majorFont>
-        <a:latin typeface="Calibri"/>
+        <a:latin typeface="Helvetica"/>
         <a:ea typeface=""/>
         <a:cs typeface=""/>
         <a:font script="Jpan" typeface="ＭＳ Ｐゴシック"/>
@@ -15018,7 +13763,7 @@
         <a:font script="Geor" typeface="Sylfaen"/>
       </a:majorFont>
       <a:minorFont>
-        <a:latin typeface="Calibri"/>
+        <a:latin typeface="Helvetica"/>
         <a:ea typeface=""/>
         <a:cs typeface=""/>
         <a:font script="Jpan" typeface="ＭＳ Ｐゴシック"/>
@@ -15303,7 +14048,7 @@
     </a:clrScheme>
     <a:fontScheme name="Office">
       <a:majorFont>
-        <a:latin typeface="Calibri Light" panose="020F0302020204030204"/>
+        <a:latin typeface="Helvetica" panose="020F0302020204030204"/>
         <a:ea typeface=""/>
         <a:cs typeface=""/>
         <a:font script="Jpan" typeface="游ゴシック Light"/>
@@ -15355,7 +14100,7 @@
         <a:font script="Tfng" typeface="Ebrima"/>
       </a:majorFont>
       <a:minorFont>
-        <a:latin typeface="Calibri" panose="020F0502020204030204"/>
+        <a:latin typeface="Helvetica" panose="020F0502020204030204"/>
         <a:ea typeface=""/>
         <a:cs typeface=""/>
         <a:font script="Jpan" typeface="游ゴシック"/>

--- a/slides/Slides_Nhom8_LinCIR.pptx
+++ b/slides/Slides_Nhom8_LinCIR.pptx
@@ -5,24 +5,25 @@
     <p:sldMasterId id="2147483648" r:id="rId1"/>
   </p:sldMasterIdLst>
   <p:notesMasterIdLst>
-    <p:notesMasterId r:id="rId19"/>
+    <p:notesMasterId r:id="rId18"/>
   </p:notesMasterIdLst>
   <p:sldIdLst>
     <p:sldId id="256" r:id="rId2"/>
-    <p:sldId id="273" r:id="rId24"/>
-    <p:sldId id="257" r:id="rId3"/>
+    <p:sldId id="275" r:id="rId3"/>
+    <p:sldId id="257" r:id="rId4"/>
+    <p:sldId id="259" r:id="rId5"/>
     <p:sldId id="260" r:id="rId6"/>
+    <p:sldId id="273" r:id="rId7"/>
     <p:sldId id="262" r:id="rId8"/>
-    <p:sldId id="266" r:id="rId12"/>
-    <p:sldId id="267" r:id="rId13"/>
-    <p:sldId id="259" r:id="rId5"/>
-    <p:sldId id="264" r:id="rId10"/>
-    <p:sldId id="268" r:id="rId14"/>
-    <p:sldId id="265" r:id="rId11"/>
-    <p:sldId id="269" r:id="rId15"/>
-    <p:sldId id="270" r:id="rId16"/>
-    <p:sldId id="271" r:id="rId17"/>
-    <p:sldId id="272" r:id="rId18"/>
+    <p:sldId id="274" r:id="rId9"/>
+    <p:sldId id="266" r:id="rId10"/>
+    <p:sldId id="267" r:id="rId11"/>
+    <p:sldId id="264" r:id="rId12"/>
+    <p:sldId id="265" r:id="rId13"/>
+    <p:sldId id="269" r:id="rId14"/>
+    <p:sldId id="270" r:id="rId15"/>
+    <p:sldId id="271" r:id="rId16"/>
+    <p:sldId id="272" r:id="rId17"/>
   </p:sldIdLst>
   <p:sldSz cx="12192000" cy="6858000"/>
   <p:notesSz cx="6858000" cy="9144000"/>
@@ -310,7 +311,152 @@
           <a:lstStyle/>
           <a:p>
             <a:r>
-              <a:t>[Tâm] Giới thiệu đề tài, giảng viên và 5 thành viên. Đề tài: tái hiện và cải tiến phương pháp LinCIR, chứng minh cải tiến bằng kiểm định thống kê.</a:t>
+              <a:rPr dirty="0"/>
+              <a:t>[Tâm] </a:t>
+            </a:r>
+            <a:r>
+              <a:rPr dirty="0" err="1"/>
+              <a:t>Giới</a:t>
+            </a:r>
+            <a:r>
+              <a:rPr dirty="0"/>
+              <a:t> </a:t>
+            </a:r>
+            <a:r>
+              <a:rPr dirty="0" err="1"/>
+              <a:t>thiệu</a:t>
+            </a:r>
+            <a:r>
+              <a:rPr dirty="0"/>
+              <a:t> </a:t>
+            </a:r>
+            <a:r>
+              <a:rPr dirty="0" err="1"/>
+              <a:t>đề</a:t>
+            </a:r>
+            <a:r>
+              <a:rPr dirty="0"/>
+              <a:t> </a:t>
+            </a:r>
+            <a:r>
+              <a:rPr dirty="0" err="1"/>
+              <a:t>tài</a:t>
+            </a:r>
+            <a:r>
+              <a:rPr dirty="0"/>
+              <a:t>, </a:t>
+            </a:r>
+            <a:r>
+              <a:rPr dirty="0" err="1"/>
+              <a:t>giảng</a:t>
+            </a:r>
+            <a:r>
+              <a:rPr dirty="0"/>
+              <a:t> </a:t>
+            </a:r>
+            <a:r>
+              <a:rPr dirty="0" err="1"/>
+              <a:t>viên</a:t>
+            </a:r>
+            <a:r>
+              <a:rPr dirty="0"/>
+              <a:t> </a:t>
+            </a:r>
+            <a:r>
+              <a:rPr dirty="0" err="1"/>
+              <a:t>và</a:t>
+            </a:r>
+            <a:r>
+              <a:rPr dirty="0"/>
+              <a:t> 5 </a:t>
+            </a:r>
+            <a:r>
+              <a:rPr dirty="0" err="1"/>
+              <a:t>thành</a:t>
+            </a:r>
+            <a:r>
+              <a:rPr dirty="0"/>
+              <a:t> </a:t>
+            </a:r>
+            <a:r>
+              <a:rPr dirty="0" err="1"/>
+              <a:t>viên</a:t>
+            </a:r>
+            <a:r>
+              <a:rPr dirty="0"/>
+              <a:t>. Tâm </a:t>
+            </a:r>
+            <a:r>
+              <a:rPr dirty="0" err="1"/>
+              <a:t>trình</a:t>
+            </a:r>
+            <a:r>
+              <a:rPr dirty="0"/>
+              <a:t> </a:t>
+            </a:r>
+            <a:r>
+              <a:rPr dirty="0" err="1"/>
+              <a:t>bày</a:t>
+            </a:r>
+            <a:r>
+              <a:rPr dirty="0"/>
+              <a:t>, </a:t>
+            </a:r>
+            <a:r>
+              <a:rPr dirty="0" err="1"/>
+              <a:t>cả</a:t>
+            </a:r>
+            <a:r>
+              <a:rPr dirty="0"/>
+              <a:t> </a:t>
+            </a:r>
+            <a:r>
+              <a:rPr dirty="0" err="1"/>
+              <a:t>nhóm</a:t>
+            </a:r>
+            <a:r>
+              <a:rPr dirty="0"/>
+              <a:t> </a:t>
+            </a:r>
+            <a:r>
+              <a:rPr dirty="0" err="1"/>
+              <a:t>cùng</a:t>
+            </a:r>
+            <a:r>
+              <a:rPr dirty="0"/>
+              <a:t> </a:t>
+            </a:r>
+            <a:r>
+              <a:rPr dirty="0" err="1"/>
+              <a:t>trả</a:t>
+            </a:r>
+            <a:r>
+              <a:rPr dirty="0"/>
+              <a:t> </a:t>
+            </a:r>
+            <a:r>
+              <a:rPr dirty="0" err="1"/>
+              <a:t>lời</a:t>
+            </a:r>
+            <a:r>
+              <a:rPr dirty="0"/>
+              <a:t> </a:t>
+            </a:r>
+            <a:r>
+              <a:rPr dirty="0" err="1"/>
+              <a:t>câu</a:t>
+            </a:r>
+            <a:r>
+              <a:rPr dirty="0"/>
+              <a:t> </a:t>
+            </a:r>
+            <a:r>
+              <a:rPr dirty="0" err="1"/>
+              <a:t>hỏi</a:t>
+            </a:r>
+            <a:r>
+              <a:rPr dirty="0"/>
+              <a:t>.</a:t>
             </a:r>
           </a:p>
         </p:txBody>
@@ -380,12 +526,12 @@
           <a:lstStyle/>
           <a:p>
             <a:r>
-              <a:t>[Tùng] Nhóm đánh giá lại checkpoint chính thức bằng mã đã chuyển đổi; kết quả khớp bài báo, xác nhận quy trình đánh giá đúng.</a:t>
-            </a:r>
-          </a:p>
-          <a:p>
-            <a:r>
-              <a:t>Con số cần nêu: Lệch lớn nhất 0,77 điểm phần trăm.</a:t>
+              <a:t>[Tâm] Cải tiến B sửa nhiễu: nhiễu của LinCIR đều theo mọi hướng, không dịch về phía vùng ảnh. B cộng thêm 0,5 · Δ, với Δ là hiệu giữa tâm vector ảnh và tâm vector văn bản, tính trên COCO val2017 khác tập đánh giá. Giả thuyết H2: φ nhất quán hơn giữa ảnh và văn bản nên R@K, mAP@K tăng. H3: A và B sửa hai thành phần khác nhau nên A+B có thể cộng hưởng.</a:t>
+            </a:r>
+          </a:p>
+          <a:p>
+            <a:r>
+              <a:t>Con số cần nêu: Độ lớn của Δ là 13,87, tính trên 5.000 cặp ảnh – chú thích.</a:t>
             </a:r>
           </a:p>
         </p:txBody>
@@ -455,12 +601,12 @@
           <a:lstStyle/>
           <a:p>
             <a:r>
-              <a:t>[Trung] Cải tiến A sửa hàm mất mát vừa trình bày: thêm hàm mất mát đối sánh để mỗi câu phân biệt với 511 câu khác. Kết quả: không tốt hơn trên FashionIQ và kém hơn trên CIRCO; nguyên nhân trình bày ở slide 13.</a:t>
-            </a:r>
-          </a:p>
-          <a:p>
-            <a:r>
-              <a:t>Con số cần nêu: CIRCO mAP@5 giảm từ 10,47 xuống 8,02, tức giảm khoảng 23%.</a:t>
+              <a:t>[Tâm] Mã gốc không chạy với thư viện hiện tại; nhóm viết lại encoder văn bản, thay tokenizer, sửa 4 lỗi và kiểm chứng sai lệch bằng 0. Thực nghiệm: 4 biến thể × 3 seed, 5.000 bước, chỉ khác thành phần cải tiến, chạy trên 2 GPU T4 của Kaggle.</a:t>
+            </a:r>
+          </a:p>
+          <a:p>
+            <a:r>
+              <a:t>Con số cần nêu: Sai lệch 0,00 so với CLIP gốc; nạp dữ liệu nhanh gấp 3,1 lần.</a:t>
             </a:r>
           </a:p>
         </p:txBody>
@@ -530,12 +676,12 @@
           <a:lstStyle/>
           <a:p>
             <a:r>
-              <a:t>[Dũng] Vector ảnh và vector văn bản của CLIP nằm ở hai vùng tách biệt; LinCIR thêm nhiễu u·ε không có hướng để φ chịu được độ lệch này. Cải tiến B cộng vào nhiễu vector Δ chỉ từ vùng văn bản sang vùng ảnh, để φ được huấn luyện gần với điều kiện khi suy luận.</a:t>
-            </a:r>
-          </a:p>
-          <a:p>
-            <a:r>
-              <a:t>Con số cần nêu: Δ tính trên 5.000 cặp COCO, độc lập với dữ liệu đánh giá.</a:t>
+              <a:t>[Tâm] Trước khi cải tiến, nhóm đánh giá lại checkpoint chính thức bằng mã đã chuyển đổi; kết quả khớp bài báo. Ba điểm bài báo khác mã nguồn; nhóm theo mã vì mã tạo ra số liệu công bố.</a:t>
+            </a:r>
+          </a:p>
+          <a:p>
+            <a:r>
+              <a:t>Con số cần nêu: Lệch lớn nhất 0,77 điểm phần trăm.</a:t>
             </a:r>
           </a:p>
         </p:txBody>
@@ -605,12 +751,12 @@
           <a:lstStyle/>
           <a:p>
             <a:r>
-              <a:t>[Tâm] Mọi biến thể dùng cùng dữ liệu, cùng 5.000 bước, cùng siêu tham số và chạy 3 seed; chỉ khác đúng thành phần cải tiến. Nhóm khắc phục nghẽn nạp dữ liệu để kịp chạy trong hạn mức GPU.</a:t>
-            </a:r>
-          </a:p>
-          <a:p>
-            <a:r>
-              <a:t>Con số cần nêu: Tốc độ tăng 3,1 lần: 2,0 giờ mỗi lần chạy thay vì 6,2 giờ.</a:t>
+              <a:t>[Tâm] So với baseline nhóm tự huấn luyện. B cao nhất ở mọi cột và tốt hơn có ý nghĩa thống kê; B 5.000 bước vượt cả checkpoint chính thức 20.000 bước. A và A+B kém hơn trên CIRCO.</a:t>
+            </a:r>
+          </a:p>
+          <a:p>
+            <a:r>
+              <a:t>Con số cần nêu: B tăng 0,60 điểm R@10 (thêm khoảng 6 truy vấn đúng trên 1.000), p = 0,006.</a:t>
             </a:r>
           </a:p>
         </p:txBody>
@@ -680,12 +826,12 @@
           <a:lstStyle/>
           <a:p>
             <a:r>
-              <a:t>[Tùng] B cao nhất ở mọi cột và tốt hơn baseline có ý nghĩa thống kê; A và A+B kém hơn trên CIRCO.</a:t>
-            </a:r>
-          </a:p>
-          <a:p>
-            <a:r>
-              <a:t>Con số cần nêu: B tăng 0,60 điểm R@10 (thêm khoảng 6 truy vấn đúng trên 1.000), p = 0,006.</a:t>
+              <a:t>[Tâm] Đo độ tương đồng giữa đầu ra của φ khi nhận ảnh và khi nhận văn bản của cùng một cặp; thứ tự trùng với thứ tự CIRCO mAP@5. InfoNCE buộc [$] mang đặc trưng phân biệt các câu, không chuyển được sang ảnh. A thấp hơn baseline ở mọi mốc huấn luyện.</a:t>
+            </a:r>
+          </a:p>
+          <a:p>
+            <a:r>
+              <a:t>Con số cần nêu: B 0,84, baseline 0,80, A 0,64.</a:t>
             </a:r>
           </a:p>
         </p:txBody>
@@ -755,12 +901,12 @@
           <a:lstStyle/>
           <a:p>
             <a:r>
-              <a:t>[Dũng] Đo độ tương đồng giữa đầu ra của φ khi nhận ảnh và khi nhận văn bản của cùng một cặp. Thứ tự độ tương đồng trùng với thứ tự kết quả CIRCO.</a:t>
-            </a:r>
-          </a:p>
-          <a:p>
-            <a:r>
-              <a:t>Con số cần nêu: B 0,84, baseline 0,80, A 0,64.</a:t>
+              <a:t>[Tâm] Ví dụ: B xếp đúng ảnh đích ở hạng 1, baseline thì không. Kết luận: H2 được ủng hộ, H1 và H3 bị bác bỏ; chất lượng phụ thuộc chủ yếu vào việc φ xử lý ảnh nhất quán với văn bản. Hạn chế: 5.000 bước, chưa quét λ, α, chưa có CIRR.</a:t>
+            </a:r>
+          </a:p>
+          <a:p>
+            <a:r>
+              <a:t>Con số cần nêu: CIRCO mAP@5: B 10,94, A 8,02.</a:t>
             </a:r>
           </a:p>
         </p:txBody>
@@ -830,12 +976,12 @@
           <a:lstStyle/>
           <a:p>
             <a:r>
-              <a:t>[Tùng] Chất lượng truy xuất phụ thuộc chủ yếu vào việc φ xử lý ảnh nhất quán với văn bản. B cải thiện điều này nên tốt hơn; A làm giảm nên kém hơn. Hạn chế chính: huấn luyện 5.000 bước và chưa quét siêu tham số.</a:t>
-            </a:r>
-          </a:p>
-          <a:p>
-            <a:r>
-              <a:t>Con số cần nêu: B chỉ huấn luyện 5.000 bước nhưng vượt checkpoint chính thức 20.000 bước.</a:t>
+              <a:t>[Tâm] Cảm ơn cô và các bạn; mời đặt câu hỏi.</a:t>
+            </a:r>
+          </a:p>
+          <a:p>
+            <a:r>
+              <a:t>Chuyển câu hỏi: phương pháp, cải tiến A → Trung; tái hiện, bảng kết quả → Tùng; độ đo, kiểm định, cải tiến B, cơ chế → Dũng; bài toán, lý thuyết, ví dụ định tính → Nou; mã nguồn, Kaggle, thiết lập → Tâm.</a:t>
             </a:r>
           </a:p>
         </p:txBody>
@@ -851,132 +997,6 @@
           </p:nvPr>
         </p:nvSpPr>
         <p:spPr/>
-      </p:sp>
-    </p:spTree>
-  </p:cSld>
-  <p:clrMapOvr>
-    <a:masterClrMapping/>
-  </p:clrMapOvr>
-</p:notes>
-</file>
-
-<file path=ppt/notesSlides/notesSlide17.xml><?xml version="1.0" encoding="utf-8"?>
-<p:notes xmlns:a="http://schemas.openxmlformats.org/drawingml/2006/main" xmlns:r="http://schemas.openxmlformats.org/officeDocument/2006/relationships" xmlns:p="http://schemas.openxmlformats.org/presentationml/2006/main">
-  <p:cSld>
-    <p:spTree>
-      <p:nvGrpSpPr>
-        <p:cNvPr id="1" name=""/>
-        <p:cNvGrpSpPr/>
-        <p:nvPr/>
-      </p:nvGrpSpPr>
-      <p:grpSpPr>
-        <a:xfrm>
-          <a:off x="0" y="0"/>
-          <a:ext cx="0" cy="0"/>
-          <a:chOff x="0" y="0"/>
-          <a:chExt cx="0" cy="0"/>
-        </a:xfrm>
-      </p:grpSpPr>
-      <p:sp>
-        <p:nvSpPr>
-          <p:cNvPr id="2" name="Slide Image Placeholder 1"/>
-          <p:cNvSpPr>
-            <a:spLocks noGrp="1" noRot="1" noChangeAspect="1"/>
-          </p:cNvSpPr>
-          <p:nvPr>
-            <p:ph type="sldImg" idx="2"/>
-          </p:nvPr>
-        </p:nvSpPr>
-        <p:spPr/>
-      </p:sp>
-      <p:sp>
-        <p:nvSpPr>
-          <p:cNvPr id="3" name="Notes Placeholder 2"/>
-          <p:cNvSpPr>
-            <a:spLocks noGrp="1"/>
-          </p:cNvSpPr>
-          <p:nvPr>
-            <p:ph type="body" sz="quarter" idx="3"/>
-          </p:nvPr>
-        </p:nvSpPr>
-        <p:spPr/>
-        <p:txBody>
-          <a:bodyPr/>
-          <a:lstStyle/>
-          <a:p>
-            <a:r>
-              <a:t>[Tâm] Cảm ơn cô và các bạn; mời đặt câu hỏi.</a:t>
-            </a:r>
-          </a:p>
-          <a:p>
-            <a:r>
-              <a:t>Chuyển câu hỏi: phương pháp, cải tiến A → Trung; tái hiện, bảng kết quả → Tùng; độ đo, kiểm định, cải tiến B, cơ chế → Dũng; bài toán, lý thuyết, ví dụ định tính → Nou; mã nguồn, Kaggle, thiết lập → Tâm.</a:t>
-            </a:r>
-          </a:p>
-        </p:txBody>
-      </p:sp>
-      <p:sp>
-        <p:nvSpPr>
-          <p:cNvPr id="4" name="Slide Number Placeholder 3"/>
-          <p:cNvSpPr>
-            <a:spLocks noGrp="1"/>
-          </p:cNvSpPr>
-          <p:nvPr>
-            <p:ph type="sldNum" sz="quarter" idx="5"/>
-          </p:nvPr>
-        </p:nvSpPr>
-        <p:spPr/>
-      </p:sp>
-    </p:spTree>
-  </p:cSld>
-  <p:clrMapOvr>
-    <a:masterClrMapping/>
-  </p:clrMapOvr>
-</p:notes>
-</file>
-
-<file path=ppt/notesSlides/notesSlide18.xml><?xml version="1.0" encoding="utf-8"?>
-<p:notes xmlns:a="http://schemas.openxmlformats.org/drawingml/2006/main" xmlns:p="http://schemas.openxmlformats.org/presentationml/2006/main" xmlns:r="http://schemas.openxmlformats.org/officeDocument/2006/relationships">
-  <p:cSld>
-    <p:spTree>
-      <p:nvGrpSpPr>
-        <p:cNvPr id="1" name=""/>
-        <p:cNvGrpSpPr/>
-        <p:nvPr/>
-      </p:nvGrpSpPr>
-      <p:grpSpPr>
-        <a:xfrm>
-          <a:off x="0" y="0"/>
-          <a:ext cx="0" cy="0"/>
-          <a:chOff x="0" y="0"/>
-          <a:chExt cx="0" cy="0"/>
-        </a:xfrm>
-      </p:grpSpPr>
-      <p:sp>
-        <p:nvSpPr>
-          <p:cNvPr id="3" name="Notes Placeholder 2"/>
-          <p:cNvSpPr>
-            <a:spLocks noGrp="1"/>
-          </p:cNvSpPr>
-          <p:nvPr>
-            <p:ph type="body" sz="quarter" idx="3"/>
-          </p:nvPr>
-        </p:nvSpPr>
-        <p:spPr/>
-        <p:txBody>
-          <a:bodyPr/>
-          <a:lstStyle/>
-          <a:p>
-            <a:r>
-              <a:t>[Tâm] Bài báo LinCIR (NAVER, CVPR 2024): bộ ba CIR gán nhãn tay đắt và nhỏ; Pic2Word, SEARLE cần ảnh khi huấn luyện và chỉ học câu mẫu cố định. LinCIR học mạng chiếu φ chỉ từ văn bản bằng Self-Masking Projection, thêm nhiễu để φ dùng được cho vector ảnh; tốt nhất trên 4 benchmark, huấn luyện nhanh hơn. Mã công khai nên nhóm dựng lại mã, tái hiện, chạy baseline, A, B, A+B trên Kaggle, kiểm định và phân tích. Nêu trước kết luận: B tốt hơn có ý nghĩa thống kê, A làm giảm hiệu năng.</a:t>
-            </a:r>
-          </a:p>
-          <a:p>
-            <a:r>
-              <a:t>Con số cần nêu: Nhanh hơn Pic2Word 6 lần, SEARLE 8,4 lần; kết quả nhóm: B tăng FashionIQ R@10 từ 25,90 lên 26,50, p = 0,006.</a:t>
-            </a:r>
-          </a:p>
-        </p:txBody>
       </p:sp>
     </p:spTree>
   </p:cSld>
@@ -1005,6 +1025,549 @@
       </p:grpSpPr>
       <p:sp>
         <p:nvSpPr>
+          <p:cNvPr id="3" name="Notes Placeholder 2"/>
+          <p:cNvSpPr>
+            <a:spLocks noGrp="1"/>
+          </p:cNvSpPr>
+          <p:nvPr>
+            <p:ph type="body" sz="quarter" idx="3"/>
+          </p:nvPr>
+        </p:nvSpPr>
+        <p:spPr/>
+        <p:txBody>
+          <a:bodyPr/>
+          <a:lstStyle/>
+          <a:p>
+            <a:r>
+              <a:rPr dirty="0"/>
+              <a:t>[Tâm] </a:t>
+            </a:r>
+            <a:r>
+              <a:rPr dirty="0" err="1"/>
+              <a:t>Phân</a:t>
+            </a:r>
+            <a:r>
+              <a:rPr dirty="0"/>
+              <a:t> </a:t>
+            </a:r>
+            <a:r>
+              <a:rPr dirty="0" err="1"/>
+              <a:t>công</a:t>
+            </a:r>
+            <a:r>
+              <a:rPr dirty="0"/>
+              <a:t>: Tâm </a:t>
+            </a:r>
+            <a:r>
+              <a:rPr dirty="0" err="1"/>
+              <a:t>chuyển</a:t>
+            </a:r>
+            <a:r>
+              <a:rPr dirty="0"/>
+              <a:t> </a:t>
+            </a:r>
+            <a:r>
+              <a:rPr dirty="0" err="1"/>
+              <a:t>đổi</a:t>
+            </a:r>
+            <a:r>
+              <a:rPr dirty="0"/>
+              <a:t> </a:t>
+            </a:r>
+            <a:r>
+              <a:rPr dirty="0" err="1"/>
+              <a:t>mã</a:t>
+            </a:r>
+            <a:r>
+              <a:rPr dirty="0"/>
+              <a:t> </a:t>
+            </a:r>
+            <a:r>
+              <a:rPr dirty="0" err="1"/>
+              <a:t>nguồn</a:t>
+            </a:r>
+            <a:r>
+              <a:rPr dirty="0"/>
+              <a:t> </a:t>
+            </a:r>
+            <a:r>
+              <a:rPr dirty="0" err="1"/>
+              <a:t>và</a:t>
+            </a:r>
+            <a:r>
+              <a:rPr dirty="0"/>
+              <a:t> </a:t>
+            </a:r>
+            <a:r>
+              <a:rPr dirty="0" err="1"/>
+              <a:t>chạy</a:t>
+            </a:r>
+            <a:r>
+              <a:rPr dirty="0"/>
+              <a:t> </a:t>
+            </a:r>
+            <a:r>
+              <a:rPr dirty="0" err="1"/>
+              <a:t>thực</a:t>
+            </a:r>
+            <a:r>
+              <a:rPr dirty="0"/>
+              <a:t> </a:t>
+            </a:r>
+            <a:r>
+              <a:rPr dirty="0" err="1"/>
+              <a:t>nghiệm</a:t>
+            </a:r>
+            <a:r>
+              <a:rPr dirty="0"/>
+              <a:t> </a:t>
+            </a:r>
+            <a:r>
+              <a:rPr dirty="0" err="1"/>
+              <a:t>trên</a:t>
+            </a:r>
+            <a:r>
+              <a:rPr dirty="0"/>
+              <a:t> Kaggle; Trung </a:t>
+            </a:r>
+            <a:r>
+              <a:rPr dirty="0" err="1"/>
+              <a:t>làm</a:t>
+            </a:r>
+            <a:r>
+              <a:rPr dirty="0"/>
+              <a:t> </a:t>
+            </a:r>
+            <a:r>
+              <a:rPr dirty="0" err="1"/>
+              <a:t>cải</a:t>
+            </a:r>
+            <a:r>
+              <a:rPr dirty="0"/>
+              <a:t> </a:t>
+            </a:r>
+            <a:r>
+              <a:rPr dirty="0" err="1"/>
+              <a:t>tiến</a:t>
+            </a:r>
+            <a:r>
+              <a:rPr dirty="0"/>
+              <a:t> A </a:t>
+            </a:r>
+            <a:r>
+              <a:rPr dirty="0" err="1"/>
+              <a:t>và</a:t>
+            </a:r>
+            <a:r>
+              <a:rPr dirty="0"/>
+              <a:t> </a:t>
+            </a:r>
+            <a:r>
+              <a:rPr dirty="0" err="1"/>
+              <a:t>đường</a:t>
+            </a:r>
+            <a:r>
+              <a:rPr dirty="0"/>
+              <a:t> </a:t>
+            </a:r>
+            <a:r>
+              <a:rPr dirty="0" err="1"/>
+              <a:t>học</a:t>
+            </a:r>
+            <a:r>
+              <a:rPr dirty="0"/>
+              <a:t>; Tùng </a:t>
+            </a:r>
+            <a:r>
+              <a:rPr dirty="0" err="1"/>
+              <a:t>tái</a:t>
+            </a:r>
+            <a:r>
+              <a:rPr dirty="0"/>
+              <a:t> </a:t>
+            </a:r>
+            <a:r>
+              <a:rPr dirty="0" err="1"/>
+              <a:t>hiện</a:t>
+            </a:r>
+            <a:r>
+              <a:rPr dirty="0"/>
+              <a:t> </a:t>
+            </a:r>
+            <a:r>
+              <a:rPr dirty="0" err="1"/>
+              <a:t>và</a:t>
+            </a:r>
+            <a:r>
+              <a:rPr dirty="0"/>
+              <a:t> </a:t>
+            </a:r>
+            <a:r>
+              <a:rPr dirty="0" err="1"/>
+              <a:t>đối</a:t>
+            </a:r>
+            <a:r>
+              <a:rPr dirty="0"/>
+              <a:t> </a:t>
+            </a:r>
+            <a:r>
+              <a:rPr dirty="0" err="1"/>
+              <a:t>chiếu</a:t>
+            </a:r>
+            <a:r>
+              <a:rPr dirty="0"/>
+              <a:t> </a:t>
+            </a:r>
+            <a:r>
+              <a:rPr dirty="0" err="1"/>
+              <a:t>bài</a:t>
+            </a:r>
+            <a:r>
+              <a:rPr dirty="0"/>
+              <a:t> </a:t>
+            </a:r>
+            <a:r>
+              <a:rPr dirty="0" err="1"/>
+              <a:t>báo</a:t>
+            </a:r>
+            <a:r>
+              <a:rPr dirty="0"/>
+              <a:t> – </a:t>
+            </a:r>
+            <a:r>
+              <a:rPr dirty="0" err="1"/>
+              <a:t>mã</a:t>
+            </a:r>
+            <a:r>
+              <a:rPr dirty="0"/>
+              <a:t> </a:t>
+            </a:r>
+            <a:r>
+              <a:rPr dirty="0" err="1"/>
+              <a:t>nguồn</a:t>
+            </a:r>
+            <a:r>
+              <a:rPr dirty="0"/>
+              <a:t>; Dũng </a:t>
+            </a:r>
+            <a:r>
+              <a:rPr dirty="0" err="1"/>
+              <a:t>làm</a:t>
+            </a:r>
+            <a:r>
+              <a:rPr dirty="0"/>
+              <a:t> </a:t>
+            </a:r>
+            <a:r>
+              <a:rPr dirty="0" err="1"/>
+              <a:t>giao</a:t>
+            </a:r>
+            <a:r>
+              <a:rPr dirty="0"/>
+              <a:t> </a:t>
+            </a:r>
+            <a:r>
+              <a:rPr dirty="0" err="1"/>
+              <a:t>thức</a:t>
+            </a:r>
+            <a:r>
+              <a:rPr dirty="0"/>
+              <a:t> </a:t>
+            </a:r>
+            <a:r>
+              <a:rPr dirty="0" err="1"/>
+              <a:t>đánh</a:t>
+            </a:r>
+            <a:r>
+              <a:rPr dirty="0"/>
+              <a:t> </a:t>
+            </a:r>
+            <a:r>
+              <a:rPr dirty="0" err="1"/>
+              <a:t>giá</a:t>
+            </a:r>
+            <a:r>
+              <a:rPr dirty="0"/>
+              <a:t>, </a:t>
+            </a:r>
+            <a:r>
+              <a:rPr dirty="0" err="1"/>
+              <a:t>kiểm</a:t>
+            </a:r>
+            <a:r>
+              <a:rPr dirty="0"/>
+              <a:t> </a:t>
+            </a:r>
+            <a:r>
+              <a:rPr dirty="0" err="1"/>
+              <a:t>định</a:t>
+            </a:r>
+            <a:r>
+              <a:rPr dirty="0"/>
+              <a:t> </a:t>
+            </a:r>
+            <a:r>
+              <a:rPr dirty="0" err="1"/>
+              <a:t>và</a:t>
+            </a:r>
+            <a:r>
+              <a:rPr dirty="0"/>
+              <a:t> </a:t>
+            </a:r>
+            <a:r>
+              <a:rPr dirty="0" err="1"/>
+              <a:t>cải</a:t>
+            </a:r>
+            <a:r>
+              <a:rPr dirty="0"/>
+              <a:t> </a:t>
+            </a:r>
+            <a:r>
+              <a:rPr dirty="0" err="1"/>
+              <a:t>tiến</a:t>
+            </a:r>
+            <a:r>
+              <a:rPr dirty="0"/>
+              <a:t> B; Nou </a:t>
+            </a:r>
+            <a:r>
+              <a:rPr dirty="0" err="1"/>
+              <a:t>làm</a:t>
+            </a:r>
+            <a:r>
+              <a:rPr dirty="0"/>
+              <a:t> </a:t>
+            </a:r>
+            <a:r>
+              <a:rPr dirty="0" err="1"/>
+              <a:t>tổng</a:t>
+            </a:r>
+            <a:r>
+              <a:rPr dirty="0"/>
+              <a:t> </a:t>
+            </a:r>
+            <a:r>
+              <a:rPr dirty="0" err="1"/>
+              <a:t>quan</a:t>
+            </a:r>
+            <a:r>
+              <a:rPr dirty="0"/>
+              <a:t> </a:t>
+            </a:r>
+            <a:r>
+              <a:rPr dirty="0" err="1"/>
+              <a:t>lý</a:t>
+            </a:r>
+            <a:r>
+              <a:rPr dirty="0"/>
+              <a:t> </a:t>
+            </a:r>
+            <a:r>
+              <a:rPr dirty="0" err="1"/>
+              <a:t>thuyết</a:t>
+            </a:r>
+            <a:r>
+              <a:rPr dirty="0"/>
+              <a:t>, </a:t>
+            </a:r>
+            <a:r>
+              <a:rPr dirty="0" err="1"/>
+              <a:t>phân</a:t>
+            </a:r>
+            <a:r>
+              <a:rPr dirty="0"/>
+              <a:t> </a:t>
+            </a:r>
+            <a:r>
+              <a:rPr dirty="0" err="1"/>
+              <a:t>tích</a:t>
+            </a:r>
+            <a:r>
+              <a:rPr dirty="0"/>
+              <a:t> </a:t>
+            </a:r>
+            <a:r>
+              <a:rPr dirty="0" err="1"/>
+              <a:t>định</a:t>
+            </a:r>
+            <a:r>
+              <a:rPr dirty="0"/>
+              <a:t> </a:t>
+            </a:r>
+            <a:r>
+              <a:rPr dirty="0" err="1"/>
+              <a:t>tính</a:t>
+            </a:r>
+            <a:r>
+              <a:rPr dirty="0"/>
+              <a:t> </a:t>
+            </a:r>
+            <a:r>
+              <a:rPr dirty="0" err="1"/>
+              <a:t>và</a:t>
+            </a:r>
+            <a:r>
+              <a:rPr dirty="0"/>
+              <a:t> </a:t>
+            </a:r>
+            <a:r>
+              <a:rPr dirty="0" err="1"/>
+              <a:t>thiết</a:t>
+            </a:r>
+            <a:r>
+              <a:rPr dirty="0"/>
+              <a:t> </a:t>
+            </a:r>
+            <a:r>
+              <a:rPr dirty="0" err="1"/>
+              <a:t>kế</a:t>
+            </a:r>
+            <a:r>
+              <a:rPr dirty="0"/>
+              <a:t> slides. Tâm </a:t>
+            </a:r>
+            <a:r>
+              <a:rPr dirty="0" err="1"/>
+              <a:t>trình</a:t>
+            </a:r>
+            <a:r>
+              <a:rPr dirty="0"/>
+              <a:t> </a:t>
+            </a:r>
+            <a:r>
+              <a:rPr dirty="0" err="1"/>
+              <a:t>bày</a:t>
+            </a:r>
+            <a:r>
+              <a:rPr dirty="0"/>
+              <a:t>, </a:t>
+            </a:r>
+            <a:r>
+              <a:rPr dirty="0" err="1"/>
+              <a:t>khi</a:t>
+            </a:r>
+            <a:r>
+              <a:rPr dirty="0"/>
+              <a:t> </a:t>
+            </a:r>
+            <a:r>
+              <a:rPr dirty="0" err="1"/>
+              <a:t>hỏi</a:t>
+            </a:r>
+            <a:r>
+              <a:rPr dirty="0"/>
+              <a:t> </a:t>
+            </a:r>
+            <a:r>
+              <a:rPr dirty="0" err="1"/>
+              <a:t>đáp</a:t>
+            </a:r>
+            <a:r>
+              <a:rPr dirty="0"/>
+              <a:t> </a:t>
+            </a:r>
+            <a:r>
+              <a:rPr dirty="0" err="1"/>
+              <a:t>thành</a:t>
+            </a:r>
+            <a:r>
+              <a:rPr dirty="0"/>
+              <a:t> </a:t>
+            </a:r>
+            <a:r>
+              <a:rPr dirty="0" err="1"/>
+              <a:t>viên</a:t>
+            </a:r>
+            <a:r>
+              <a:rPr dirty="0"/>
+              <a:t> </a:t>
+            </a:r>
+            <a:r>
+              <a:rPr dirty="0" err="1"/>
+              <a:t>phụ</a:t>
+            </a:r>
+            <a:r>
+              <a:rPr dirty="0"/>
+              <a:t> </a:t>
+            </a:r>
+            <a:r>
+              <a:rPr dirty="0" err="1"/>
+              <a:t>trách</a:t>
+            </a:r>
+            <a:r>
+              <a:rPr dirty="0"/>
+              <a:t> </a:t>
+            </a:r>
+            <a:r>
+              <a:rPr dirty="0" err="1"/>
+              <a:t>trả</a:t>
+            </a:r>
+            <a:r>
+              <a:rPr dirty="0"/>
+              <a:t> </a:t>
+            </a:r>
+            <a:r>
+              <a:rPr dirty="0" err="1"/>
+              <a:t>lời</a:t>
+            </a:r>
+            <a:r>
+              <a:rPr dirty="0"/>
+              <a:t> </a:t>
+            </a:r>
+            <a:r>
+              <a:rPr dirty="0" err="1"/>
+              <a:t>phần</a:t>
+            </a:r>
+            <a:r>
+              <a:rPr dirty="0"/>
+              <a:t> </a:t>
+            </a:r>
+            <a:r>
+              <a:rPr dirty="0" err="1"/>
+              <a:t>của</a:t>
+            </a:r>
+            <a:r>
+              <a:rPr dirty="0"/>
+              <a:t> </a:t>
+            </a:r>
+            <a:r>
+              <a:rPr dirty="0" err="1"/>
+              <a:t>mình</a:t>
+            </a:r>
+            <a:r>
+              <a:rPr dirty="0"/>
+              <a:t>.</a:t>
+            </a:r>
+          </a:p>
+        </p:txBody>
+      </p:sp>
+    </p:spTree>
+  </p:cSld>
+  <p:clrMapOvr>
+    <a:masterClrMapping/>
+  </p:clrMapOvr>
+</p:notes>
+</file>
+
+<file path=ppt/notesSlides/notesSlide3.xml><?xml version="1.0" encoding="utf-8"?>
+<p:notes xmlns:a="http://schemas.openxmlformats.org/drawingml/2006/main" xmlns:r="http://schemas.openxmlformats.org/officeDocument/2006/relationships" xmlns:p="http://schemas.openxmlformats.org/presentationml/2006/main">
+  <p:cSld>
+    <p:spTree>
+      <p:nvGrpSpPr>
+        <p:cNvPr id="1" name=""/>
+        <p:cNvGrpSpPr/>
+        <p:nvPr/>
+      </p:nvGrpSpPr>
+      <p:grpSpPr>
+        <a:xfrm>
+          <a:off x="0" y="0"/>
+          <a:ext cx="0" cy="0"/>
+          <a:chOff x="0" y="0"/>
+          <a:chExt cx="0" cy="0"/>
+        </a:xfrm>
+      </p:grpSpPr>
+      <p:sp>
+        <p:nvSpPr>
           <p:cNvPr id="2" name="Slide Image Placeholder 1"/>
           <p:cNvSpPr>
             <a:spLocks noGrp="1" noRot="1" noChangeAspect="1"/>
@@ -1031,12 +1594,12 @@
           <a:lstStyle/>
           <a:p>
             <a:r>
-              <a:t>[Nou] Truy vấn gồm một ảnh tham chiếu và một câu mô tả thay đổi; hệ thống phải tìm ảnh giữ đặc điểm của ảnh tham chiếu và áp dụng thay đổi. Bộ ba (ảnh tham chiếu, câu, ảnh đích) phải gán nhãn tay nên đắt và nhỏ, vì vậy cần zero-shot: không dùng bộ ba nào khi huấn luyện.</a:t>
-            </a:r>
-          </a:p>
-          <a:p>
-            <a:r>
-              <a:t>Con số cần nêu: FashionIQ chỉ có 46,6 nghìn bộ ba, CIRR 28,8 nghìn.</a:t>
+              <a:t>[Tâm] Truy vấn gồm một ảnh tham chiếu và một câu chỉ mô tả phần thay đổi; hệ thống phải tìm ảnh giữ đặc điểm của ảnh tham chiếu và áp dụng thay đổi. Bài báo LinCIR giải bài toán này mà không cần bộ ba gán nhãn. Câu hỏi của nhóm: sửa hàm mất mát (A) hoặc sửa nhiễu (B) có giúp LinCIR truy xuất tốt hơn không.</a:t>
+            </a:r>
+          </a:p>
+          <a:p>
+            <a:r>
+              <a:t>Con số cần nêu: FashionIQ chỉ có 46,6 nghìn bộ ba gán nhãn, CIRR 28,8 nghìn.</a:t>
             </a:r>
           </a:p>
         </p:txBody>
@@ -1106,12 +1669,12 @@
           <a:lstStyle/>
           <a:p>
             <a:r>
-              <a:t>[Dũng] Bài toán vẫn là truy xuất có xếp hạng như chương I. R@K là Recall tính trên K kết quả đầu; mAP@K dùng khi có nhiều ảnh đúng. Khác chương I ở chỗ so khớp bằng vector thay vì từ khóa.</a:t>
-            </a:r>
-          </a:p>
-          <a:p>
-            <a:r>
-              <a:t>Con số cần nêu: R@10 = 26 nghĩa là 26% số truy vấn có ảnh đúng trong 10 kết quả đầu.</a:t>
+              <a:t>[Tâm] CIR vẫn là truy xuất có xếp hạng như chương I. R@K là tỉ lệ truy vấn có ảnh đích trong K kết quả đầu, dùng cho FashionIQ (1 ảnh đúng). AP@K lấy Precision tại các vị trí có ảnh đúng, chia cho min(K, số ảnh đúng); mAP@K là trung bình trên các truy vấn, dùng cho CIRCO (nhiều ảnh đúng). Khác chương I: so khớp vector bằng cosine thay vì khớp từ. Mọi so sánh được kiểm định bootstrap và Wilcoxon theo từng truy vấn.</a:t>
+            </a:r>
+          </a:p>
+          <a:p>
+            <a:r>
+              <a:t>Con số cần nêu: R@10 = 26 nghĩa là 26% số truy vấn có ảnh đích trong 10 kết quả đầu.</a:t>
             </a:r>
           </a:p>
         </p:txBody>
@@ -1181,7 +1744,7 @@
           <a:lstStyle/>
           <a:p>
             <a:r>
-              <a:t>[Nou] Ảnh tham chiếu được chuyển thành một token giả [$] và ghép vào câu “a photo of [$] that …”; bộ mã hóa văn bản tạo vector truy vấn để tìm ảnh. Chỉ cần huấn luyện mạng chiếu φ.</a:t>
+              <a:t>[Tâm] Ảnh tham chiếu qua bộ mã hóa ảnh rồi qua mạng chiếu φ thành một token giả [$], ghép vào câu “a photo of [$] that …”; bộ mã hóa văn bản tạo vector truy vấn để xếp hạng ảnh theo cosine. Chỉ cần học φ, CLIP giữ nguyên.</a:t>
             </a:r>
           </a:p>
         </p:txBody>
@@ -1197,6 +1760,57 @@
           </p:nvPr>
         </p:nvSpPr>
         <p:spPr/>
+      </p:sp>
+    </p:spTree>
+  </p:cSld>
+  <p:clrMapOvr>
+    <a:masterClrMapping/>
+  </p:clrMapOvr>
+</p:notes>
+</file>
+
+<file path=ppt/notesSlides/notesSlide6.xml><?xml version="1.0" encoding="utf-8"?>
+<p:notes xmlns:a="http://schemas.openxmlformats.org/drawingml/2006/main" xmlns:r="http://schemas.openxmlformats.org/officeDocument/2006/relationships" xmlns:p="http://schemas.openxmlformats.org/presentationml/2006/main">
+  <p:cSld>
+    <p:spTree>
+      <p:nvGrpSpPr>
+        <p:cNvPr id="1" name=""/>
+        <p:cNvGrpSpPr/>
+        <p:nvPr/>
+      </p:nvGrpSpPr>
+      <p:grpSpPr>
+        <a:xfrm>
+          <a:off x="0" y="0"/>
+          <a:ext cx="0" cy="0"/>
+          <a:chOff x="0" y="0"/>
+          <a:chExt cx="0" cy="0"/>
+        </a:xfrm>
+      </p:grpSpPr>
+      <p:sp>
+        <p:nvSpPr>
+          <p:cNvPr id="3" name="Notes Placeholder 2"/>
+          <p:cNvSpPr>
+            <a:spLocks noGrp="1"/>
+          </p:cNvSpPr>
+          <p:nvPr>
+            <p:ph type="body" sz="quarter" idx="3"/>
+          </p:nvPr>
+        </p:nvSpPr>
+        <p:spPr/>
+        <p:txBody>
+          <a:bodyPr/>
+          <a:lstStyle/>
+          <a:p>
+            <a:r>
+              <a:t>[Tâm] Pic2Word và SEARLE học φ nhưng cần ảnh khi huấn luyện và chỉ học một câu mẫu cố định. LinCIR học φ chỉ từ văn bản bằng Self-Masking Projection và thêm nhiễu; bài báo đạt kết quả tốt nhất trên 4 bộ đánh giá, huấn luyện nhanh hơn và vượt cả phương pháp có giám sát trên FashionIQ.</a:t>
+            </a:r>
+          </a:p>
+          <a:p>
+            <a:r>
+              <a:t>Con số cần nêu: Nhanh hơn Pic2Word 6 lần, SEARLE 8,4 lần với ViT-L.</a:t>
+            </a:r>
+          </a:p>
+        </p:txBody>
       </p:sp>
     </p:spTree>
   </p:cSld>
@@ -1251,7 +1865,7 @@
           <a:lstStyle/>
           <a:p>
             <a:r>
-              <a:t>[Trung] Khác Pic2Word và SEARLE (cần ảnh, câu mẫu cố định), LinCIR huấn luyện φ chỉ bằng văn bản: che các từ khóa của câu bằng [$] và yêu cầu câu đã che có cùng vector với câu gốc.</a:t>
+              <a:t>[Tâm] Che tính từ, danh từ trong câu bằng [$], thay [$] bằng token do φ tạo từ chính câu gốc, rồi yêu cầu câu đã che có cùng vector với câu gốc (MSE). Ví dụ “gray cat sleeps on a pillow” thành “[$] sleeps on [$]”. Nhờ vậy [$] học được bản tóm tắt một từ của câu.</a:t>
             </a:r>
           </a:p>
         </p:txBody>
@@ -1267,6 +1881,57 @@
           </p:nvPr>
         </p:nvSpPr>
         <p:spPr/>
+      </p:sp>
+    </p:spTree>
+  </p:cSld>
+  <p:clrMapOvr>
+    <a:masterClrMapping/>
+  </p:clrMapOvr>
+</p:notes>
+</file>
+
+<file path=ppt/notesSlides/notesSlide8.xml><?xml version="1.0" encoding="utf-8"?>
+<p:notes xmlns:a="http://schemas.openxmlformats.org/drawingml/2006/main" xmlns:r="http://schemas.openxmlformats.org/officeDocument/2006/relationships" xmlns:p="http://schemas.openxmlformats.org/presentationml/2006/main">
+  <p:cSld>
+    <p:spTree>
+      <p:nvGrpSpPr>
+        <p:cNvPr id="1" name=""/>
+        <p:cNvGrpSpPr/>
+        <p:nvPr/>
+      </p:nvGrpSpPr>
+      <p:grpSpPr>
+        <a:xfrm>
+          <a:off x="0" y="0"/>
+          <a:ext cx="0" cy="0"/>
+          <a:chOff x="0" y="0"/>
+          <a:chExt cx="0" cy="0"/>
+        </a:xfrm>
+      </p:grpSpPr>
+      <p:sp>
+        <p:nvSpPr>
+          <p:cNvPr id="3" name="Notes Placeholder 2"/>
+          <p:cNvSpPr>
+            <a:spLocks noGrp="1"/>
+          </p:cNvSpPr>
+          <p:nvPr>
+            <p:ph type="body" sz="quarter" idx="3"/>
+          </p:nvPr>
+        </p:nvSpPr>
+        <p:spPr/>
+        <p:txBody>
+          <a:bodyPr/>
+          <a:lstStyle/>
+          <a:p>
+            <a:r>
+              <a:t>[Tâm] Vector ảnh và vector văn bản của CLIP nằm ở hai vùng tách biệt. φ học trên văn bản nhưng khi suy luận nhận vector ảnh, nên LinCIR thêm nhiễu u · ε khi huấn luyện để φ chịu được độ lệch này.</a:t>
+            </a:r>
+          </a:p>
+          <a:p>
+            <a:r>
+              <a:t>Con số cần nêu: Tâm hai vùng cách nhau 0,82; ảnh và chú thích của chính nó chỉ có cosine 0,26.</a:t>
+            </a:r>
+          </a:p>
+        </p:txBody>
       </p:sp>
     </p:spTree>
   </p:cSld>
@@ -1321,12 +1986,12 @@
           <a:lstStyle/>
           <a:p>
             <a:r>
-              <a:t>[Tâm] Mã nguồn gốc không chạy với thư viện hiện tại. Nhóm viết lại phần mã hóa văn bản, sửa 4 lỗi và kiểm chứng kết quả trùng khớp với mô hình gốc.</a:t>
-            </a:r>
-          </a:p>
-          <a:p>
-            <a:r>
-              <a:t>Con số cần nêu: Sai lệch 0,00 so với CLIP gốc.</a:t>
+              <a:t>[Tâm] Cải tiến A sửa hàm mất mát: MSE chỉ kéo câu đã che về câu gốc, không phạt khi nó cũng gần các câu khác, trong khi đánh giá là xếp hạng. Thêm InfoNCE với 511 câu khác trong batch làm mẫu âm. Giả thuyết H1: A tăng R@K, mAP@K so với baseline.</a:t>
+            </a:r>
+          </a:p>
+          <a:p>
+            <a:r>
+              <a:t>Con số cần nêu: Chi phí chỉ tăng 2% thời gian mỗi bước (1,474 so với 1,448 giây).</a:t>
             </a:r>
           </a:p>
         </p:txBody>
@@ -1530,7 +2195,7 @@
           <a:p>
             <a:fld id="{5BCAD085-E8A6-8845-BD4E-CB4CCA059FC4}" type="datetimeFigureOut">
               <a:rPr lang="en-US" smtClean="0"/>
-              <a:t>10/8/26</a:t>
+              <a:t>10/13/26</a:t>
             </a:fld>
             <a:endParaRPr lang="en-US"/>
           </a:p>
@@ -1698,7 +2363,7 @@
           <a:p>
             <a:fld id="{5BCAD085-E8A6-8845-BD4E-CB4CCA059FC4}" type="datetimeFigureOut">
               <a:rPr lang="en-US" smtClean="0"/>
-              <a:t>10/8/26</a:t>
+              <a:t>10/13/26</a:t>
             </a:fld>
             <a:endParaRPr lang="en-US"/>
           </a:p>
@@ -1876,7 +2541,7 @@
           <a:p>
             <a:fld id="{5BCAD085-E8A6-8845-BD4E-CB4CCA059FC4}" type="datetimeFigureOut">
               <a:rPr lang="en-US" smtClean="0"/>
-              <a:t>10/8/26</a:t>
+              <a:t>10/13/26</a:t>
             </a:fld>
             <a:endParaRPr lang="en-US"/>
           </a:p>
@@ -2044,7 +2709,7 @@
           <a:p>
             <a:fld id="{5BCAD085-E8A6-8845-BD4E-CB4CCA059FC4}" type="datetimeFigureOut">
               <a:rPr lang="en-US" smtClean="0"/>
-              <a:t>10/8/26</a:t>
+              <a:t>10/13/26</a:t>
             </a:fld>
             <a:endParaRPr lang="en-US"/>
           </a:p>
@@ -2289,7 +2954,7 @@
           <a:p>
             <a:fld id="{5BCAD085-E8A6-8845-BD4E-CB4CCA059FC4}" type="datetimeFigureOut">
               <a:rPr lang="en-US" smtClean="0"/>
-              <a:t>10/8/26</a:t>
+              <a:t>10/13/26</a:t>
             </a:fld>
             <a:endParaRPr lang="en-US"/>
           </a:p>
@@ -2574,7 +3239,7 @@
           <a:p>
             <a:fld id="{5BCAD085-E8A6-8845-BD4E-CB4CCA059FC4}" type="datetimeFigureOut">
               <a:rPr lang="en-US" smtClean="0"/>
-              <a:t>10/8/26</a:t>
+              <a:t>10/13/26</a:t>
             </a:fld>
             <a:endParaRPr lang="en-US"/>
           </a:p>
@@ -2993,7 +3658,7 @@
           <a:p>
             <a:fld id="{5BCAD085-E8A6-8845-BD4E-CB4CCA059FC4}" type="datetimeFigureOut">
               <a:rPr lang="en-US" smtClean="0"/>
-              <a:t>10/8/26</a:t>
+              <a:t>10/13/26</a:t>
             </a:fld>
             <a:endParaRPr lang="en-US"/>
           </a:p>
@@ -3110,7 +3775,7 @@
           <a:p>
             <a:fld id="{5BCAD085-E8A6-8845-BD4E-CB4CCA059FC4}" type="datetimeFigureOut">
               <a:rPr lang="en-US" smtClean="0"/>
-              <a:t>10/8/26</a:t>
+              <a:t>10/13/26</a:t>
             </a:fld>
             <a:endParaRPr lang="en-US"/>
           </a:p>
@@ -3205,7 +3870,7 @@
           <a:p>
             <a:fld id="{5BCAD085-E8A6-8845-BD4E-CB4CCA059FC4}" type="datetimeFigureOut">
               <a:rPr lang="en-US" smtClean="0"/>
-              <a:t>10/8/26</a:t>
+              <a:t>10/13/26</a:t>
             </a:fld>
             <a:endParaRPr lang="en-US"/>
           </a:p>
@@ -3480,7 +4145,7 @@
           <a:p>
             <a:fld id="{5BCAD085-E8A6-8845-BD4E-CB4CCA059FC4}" type="datetimeFigureOut">
               <a:rPr lang="en-US" smtClean="0"/>
-              <a:t>10/8/26</a:t>
+              <a:t>10/13/26</a:t>
             </a:fld>
             <a:endParaRPr lang="en-US"/>
           </a:p>
@@ -3732,7 +4397,7 @@
           <a:p>
             <a:fld id="{5BCAD085-E8A6-8845-BD4E-CB4CCA059FC4}" type="datetimeFigureOut">
               <a:rPr lang="en-US" smtClean="0"/>
-              <a:t>10/8/26</a:t>
+              <a:t>10/13/26</a:t>
             </a:fld>
             <a:endParaRPr lang="en-US"/>
           </a:p>
@@ -3943,7 +4608,7 @@
           <a:p>
             <a:fld id="{5BCAD085-E8A6-8845-BD4E-CB4CCA059FC4}" type="datetimeFigureOut">
               <a:rPr lang="en-US" smtClean="0"/>
-              <a:t>10/8/26</a:t>
+              <a:t>10/13/26</a:t>
             </a:fld>
             <a:endParaRPr lang="en-US"/>
           </a:p>
@@ -4379,7 +5044,7 @@
         </p:nvSpPr>
         <p:spPr>
           <a:xfrm>
-            <a:off x="7630509" y="5454098"/>
+            <a:off x="7086599" y="3736008"/>
             <a:ext cx="822960" cy="822960"/>
           </a:xfrm>
           <a:prstGeom prst="ellipse">
@@ -4855,8 +5520,8 @@
         </p:nvSpPr>
         <p:spPr>
           <a:xfrm>
-            <a:off x="731519" y="5349240"/>
-            <a:ext cx="6949440" cy="1737360"/>
+            <a:off x="483476" y="5477884"/>
+            <a:ext cx="11225048" cy="1057149"/>
           </a:xfrm>
           <a:prstGeom prst="rect">
             <a:avLst/>
@@ -4908,26 +5573,14 @@
                 </a:solidFill>
                 <a:latin typeface="Helvetica"/>
               </a:rPr>
-              <a:t>: TS. Đào Thị Thuý Quỳnh · </a:t>
-            </a:r>
-            <a:r>
-              <a:rPr sz="2000" b="0" i="0" dirty="0" err="1">
-                <a:solidFill>
-                  <a:srgbClr val="5B6B82"/>
-                </a:solidFill>
-                <a:latin typeface="Helvetica"/>
-              </a:rPr>
-              <a:t>Lớp</a:t>
-            </a:r>
-            <a:r>
-              <a:rPr sz="2000" b="0" i="0" dirty="0">
-                <a:solidFill>
-                  <a:srgbClr val="5B6B82"/>
-                </a:solidFill>
-                <a:latin typeface="Helvetica"/>
-              </a:rPr>
-              <a:t> M25CQHT02-B</a:t>
-            </a:r>
+              <a:t>: TS. Đào Thị Thuý Quỳnh </a:t>
+            </a:r>
+            <a:endParaRPr lang="en-US" sz="2000" dirty="0">
+              <a:solidFill>
+                <a:srgbClr val="5B6B82"/>
+              </a:solidFill>
+              <a:latin typeface="Helvetica"/>
+            </a:endParaRPr>
           </a:p>
           <a:p>
             <a:pPr algn="l">
@@ -4936,17 +5589,26 @@
               </a:lnSpc>
             </a:pPr>
             <a:r>
+              <a:rPr sz="2000" b="0" i="0" dirty="0" err="1">
+                <a:solidFill>
+                  <a:srgbClr val="5B6B82"/>
+                </a:solidFill>
+                <a:latin typeface="Helvetica"/>
+              </a:rPr>
+              <a:t>Lớp</a:t>
+            </a:r>
+            <a:r>
               <a:rPr sz="2000" b="0" i="0" dirty="0">
                 <a:solidFill>
                   <a:srgbClr val="5B6B82"/>
                 </a:solidFill>
                 <a:latin typeface="Helvetica"/>
               </a:rPr>
-              <a:t>Đào Văn Tâm · Lâm Thành Trung · Nguyễn Xuân Tùng</a:t>
-            </a:r>
-          </a:p>
-          <a:p>
-            <a:pPr algn="l">
+              <a:t> M25CQHT02-B</a:t>
+            </a:r>
+          </a:p>
+          <a:p>
+            <a:pPr>
               <a:lnSpc>
                 <a:spcPct val="110000"/>
               </a:lnSpc>
@@ -4958,7 +5620,33 @@
                 </a:solidFill>
                 <a:latin typeface="Helvetica"/>
               </a:rPr>
-              <a:t>Trần Quang Đức Dũng · </a:t>
+              <a:t>Đào Văn Tâm · Lâm Thành Trung · Nguyễn Xuân Tùng</a:t>
+            </a:r>
+            <a:r>
+              <a:rPr lang="en-VN" sz="2000" dirty="0">
+                <a:solidFill>
+                  <a:srgbClr val="5B6B82"/>
+                </a:solidFill>
+              </a:rPr>
+              <a:t> · </a:t>
+            </a:r>
+            <a:r>
+              <a:rPr sz="2000" b="0" i="0" dirty="0" err="1">
+                <a:solidFill>
+                  <a:srgbClr val="5B6B82"/>
+                </a:solidFill>
+                <a:latin typeface="Helvetica"/>
+              </a:rPr>
+              <a:t>Trần</a:t>
+            </a:r>
+            <a:r>
+              <a:rPr sz="2000" b="0" i="0" dirty="0">
+                <a:solidFill>
+                  <a:srgbClr val="5B6B82"/>
+                </a:solidFill>
+                <a:latin typeface="Helvetica"/>
+              </a:rPr>
+              <a:t> Quang Đức Dũng · </a:t>
             </a:r>
             <a:r>
               <a:rPr sz="2000" b="0" i="0" dirty="0" err="1">
@@ -5058,8 +5746,8 @@
         </p:nvSpPr>
         <p:spPr>
           <a:xfrm>
-            <a:off x="9966960" y="4389120"/>
-            <a:ext cx="3566160" cy="3566160"/>
+            <a:off x="-1828800" y="4114800"/>
+            <a:ext cx="3840480" cy="3840480"/>
           </a:xfrm>
           <a:prstGeom prst="ellipse">
             <a:avLst/>
@@ -5103,7 +5791,7 @@
         </p:nvSpPr>
         <p:spPr>
           <a:xfrm>
-            <a:off x="11704320" y="3657600"/>
+            <a:off x="54864" y="6035040"/>
             <a:ext cx="411480" cy="411480"/>
           </a:xfrm>
           <a:prstGeom prst="ellipse">
@@ -5174,7 +5862,7 @@
                 </a:solidFill>
                 <a:latin typeface="Helvetica"/>
               </a:rPr>
-              <a:t>Mọi biến thể dùng cùng cấu hình, 3 seed và kiểm định theo truy vấn</a:t>
+              <a:t>Cải tiến B: dịch nhiễu theo hướng của modality gap</a:t>
             </a:r>
           </a:p>
         </p:txBody>
@@ -5227,7 +5915,7 @@
         <p:spPr>
           <a:xfrm>
             <a:off x="548640" y="1737360"/>
-            <a:ext cx="3566160" cy="3429000"/>
+            <a:ext cx="5577840" cy="2011680"/>
           </a:xfrm>
           <a:prstGeom prst="roundRect">
             <a:avLst>
@@ -5274,7 +5962,7 @@
         <p:spPr>
           <a:xfrm>
             <a:off x="777240" y="1901952"/>
-            <a:ext cx="3108960" cy="502920"/>
+            <a:ext cx="5120640" cy="502920"/>
           </a:xfrm>
           <a:prstGeom prst="rect">
             <a:avLst/>
@@ -5299,7 +5987,7 @@
                 </a:solidFill>
                 <a:latin typeface="Helvetica"/>
               </a:rPr>
-              <a:t>Cấu hình</a:t>
+              <a:t>Vấn đề</a:t>
             </a:r>
           </a:p>
         </p:txBody>
@@ -5313,7 +6001,7 @@
         <p:spPr>
           <a:xfrm>
             <a:off x="777240" y="2468880"/>
-            <a:ext cx="3108960" cy="2240280"/>
+            <a:ext cx="5120640" cy="1143000"/>
           </a:xfrm>
           <a:prstGeom prst="rect">
             <a:avLst/>
@@ -5346,7 +6034,7 @@
                 </a:solidFill>
                 <a:latin typeface="Helvetica"/>
               </a:rPr>
-              <a:t>4 biến thể: baseline, A, B, A+B</a:t>
+              <a:t>Nhiễu u · ε đều theo mọi hướng</a:t>
             </a:r>
           </a:p>
           <a:p>
@@ -5370,31 +6058,7 @@
                 </a:solidFill>
                 <a:latin typeface="Helvetica"/>
               </a:rPr>
-              <a:t>CLIP ViT-L/14, batch 512</a:t>
-            </a:r>
-          </a:p>
-          <a:p>
-            <a:pPr marL="292608" indent="-292608">
-              <a:lnSpc>
-                <a:spcPct val="108000"/>
-              </a:lnSpc>
-              <a:spcAft>
-                <a:spcPts val="600"/>
-              </a:spcAft>
-              <a:buClr>
-                <a:srgbClr val="1E6FE8"/>
-              </a:buClr>
-              <a:buFont typeface="Helvetica"/>
-              <a:buChar char="•"/>
-            </a:pPr>
-            <a:r>
-              <a:rPr sz="2100" b="0" i="0">
-                <a:solidFill>
-                  <a:srgbClr val="0F1C3F"/>
-                </a:solidFill>
-                <a:latin typeface="Helvetica"/>
-              </a:rPr>
-              <a:t>5.000 bước, 3 seed mỗi biến thể</a:t>
+              <a:t>Không dịch về phía vùng ảnh</a:t>
             </a:r>
           </a:p>
         </p:txBody>
@@ -5407,8 +6071,8 @@
         </p:nvSpPr>
         <p:spPr>
           <a:xfrm>
-            <a:off x="4343400" y="1737360"/>
-            <a:ext cx="3566160" cy="3429000"/>
+            <a:off x="548640" y="3931920"/>
+            <a:ext cx="5577840" cy="2011680"/>
           </a:xfrm>
           <a:prstGeom prst="roundRect">
             <a:avLst>
@@ -5416,7 +6080,7 @@
             </a:avLst>
           </a:prstGeom>
           <a:solidFill>
-            <a:srgbClr val="EAF2FF"/>
+            <a:srgbClr val="D6E6FF"/>
           </a:solidFill>
           <a:ln>
             <a:noFill/>
@@ -5454,8 +6118,8 @@
         </p:nvSpPr>
         <p:spPr>
           <a:xfrm>
-            <a:off x="4572000" y="1901952"/>
-            <a:ext cx="3108960" cy="502920"/>
+            <a:off x="777240" y="4096511"/>
+            <a:ext cx="5120640" cy="502920"/>
           </a:xfrm>
           <a:prstGeom prst="rect">
             <a:avLst/>
@@ -5480,7 +6144,7 @@
                 </a:solidFill>
                 <a:latin typeface="Helvetica"/>
               </a:rPr>
-              <a:t>Đánh giá</a:t>
+              <a:t>Giải pháp: nhiễu có hướng</a:t>
             </a:r>
           </a:p>
         </p:txBody>
@@ -5493,8 +6157,8 @@
         </p:nvSpPr>
         <p:spPr>
           <a:xfrm>
-            <a:off x="4572000" y="2468880"/>
-            <a:ext cx="3108960" cy="2240280"/>
+            <a:off x="777240" y="4663440"/>
+            <a:ext cx="5120640" cy="1143000"/>
           </a:xfrm>
           <a:prstGeom prst="rect">
             <a:avLst/>
@@ -5521,13 +6185,13 @@
               <a:buChar char="•"/>
             </a:pPr>
             <a:r>
-              <a:rPr sz="2100" b="0" i="0">
+              <a:rPr sz="2100" b="1" i="0">
                 <a:solidFill>
                   <a:srgbClr val="0F1C3F"/>
                 </a:solidFill>
                 <a:latin typeface="Helvetica"/>
               </a:rPr>
-              <a:t>FashionIQ val (3 nhóm sản phẩm)</a:t>
+              <a:t>n = 0,5 · Δ + u · ε</a:t>
             </a:r>
           </a:p>
           <a:p>
@@ -5551,92 +6215,21 @@
                 </a:solidFill>
                 <a:latin typeface="Helvetica"/>
               </a:rPr>
-              <a:t>CIRCO val (220 truy vấn)</a:t>
-            </a:r>
-          </a:p>
-          <a:p>
-            <a:pPr marL="292608" indent="-292608">
-              <a:lnSpc>
-                <a:spcPct val="108000"/>
-              </a:lnSpc>
-              <a:spcAft>
-                <a:spcPts val="600"/>
-              </a:spcAft>
-              <a:buClr>
-                <a:srgbClr val="1E6FE8"/>
-              </a:buClr>
-              <a:buFont typeface="Helvetica"/>
-              <a:buChar char="•"/>
-            </a:pPr>
-            <a:r>
-              <a:rPr sz="2100" b="0" i="0">
-                <a:solidFill>
-                  <a:srgbClr val="0F1C3F"/>
-                </a:solidFill>
-                <a:latin typeface="Helvetica"/>
-              </a:rPr>
-              <a:t>Kiểm định bootstrap và Wilcoxon theo từng truy vấn</a:t>
-            </a:r>
-          </a:p>
-        </p:txBody>
-      </p:sp>
-      <p:sp>
-        <p:nvSpPr>
-          <p:cNvPr id="12" name="Rounded Rectangle 11"/>
-          <p:cNvSpPr/>
-          <p:nvPr/>
-        </p:nvSpPr>
-        <p:spPr>
-          <a:xfrm>
-            <a:off x="8138160" y="1737360"/>
-            <a:ext cx="3566160" cy="3429000"/>
-          </a:xfrm>
-          <a:prstGeom prst="roundRect">
-            <a:avLst>
-              <a:gd name="adj" fmla="val 8000"/>
-            </a:avLst>
-          </a:prstGeom>
-          <a:solidFill>
-            <a:srgbClr val="D6E6FF"/>
-          </a:solidFill>
-          <a:ln>
-            <a:noFill/>
-          </a:ln>
-          <a:effectLst/>
-        </p:spPr>
-        <p:style>
-          <a:lnRef idx="1">
-            <a:schemeClr val="accent1"/>
-          </a:lnRef>
-          <a:fillRef idx="3">
-            <a:schemeClr val="accent1"/>
-          </a:fillRef>
-          <a:effectRef idx="2">
-            <a:schemeClr val="accent1"/>
-          </a:effectRef>
-          <a:fontRef idx="minor">
-            <a:schemeClr val="lt1"/>
-          </a:fontRef>
-        </p:style>
-        <p:txBody>
-          <a:bodyPr rtlCol="0" anchor="ctr"/>
-          <a:lstStyle/>
-          <a:p>
-            <a:pPr algn="ctr"/>
-            <a:endParaRPr/>
-          </a:p>
-        </p:txBody>
-      </p:sp>
-      <p:sp>
-        <p:nvSpPr>
-          <p:cNvPr id="13" name="TextBox 12"/>
+              <a:t>Δ = tâm ảnh − tâm văn bản</a:t>
+            </a:r>
+          </a:p>
+        </p:txBody>
+      </p:sp>
+      <p:sp>
+        <p:nvSpPr>
+          <p:cNvPr id="12" name="TextBox 11"/>
           <p:cNvSpPr txBox="1"/>
           <p:nvPr/>
         </p:nvSpPr>
         <p:spPr>
           <a:xfrm>
-            <a:off x="8366760" y="1901952"/>
-            <a:ext cx="3108960" cy="502920"/>
+            <a:off x="6675120" y="1828800"/>
+            <a:ext cx="4754880" cy="868680"/>
           </a:xfrm>
           <a:prstGeom prst="rect">
             <a:avLst/>
@@ -5655,122 +6248,27 @@
               </a:lnSpc>
             </a:pPr>
             <a:r>
-              <a:rPr sz="2200" b="1" i="0">
-                <a:solidFill>
-                  <a:srgbClr val="144FB0"/>
-                </a:solidFill>
-                <a:latin typeface="Helvetica"/>
-              </a:rPr>
-              <a:t>Vận hành Kaggle</a:t>
-            </a:r>
-          </a:p>
-        </p:txBody>
-      </p:sp>
-      <p:sp>
-        <p:nvSpPr>
-          <p:cNvPr id="14" name="TextBox 13"/>
+              <a:rPr sz="4800" b="1" i="0">
+                <a:solidFill>
+                  <a:srgbClr val="1E6FE8"/>
+                </a:solidFill>
+                <a:latin typeface="Helvetica"/>
+              </a:rPr>
+              <a:t>13,87</a:t>
+            </a:r>
+          </a:p>
+        </p:txBody>
+      </p:sp>
+      <p:sp>
+        <p:nvSpPr>
+          <p:cNvPr id="13" name="TextBox 12"/>
           <p:cNvSpPr txBox="1"/>
           <p:nvPr/>
         </p:nvSpPr>
         <p:spPr>
           <a:xfrm>
-            <a:off x="8366760" y="2468880"/>
-            <a:ext cx="3108960" cy="2240280"/>
-          </a:xfrm>
-          <a:prstGeom prst="rect">
-            <a:avLst/>
-          </a:prstGeom>
-          <a:noFill/>
-        </p:spPr>
-        <p:txBody>
-          <a:bodyPr wrap="square">
-            <a:spAutoFit/>
-          </a:bodyPr>
-          <a:lstStyle/>
-          <a:p>
-            <a:pPr marL="292608" indent="-292608">
-              <a:lnSpc>
-                <a:spcPct val="108000"/>
-              </a:lnSpc>
-              <a:spcAft>
-                <a:spcPts val="600"/>
-              </a:spcAft>
-              <a:buClr>
-                <a:srgbClr val="1E6FE8"/>
-              </a:buClr>
-              <a:buFont typeface="Helvetica"/>
-              <a:buChar char="•"/>
-            </a:pPr>
-            <a:r>
-              <a:rPr sz="2100" b="0" i="0">
-                <a:solidFill>
-                  <a:srgbClr val="0F1C3F"/>
-                </a:solidFill>
-                <a:latin typeface="Helvetica"/>
-              </a:rPr>
-              <a:t>2 GPU T4, mỗi GPU một lần chạy</a:t>
-            </a:r>
-          </a:p>
-          <a:p>
-            <a:pPr marL="292608" indent="-292608">
-              <a:lnSpc>
-                <a:spcPct val="108000"/>
-              </a:lnSpc>
-              <a:spcAft>
-                <a:spcPts val="600"/>
-              </a:spcAft>
-              <a:buClr>
-                <a:srgbClr val="1E6FE8"/>
-              </a:buClr>
-              <a:buFont typeface="Helvetica"/>
-              <a:buChar char="•"/>
-            </a:pPr>
-            <a:r>
-              <a:rPr sz="2100" b="0" i="0">
-                <a:solidFill>
-                  <a:srgbClr val="0F1C3F"/>
-                </a:solidFill>
-                <a:latin typeface="Helvetica"/>
-              </a:rPr>
-              <a:t>Không vượt 12 giờ mỗi phiên</a:t>
-            </a:r>
-          </a:p>
-          <a:p>
-            <a:pPr marL="292608" indent="-292608">
-              <a:lnSpc>
-                <a:spcPct val="108000"/>
-              </a:lnSpc>
-              <a:spcAft>
-                <a:spcPts val="600"/>
-              </a:spcAft>
-              <a:buClr>
-                <a:srgbClr val="1E6FE8"/>
-              </a:buClr>
-              <a:buFont typeface="Helvetica"/>
-              <a:buChar char="•"/>
-            </a:pPr>
-            <a:r>
-              <a:rPr sz="2100" b="0" i="0">
-                <a:solidFill>
-                  <a:srgbClr val="0F1C3F"/>
-                </a:solidFill>
-                <a:latin typeface="Helvetica"/>
-              </a:rPr>
-              <a:t>Nạp dữ liệu nhanh gấp 3,1 lần</a:t>
-            </a:r>
-          </a:p>
-        </p:txBody>
-      </p:sp>
-      <p:sp>
-        <p:nvSpPr>
-          <p:cNvPr id="15" name="TextBox 14"/>
-          <p:cNvSpPr txBox="1"/>
-          <p:nvPr/>
-        </p:nvSpPr>
-        <p:spPr>
-          <a:xfrm>
-            <a:off x="548640" y="5349240"/>
-            <a:ext cx="11064240" cy="822960"/>
+            <a:off x="6675120" y="2697480"/>
+            <a:ext cx="4754880" cy="777240"/>
           </a:xfrm>
           <a:prstGeom prst="rect">
             <a:avLst/>
@@ -5789,22 +6287,91 @@
               </a:lnSpc>
             </a:pPr>
             <a:r>
-              <a:rPr sz="2200" b="1" i="0">
-                <a:solidFill>
-                  <a:srgbClr val="144FB0"/>
-                </a:solidFill>
-                <a:latin typeface="Helvetica"/>
-              </a:rPr>
-              <a:t>Các biến thể chỉ khác đúng thành phần cải tiến</a:t>
-            </a:r>
-            <a:r>
-              <a:rPr sz="2200" b="0" i="0">
-                <a:solidFill>
-                  <a:srgbClr val="0F1C3F"/>
-                </a:solidFill>
-                <a:latin typeface="Helvetica"/>
-              </a:rPr>
-              <a:t>, nên chênh lệch kết quả là do cải tiến, không do cấu hình</a:t>
+              <a:rPr sz="2000" b="0" i="0">
+                <a:solidFill>
+                  <a:srgbClr val="5B6B82"/>
+                </a:solidFill>
+                <a:latin typeface="Helvetica"/>
+              </a:rPr>
+              <a:t>độ lớn của Δ, tính trên 5.000 cặp COCO val2017 (khác tập đánh giá)</a:t>
+            </a:r>
+          </a:p>
+        </p:txBody>
+      </p:sp>
+      <p:sp>
+        <p:nvSpPr>
+          <p:cNvPr id="14" name="TextBox 13"/>
+          <p:cNvSpPr txBox="1"/>
+          <p:nvPr/>
+        </p:nvSpPr>
+        <p:spPr>
+          <a:xfrm>
+            <a:off x="6675120" y="3931920"/>
+            <a:ext cx="4754880" cy="868680"/>
+          </a:xfrm>
+          <a:prstGeom prst="rect">
+            <a:avLst/>
+          </a:prstGeom>
+          <a:noFill/>
+        </p:spPr>
+        <p:txBody>
+          <a:bodyPr wrap="square" lIns="45720" tIns="27432" rIns="45720" bIns="27432" anchor="t">
+            <a:spAutoFit/>
+          </a:bodyPr>
+          <a:lstStyle/>
+          <a:p>
+            <a:pPr algn="l">
+              <a:lnSpc>
+                <a:spcPct val="110000"/>
+              </a:lnSpc>
+            </a:pPr>
+            <a:r>
+              <a:rPr sz="4800" b="1" i="0">
+                <a:solidFill>
+                  <a:srgbClr val="1E6FE8"/>
+                </a:solidFill>
+                <a:latin typeface="Helvetica"/>
+              </a:rPr>
+              <a:t>H2</a:t>
+            </a:r>
+          </a:p>
+        </p:txBody>
+      </p:sp>
+      <p:sp>
+        <p:nvSpPr>
+          <p:cNvPr id="15" name="TextBox 14"/>
+          <p:cNvSpPr txBox="1"/>
+          <p:nvPr/>
+        </p:nvSpPr>
+        <p:spPr>
+          <a:xfrm>
+            <a:off x="6675120" y="4800600"/>
+            <a:ext cx="4754880" cy="777240"/>
+          </a:xfrm>
+          <a:prstGeom prst="rect">
+            <a:avLst/>
+          </a:prstGeom>
+          <a:noFill/>
+        </p:spPr>
+        <p:txBody>
+          <a:bodyPr wrap="square" lIns="45720" tIns="27432" rIns="45720" bIns="27432" anchor="t">
+            <a:spAutoFit/>
+          </a:bodyPr>
+          <a:lstStyle/>
+          <a:p>
+            <a:pPr algn="l">
+              <a:lnSpc>
+                <a:spcPct val="110000"/>
+              </a:lnSpc>
+            </a:pPr>
+            <a:r>
+              <a:rPr sz="2000" b="0" i="0">
+                <a:solidFill>
+                  <a:srgbClr val="5B6B82"/>
+                </a:solidFill>
+                <a:latin typeface="Helvetica"/>
+              </a:rPr>
+              <a:t>giả thuyết: φ nhất quán hơn giữa ảnh và văn bản, nên R@K, mAP@K tăng</a:t>
             </a:r>
           </a:p>
         </p:txBody>
@@ -5862,8 +6429,8 @@
         </p:nvSpPr>
         <p:spPr>
           <a:xfrm>
-            <a:off x="9875520" y="4480560"/>
-            <a:ext cx="3474720" cy="3474720"/>
+            <a:off x="-1645920" y="4206240"/>
+            <a:ext cx="3657600" cy="3657600"/>
           </a:xfrm>
           <a:prstGeom prst="ellipse">
             <a:avLst/>
@@ -5907,7 +6474,7 @@
         </p:nvSpPr>
         <p:spPr>
           <a:xfrm>
-            <a:off x="11704320" y="3108960"/>
+            <a:off x="54864" y="6035040"/>
             <a:ext cx="411480" cy="411480"/>
           </a:xfrm>
           <a:prstGeom prst="ellipse">
@@ -5978,7 +6545,7 @@
                 </a:solidFill>
                 <a:latin typeface="Helvetica"/>
               </a:rPr>
-              <a:t>Checkpoint chính thức tái hiện khớp bài báo, lệch tối đa 0,77 điểm</a:t>
+              <a:t>Dựng lại mã nguồn và chạy 4 biến thể × 3 seed trên Kaggle</a:t>
             </a:r>
           </a:p>
         </p:txBody>
@@ -6018,6 +6585,737 @@
                 <a:latin typeface="Helvetica"/>
               </a:rPr>
               <a:t>11</a:t>
+            </a:r>
+          </a:p>
+        </p:txBody>
+      </p:sp>
+      <p:sp>
+        <p:nvSpPr>
+          <p:cNvPr id="6" name="TextBox 5"/>
+          <p:cNvSpPr txBox="1"/>
+          <p:nvPr/>
+        </p:nvSpPr>
+        <p:spPr>
+          <a:xfrm>
+            <a:off x="731520" y="1783080"/>
+            <a:ext cx="3291840" cy="868680"/>
+          </a:xfrm>
+          <a:prstGeom prst="rect">
+            <a:avLst/>
+          </a:prstGeom>
+          <a:noFill/>
+        </p:spPr>
+        <p:txBody>
+          <a:bodyPr wrap="square" lIns="45720" tIns="27432" rIns="45720" bIns="27432" anchor="t">
+            <a:spAutoFit/>
+          </a:bodyPr>
+          <a:lstStyle/>
+          <a:p>
+            <a:pPr algn="l">
+              <a:lnSpc>
+                <a:spcPct val="110000"/>
+              </a:lnSpc>
+            </a:pPr>
+            <a:r>
+              <a:rPr sz="4800" b="1" i="0">
+                <a:solidFill>
+                  <a:srgbClr val="1E6FE8"/>
+                </a:solidFill>
+                <a:latin typeface="Helvetica"/>
+              </a:rPr>
+              <a:t>0,00</a:t>
+            </a:r>
+          </a:p>
+        </p:txBody>
+      </p:sp>
+      <p:sp>
+        <p:nvSpPr>
+          <p:cNvPr id="7" name="TextBox 6"/>
+          <p:cNvSpPr txBox="1"/>
+          <p:nvPr/>
+        </p:nvSpPr>
+        <p:spPr>
+          <a:xfrm>
+            <a:off x="731520" y="2651760"/>
+            <a:ext cx="3291840" cy="777240"/>
+          </a:xfrm>
+          <a:prstGeom prst="rect">
+            <a:avLst/>
+          </a:prstGeom>
+          <a:noFill/>
+        </p:spPr>
+        <p:txBody>
+          <a:bodyPr wrap="square" lIns="45720" tIns="27432" rIns="45720" bIns="27432" anchor="t">
+            <a:spAutoFit/>
+          </a:bodyPr>
+          <a:lstStyle/>
+          <a:p>
+            <a:pPr algn="l">
+              <a:lnSpc>
+                <a:spcPct val="110000"/>
+              </a:lnSpc>
+            </a:pPr>
+            <a:r>
+              <a:rPr sz="2000" b="0" i="0">
+                <a:solidFill>
+                  <a:srgbClr val="5B6B82"/>
+                </a:solidFill>
+                <a:latin typeface="Helvetica"/>
+              </a:rPr>
+              <a:t>sai lệch giữa encoder viết lại và CLIP gốc</a:t>
+            </a:r>
+          </a:p>
+        </p:txBody>
+      </p:sp>
+      <p:sp>
+        <p:nvSpPr>
+          <p:cNvPr id="8" name="TextBox 7"/>
+          <p:cNvSpPr txBox="1"/>
+          <p:nvPr/>
+        </p:nvSpPr>
+        <p:spPr>
+          <a:xfrm>
+            <a:off x="731520" y="3703320"/>
+            <a:ext cx="3291840" cy="868680"/>
+          </a:xfrm>
+          <a:prstGeom prst="rect">
+            <a:avLst/>
+          </a:prstGeom>
+          <a:noFill/>
+        </p:spPr>
+        <p:txBody>
+          <a:bodyPr wrap="square" lIns="45720" tIns="27432" rIns="45720" bIns="27432" anchor="t">
+            <a:spAutoFit/>
+          </a:bodyPr>
+          <a:lstStyle/>
+          <a:p>
+            <a:pPr algn="l">
+              <a:lnSpc>
+                <a:spcPct val="110000"/>
+              </a:lnSpc>
+            </a:pPr>
+            <a:r>
+              <a:rPr sz="4800" b="1" i="0">
+                <a:solidFill>
+                  <a:srgbClr val="1E6FE8"/>
+                </a:solidFill>
+                <a:latin typeface="Helvetica"/>
+              </a:rPr>
+              <a:t>4</a:t>
+            </a:r>
+          </a:p>
+        </p:txBody>
+      </p:sp>
+      <p:sp>
+        <p:nvSpPr>
+          <p:cNvPr id="9" name="TextBox 8"/>
+          <p:cNvSpPr txBox="1"/>
+          <p:nvPr/>
+        </p:nvSpPr>
+        <p:spPr>
+          <a:xfrm>
+            <a:off x="731520" y="4572000"/>
+            <a:ext cx="3291840" cy="777240"/>
+          </a:xfrm>
+          <a:prstGeom prst="rect">
+            <a:avLst/>
+          </a:prstGeom>
+          <a:noFill/>
+        </p:spPr>
+        <p:txBody>
+          <a:bodyPr wrap="square" lIns="45720" tIns="27432" rIns="45720" bIns="27432" anchor="t">
+            <a:spAutoFit/>
+          </a:bodyPr>
+          <a:lstStyle/>
+          <a:p>
+            <a:pPr algn="l">
+              <a:lnSpc>
+                <a:spcPct val="110000"/>
+              </a:lnSpc>
+            </a:pPr>
+            <a:r>
+              <a:rPr sz="2000" b="0" i="0">
+                <a:solidFill>
+                  <a:srgbClr val="5B6B82"/>
+                </a:solidFill>
+                <a:latin typeface="Helvetica"/>
+              </a:rPr>
+              <a:t>lỗi trong mã gốc đã được sửa</a:t>
+            </a:r>
+          </a:p>
+        </p:txBody>
+      </p:sp>
+      <p:sp>
+        <p:nvSpPr>
+          <p:cNvPr id="10" name="Rounded Rectangle 9"/>
+          <p:cNvSpPr/>
+          <p:nvPr/>
+        </p:nvSpPr>
+        <p:spPr>
+          <a:xfrm>
+            <a:off x="4297680" y="1737360"/>
+            <a:ext cx="3566160" cy="3566160"/>
+          </a:xfrm>
+          <a:prstGeom prst="roundRect">
+            <a:avLst>
+              <a:gd name="adj" fmla="val 8000"/>
+            </a:avLst>
+          </a:prstGeom>
+          <a:solidFill>
+            <a:srgbClr val="EAF2FF"/>
+          </a:solidFill>
+          <a:ln>
+            <a:noFill/>
+          </a:ln>
+          <a:effectLst/>
+        </p:spPr>
+        <p:style>
+          <a:lnRef idx="1">
+            <a:schemeClr val="accent1"/>
+          </a:lnRef>
+          <a:fillRef idx="3">
+            <a:schemeClr val="accent1"/>
+          </a:fillRef>
+          <a:effectRef idx="2">
+            <a:schemeClr val="accent1"/>
+          </a:effectRef>
+          <a:fontRef idx="minor">
+            <a:schemeClr val="lt1"/>
+          </a:fontRef>
+        </p:style>
+        <p:txBody>
+          <a:bodyPr rtlCol="0" anchor="ctr"/>
+          <a:lstStyle/>
+          <a:p>
+            <a:pPr algn="ctr"/>
+            <a:endParaRPr/>
+          </a:p>
+        </p:txBody>
+      </p:sp>
+      <p:sp>
+        <p:nvSpPr>
+          <p:cNvPr id="11" name="TextBox 10"/>
+          <p:cNvSpPr txBox="1"/>
+          <p:nvPr/>
+        </p:nvSpPr>
+        <p:spPr>
+          <a:xfrm>
+            <a:off x="4526280" y="1901952"/>
+            <a:ext cx="3108960" cy="502920"/>
+          </a:xfrm>
+          <a:prstGeom prst="rect">
+            <a:avLst/>
+          </a:prstGeom>
+          <a:noFill/>
+        </p:spPr>
+        <p:txBody>
+          <a:bodyPr wrap="square" lIns="45720" tIns="27432" rIns="45720" bIns="27432" anchor="t">
+            <a:spAutoFit/>
+          </a:bodyPr>
+          <a:lstStyle/>
+          <a:p>
+            <a:pPr algn="l">
+              <a:lnSpc>
+                <a:spcPct val="110000"/>
+              </a:lnSpc>
+            </a:pPr>
+            <a:r>
+              <a:rPr sz="2200" b="1" i="0">
+                <a:solidFill>
+                  <a:srgbClr val="144FB0"/>
+                </a:solidFill>
+                <a:latin typeface="Helvetica"/>
+              </a:rPr>
+              <a:t>Đã làm</a:t>
+            </a:r>
+          </a:p>
+        </p:txBody>
+      </p:sp>
+      <p:sp>
+        <p:nvSpPr>
+          <p:cNvPr id="12" name="TextBox 11"/>
+          <p:cNvSpPr txBox="1"/>
+          <p:nvPr/>
+        </p:nvSpPr>
+        <p:spPr>
+          <a:xfrm>
+            <a:off x="4526280" y="2468880"/>
+            <a:ext cx="3108960" cy="2697480"/>
+          </a:xfrm>
+          <a:prstGeom prst="rect">
+            <a:avLst/>
+          </a:prstGeom>
+          <a:noFill/>
+        </p:spPr>
+        <p:txBody>
+          <a:bodyPr wrap="square">
+            <a:spAutoFit/>
+          </a:bodyPr>
+          <a:lstStyle/>
+          <a:p>
+            <a:pPr marL="292608" indent="-292608">
+              <a:lnSpc>
+                <a:spcPct val="108000"/>
+              </a:lnSpc>
+              <a:spcAft>
+                <a:spcPts val="600"/>
+              </a:spcAft>
+              <a:buClr>
+                <a:srgbClr val="1E6FE8"/>
+              </a:buClr>
+              <a:buFont typeface="Helvetica"/>
+              <a:buChar char="•"/>
+            </a:pPr>
+            <a:r>
+              <a:rPr sz="2100" b="0" i="0">
+                <a:solidFill>
+                  <a:srgbClr val="0F1C3F"/>
+                </a:solidFill>
+                <a:latin typeface="Helvetica"/>
+              </a:rPr>
+              <a:t>Viết lại encoder văn bản cho thư viện mới</a:t>
+            </a:r>
+          </a:p>
+          <a:p>
+            <a:pPr marL="292608" indent="-292608">
+              <a:lnSpc>
+                <a:spcPct val="108000"/>
+              </a:lnSpc>
+              <a:spcAft>
+                <a:spcPts val="600"/>
+              </a:spcAft>
+              <a:buClr>
+                <a:srgbClr val="1E6FE8"/>
+              </a:buClr>
+              <a:buFont typeface="Helvetica"/>
+              <a:buChar char="•"/>
+            </a:pPr>
+            <a:r>
+              <a:rPr sz="2100" b="0" i="0">
+                <a:solidFill>
+                  <a:srgbClr val="0F1C3F"/>
+                </a:solidFill>
+                <a:latin typeface="Helvetica"/>
+              </a:rPr>
+              <a:t>Thay tokenizer; token “$” có mã 259</a:t>
+            </a:r>
+          </a:p>
+          <a:p>
+            <a:pPr marL="292608" indent="-292608">
+              <a:lnSpc>
+                <a:spcPct val="108000"/>
+              </a:lnSpc>
+              <a:spcAft>
+                <a:spcPts val="600"/>
+              </a:spcAft>
+              <a:buClr>
+                <a:srgbClr val="1E6FE8"/>
+              </a:buClr>
+              <a:buFont typeface="Helvetica"/>
+              <a:buChar char="•"/>
+            </a:pPr>
+            <a:r>
+              <a:rPr sz="2100" b="0" i="0">
+                <a:solidFill>
+                  <a:srgbClr val="0F1C3F"/>
+                </a:solidFill>
+                <a:latin typeface="Helvetica"/>
+              </a:rPr>
+              <a:t>Kiểm chứng trên ViT-B/32 và ViT-L/14</a:t>
+            </a:r>
+          </a:p>
+        </p:txBody>
+      </p:sp>
+      <p:sp>
+        <p:nvSpPr>
+          <p:cNvPr id="13" name="Rounded Rectangle 12"/>
+          <p:cNvSpPr/>
+          <p:nvPr/>
+        </p:nvSpPr>
+        <p:spPr>
+          <a:xfrm>
+            <a:off x="8092440" y="1737360"/>
+            <a:ext cx="3566160" cy="3566160"/>
+          </a:xfrm>
+          <a:prstGeom prst="roundRect">
+            <a:avLst>
+              <a:gd name="adj" fmla="val 8000"/>
+            </a:avLst>
+          </a:prstGeom>
+          <a:solidFill>
+            <a:srgbClr val="D6E6FF"/>
+          </a:solidFill>
+          <a:ln>
+            <a:noFill/>
+          </a:ln>
+          <a:effectLst/>
+        </p:spPr>
+        <p:style>
+          <a:lnRef idx="1">
+            <a:schemeClr val="accent1"/>
+          </a:lnRef>
+          <a:fillRef idx="3">
+            <a:schemeClr val="accent1"/>
+          </a:fillRef>
+          <a:effectRef idx="2">
+            <a:schemeClr val="accent1"/>
+          </a:effectRef>
+          <a:fontRef idx="minor">
+            <a:schemeClr val="lt1"/>
+          </a:fontRef>
+        </p:style>
+        <p:txBody>
+          <a:bodyPr rtlCol="0" anchor="ctr"/>
+          <a:lstStyle/>
+          <a:p>
+            <a:pPr algn="ctr"/>
+            <a:endParaRPr/>
+          </a:p>
+        </p:txBody>
+      </p:sp>
+      <p:sp>
+        <p:nvSpPr>
+          <p:cNvPr id="14" name="TextBox 13"/>
+          <p:cNvSpPr txBox="1"/>
+          <p:nvPr/>
+        </p:nvSpPr>
+        <p:spPr>
+          <a:xfrm>
+            <a:off x="8321040" y="1901952"/>
+            <a:ext cx="3108960" cy="502920"/>
+          </a:xfrm>
+          <a:prstGeom prst="rect">
+            <a:avLst/>
+          </a:prstGeom>
+          <a:noFill/>
+        </p:spPr>
+        <p:txBody>
+          <a:bodyPr wrap="square" lIns="45720" tIns="27432" rIns="45720" bIns="27432" anchor="t">
+            <a:spAutoFit/>
+          </a:bodyPr>
+          <a:lstStyle/>
+          <a:p>
+            <a:pPr algn="l">
+              <a:lnSpc>
+                <a:spcPct val="110000"/>
+              </a:lnSpc>
+            </a:pPr>
+            <a:r>
+              <a:rPr sz="2200" b="1" i="0">
+                <a:solidFill>
+                  <a:srgbClr val="144FB0"/>
+                </a:solidFill>
+                <a:latin typeface="Helvetica"/>
+              </a:rPr>
+              <a:t>Chạy trên Kaggle</a:t>
+            </a:r>
+          </a:p>
+        </p:txBody>
+      </p:sp>
+      <p:sp>
+        <p:nvSpPr>
+          <p:cNvPr id="15" name="TextBox 14"/>
+          <p:cNvSpPr txBox="1"/>
+          <p:nvPr/>
+        </p:nvSpPr>
+        <p:spPr>
+          <a:xfrm>
+            <a:off x="8321040" y="2468880"/>
+            <a:ext cx="3108960" cy="2697480"/>
+          </a:xfrm>
+          <a:prstGeom prst="rect">
+            <a:avLst/>
+          </a:prstGeom>
+          <a:noFill/>
+        </p:spPr>
+        <p:txBody>
+          <a:bodyPr wrap="square">
+            <a:spAutoFit/>
+          </a:bodyPr>
+          <a:lstStyle/>
+          <a:p>
+            <a:pPr marL="292608" indent="-292608">
+              <a:lnSpc>
+                <a:spcPct val="108000"/>
+              </a:lnSpc>
+              <a:spcAft>
+                <a:spcPts val="600"/>
+              </a:spcAft>
+              <a:buClr>
+                <a:srgbClr val="1E6FE8"/>
+              </a:buClr>
+              <a:buFont typeface="Helvetica"/>
+              <a:buChar char="•"/>
+            </a:pPr>
+            <a:r>
+              <a:rPr sz="2100" b="0" i="0">
+                <a:solidFill>
+                  <a:srgbClr val="0F1C3F"/>
+                </a:solidFill>
+                <a:latin typeface="Helvetica"/>
+              </a:rPr>
+              <a:t>Baseline, A, B, A+B (H3: A+B có cộng hưởng không)</a:t>
+            </a:r>
+          </a:p>
+          <a:p>
+            <a:pPr marL="292608" indent="-292608">
+              <a:lnSpc>
+                <a:spcPct val="108000"/>
+              </a:lnSpc>
+              <a:spcAft>
+                <a:spcPts val="600"/>
+              </a:spcAft>
+              <a:buClr>
+                <a:srgbClr val="1E6FE8"/>
+              </a:buClr>
+              <a:buFont typeface="Helvetica"/>
+              <a:buChar char="•"/>
+            </a:pPr>
+            <a:r>
+              <a:rPr sz="2100" b="0" i="0">
+                <a:solidFill>
+                  <a:srgbClr val="0F1C3F"/>
+                </a:solidFill>
+                <a:latin typeface="Helvetica"/>
+              </a:rPr>
+              <a:t>3 seed, 5.000 bước, chỉ khác thành phần cải tiến</a:t>
+            </a:r>
+          </a:p>
+          <a:p>
+            <a:pPr marL="292608" indent="-292608">
+              <a:lnSpc>
+                <a:spcPct val="108000"/>
+              </a:lnSpc>
+              <a:spcAft>
+                <a:spcPts val="600"/>
+              </a:spcAft>
+              <a:buClr>
+                <a:srgbClr val="1E6FE8"/>
+              </a:buClr>
+              <a:buFont typeface="Helvetica"/>
+              <a:buChar char="•"/>
+            </a:pPr>
+            <a:r>
+              <a:rPr sz="2100" b="0" i="0">
+                <a:solidFill>
+                  <a:srgbClr val="0F1C3F"/>
+                </a:solidFill>
+                <a:latin typeface="Helvetica"/>
+              </a:rPr>
+              <a:t>2 GPU T4; nạp dữ liệu nhanh gấp 3,1 lần</a:t>
+            </a:r>
+          </a:p>
+        </p:txBody>
+      </p:sp>
+    </p:spTree>
+  </p:cSld>
+  <p:clrMapOvr>
+    <a:masterClrMapping/>
+  </p:clrMapOvr>
+  <mc:AlternateContent xmlns:mc="http://schemas.openxmlformats.org/markup-compatibility/2006" xmlns:p159="http://schemas.microsoft.com/office/powerpoint/2015/09/main">
+    <mc:Choice Requires="p159">
+      <p:transition xmlns:p14="http://schemas.microsoft.com/office/powerpoint/2010/main" spd="slow" p14:dur="1200">
+        <p159:morph option="byObject"/>
+      </p:transition>
+    </mc:Choice>
+    <mc:Fallback xmlns="">
+      <p:transition spd="slow">
+        <p:fade/>
+      </p:transition>
+    </mc:Fallback>
+  </mc:AlternateContent>
+</p:sld>
+</file>
+
+<file path=ppt/slides/slide12.xml><?xml version="1.0" encoding="utf-8"?>
+<p:sld xmlns:a="http://schemas.openxmlformats.org/drawingml/2006/main" xmlns:r="http://schemas.openxmlformats.org/officeDocument/2006/relationships" xmlns:p="http://schemas.openxmlformats.org/presentationml/2006/main">
+  <p:cSld>
+    <p:bg>
+      <p:bgPr>
+        <a:solidFill>
+          <a:srgbClr val="FFFFFF"/>
+        </a:solidFill>
+        <a:effectLst/>
+      </p:bgPr>
+    </p:bg>
+    <p:spTree>
+      <p:nvGrpSpPr>
+        <p:cNvPr id="1" name=""/>
+        <p:cNvGrpSpPr/>
+        <p:nvPr/>
+      </p:nvGrpSpPr>
+      <p:grpSpPr>
+        <a:xfrm>
+          <a:off x="0" y="0"/>
+          <a:ext cx="0" cy="0"/>
+          <a:chOff x="0" y="0"/>
+          <a:chExt cx="0" cy="0"/>
+        </a:xfrm>
+      </p:grpSpPr>
+      <p:sp>
+        <p:nvSpPr>
+          <p:cNvPr id="2" name="!!orb"/>
+          <p:cNvSpPr/>
+          <p:nvPr/>
+        </p:nvSpPr>
+        <p:spPr>
+          <a:xfrm>
+            <a:off x="9875520" y="4480560"/>
+            <a:ext cx="3474720" cy="3474720"/>
+          </a:xfrm>
+          <a:prstGeom prst="ellipse">
+            <a:avLst/>
+          </a:prstGeom>
+          <a:solidFill>
+            <a:srgbClr val="EAF2FF"/>
+          </a:solidFill>
+          <a:ln>
+            <a:noFill/>
+          </a:ln>
+          <a:effectLst/>
+        </p:spPr>
+        <p:style>
+          <a:lnRef idx="1">
+            <a:schemeClr val="accent1"/>
+          </a:lnRef>
+          <a:fillRef idx="3">
+            <a:schemeClr val="accent1"/>
+          </a:fillRef>
+          <a:effectRef idx="2">
+            <a:schemeClr val="accent1"/>
+          </a:effectRef>
+          <a:fontRef idx="minor">
+            <a:schemeClr val="lt1"/>
+          </a:fontRef>
+        </p:style>
+        <p:txBody>
+          <a:bodyPr rtlCol="0" anchor="ctr"/>
+          <a:lstStyle/>
+          <a:p>
+            <a:pPr algn="ctr"/>
+            <a:endParaRPr/>
+          </a:p>
+        </p:txBody>
+      </p:sp>
+      <p:sp>
+        <p:nvSpPr>
+          <p:cNvPr id="3" name="!!dot"/>
+          <p:cNvSpPr/>
+          <p:nvPr/>
+        </p:nvSpPr>
+        <p:spPr>
+          <a:xfrm>
+            <a:off x="11704320" y="3108960"/>
+            <a:ext cx="411480" cy="411480"/>
+          </a:xfrm>
+          <a:prstGeom prst="ellipse">
+            <a:avLst/>
+          </a:prstGeom>
+          <a:solidFill>
+            <a:srgbClr val="1E6FE8"/>
+          </a:solidFill>
+          <a:ln>
+            <a:noFill/>
+          </a:ln>
+          <a:effectLst/>
+        </p:spPr>
+        <p:style>
+          <a:lnRef idx="1">
+            <a:schemeClr val="accent1"/>
+          </a:lnRef>
+          <a:fillRef idx="3">
+            <a:schemeClr val="accent1"/>
+          </a:fillRef>
+          <a:effectRef idx="2">
+            <a:schemeClr val="accent1"/>
+          </a:effectRef>
+          <a:fontRef idx="minor">
+            <a:schemeClr val="lt1"/>
+          </a:fontRef>
+        </p:style>
+        <p:txBody>
+          <a:bodyPr rtlCol="0" anchor="ctr"/>
+          <a:lstStyle/>
+          <a:p>
+            <a:pPr algn="ctr"/>
+            <a:endParaRPr/>
+          </a:p>
+        </p:txBody>
+      </p:sp>
+      <p:sp>
+        <p:nvSpPr>
+          <p:cNvPr id="4" name="!!title"/>
+          <p:cNvSpPr txBox="1"/>
+          <p:nvPr/>
+        </p:nvSpPr>
+        <p:spPr>
+          <a:xfrm>
+            <a:off x="548640" y="347472"/>
+            <a:ext cx="10424160" cy="1143000"/>
+          </a:xfrm>
+          <a:prstGeom prst="rect">
+            <a:avLst/>
+          </a:prstGeom>
+          <a:noFill/>
+        </p:spPr>
+        <p:txBody>
+          <a:bodyPr wrap="square" lIns="45720" tIns="27432" rIns="45720" bIns="27432" anchor="ctr">
+            <a:spAutoFit/>
+          </a:bodyPr>
+          <a:lstStyle/>
+          <a:p>
+            <a:pPr algn="l">
+              <a:lnSpc>
+                <a:spcPct val="110000"/>
+              </a:lnSpc>
+            </a:pPr>
+            <a:r>
+              <a:rPr sz="3200" b="1" i="0">
+                <a:solidFill>
+                  <a:srgbClr val="0F1C3F"/>
+                </a:solidFill>
+                <a:latin typeface="Helvetica"/>
+              </a:rPr>
+              <a:t>Checkpoint chính thức tái hiện khớp bài báo, lệch tối đa 0,77 điểm</a:t>
+            </a:r>
+          </a:p>
+        </p:txBody>
+      </p:sp>
+      <p:sp>
+        <p:nvSpPr>
+          <p:cNvPr id="5" name="!!num"/>
+          <p:cNvSpPr txBox="1"/>
+          <p:nvPr/>
+        </p:nvSpPr>
+        <p:spPr>
+          <a:xfrm>
+            <a:off x="10881360" y="6236208"/>
+            <a:ext cx="914400" cy="457200"/>
+          </a:xfrm>
+          <a:prstGeom prst="rect">
+            <a:avLst/>
+          </a:prstGeom>
+          <a:noFill/>
+        </p:spPr>
+        <p:txBody>
+          <a:bodyPr wrap="square" lIns="45720" tIns="27432" rIns="45720" bIns="27432" anchor="t">
+            <a:spAutoFit/>
+          </a:bodyPr>
+          <a:lstStyle/>
+          <a:p>
+            <a:pPr algn="r">
+              <a:lnSpc>
+                <a:spcPct val="110000"/>
+              </a:lnSpc>
+            </a:pPr>
+            <a:r>
+              <a:rPr sz="2000" b="0" i="0">
+                <a:solidFill>
+                  <a:srgbClr val="5B6B82"/>
+                </a:solidFill>
+                <a:latin typeface="Helvetica"/>
+              </a:rPr>
+              <a:t>12</a:t>
             </a:r>
           </a:p>
         </p:txBody>
@@ -6831,14 +8129,61 @@
       </p:sp>
       <p:sp>
         <p:nvSpPr>
-          <p:cNvPr id="9" name="TextBox 8"/>
+          <p:cNvPr id="9" name="Rounded Rectangle 8"/>
+          <p:cNvSpPr/>
+          <p:nvPr/>
+        </p:nvSpPr>
+        <p:spPr>
+          <a:xfrm>
+            <a:off x="4297680" y="3749039"/>
+            <a:ext cx="7315200" cy="2240280"/>
+          </a:xfrm>
+          <a:prstGeom prst="roundRect">
+            <a:avLst>
+              <a:gd name="adj" fmla="val 8000"/>
+            </a:avLst>
+          </a:prstGeom>
+          <a:solidFill>
+            <a:srgbClr val="EAF2FF"/>
+          </a:solidFill>
+          <a:ln>
+            <a:noFill/>
+          </a:ln>
+          <a:effectLst/>
+        </p:spPr>
+        <p:style>
+          <a:lnRef idx="1">
+            <a:schemeClr val="accent1"/>
+          </a:lnRef>
+          <a:fillRef idx="3">
+            <a:schemeClr val="accent1"/>
+          </a:fillRef>
+          <a:effectRef idx="2">
+            <a:schemeClr val="accent1"/>
+          </a:effectRef>
+          <a:fontRef idx="minor">
+            <a:schemeClr val="lt1"/>
+          </a:fontRef>
+        </p:style>
+        <p:txBody>
+          <a:bodyPr rtlCol="0" anchor="ctr"/>
+          <a:lstStyle/>
+          <a:p>
+            <a:pPr algn="ctr"/>
+            <a:endParaRPr/>
+          </a:p>
+        </p:txBody>
+      </p:sp>
+      <p:sp>
+        <p:nvSpPr>
+          <p:cNvPr id="10" name="TextBox 9"/>
           <p:cNvSpPr txBox="1"/>
           <p:nvPr/>
         </p:nvSpPr>
         <p:spPr>
           <a:xfrm>
-            <a:off x="4297680" y="3840480"/>
-            <a:ext cx="3566160" cy="868680"/>
+            <a:off x="4526280" y="3913631"/>
+            <a:ext cx="6858000" cy="502920"/>
           </a:xfrm>
           <a:prstGeom prst="rect">
             <a:avLst/>
@@ -6857,27 +8202,27 @@
               </a:lnSpc>
             </a:pPr>
             <a:r>
-              <a:rPr sz="4800" b="1" i="0">
-                <a:solidFill>
-                  <a:srgbClr val="1E6FE8"/>
-                </a:solidFill>
-                <a:latin typeface="Helvetica"/>
-              </a:rPr>
-              <a:t>10,50</a:t>
-            </a:r>
-          </a:p>
-        </p:txBody>
-      </p:sp>
-      <p:sp>
-        <p:nvSpPr>
-          <p:cNvPr id="10" name="TextBox 9"/>
+              <a:rPr sz="2200" b="1" i="0">
+                <a:solidFill>
+                  <a:srgbClr val="144FB0"/>
+                </a:solidFill>
+                <a:latin typeface="Helvetica"/>
+              </a:rPr>
+              <a:t>Bài báo khác mã nguồn (nhóm theo mã)</a:t>
+            </a:r>
+          </a:p>
+        </p:txBody>
+      </p:sp>
+      <p:sp>
+        <p:nvSpPr>
+          <p:cNvPr id="11" name="TextBox 10"/>
           <p:cNvSpPr txBox="1"/>
           <p:nvPr/>
         </p:nvSpPr>
         <p:spPr>
           <a:xfrm>
-            <a:off x="4297680" y="4709160"/>
-            <a:ext cx="3566160" cy="777240"/>
+            <a:off x="4526280" y="4480559"/>
+            <a:ext cx="6858000" cy="1371600"/>
           </a:xfrm>
           <a:prstGeom prst="rect">
             <a:avLst/>
@@ -6885,102 +8230,80 @@
           <a:noFill/>
         </p:spPr>
         <p:txBody>
-          <a:bodyPr wrap="square" lIns="45720" tIns="27432" rIns="45720" bIns="27432" anchor="t">
+          <a:bodyPr wrap="square">
             <a:spAutoFit/>
           </a:bodyPr>
           <a:lstStyle/>
           <a:p>
-            <a:pPr algn="l">
+            <a:pPr marL="292608" indent="-292608">
               <a:lnSpc>
-                <a:spcPct val="110000"/>
+                <a:spcPct val="108000"/>
               </a:lnSpc>
+              <a:spcAft>
+                <a:spcPts val="600"/>
+              </a:spcAft>
+              <a:buClr>
+                <a:srgbClr val="1E6FE8"/>
+              </a:buClr>
+              <a:buFont typeface="Helvetica"/>
+              <a:buChar char="•"/>
             </a:pPr>
             <a:r>
-              <a:rPr sz="2000" b="0" i="0">
-                <a:solidFill>
-                  <a:srgbClr val="5B6B82"/>
-                </a:solidFill>
-                <a:latin typeface="Helvetica"/>
-              </a:rPr>
-              <a:t>CIRCO val mAP@5 của checkpoint, dùng làm mốc</a:t>
-            </a:r>
-          </a:p>
-        </p:txBody>
-      </p:sp>
-      <p:sp>
-        <p:nvSpPr>
-          <p:cNvPr id="11" name="TextBox 10"/>
-          <p:cNvSpPr txBox="1"/>
-          <p:nvPr/>
-        </p:nvSpPr>
-        <p:spPr>
-          <a:xfrm>
-            <a:off x="8046720" y="3840480"/>
-            <a:ext cx="3566160" cy="868680"/>
-          </a:xfrm>
-          <a:prstGeom prst="rect">
-            <a:avLst/>
-          </a:prstGeom>
-          <a:noFill/>
-        </p:spPr>
-        <p:txBody>
-          <a:bodyPr wrap="square" lIns="45720" tIns="27432" rIns="45720" bIns="27432" anchor="t">
-            <a:spAutoFit/>
-          </a:bodyPr>
-          <a:lstStyle/>
-          <a:p>
-            <a:pPr algn="l">
+              <a:rPr sz="2100" b="0" i="0">
+                <a:solidFill>
+                  <a:srgbClr val="0F1C3F"/>
+                </a:solidFill>
+                <a:latin typeface="Helvetica"/>
+              </a:rPr>
+              <a:t>φ trong mã không có LayerNorm (bài báo có)</a:t>
+            </a:r>
+          </a:p>
+          <a:p>
+            <a:pPr marL="292608" indent="-292608">
               <a:lnSpc>
-                <a:spcPct val="110000"/>
+                <a:spcPct val="108000"/>
               </a:lnSpc>
+              <a:spcAft>
+                <a:spcPts val="600"/>
+              </a:spcAft>
+              <a:buClr>
+                <a:srgbClr val="1E6FE8"/>
+              </a:buClr>
+              <a:buFont typeface="Helvetica"/>
+              <a:buChar char="•"/>
             </a:pPr>
             <a:r>
-              <a:rPr sz="4800" b="1" i="0">
-                <a:solidFill>
-                  <a:srgbClr val="1E6FE8"/>
-                </a:solidFill>
-                <a:latin typeface="Helvetica"/>
-              </a:rPr>
-              <a:t>100%</a:t>
-            </a:r>
-          </a:p>
-        </p:txBody>
-      </p:sp>
-      <p:sp>
-        <p:nvSpPr>
-          <p:cNvPr id="12" name="TextBox 11"/>
-          <p:cNvSpPr txBox="1"/>
-          <p:nvPr/>
-        </p:nvSpPr>
-        <p:spPr>
-          <a:xfrm>
-            <a:off x="8046720" y="4709160"/>
-            <a:ext cx="3566160" cy="777240"/>
-          </a:xfrm>
-          <a:prstGeom prst="rect">
-            <a:avLst/>
-          </a:prstGeom>
-          <a:noFill/>
-        </p:spPr>
-        <p:txBody>
-          <a:bodyPr wrap="square" lIns="45720" tIns="27432" rIns="45720" bIns="27432" anchor="t">
-            <a:spAutoFit/>
-          </a:bodyPr>
-          <a:lstStyle/>
-          <a:p>
-            <a:pPr algn="l">
+              <a:rPr sz="2100" b="0" i="0">
+                <a:solidFill>
+                  <a:srgbClr val="0F1C3F"/>
+                </a:solidFill>
+                <a:latin typeface="Helvetica"/>
+              </a:rPr>
+              <a:t>Mã nạp thêm câu prompt Midjourney</a:t>
+            </a:r>
+          </a:p>
+          <a:p>
+            <a:pPr marL="292608" indent="-292608">
               <a:lnSpc>
-                <a:spcPct val="110000"/>
+                <a:spcPct val="108000"/>
               </a:lnSpc>
+              <a:spcAft>
+                <a:spcPts val="600"/>
+              </a:spcAft>
+              <a:buClr>
+                <a:srgbClr val="1E6FE8"/>
+              </a:buClr>
+              <a:buFont typeface="Helvetica"/>
+              <a:buChar char="•"/>
             </a:pPr>
             <a:r>
-              <a:rPr sz="2000" b="0" i="0">
-                <a:solidFill>
-                  <a:srgbClr val="5B6B82"/>
-                </a:solidFill>
-                <a:latin typeface="Helvetica"/>
-              </a:rPr>
-              <a:t>thứ hạng từng truy vấn giống hệt khi chạy lại</a:t>
+              <a:rPr sz="2100" b="0" i="0">
+                <a:solidFill>
+                  <a:srgbClr val="0F1C3F"/>
+                </a:solidFill>
+                <a:latin typeface="Helvetica"/>
+              </a:rPr>
+              <a:t>Từ khóa bị che gồm cả mạo từ (a, the)</a:t>
             </a:r>
           </a:p>
         </p:txBody>
@@ -7005,7 +8328,7 @@
 </p:sld>
 </file>
 
-<file path=ppt/slides/slide12.xml><?xml version="1.0" encoding="utf-8"?>
+<file path=ppt/slides/slide13.xml><?xml version="1.0" encoding="utf-8"?>
 <p:sld xmlns:a="http://schemas.openxmlformats.org/drawingml/2006/main" xmlns:r="http://schemas.openxmlformats.org/officeDocument/2006/relationships" xmlns:p="http://schemas.openxmlformats.org/presentationml/2006/main">
   <p:cSld>
     <p:bg>
@@ -7193,7 +8516,7 @@
                 </a:solidFill>
                 <a:latin typeface="Helvetica"/>
               </a:rPr>
-              <a:t>12</a:t>
+              <a:t>13</a:t>
             </a:r>
           </a:p>
         </p:txBody>
@@ -7551,7 +8874,7 @@
                     <a:p>
                       <a:pPr algn="l"/>
                       <a:r>
-                        <a:rPr sz="2000" b="0" i="0">
+                        <a:rPr sz="2000" b="1" i="0">
                           <a:solidFill>
                             <a:srgbClr val="0F1C3F"/>
                           </a:solidFill>
@@ -7563,7 +8886,7 @@
                   </a:txBody>
                   <a:tcPr marL="73152" marR="73152" marT="36576" marB="36576" anchor="ctr">
                     <a:solidFill>
-                      <a:srgbClr val="FFFFFF"/>
+                      <a:srgbClr val="EAF2FF"/>
                     </a:solidFill>
                   </a:tcPr>
                 </a:tc>
@@ -7574,7 +8897,7 @@
                     <a:p>
                       <a:pPr algn="ctr"/>
                       <a:r>
-                        <a:rPr sz="2000" b="0" i="0">
+                        <a:rPr sz="2000" b="1" i="0">
                           <a:solidFill>
                             <a:srgbClr val="0F1C3F"/>
                           </a:solidFill>
@@ -7586,7 +8909,7 @@
                   </a:txBody>
                   <a:tcPr marL="73152" marR="73152" marT="36576" marB="36576" anchor="ctr">
                     <a:solidFill>
-                      <a:srgbClr val="FFFFFF"/>
+                      <a:srgbClr val="EAF2FF"/>
                     </a:solidFill>
                   </a:tcPr>
                 </a:tc>
@@ -7597,7 +8920,7 @@
                     <a:p>
                       <a:pPr algn="ctr"/>
                       <a:r>
-                        <a:rPr sz="2000" b="0" i="0">
+                        <a:rPr sz="2000" b="1" i="0">
                           <a:solidFill>
                             <a:srgbClr val="0F1C3F"/>
                           </a:solidFill>
@@ -7609,7 +8932,7 @@
                   </a:txBody>
                   <a:tcPr marL="73152" marR="73152" marT="36576" marB="36576" anchor="ctr">
                     <a:solidFill>
-                      <a:srgbClr val="FFFFFF"/>
+                      <a:srgbClr val="EAF2FF"/>
                     </a:solidFill>
                   </a:tcPr>
                 </a:tc>
@@ -7620,7 +8943,7 @@
                     <a:p>
                       <a:pPr algn="ctr"/>
                       <a:r>
-                        <a:rPr sz="2000" b="0" i="0">
+                        <a:rPr sz="2000" b="1" i="0">
                           <a:solidFill>
                             <a:srgbClr val="0F1C3F"/>
                           </a:solidFill>
@@ -7632,7 +8955,7 @@
                   </a:txBody>
                   <a:tcPr marL="73152" marR="73152" marT="36576" marB="36576" anchor="ctr">
                     <a:solidFill>
-                      <a:srgbClr val="FFFFFF"/>
+                      <a:srgbClr val="EAF2FF"/>
                     </a:solidFill>
                   </a:tcPr>
                 </a:tc>
@@ -7741,6 +9064,105 @@
                   </a:ext>
                 </a:extLst>
               </a:tr>
+              <a:tr h="457200">
+                <a:tc>
+                  <a:txBody>
+                    <a:bodyPr/>
+                    <a:lstStyle/>
+                    <a:p>
+                      <a:pPr algn="l"/>
+                      <a:r>
+                        <a:rPr sz="2000" b="0" i="1">
+                          <a:solidFill>
+                            <a:srgbClr val="5B6B82"/>
+                          </a:solidFill>
+                          <a:latin typeface="Helvetica"/>
+                        </a:rPr>
+                        <a:t>Checkpoint chính thức (20.000 bước)</a:t>
+                      </a:r>
+                    </a:p>
+                  </a:txBody>
+                  <a:tcPr marL="73152" marR="73152" marT="36576" marB="36576" anchor="ctr">
+                    <a:solidFill>
+                      <a:srgbClr val="FFFFFF"/>
+                    </a:solidFill>
+                  </a:tcPr>
+                </a:tc>
+                <a:tc>
+                  <a:txBody>
+                    <a:bodyPr/>
+                    <a:lstStyle/>
+                    <a:p>
+                      <a:pPr algn="ctr"/>
+                      <a:r>
+                        <a:rPr sz="2000" b="0" i="1">
+                          <a:solidFill>
+                            <a:srgbClr val="5B6B82"/>
+                          </a:solidFill>
+                          <a:latin typeface="Helvetica"/>
+                        </a:rPr>
+                        <a:t>26,35</a:t>
+                      </a:r>
+                    </a:p>
+                  </a:txBody>
+                  <a:tcPr marL="73152" marR="73152" marT="36576" marB="36576" anchor="ctr">
+                    <a:solidFill>
+                      <a:srgbClr val="FFFFFF"/>
+                    </a:solidFill>
+                  </a:tcPr>
+                </a:tc>
+                <a:tc>
+                  <a:txBody>
+                    <a:bodyPr/>
+                    <a:lstStyle/>
+                    <a:p>
+                      <a:pPr algn="ctr"/>
+                      <a:r>
+                        <a:rPr sz="2000" b="0" i="1">
+                          <a:solidFill>
+                            <a:srgbClr val="5B6B82"/>
+                          </a:solidFill>
+                          <a:latin typeface="Helvetica"/>
+                        </a:rPr>
+                        <a:t>46,12</a:t>
+                      </a:r>
+                    </a:p>
+                  </a:txBody>
+                  <a:tcPr marL="73152" marR="73152" marT="36576" marB="36576" anchor="ctr">
+                    <a:solidFill>
+                      <a:srgbClr val="FFFFFF"/>
+                    </a:solidFill>
+                  </a:tcPr>
+                </a:tc>
+                <a:tc>
+                  <a:txBody>
+                    <a:bodyPr/>
+                    <a:lstStyle/>
+                    <a:p>
+                      <a:pPr algn="ctr"/>
+                      <a:r>
+                        <a:rPr sz="2000" b="0" i="1">
+                          <a:solidFill>
+                            <a:srgbClr val="5B6B82"/>
+                          </a:solidFill>
+                          <a:latin typeface="Helvetica"/>
+                        </a:rPr>
+                        <a:t>10,50</a:t>
+                      </a:r>
+                    </a:p>
+                  </a:txBody>
+                  <a:tcPr marL="73152" marR="73152" marT="36576" marB="36576" anchor="ctr">
+                    <a:solidFill>
+                      <a:srgbClr val="FFFFFF"/>
+                    </a:solidFill>
+                  </a:tcPr>
+                </a:tc>
+                <a:extLst>
+                  <a:ext uri="{0D108BD9-81ED-4DB2-BD59-A6C34878D82A}">
+                    <a16:rowId xmlns:a16="http://schemas.microsoft.com/office/drawing/2014/main" val="3725871879"/>
+                  </a:ext>
+                </a:extLst>
+              </a:tr>
             </a:tbl>
           </a:graphicData>
         </a:graphic>
@@ -7753,8 +9175,8 @@
         </p:nvSpPr>
         <p:spPr>
           <a:xfrm>
-            <a:off x="548640" y="4343400"/>
-            <a:ext cx="11064240" cy="1554480"/>
+            <a:off x="548640" y="4800600"/>
+            <a:ext cx="11064240" cy="1344168"/>
           </a:xfrm>
           <a:prstGeom prst="roundRect">
             <a:avLst>
@@ -7800,7 +9222,7 @@
         </p:nvSpPr>
         <p:spPr>
           <a:xfrm>
-            <a:off x="822959" y="4572000"/>
+            <a:off x="822959" y="5029200"/>
             <a:ext cx="10515600" cy="1097280"/>
           </a:xfrm>
           <a:prstGeom prst="rect">
@@ -7842,272 +9264,11 @@
                 </a:solidFill>
                 <a:latin typeface="Helvetica"/>
               </a:rPr>
-              <a:t>A kém hơn trên CIRCO: mAP@5 −2,45, khoảng tin cậy 95% [−3,95; −1,07] nằm dưới 0; A+B tương tự</a:t>
-            </a:r>
-          </a:p>
-        </p:txBody>
-      </p:sp>
-    </p:spTree>
-  </p:cSld>
-  <p:clrMapOvr>
-    <a:masterClrMapping/>
-  </p:clrMapOvr>
-  <mc:AlternateContent xmlns:mc="http://schemas.openxmlformats.org/markup-compatibility/2006" xmlns:p159="http://schemas.microsoft.com/office/powerpoint/2015/09/main">
-    <mc:Choice Requires="p159">
-      <p:transition xmlns:p14="http://schemas.microsoft.com/office/powerpoint/2010/main" spd="slow" p14:dur="1200">
-        <p159:morph option="byObject"/>
-      </p:transition>
-    </mc:Choice>
-    <mc:Fallback xmlns="">
-      <p:transition spd="slow">
-        <p:fade/>
-      </p:transition>
-    </mc:Fallback>
-  </mc:AlternateContent>
-</p:sld>
-</file>
-
-<file path=ppt/slides/slide13.xml><?xml version="1.0" encoding="utf-8"?>
-<p:sld xmlns:a="http://schemas.openxmlformats.org/drawingml/2006/main" xmlns:r="http://schemas.openxmlformats.org/officeDocument/2006/relationships" xmlns:p="http://schemas.openxmlformats.org/presentationml/2006/main">
-  <p:cSld>
-    <p:bg>
-      <p:bgPr>
-        <a:solidFill>
-          <a:srgbClr val="FFFFFF"/>
-        </a:solidFill>
-        <a:effectLst/>
-      </p:bgPr>
-    </p:bg>
-    <p:spTree>
-      <p:nvGrpSpPr>
-        <p:cNvPr id="1" name=""/>
-        <p:cNvGrpSpPr/>
-        <p:nvPr/>
-      </p:nvGrpSpPr>
-      <p:grpSpPr>
-        <a:xfrm>
-          <a:off x="0" y="0"/>
-          <a:ext cx="0" cy="0"/>
-          <a:chOff x="0" y="0"/>
-          <a:chExt cx="0" cy="0"/>
-        </a:xfrm>
-      </p:grpSpPr>
-      <p:sp>
-        <p:nvSpPr>
-          <p:cNvPr id="2" name="!!orb"/>
-          <p:cNvSpPr/>
-          <p:nvPr/>
-        </p:nvSpPr>
-        <p:spPr>
-          <a:xfrm>
-            <a:off x="-1737360" y="-2011680"/>
-            <a:ext cx="3657600" cy="3657600"/>
-          </a:xfrm>
-          <a:prstGeom prst="ellipse">
-            <a:avLst/>
-          </a:prstGeom>
-          <a:solidFill>
-            <a:srgbClr val="EAF2FF"/>
-          </a:solidFill>
-          <a:ln>
-            <a:noFill/>
-          </a:ln>
-          <a:effectLst/>
-        </p:spPr>
-        <p:style>
-          <a:lnRef idx="1">
-            <a:schemeClr val="accent1"/>
-          </a:lnRef>
-          <a:fillRef idx="3">
-            <a:schemeClr val="accent1"/>
-          </a:fillRef>
-          <a:effectRef idx="2">
-            <a:schemeClr val="accent1"/>
-          </a:effectRef>
-          <a:fontRef idx="minor">
-            <a:schemeClr val="lt1"/>
-          </a:fontRef>
-        </p:style>
-        <p:txBody>
-          <a:bodyPr rtlCol="0" anchor="ctr"/>
-          <a:lstStyle/>
-          <a:p>
-            <a:pPr algn="ctr"/>
-            <a:endParaRPr/>
-          </a:p>
-        </p:txBody>
-      </p:sp>
-      <p:sp>
-        <p:nvSpPr>
-          <p:cNvPr id="3" name="!!dot"/>
-          <p:cNvSpPr/>
-          <p:nvPr/>
-        </p:nvSpPr>
-        <p:spPr>
-          <a:xfrm>
-            <a:off x="54864" y="3291840"/>
-            <a:ext cx="411480" cy="411480"/>
-          </a:xfrm>
-          <a:prstGeom prst="ellipse">
-            <a:avLst/>
-          </a:prstGeom>
-          <a:solidFill>
-            <a:srgbClr val="1E6FE8"/>
-          </a:solidFill>
-          <a:ln>
-            <a:noFill/>
-          </a:ln>
-          <a:effectLst/>
-        </p:spPr>
-        <p:style>
-          <a:lnRef idx="1">
-            <a:schemeClr val="accent1"/>
-          </a:lnRef>
-          <a:fillRef idx="3">
-            <a:schemeClr val="accent1"/>
-          </a:fillRef>
-          <a:effectRef idx="2">
-            <a:schemeClr val="accent1"/>
-          </a:effectRef>
-          <a:fontRef idx="minor">
-            <a:schemeClr val="lt1"/>
-          </a:fontRef>
-        </p:style>
-        <p:txBody>
-          <a:bodyPr rtlCol="0" anchor="ctr"/>
-          <a:lstStyle/>
-          <a:p>
-            <a:pPr algn="ctr"/>
-            <a:endParaRPr/>
-          </a:p>
-        </p:txBody>
-      </p:sp>
-      <p:sp>
-        <p:nvSpPr>
-          <p:cNvPr id="4" name="!!title"/>
-          <p:cNvSpPr txBox="1"/>
-          <p:nvPr/>
-        </p:nvSpPr>
-        <p:spPr>
-          <a:xfrm>
-            <a:off x="548640" y="347472"/>
-            <a:ext cx="10424160" cy="1143000"/>
-          </a:xfrm>
-          <a:prstGeom prst="rect">
-            <a:avLst/>
-          </a:prstGeom>
-          <a:noFill/>
-        </p:spPr>
-        <p:txBody>
-          <a:bodyPr wrap="square" lIns="45720" tIns="27432" rIns="45720" bIns="27432" anchor="ctr">
-            <a:spAutoFit/>
-          </a:bodyPr>
-          <a:lstStyle/>
-          <a:p>
-            <a:pPr algn="l">
-              <a:lnSpc>
-                <a:spcPct val="110000"/>
-              </a:lnSpc>
-            </a:pPr>
-            <a:r>
-              <a:rPr sz="3200" b="1" i="0">
-                <a:solidFill>
-                  <a:srgbClr val="0F1C3F"/>
-                </a:solidFill>
-                <a:latin typeface="Helvetica"/>
-              </a:rPr>
-              <a:t>Vì sao: B làm φ nhất quán hơn giữa ảnh và văn bản, A làm ngược lại</a:t>
-            </a:r>
-          </a:p>
-        </p:txBody>
-      </p:sp>
-      <p:sp>
-        <p:nvSpPr>
-          <p:cNvPr id="5" name="!!num"/>
-          <p:cNvSpPr txBox="1"/>
-          <p:nvPr/>
-        </p:nvSpPr>
-        <p:spPr>
-          <a:xfrm>
-            <a:off x="10881360" y="6236208"/>
-            <a:ext cx="914400" cy="457200"/>
-          </a:xfrm>
-          <a:prstGeom prst="rect">
-            <a:avLst/>
-          </a:prstGeom>
-          <a:noFill/>
-        </p:spPr>
-        <p:txBody>
-          <a:bodyPr wrap="square" lIns="45720" tIns="27432" rIns="45720" bIns="27432" anchor="t">
-            <a:spAutoFit/>
-          </a:bodyPr>
-          <a:lstStyle/>
-          <a:p>
-            <a:pPr algn="r">
-              <a:lnSpc>
-                <a:spcPct val="110000"/>
-              </a:lnSpc>
-            </a:pPr>
-            <a:r>
-              <a:rPr sz="2000" b="0" i="0">
-                <a:solidFill>
-                  <a:srgbClr val="5B6B82"/>
-                </a:solidFill>
-                <a:latin typeface="Helvetica"/>
-              </a:rPr>
-              <a:t>13</a:t>
-            </a:r>
-          </a:p>
-        </p:txBody>
-      </p:sp>
-      <p:pic>
-        <p:nvPicPr>
-          <p:cNvPr id="10" name="Picture 9" descr="modality_gap_slide.png"/>
-          <p:cNvPicPr>
-            <a:picLocks noChangeAspect="1"/>
-          </p:cNvPicPr>
-          <p:nvPr/>
-        </p:nvPicPr>
-        <p:blipFill>
-          <a:blip r:embed="rId3"/>
-          <a:stretch>
-            <a:fillRect/>
-          </a:stretch>
-        </p:blipFill>
-        <p:spPr>
-          <a:xfrm>
-            <a:off x="548640" y="1783080"/>
-            <a:ext cx="5486400" cy="3716593"/>
-          </a:xfrm>
-          <a:prstGeom prst="rect">
-            <a:avLst/>
-          </a:prstGeom>
-        </p:spPr>
-      </p:pic>
-      <p:pic>
-        <p:nvPicPr>
-          <p:cNvPr id="11" name="Picture 10" descr="learning_curve_slide.png"/>
-          <p:cNvPicPr>
-            <a:picLocks noChangeAspect="1"/>
-          </p:cNvPicPr>
-          <p:nvPr/>
-        </p:nvPicPr>
-        <p:blipFill>
-          <a:blip r:embed="rId4"/>
-          <a:stretch>
-            <a:fillRect/>
-          </a:stretch>
-        </p:blipFill>
-        <p:spPr>
-          <a:xfrm>
-            <a:off x="6217920" y="1783080"/>
-            <a:ext cx="5486400" cy="3716593"/>
-          </a:xfrm>
-          <a:prstGeom prst="rect">
-            <a:avLst/>
-          </a:prstGeom>
-        </p:spPr>
-      </p:pic>
+              <a:t>A kém hơn trên CIRCO: mAP@5 −2,45, khoảng tin cậy 95% [−3,95; −1,07]; A+B tương tự</a:t>
+            </a:r>
+          </a:p>
+        </p:txBody>
+      </p:sp>
     </p:spTree>
   </p:cSld>
   <p:clrMapOvr>
@@ -8161,7 +9322,7 @@
         </p:nvSpPr>
         <p:spPr>
           <a:xfrm>
-            <a:off x="9875520" y="4297680"/>
+            <a:off x="-1737360" y="-2011680"/>
             <a:ext cx="3657600" cy="3657600"/>
           </a:xfrm>
           <a:prstGeom prst="ellipse">
@@ -8206,7 +9367,7 @@
         </p:nvSpPr>
         <p:spPr>
           <a:xfrm>
-            <a:off x="11704320" y="3474720"/>
+            <a:off x="54864" y="3291840"/>
             <a:ext cx="411480" cy="411480"/>
           </a:xfrm>
           <a:prstGeom prst="ellipse">
@@ -8277,7 +9438,7 @@
                 </a:solidFill>
                 <a:latin typeface="Helvetica"/>
               </a:rPr>
-              <a:t>Kết luận: tính nhất quán qua modality gap quyết định chất lượng</a:t>
+              <a:t>Vì sao: B làm φ nhất quán hơn giữa ảnh và văn bản, A làm ngược lại</a:t>
             </a:r>
           </a:p>
         </p:txBody>
@@ -8321,63 +9482,64 @@
           </a:p>
         </p:txBody>
       </p:sp>
-      <p:sp>
-        <p:nvSpPr>
-          <p:cNvPr id="6" name="Rounded Rectangle 5"/>
-          <p:cNvSpPr/>
+      <p:pic>
+        <p:nvPicPr>
+          <p:cNvPr id="12" name="Picture 11" descr="image.png"/>
+          <p:cNvPicPr>
+            <a:picLocks noChangeAspect="1"/>
+          </p:cNvPicPr>
           <p:nvPr/>
-        </p:nvSpPr>
-        <p:spPr>
-          <a:xfrm>
-            <a:off x="548640" y="1737360"/>
-            <a:ext cx="5486400" cy="3291840"/>
-          </a:xfrm>
-          <a:prstGeom prst="roundRect">
-            <a:avLst>
-              <a:gd name="adj" fmla="val 8000"/>
-            </a:avLst>
+        </p:nvPicPr>
+        <p:blipFill>
+          <a:blip r:embed="rId3"/>
+          <a:stretch>
+            <a:fillRect/>
+          </a:stretch>
+        </p:blipFill>
+        <p:spPr>
+          <a:xfrm>
+            <a:off x="985157" y="1600200"/>
+            <a:ext cx="4521925" cy="3063240"/>
+          </a:xfrm>
+          <a:prstGeom prst="rect">
+            <a:avLst/>
           </a:prstGeom>
-          <a:solidFill>
-            <a:srgbClr val="EAF2FF"/>
-          </a:solidFill>
-          <a:ln>
-            <a:noFill/>
-          </a:ln>
-          <a:effectLst/>
-        </p:spPr>
-        <p:style>
-          <a:lnRef idx="1">
-            <a:schemeClr val="accent1"/>
-          </a:lnRef>
-          <a:fillRef idx="3">
-            <a:schemeClr val="accent1"/>
-          </a:fillRef>
-          <a:effectRef idx="2">
-            <a:schemeClr val="accent1"/>
-          </a:effectRef>
-          <a:fontRef idx="minor">
-            <a:schemeClr val="lt1"/>
-          </a:fontRef>
-        </p:style>
-        <p:txBody>
-          <a:bodyPr rtlCol="0" anchor="ctr"/>
-          <a:lstStyle/>
-          <a:p>
-            <a:pPr algn="ctr"/>
-            <a:endParaRPr/>
-          </a:p>
-        </p:txBody>
-      </p:sp>
-      <p:sp>
-        <p:nvSpPr>
-          <p:cNvPr id="7" name="TextBox 6"/>
+        </p:spPr>
+      </p:pic>
+      <p:pic>
+        <p:nvPicPr>
+          <p:cNvPr id="13" name="Picture 12" descr="image.png"/>
+          <p:cNvPicPr>
+            <a:picLocks noChangeAspect="1"/>
+          </p:cNvPicPr>
+          <p:nvPr/>
+        </p:nvPicPr>
+        <p:blipFill>
+          <a:blip r:embed="rId4"/>
+          <a:stretch>
+            <a:fillRect/>
+          </a:stretch>
+        </p:blipFill>
+        <p:spPr>
+          <a:xfrm>
+            <a:off x="6654437" y="1600200"/>
+            <a:ext cx="4521925" cy="3063240"/>
+          </a:xfrm>
+          <a:prstGeom prst="rect">
+            <a:avLst/>
+          </a:prstGeom>
+        </p:spPr>
+      </p:pic>
+      <p:sp>
+        <p:nvSpPr>
+          <p:cNvPr id="14" name="TextBox 13"/>
           <p:cNvSpPr txBox="1"/>
           <p:nvPr/>
         </p:nvSpPr>
         <p:spPr>
           <a:xfrm>
-            <a:off x="822959" y="1965960"/>
-            <a:ext cx="4937760" cy="2834640"/>
+            <a:off x="548640" y="4800600"/>
+            <a:ext cx="10241280" cy="1371600"/>
           </a:xfrm>
           <a:prstGeom prst="rect">
             <a:avLst/>
@@ -8392,270 +9554,51 @@
           <a:p>
             <a:pPr algn="l">
               <a:lnSpc>
-                <a:spcPct val="110000"/>
+                <a:spcPct val="105000"/>
               </a:lnSpc>
             </a:pPr>
             <a:r>
-              <a:rPr sz="2200" b="0" i="0">
+              <a:rPr sz="2000" b="1" i="0">
+                <a:solidFill>
+                  <a:srgbClr val="144FB0"/>
+                </a:solidFill>
+                <a:latin typeface="Helvetica"/>
+              </a:rPr>
+              <a:t>Trái: </a:t>
+            </a:r>
+            <a:r>
+              <a:rPr sz="2000" b="0" i="0">
                 <a:solidFill>
                   <a:srgbClr val="0F1C3F"/>
                 </a:solidFill>
                 <a:latin typeface="Helvetica"/>
               </a:rPr>
-              <a:t>Tái hiện khớp bài báo, lệch tối đa 0,77 điểm</a:t>
+              <a:t>cosine giữa φ(ảnh) và φ(văn bản) của cùng một cặp; B cao nhất (0,84), A thấp nhất (0,64), cùng thứ tự với CIRCO mAP@5</a:t>
             </a:r>
           </a:p>
           <a:p>
             <a:pPr algn="l">
               <a:lnSpc>
-                <a:spcPct val="110000"/>
+                <a:spcPct val="105000"/>
               </a:lnSpc>
             </a:pPr>
             <a:r>
-              <a:rPr sz="2200" b="0" i="0">
+              <a:rPr sz="2000" b="1" i="0">
+                <a:solidFill>
+                  <a:srgbClr val="144FB0"/>
+                </a:solidFill>
+                <a:latin typeface="Helvetica"/>
+              </a:rPr>
+              <a:t>Phải: </a:t>
+            </a:r>
+            <a:r>
+              <a:rPr sz="2000" b="0" i="0">
                 <a:solidFill>
                   <a:srgbClr val="0F1C3F"/>
                 </a:solidFill>
                 <a:latin typeface="Helvetica"/>
               </a:rPr>
-              <a:t>B tốt hơn có ý nghĩa thống kê, vượt cả checkpoint 20.000 bước</a:t>
-            </a:r>
-          </a:p>
-          <a:p>
-            <a:pPr algn="l">
-              <a:lnSpc>
-                <a:spcPct val="110000"/>
-              </a:lnSpc>
-            </a:pPr>
-            <a:r>
-              <a:rPr sz="2200" b="0" i="0">
-                <a:solidFill>
-                  <a:srgbClr val="0F1C3F"/>
-                </a:solidFill>
-                <a:latin typeface="Helvetica"/>
-              </a:rPr>
-              <a:t>A làm CIRCO mAP@5 giảm 2,45 điểm</a:t>
-            </a:r>
-          </a:p>
-          <a:p>
-            <a:pPr algn="l">
-              <a:lnSpc>
-                <a:spcPct val="110000"/>
-              </a:lnSpc>
-            </a:pPr>
-            <a:r>
-              <a:rPr sz="2200" b="0" i="0">
-                <a:solidFill>
-                  <a:srgbClr val="0F1C3F"/>
-                </a:solidFill>
-                <a:latin typeface="Helvetica"/>
-              </a:rPr>
-              <a:t>Yếu tố then chốt: φ xử lý ảnh nhất quán với văn bản</a:t>
-            </a:r>
-          </a:p>
-        </p:txBody>
-      </p:sp>
-      <p:sp>
-        <p:nvSpPr>
-          <p:cNvPr id="8" name="Rounded Rectangle 7"/>
-          <p:cNvSpPr/>
-          <p:nvPr/>
-        </p:nvSpPr>
-        <p:spPr>
-          <a:xfrm>
-            <a:off x="6309360" y="1737360"/>
-            <a:ext cx="5303520" cy="3291840"/>
-          </a:xfrm>
-          <a:prstGeom prst="roundRect">
-            <a:avLst>
-              <a:gd name="adj" fmla="val 8000"/>
-            </a:avLst>
-          </a:prstGeom>
-          <a:solidFill>
-            <a:srgbClr val="D6E6FF"/>
-          </a:solidFill>
-          <a:ln>
-            <a:noFill/>
-          </a:ln>
-          <a:effectLst/>
-        </p:spPr>
-        <p:style>
-          <a:lnRef idx="1">
-            <a:schemeClr val="accent1"/>
-          </a:lnRef>
-          <a:fillRef idx="3">
-            <a:schemeClr val="accent1"/>
-          </a:fillRef>
-          <a:effectRef idx="2">
-            <a:schemeClr val="accent1"/>
-          </a:effectRef>
-          <a:fontRef idx="minor">
-            <a:schemeClr val="lt1"/>
-          </a:fontRef>
-        </p:style>
-        <p:txBody>
-          <a:bodyPr rtlCol="0" anchor="ctr"/>
-          <a:lstStyle/>
-          <a:p>
-            <a:pPr algn="ctr"/>
-            <a:endParaRPr/>
-          </a:p>
-        </p:txBody>
-      </p:sp>
-      <p:sp>
-        <p:nvSpPr>
-          <p:cNvPr id="9" name="TextBox 8"/>
-          <p:cNvSpPr txBox="1"/>
-          <p:nvPr/>
-        </p:nvSpPr>
-        <p:spPr>
-          <a:xfrm>
-            <a:off x="6537960" y="1901952"/>
-            <a:ext cx="4846320" cy="502920"/>
-          </a:xfrm>
-          <a:prstGeom prst="rect">
-            <a:avLst/>
-          </a:prstGeom>
-          <a:noFill/>
-        </p:spPr>
-        <p:txBody>
-          <a:bodyPr wrap="square" lIns="45720" tIns="27432" rIns="45720" bIns="27432" anchor="t">
-            <a:spAutoFit/>
-          </a:bodyPr>
-          <a:lstStyle/>
-          <a:p>
-            <a:pPr algn="l">
-              <a:lnSpc>
-                <a:spcPct val="110000"/>
-              </a:lnSpc>
-            </a:pPr>
-            <a:r>
-              <a:rPr sz="2200" b="1" i="0">
-                <a:solidFill>
-                  <a:srgbClr val="144FB0"/>
-                </a:solidFill>
-                <a:latin typeface="Helvetica"/>
-              </a:rPr>
-              <a:t>Hạn chế và hướng phát triển</a:t>
-            </a:r>
-          </a:p>
-        </p:txBody>
-      </p:sp>
-      <p:sp>
-        <p:nvSpPr>
-          <p:cNvPr id="10" name="TextBox 9"/>
-          <p:cNvSpPr txBox="1"/>
-          <p:nvPr/>
-        </p:nvSpPr>
-        <p:spPr>
-          <a:xfrm>
-            <a:off x="6537960" y="2468880"/>
-            <a:ext cx="4846320" cy="2423160"/>
-          </a:xfrm>
-          <a:prstGeom prst="rect">
-            <a:avLst/>
-          </a:prstGeom>
-          <a:noFill/>
-        </p:spPr>
-        <p:txBody>
-          <a:bodyPr wrap="square">
-            <a:spAutoFit/>
-          </a:bodyPr>
-          <a:lstStyle/>
-          <a:p>
-            <a:pPr marL="292608" indent="-292608">
-              <a:lnSpc>
-                <a:spcPct val="108000"/>
-              </a:lnSpc>
-              <a:spcAft>
-                <a:spcPts val="600"/>
-              </a:spcAft>
-              <a:buClr>
-                <a:srgbClr val="1E6FE8"/>
-              </a:buClr>
-              <a:buFont typeface="Helvetica"/>
-              <a:buChar char="•"/>
-            </a:pPr>
-            <a:r>
-              <a:rPr sz="2100" b="0" i="0">
-                <a:solidFill>
-                  <a:srgbClr val="0F1C3F"/>
-                </a:solidFill>
-                <a:latin typeface="Helvetica"/>
-              </a:rPr>
-              <a:t>Mới huấn luyện 5.000 bước, cần đủ 20.000</a:t>
-            </a:r>
-          </a:p>
-          <a:p>
-            <a:pPr marL="292608" indent="-292608">
-              <a:lnSpc>
-                <a:spcPct val="108000"/>
-              </a:lnSpc>
-              <a:spcAft>
-                <a:spcPts val="600"/>
-              </a:spcAft>
-              <a:buClr>
-                <a:srgbClr val="1E6FE8"/>
-              </a:buClr>
-              <a:buFont typeface="Helvetica"/>
-              <a:buChar char="•"/>
-            </a:pPr>
-            <a:r>
-              <a:rPr sz="2100" b="0" i="0">
-                <a:solidFill>
-                  <a:srgbClr val="0F1C3F"/>
-                </a:solidFill>
-                <a:latin typeface="Helvetica"/>
-              </a:rPr>
-              <a:t>Chưa quét λ (A) và α (B)</a:t>
-            </a:r>
-          </a:p>
-          <a:p>
-            <a:pPr marL="292608" indent="-292608">
-              <a:lnSpc>
-                <a:spcPct val="108000"/>
-              </a:lnSpc>
-              <a:spcAft>
-                <a:spcPts val="600"/>
-              </a:spcAft>
-              <a:buClr>
-                <a:srgbClr val="1E6FE8"/>
-              </a:buClr>
-              <a:buFont typeface="Helvetica"/>
-              <a:buChar char="•"/>
-            </a:pPr>
-            <a:r>
-              <a:rPr sz="2100" b="0" i="0">
-                <a:solidFill>
-                  <a:srgbClr val="0F1C3F"/>
-                </a:solidFill>
-                <a:latin typeface="Helvetica"/>
-              </a:rPr>
-              <a:t>Chưa có CIRR, CIRCO test</a:t>
-            </a:r>
-          </a:p>
-          <a:p>
-            <a:pPr marL="292608" indent="-292608">
-              <a:lnSpc>
-                <a:spcPct val="108000"/>
-              </a:lnSpc>
-              <a:spcAft>
-                <a:spcPts val="600"/>
-              </a:spcAft>
-              <a:buClr>
-                <a:srgbClr val="1E6FE8"/>
-              </a:buClr>
-              <a:buFont typeface="Helvetica"/>
-              <a:buChar char="•"/>
-            </a:pPr>
-            <a:r>
-              <a:rPr sz="2100" b="0" i="0">
-                <a:solidFill>
-                  <a:srgbClr val="0F1C3F"/>
-                </a:solidFill>
-                <a:latin typeface="Helvetica"/>
-              </a:rPr>
-              <a:t>Hướng C: chọn từ khóa che theo IDF</a:t>
+              <a:t>A thấp hơn baseline ở mọi mốc huấn luyện, nên kết luận không phụ thuộc điểm dừng</a:t>
             </a:r>
           </a:p>
         </p:txBody>
@@ -8713,8 +9656,8 @@
         </p:nvSpPr>
         <p:spPr>
           <a:xfrm>
-            <a:off x="-1783080" y="-4770120"/>
-            <a:ext cx="15758159" cy="15758159"/>
+            <a:off x="9875520" y="4297680"/>
+            <a:ext cx="3657600" cy="3657600"/>
           </a:xfrm>
           <a:prstGeom prst="ellipse">
             <a:avLst/>
@@ -8758,8 +9701,8 @@
         </p:nvSpPr>
         <p:spPr>
           <a:xfrm>
-            <a:off x="5368065" y="1416270"/>
-            <a:ext cx="1960581" cy="1960581"/>
+            <a:off x="11704320" y="3474720"/>
+            <a:ext cx="411480" cy="411480"/>
           </a:xfrm>
           <a:prstGeom prst="ellipse">
             <a:avLst/>
@@ -8803,6 +9746,535 @@
         </p:nvSpPr>
         <p:spPr>
           <a:xfrm>
+            <a:off x="548640" y="347472"/>
+            <a:ext cx="10424160" cy="1143000"/>
+          </a:xfrm>
+          <a:prstGeom prst="rect">
+            <a:avLst/>
+          </a:prstGeom>
+          <a:noFill/>
+        </p:spPr>
+        <p:txBody>
+          <a:bodyPr wrap="square" lIns="45720" tIns="27432" rIns="45720" bIns="27432" anchor="ctr">
+            <a:spAutoFit/>
+          </a:bodyPr>
+          <a:lstStyle/>
+          <a:p>
+            <a:pPr algn="l">
+              <a:lnSpc>
+                <a:spcPct val="110000"/>
+              </a:lnSpc>
+            </a:pPr>
+            <a:r>
+              <a:rPr sz="3200" b="1" i="0">
+                <a:solidFill>
+                  <a:srgbClr val="0F1C3F"/>
+                </a:solidFill>
+                <a:latin typeface="Helvetica"/>
+              </a:rPr>
+              <a:t>Kết luận: H2 được ủng hộ, H1 và H3 bị bác bỏ</a:t>
+            </a:r>
+          </a:p>
+        </p:txBody>
+      </p:sp>
+      <p:sp>
+        <p:nvSpPr>
+          <p:cNvPr id="5" name="!!num"/>
+          <p:cNvSpPr txBox="1"/>
+          <p:nvPr/>
+        </p:nvSpPr>
+        <p:spPr>
+          <a:xfrm>
+            <a:off x="10881360" y="6236208"/>
+            <a:ext cx="914400" cy="457200"/>
+          </a:xfrm>
+          <a:prstGeom prst="rect">
+            <a:avLst/>
+          </a:prstGeom>
+          <a:noFill/>
+        </p:spPr>
+        <p:txBody>
+          <a:bodyPr wrap="square" lIns="45720" tIns="27432" rIns="45720" bIns="27432" anchor="t">
+            <a:spAutoFit/>
+          </a:bodyPr>
+          <a:lstStyle/>
+          <a:p>
+            <a:pPr algn="r">
+              <a:lnSpc>
+                <a:spcPct val="110000"/>
+              </a:lnSpc>
+            </a:pPr>
+            <a:r>
+              <a:rPr sz="2000" b="0" i="0">
+                <a:solidFill>
+                  <a:srgbClr val="5B6B82"/>
+                </a:solidFill>
+                <a:latin typeface="Helvetica"/>
+              </a:rPr>
+              <a:t>15</a:t>
+            </a:r>
+          </a:p>
+        </p:txBody>
+      </p:sp>
+      <p:pic>
+        <p:nvPicPr>
+          <p:cNvPr id="6" name="Picture 5" descr="qualitative_fiq_1.png"/>
+          <p:cNvPicPr>
+            <a:picLocks noChangeAspect="1"/>
+          </p:cNvPicPr>
+          <p:nvPr/>
+        </p:nvPicPr>
+        <p:blipFill>
+          <a:blip r:embed="rId3"/>
+          <a:stretch>
+            <a:fillRect/>
+          </a:stretch>
+        </p:blipFill>
+        <p:spPr>
+          <a:xfrm>
+            <a:off x="548640" y="1600200"/>
+            <a:ext cx="6949440" cy="2779776"/>
+          </a:xfrm>
+          <a:prstGeom prst="rect">
+            <a:avLst/>
+          </a:prstGeom>
+        </p:spPr>
+      </p:pic>
+      <p:sp>
+        <p:nvSpPr>
+          <p:cNvPr id="7" name="TextBox 6"/>
+          <p:cNvSpPr txBox="1"/>
+          <p:nvPr/>
+        </p:nvSpPr>
+        <p:spPr>
+          <a:xfrm>
+            <a:off x="548640" y="4471416"/>
+            <a:ext cx="6949440" cy="731520"/>
+          </a:xfrm>
+          <a:prstGeom prst="rect">
+            <a:avLst/>
+          </a:prstGeom>
+          <a:noFill/>
+        </p:spPr>
+        <p:txBody>
+          <a:bodyPr wrap="square" lIns="45720" tIns="27432" rIns="45720" bIns="27432" anchor="t">
+            <a:spAutoFit/>
+          </a:bodyPr>
+          <a:lstStyle/>
+          <a:p>
+            <a:pPr algn="l">
+              <a:lnSpc>
+                <a:spcPct val="110000"/>
+              </a:lnSpc>
+            </a:pPr>
+            <a:r>
+              <a:rPr sz="2000" b="0" i="0">
+                <a:solidFill>
+                  <a:srgbClr val="0F1C3F"/>
+                </a:solidFill>
+                <a:latin typeface="Helvetica"/>
+              </a:rPr>
+              <a:t>Ví dụ FashionIQ: B xếp đúng ảnh đích ở hạng 1; baseline trả về váy ngắn, tối màu</a:t>
+            </a:r>
+          </a:p>
+        </p:txBody>
+      </p:sp>
+      <p:sp>
+        <p:nvSpPr>
+          <p:cNvPr id="8" name="TextBox 7"/>
+          <p:cNvSpPr txBox="1"/>
+          <p:nvPr/>
+        </p:nvSpPr>
+        <p:spPr>
+          <a:xfrm>
+            <a:off x="548640" y="5340096"/>
+            <a:ext cx="6949440" cy="731520"/>
+          </a:xfrm>
+          <a:prstGeom prst="rect">
+            <a:avLst/>
+          </a:prstGeom>
+          <a:noFill/>
+        </p:spPr>
+        <p:txBody>
+          <a:bodyPr wrap="square" lIns="45720" tIns="27432" rIns="45720" bIns="27432" anchor="t">
+            <a:spAutoFit/>
+          </a:bodyPr>
+          <a:lstStyle/>
+          <a:p>
+            <a:pPr algn="l">
+              <a:lnSpc>
+                <a:spcPct val="110000"/>
+              </a:lnSpc>
+            </a:pPr>
+            <a:r>
+              <a:rPr sz="2000" b="1" i="0">
+                <a:solidFill>
+                  <a:srgbClr val="144FB0"/>
+                </a:solidFill>
+                <a:latin typeface="Helvetica"/>
+              </a:rPr>
+              <a:t>Đóng góp: </a:t>
+            </a:r>
+            <a:r>
+              <a:rPr sz="2000" b="0" i="0">
+                <a:solidFill>
+                  <a:srgbClr val="0F1C3F"/>
+                </a:solidFill>
+                <a:latin typeface="Helvetica"/>
+              </a:rPr>
+              <a:t>dựng lại mã, tái hiện, hai cải tiến, kiểm định thống kê, phân tích cơ chế</a:t>
+            </a:r>
+          </a:p>
+        </p:txBody>
+      </p:sp>
+      <p:sp>
+        <p:nvSpPr>
+          <p:cNvPr id="9" name="Rounded Rectangle 8"/>
+          <p:cNvSpPr/>
+          <p:nvPr/>
+        </p:nvSpPr>
+        <p:spPr>
+          <a:xfrm>
+            <a:off x="7726679" y="1600200"/>
+            <a:ext cx="3931920" cy="4434840"/>
+          </a:xfrm>
+          <a:prstGeom prst="roundRect">
+            <a:avLst>
+              <a:gd name="adj" fmla="val 8000"/>
+            </a:avLst>
+          </a:prstGeom>
+          <a:solidFill>
+            <a:srgbClr val="EAF2FF"/>
+          </a:solidFill>
+          <a:ln>
+            <a:noFill/>
+          </a:ln>
+          <a:effectLst/>
+        </p:spPr>
+        <p:style>
+          <a:lnRef idx="1">
+            <a:schemeClr val="accent1"/>
+          </a:lnRef>
+          <a:fillRef idx="3">
+            <a:schemeClr val="accent1"/>
+          </a:fillRef>
+          <a:effectRef idx="2">
+            <a:schemeClr val="accent1"/>
+          </a:effectRef>
+          <a:fontRef idx="minor">
+            <a:schemeClr val="lt1"/>
+          </a:fontRef>
+        </p:style>
+        <p:txBody>
+          <a:bodyPr rtlCol="0" anchor="ctr"/>
+          <a:lstStyle/>
+          <a:p>
+            <a:pPr algn="ctr"/>
+            <a:endParaRPr/>
+          </a:p>
+        </p:txBody>
+      </p:sp>
+      <p:sp>
+        <p:nvSpPr>
+          <p:cNvPr id="10" name="TextBox 9"/>
+          <p:cNvSpPr txBox="1"/>
+          <p:nvPr/>
+        </p:nvSpPr>
+        <p:spPr>
+          <a:xfrm>
+            <a:off x="7955279" y="1764792"/>
+            <a:ext cx="3474720" cy="502920"/>
+          </a:xfrm>
+          <a:prstGeom prst="rect">
+            <a:avLst/>
+          </a:prstGeom>
+          <a:noFill/>
+        </p:spPr>
+        <p:txBody>
+          <a:bodyPr wrap="square" lIns="45720" tIns="27432" rIns="45720" bIns="27432" anchor="t">
+            <a:spAutoFit/>
+          </a:bodyPr>
+          <a:lstStyle/>
+          <a:p>
+            <a:pPr algn="l">
+              <a:lnSpc>
+                <a:spcPct val="110000"/>
+              </a:lnSpc>
+            </a:pPr>
+            <a:r>
+              <a:rPr sz="2200" b="1" i="0">
+                <a:solidFill>
+                  <a:srgbClr val="144FB0"/>
+                </a:solidFill>
+                <a:latin typeface="Helvetica"/>
+              </a:rPr>
+              <a:t>Kết luận</a:t>
+            </a:r>
+          </a:p>
+        </p:txBody>
+      </p:sp>
+      <p:sp>
+        <p:nvSpPr>
+          <p:cNvPr id="11" name="TextBox 10"/>
+          <p:cNvSpPr txBox="1"/>
+          <p:nvPr/>
+        </p:nvSpPr>
+        <p:spPr>
+          <a:xfrm>
+            <a:off x="7955279" y="2331720"/>
+            <a:ext cx="3474720" cy="3566159"/>
+          </a:xfrm>
+          <a:prstGeom prst="rect">
+            <a:avLst/>
+          </a:prstGeom>
+          <a:noFill/>
+        </p:spPr>
+        <p:txBody>
+          <a:bodyPr wrap="square">
+            <a:spAutoFit/>
+          </a:bodyPr>
+          <a:lstStyle/>
+          <a:p>
+            <a:pPr marL="292608" indent="-292608">
+              <a:lnSpc>
+                <a:spcPct val="108000"/>
+              </a:lnSpc>
+              <a:spcAft>
+                <a:spcPts val="600"/>
+              </a:spcAft>
+              <a:buClr>
+                <a:srgbClr val="1E6FE8"/>
+              </a:buClr>
+              <a:buFont typeface="Helvetica"/>
+              <a:buChar char="•"/>
+            </a:pPr>
+            <a:r>
+              <a:rPr sz="2000" b="0" i="0">
+                <a:solidFill>
+                  <a:srgbClr val="0F1C3F"/>
+                </a:solidFill>
+                <a:latin typeface="Helvetica"/>
+              </a:rPr>
+              <a:t>H2 (B) được ủng hộ: R@10 +0,60, R@50 +1,27</a:t>
+            </a:r>
+          </a:p>
+          <a:p>
+            <a:pPr marL="292608" indent="-292608">
+              <a:lnSpc>
+                <a:spcPct val="108000"/>
+              </a:lnSpc>
+              <a:spcAft>
+                <a:spcPts val="600"/>
+              </a:spcAft>
+              <a:buClr>
+                <a:srgbClr val="1E6FE8"/>
+              </a:buClr>
+              <a:buFont typeface="Helvetica"/>
+              <a:buChar char="•"/>
+            </a:pPr>
+            <a:r>
+              <a:rPr sz="2000" b="0" i="0">
+                <a:solidFill>
+                  <a:srgbClr val="0F1C3F"/>
+                </a:solidFill>
+                <a:latin typeface="Helvetica"/>
+              </a:rPr>
+              <a:t>H1 (A) bị bác bỏ: CIRCO mAP@5 giảm 2,45</a:t>
+            </a:r>
+          </a:p>
+          <a:p>
+            <a:pPr marL="292608" indent="-292608">
+              <a:lnSpc>
+                <a:spcPct val="108000"/>
+              </a:lnSpc>
+              <a:spcAft>
+                <a:spcPts val="600"/>
+              </a:spcAft>
+              <a:buClr>
+                <a:srgbClr val="1E6FE8"/>
+              </a:buClr>
+              <a:buFont typeface="Helvetica"/>
+              <a:buChar char="•"/>
+            </a:pPr>
+            <a:r>
+              <a:rPr sz="2000" b="0" i="0">
+                <a:solidFill>
+                  <a:srgbClr val="0F1C3F"/>
+                </a:solidFill>
+                <a:latin typeface="Helvetica"/>
+              </a:rPr>
+              <a:t>H3 (A+B) bị bác bỏ: kém baseline trên CIRCO</a:t>
+            </a:r>
+          </a:p>
+          <a:p>
+            <a:pPr marL="292608" indent="-292608">
+              <a:lnSpc>
+                <a:spcPct val="108000"/>
+              </a:lnSpc>
+              <a:spcAft>
+                <a:spcPts val="600"/>
+              </a:spcAft>
+              <a:buClr>
+                <a:srgbClr val="1E6FE8"/>
+              </a:buClr>
+              <a:buFont typeface="Helvetica"/>
+              <a:buChar char="•"/>
+            </a:pPr>
+            <a:r>
+              <a:rPr sz="2000" b="0" i="0">
+                <a:solidFill>
+                  <a:srgbClr val="0F1C3F"/>
+                </a:solidFill>
+                <a:latin typeface="Helvetica"/>
+              </a:rPr>
+              <a:t>Hạn chế: 5.000 bước, chưa quét λ, α</a:t>
+            </a:r>
+          </a:p>
+        </p:txBody>
+      </p:sp>
+    </p:spTree>
+  </p:cSld>
+  <p:clrMapOvr>
+    <a:masterClrMapping/>
+  </p:clrMapOvr>
+  <mc:AlternateContent xmlns:mc="http://schemas.openxmlformats.org/markup-compatibility/2006" xmlns:p159="http://schemas.microsoft.com/office/powerpoint/2015/09/main">
+    <mc:Choice Requires="p159">
+      <p:transition xmlns:p14="http://schemas.microsoft.com/office/powerpoint/2010/main" spd="slow" p14:dur="1200">
+        <p159:morph option="byObject"/>
+      </p:transition>
+    </mc:Choice>
+    <mc:Fallback xmlns="">
+      <p:transition spd="slow">
+        <p:fade/>
+      </p:transition>
+    </mc:Fallback>
+  </mc:AlternateContent>
+</p:sld>
+</file>
+
+<file path=ppt/slides/slide16.xml><?xml version="1.0" encoding="utf-8"?>
+<p:sld xmlns:a="http://schemas.openxmlformats.org/drawingml/2006/main" xmlns:r="http://schemas.openxmlformats.org/officeDocument/2006/relationships" xmlns:p="http://schemas.openxmlformats.org/presentationml/2006/main">
+  <p:cSld>
+    <p:bg>
+      <p:bgPr>
+        <a:solidFill>
+          <a:srgbClr val="FFFFFF"/>
+        </a:solidFill>
+        <a:effectLst/>
+      </p:bgPr>
+    </p:bg>
+    <p:spTree>
+      <p:nvGrpSpPr>
+        <p:cNvPr id="1" name=""/>
+        <p:cNvGrpSpPr/>
+        <p:nvPr/>
+      </p:nvGrpSpPr>
+      <p:grpSpPr>
+        <a:xfrm>
+          <a:off x="0" y="0"/>
+          <a:ext cx="0" cy="0"/>
+          <a:chOff x="0" y="0"/>
+          <a:chExt cx="0" cy="0"/>
+        </a:xfrm>
+      </p:grpSpPr>
+      <p:sp>
+        <p:nvSpPr>
+          <p:cNvPr id="2" name="!!orb"/>
+          <p:cNvSpPr/>
+          <p:nvPr/>
+        </p:nvSpPr>
+        <p:spPr>
+          <a:xfrm>
+            <a:off x="-1783080" y="-4770120"/>
+            <a:ext cx="15758159" cy="15758159"/>
+          </a:xfrm>
+          <a:prstGeom prst="ellipse">
+            <a:avLst/>
+          </a:prstGeom>
+          <a:solidFill>
+            <a:srgbClr val="EAF2FF"/>
+          </a:solidFill>
+          <a:ln>
+            <a:noFill/>
+          </a:ln>
+          <a:effectLst/>
+        </p:spPr>
+        <p:style>
+          <a:lnRef idx="1">
+            <a:schemeClr val="accent1"/>
+          </a:lnRef>
+          <a:fillRef idx="3">
+            <a:schemeClr val="accent1"/>
+          </a:fillRef>
+          <a:effectRef idx="2">
+            <a:schemeClr val="accent1"/>
+          </a:effectRef>
+          <a:fontRef idx="minor">
+            <a:schemeClr val="lt1"/>
+          </a:fontRef>
+        </p:style>
+        <p:txBody>
+          <a:bodyPr rtlCol="0" anchor="ctr"/>
+          <a:lstStyle/>
+          <a:p>
+            <a:pPr algn="ctr"/>
+            <a:endParaRPr/>
+          </a:p>
+        </p:txBody>
+      </p:sp>
+      <p:sp>
+        <p:nvSpPr>
+          <p:cNvPr id="3" name="!!dot"/>
+          <p:cNvSpPr/>
+          <p:nvPr/>
+        </p:nvSpPr>
+        <p:spPr>
+          <a:xfrm>
+            <a:off x="5368065" y="1416270"/>
+            <a:ext cx="1960581" cy="1960581"/>
+          </a:xfrm>
+          <a:prstGeom prst="ellipse">
+            <a:avLst/>
+          </a:prstGeom>
+          <a:solidFill>
+            <a:srgbClr val="1E6FE8"/>
+          </a:solidFill>
+          <a:ln>
+            <a:noFill/>
+          </a:ln>
+          <a:effectLst/>
+        </p:spPr>
+        <p:style>
+          <a:lnRef idx="1">
+            <a:schemeClr val="accent1"/>
+          </a:lnRef>
+          <a:fillRef idx="3">
+            <a:schemeClr val="accent1"/>
+          </a:fillRef>
+          <a:effectRef idx="2">
+            <a:schemeClr val="accent1"/>
+          </a:effectRef>
+          <a:fontRef idx="minor">
+            <a:schemeClr val="lt1"/>
+          </a:fontRef>
+        </p:style>
+        <p:txBody>
+          <a:bodyPr rtlCol="0" anchor="ctr"/>
+          <a:lstStyle/>
+          <a:p>
+            <a:pPr algn="ctr"/>
+            <a:endParaRPr/>
+          </a:p>
+        </p:txBody>
+      </p:sp>
+      <p:sp>
+        <p:nvSpPr>
+          <p:cNvPr id="4" name="!!title"/>
+          <p:cNvSpPr txBox="1"/>
+          <p:nvPr/>
+        </p:nvSpPr>
+        <p:spPr>
+          <a:xfrm>
             <a:off x="731520" y="2011680"/>
             <a:ext cx="9601200" cy="769763"/>
           </a:xfrm>
@@ -9180,7 +10652,7 @@
                 </a:solidFill>
                 <a:latin typeface="Helvetica"/>
               </a:rPr>
-              <a:t>15</a:t>
+              <a:t>16</a:t>
             </a:r>
           </a:p>
         </p:txBody>
@@ -9206,7 +10678,7 @@
 </file>
 
 <file path=ppt/slides/slide2.xml><?xml version="1.0" encoding="utf-8"?>
-<p:sld xmlns:a="http://schemas.openxmlformats.org/drawingml/2006/main" xmlns:p="http://schemas.openxmlformats.org/presentationml/2006/main" xmlns:r="http://schemas.openxmlformats.org/officeDocument/2006/relationships">
+<p:sld xmlns:a="http://schemas.openxmlformats.org/drawingml/2006/main" xmlns:r="http://schemas.openxmlformats.org/officeDocument/2006/relationships" xmlns:p="http://schemas.openxmlformats.org/presentationml/2006/main">
   <p:cSld>
     <p:bg>
       <p:bgPr>
@@ -9222,7 +10694,14 @@
         <p:cNvGrpSpPr/>
         <p:nvPr/>
       </p:nvGrpSpPr>
-      <p:grpSpPr/>
+      <p:grpSpPr>
+        <a:xfrm>
+          <a:off x="0" y="0"/>
+          <a:ext cx="0" cy="0"/>
+          <a:chOff x="0" y="0"/>
+          <a:chExt cx="0" cy="0"/>
+        </a:xfrm>
+      </p:grpSpPr>
       <p:sp>
         <p:nvSpPr>
           <p:cNvPr id="2" name="!!orb"/>
@@ -9231,8 +10710,8 @@
         </p:nvSpPr>
         <p:spPr>
           <a:xfrm>
-            <a:off x="-1645920" y="4206240"/>
-            <a:ext cx="3657600" cy="3657600"/>
+            <a:off x="-1463040" y="4023360"/>
+            <a:ext cx="3840480" cy="3840480"/>
           </a:xfrm>
           <a:prstGeom prst="ellipse">
             <a:avLst/>
@@ -9264,6 +10743,7 @@
           <a:lstStyle/>
           <a:p>
             <a:pPr algn="ctr"/>
+            <a:endParaRPr/>
           </a:p>
         </p:txBody>
       </p:sp>
@@ -9275,7 +10755,7 @@
         </p:nvSpPr>
         <p:spPr>
           <a:xfrm>
-            <a:off x="54864" y="3108960"/>
+            <a:off x="54864" y="6035040"/>
             <a:ext cx="411480" cy="411480"/>
           </a:xfrm>
           <a:prstGeom prst="ellipse">
@@ -9308,6 +10788,7 @@
           <a:lstStyle/>
           <a:p>
             <a:pPr algn="ctr"/>
+            <a:endParaRPr/>
           </a:p>
         </p:txBody>
       </p:sp>
@@ -9319,8 +10800,8 @@
         </p:nvSpPr>
         <p:spPr>
           <a:xfrm>
-            <a:off x="548640" y="347472"/>
-            <a:ext cx="10424160" cy="1143000"/>
+            <a:off x="548640" y="631521"/>
+            <a:ext cx="10424160" cy="574901"/>
           </a:xfrm>
           <a:prstGeom prst="rect">
             <a:avLst/>
@@ -9328,7 +10809,7 @@
           <a:noFill/>
         </p:spPr>
         <p:txBody>
-          <a:bodyPr wrap="square" anchor="ctr" lIns="45720" rIns="45720" tIns="27432" bIns="27432">
+          <a:bodyPr wrap="square" lIns="45720" tIns="27432" rIns="45720" bIns="27432" anchor="ctr">
             <a:spAutoFit/>
           </a:bodyPr>
           <a:lstStyle/>
@@ -9339,14 +10820,119 @@
               </a:lnSpc>
             </a:pPr>
             <a:r>
-              <a:rPr sz="3200" b="1" i="0">
+              <a:rPr sz="3200" b="1" i="0" dirty="0" err="1">
                 <a:solidFill>
                   <a:srgbClr val="0F1C3F"/>
                 </a:solidFill>
                 <a:latin typeface="Helvetica"/>
               </a:rPr>
-              <a:t>Bài báo LinCIR: huấn luyện truy xuất ảnh kết hợp chỉ bằng văn bản</a:t>
-            </a:r>
+              <a:t>Phân</a:t>
+            </a:r>
+            <a:r>
+              <a:rPr sz="3200" b="1" i="0" dirty="0">
+                <a:solidFill>
+                  <a:srgbClr val="0F1C3F"/>
+                </a:solidFill>
+                <a:latin typeface="Helvetica"/>
+              </a:rPr>
+              <a:t> </a:t>
+            </a:r>
+            <a:r>
+              <a:rPr lang="en-US" sz="3200" b="1" i="0" dirty="0">
+                <a:solidFill>
+                  <a:srgbClr val="0F1C3F"/>
+                </a:solidFill>
+                <a:latin typeface="Helvetica"/>
+              </a:rPr>
+              <a:t>chia</a:t>
+            </a:r>
+            <a:r>
+              <a:rPr sz="3200" b="1" i="0" dirty="0">
+                <a:solidFill>
+                  <a:srgbClr val="0F1C3F"/>
+                </a:solidFill>
+                <a:latin typeface="Helvetica"/>
+              </a:rPr>
+              <a:t> </a:t>
+            </a:r>
+            <a:r>
+              <a:rPr sz="3200" b="1" i="0" dirty="0" err="1">
+                <a:solidFill>
+                  <a:srgbClr val="0F1C3F"/>
+                </a:solidFill>
+                <a:latin typeface="Helvetica"/>
+              </a:rPr>
+              <a:t>công</a:t>
+            </a:r>
+            <a:r>
+              <a:rPr sz="3200" b="1" i="0" dirty="0">
+                <a:solidFill>
+                  <a:srgbClr val="0F1C3F"/>
+                </a:solidFill>
+                <a:latin typeface="Helvetica"/>
+              </a:rPr>
+              <a:t> </a:t>
+            </a:r>
+            <a:r>
+              <a:rPr sz="3200" b="1" i="0" dirty="0" err="1">
+                <a:solidFill>
+                  <a:srgbClr val="0F1C3F"/>
+                </a:solidFill>
+                <a:latin typeface="Helvetica"/>
+              </a:rPr>
+              <a:t>việc</a:t>
+            </a:r>
+            <a:r>
+              <a:rPr sz="3200" b="1" i="0" dirty="0">
+                <a:solidFill>
+                  <a:srgbClr val="0F1C3F"/>
+                </a:solidFill>
+                <a:latin typeface="Helvetica"/>
+              </a:rPr>
+              <a:t> </a:t>
+            </a:r>
+            <a:r>
+              <a:rPr sz="3200" b="1" i="0" dirty="0" err="1">
+                <a:solidFill>
+                  <a:srgbClr val="0F1C3F"/>
+                </a:solidFill>
+                <a:latin typeface="Helvetica"/>
+              </a:rPr>
+              <a:t>của</a:t>
+            </a:r>
+            <a:r>
+              <a:rPr sz="3200" b="1" i="0" dirty="0">
+                <a:solidFill>
+                  <a:srgbClr val="0F1C3F"/>
+                </a:solidFill>
+                <a:latin typeface="Helvetica"/>
+              </a:rPr>
+              <a:t> </a:t>
+            </a:r>
+            <a:r>
+              <a:rPr sz="3200" b="1" i="0" dirty="0" err="1">
+                <a:solidFill>
+                  <a:srgbClr val="0F1C3F"/>
+                </a:solidFill>
+                <a:latin typeface="Helvetica"/>
+              </a:rPr>
+              <a:t>nhóm</a:t>
+            </a:r>
+            <a:r>
+              <a:rPr lang="en-US" sz="3200" b="1" i="0" dirty="0">
+                <a:solidFill>
+                  <a:srgbClr val="0F1C3F"/>
+                </a:solidFill>
+                <a:latin typeface="Helvetica"/>
+              </a:rPr>
+              <a:t> 8</a:t>
+            </a:r>
+            <a:endParaRPr sz="3200" b="1" i="0" dirty="0">
+              <a:solidFill>
+                <a:srgbClr val="0F1C3F"/>
+              </a:solidFill>
+              <a:latin typeface="Helvetica"/>
+            </a:endParaRPr>
           </a:p>
         </p:txBody>
       </p:sp>
@@ -9367,7 +10953,7 @@
           <a:noFill/>
         </p:spPr>
         <p:txBody>
-          <a:bodyPr wrap="square" anchor="t" lIns="45720" rIns="45720" tIns="27432" bIns="27432">
+          <a:bodyPr wrap="square" lIns="45720" tIns="27432" rIns="45720" bIns="27432" anchor="t">
             <a:spAutoFit/>
           </a:bodyPr>
           <a:lstStyle/>
@@ -9389,558 +10975,620 @@
           </a:p>
         </p:txBody>
       </p:sp>
-      <p:sp>
-        <p:nvSpPr>
-          <p:cNvPr id="6" name="Rounded Rectangle 5"/>
-          <p:cNvSpPr/>
-          <p:nvPr/>
-        </p:nvSpPr>
-        <p:spPr>
-          <a:xfrm>
-            <a:off x="548640" y="1737360"/>
-            <a:ext cx="3520440" cy="3520440"/>
-          </a:xfrm>
-          <a:prstGeom prst="roundRect">
-            <a:avLst>
-              <a:gd name="adj" fmla="val 8000"/>
-            </a:avLst>
-          </a:prstGeom>
-          <a:solidFill>
-            <a:srgbClr val="EAF2FF"/>
-          </a:solidFill>
-          <a:ln>
-            <a:noFill/>
-          </a:ln>
-          <a:effectLst/>
-        </p:spPr>
-        <p:style>
-          <a:lnRef idx="1">
-            <a:schemeClr val="accent1"/>
-          </a:lnRef>
-          <a:fillRef idx="3">
-            <a:schemeClr val="accent1"/>
-          </a:fillRef>
-          <a:effectRef idx="2">
-            <a:schemeClr val="accent1"/>
-          </a:effectRef>
-          <a:fontRef idx="minor">
-            <a:schemeClr val="lt1"/>
-          </a:fontRef>
-        </p:style>
-        <p:txBody>
-          <a:bodyPr rtlCol="0" anchor="ctr"/>
-          <a:lstStyle/>
-          <a:p>
-            <a:pPr algn="ctr"/>
-          </a:p>
-        </p:txBody>
-      </p:sp>
-      <p:sp>
-        <p:nvSpPr>
-          <p:cNvPr id="7" name="TextBox 6"/>
-          <p:cNvSpPr txBox="1"/>
-          <p:nvPr/>
-        </p:nvSpPr>
-        <p:spPr>
-          <a:xfrm>
-            <a:off x="777240" y="1901952"/>
-            <a:ext cx="3063240" cy="502920"/>
-          </a:xfrm>
-          <a:prstGeom prst="rect">
-            <a:avLst/>
-          </a:prstGeom>
-          <a:noFill/>
-        </p:spPr>
-        <p:txBody>
-          <a:bodyPr wrap="square" anchor="t" lIns="45720" rIns="45720" tIns="27432" bIns="27432">
-            <a:spAutoFit/>
-          </a:bodyPr>
-          <a:lstStyle/>
-          <a:p>
-            <a:pPr algn="l">
-              <a:lnSpc>
-                <a:spcPct val="110000"/>
-              </a:lnSpc>
-            </a:pPr>
-            <a:r>
-              <a:rPr sz="2200" b="1" i="0">
-                <a:solidFill>
-                  <a:srgbClr val="144FB0"/>
-                </a:solidFill>
-                <a:latin typeface="Helvetica"/>
-              </a:rPr>
-              <a:t>Vấn đề</a:t>
-            </a:r>
-          </a:p>
-        </p:txBody>
-      </p:sp>
-      <p:sp>
-        <p:nvSpPr>
-          <p:cNvPr id="8" name="TextBox 7"/>
-          <p:cNvSpPr txBox="1"/>
-          <p:nvPr/>
-        </p:nvSpPr>
-        <p:spPr>
-          <a:xfrm>
-            <a:off x="777240" y="2468880"/>
-            <a:ext cx="3063240" cy="2331720"/>
-          </a:xfrm>
-          <a:prstGeom prst="rect">
-            <a:avLst/>
-          </a:prstGeom>
-          <a:noFill/>
-        </p:spPr>
-        <p:txBody>
-          <a:bodyPr wrap="square">
-            <a:spAutoFit/>
-          </a:bodyPr>
-          <a:lstStyle/>
-          <a:p>
-            <a:pPr marL="292608" indent="-292608">
-              <a:lnSpc>
-                <a:spcPct val="108000"/>
-              </a:lnSpc>
-              <a:spcAft>
-                <a:spcPts val="600"/>
-              </a:spcAft>
-              <a:buClr>
-                <a:srgbClr val="1E6FE8"/>
-              </a:buClr>
-              <a:buFont typeface="Helvetica"/>
-              <a:buChar char="•"/>
-            </a:pPr>
-            <a:r>
-              <a:rPr sz="2000" b="0" i="0">
-                <a:solidFill>
-                  <a:srgbClr val="0F1C3F"/>
-                </a:solidFill>
-                <a:latin typeface="Helvetica"/>
-              </a:rPr>
-              <a:t>Bộ ba ảnh – câu – ảnh đích phải gán nhãn tay: đắt và ít</a:t>
-            </a:r>
-          </a:p>
-          <a:p>
-            <a:pPr marL="292608" indent="-292608">
-              <a:lnSpc>
-                <a:spcPct val="108000"/>
-              </a:lnSpc>
-              <a:spcAft>
-                <a:spcPts val="600"/>
-              </a:spcAft>
-              <a:buClr>
-                <a:srgbClr val="1E6FE8"/>
-              </a:buClr>
-              <a:buFont typeface="Helvetica"/>
-              <a:buChar char="•"/>
-            </a:pPr>
-            <a:r>
-              <a:rPr sz="2000" b="0" i="0">
-                <a:solidFill>
-                  <a:srgbClr val="0F1C3F"/>
-                </a:solidFill>
-                <a:latin typeface="Helvetica"/>
-              </a:rPr>
-              <a:t>Pic2Word, SEARLE cần ảnh khi huấn luyện, chỉ học câu mẫu cố định</a:t>
-            </a:r>
-          </a:p>
-        </p:txBody>
-      </p:sp>
-      <p:sp>
-        <p:nvSpPr>
-          <p:cNvPr id="9" name="Rounded Rectangle 8"/>
-          <p:cNvSpPr/>
-          <p:nvPr/>
-        </p:nvSpPr>
-        <p:spPr>
-          <a:xfrm>
-            <a:off x="4343400" y="1737360"/>
-            <a:ext cx="3520440" cy="3520440"/>
-          </a:xfrm>
-          <a:prstGeom prst="roundRect">
-            <a:avLst>
-              <a:gd name="adj" fmla="val 8000"/>
-            </a:avLst>
-          </a:prstGeom>
-          <a:solidFill>
-            <a:srgbClr val="EAF2FF"/>
-          </a:solidFill>
-          <a:ln>
-            <a:noFill/>
-          </a:ln>
-          <a:effectLst/>
-        </p:spPr>
-        <p:style>
-          <a:lnRef idx="1">
-            <a:schemeClr val="accent1"/>
-          </a:lnRef>
-          <a:fillRef idx="3">
-            <a:schemeClr val="accent1"/>
-          </a:fillRef>
-          <a:effectRef idx="2">
-            <a:schemeClr val="accent1"/>
-          </a:effectRef>
-          <a:fontRef idx="minor">
-            <a:schemeClr val="lt1"/>
-          </a:fontRef>
-        </p:style>
-        <p:txBody>
-          <a:bodyPr rtlCol="0" anchor="ctr"/>
-          <a:lstStyle/>
-          <a:p>
-            <a:pPr algn="ctr"/>
-          </a:p>
-        </p:txBody>
-      </p:sp>
-      <p:sp>
-        <p:nvSpPr>
-          <p:cNvPr id="10" name="TextBox 9"/>
-          <p:cNvSpPr txBox="1"/>
-          <p:nvPr/>
-        </p:nvSpPr>
-        <p:spPr>
-          <a:xfrm>
-            <a:off x="4572000" y="1901952"/>
-            <a:ext cx="3063240" cy="502920"/>
-          </a:xfrm>
-          <a:prstGeom prst="rect">
-            <a:avLst/>
-          </a:prstGeom>
-          <a:noFill/>
-        </p:spPr>
-        <p:txBody>
-          <a:bodyPr wrap="square" anchor="t" lIns="45720" rIns="45720" tIns="27432" bIns="27432">
-            <a:spAutoFit/>
-          </a:bodyPr>
-          <a:lstStyle/>
-          <a:p>
-            <a:pPr algn="l">
-              <a:lnSpc>
-                <a:spcPct val="110000"/>
-              </a:lnSpc>
-            </a:pPr>
-            <a:r>
-              <a:rPr sz="2200" b="1" i="0">
-                <a:solidFill>
-                  <a:srgbClr val="144FB0"/>
-                </a:solidFill>
-                <a:latin typeface="Helvetica"/>
-              </a:rPr>
-              <a:t>Ý tưởng LinCIR</a:t>
-            </a:r>
-          </a:p>
-        </p:txBody>
-      </p:sp>
-      <p:sp>
-        <p:nvSpPr>
-          <p:cNvPr id="11" name="TextBox 10"/>
-          <p:cNvSpPr txBox="1"/>
-          <p:nvPr/>
-        </p:nvSpPr>
-        <p:spPr>
-          <a:xfrm>
-            <a:off x="4572000" y="2468880"/>
-            <a:ext cx="3063240" cy="2331720"/>
-          </a:xfrm>
-          <a:prstGeom prst="rect">
-            <a:avLst/>
-          </a:prstGeom>
-          <a:noFill/>
-        </p:spPr>
-        <p:txBody>
-          <a:bodyPr wrap="square">
-            <a:spAutoFit/>
-          </a:bodyPr>
-          <a:lstStyle/>
-          <a:p>
-            <a:pPr marL="292608" indent="-292608">
-              <a:lnSpc>
-                <a:spcPct val="108000"/>
-              </a:lnSpc>
-              <a:spcAft>
-                <a:spcPts val="600"/>
-              </a:spcAft>
-              <a:buClr>
-                <a:srgbClr val="1E6FE8"/>
-              </a:buClr>
-              <a:buFont typeface="Helvetica"/>
-              <a:buChar char="•"/>
-            </a:pPr>
-            <a:r>
-              <a:rPr sz="2000" b="0" i="0">
-                <a:solidFill>
-                  <a:srgbClr val="0F1C3F"/>
-                </a:solidFill>
-                <a:latin typeface="Helvetica"/>
-              </a:rPr>
-              <a:t>Self-Masking Projection: học φ chỉ từ văn bản, không cần ảnh</a:t>
-            </a:r>
-          </a:p>
-          <a:p>
-            <a:pPr marL="292608" indent="-292608">
-              <a:lnSpc>
-                <a:spcPct val="108000"/>
-              </a:lnSpc>
-              <a:spcAft>
-                <a:spcPts val="600"/>
-              </a:spcAft>
-              <a:buClr>
-                <a:srgbClr val="1E6FE8"/>
-              </a:buClr>
-              <a:buFont typeface="Helvetica"/>
-              <a:buChar char="•"/>
-            </a:pPr>
-            <a:r>
-              <a:rPr sz="2000" b="0" i="0">
-                <a:solidFill>
-                  <a:srgbClr val="0F1C3F"/>
-                </a:solidFill>
-                <a:latin typeface="Helvetica"/>
-              </a:rPr>
-              <a:t>Thêm nhiễu khi huấn luyện để φ dùng được cho vector ảnh</a:t>
-            </a:r>
-          </a:p>
-        </p:txBody>
-      </p:sp>
-      <p:sp>
-        <p:nvSpPr>
-          <p:cNvPr id="12" name="Rounded Rectangle 11"/>
-          <p:cNvSpPr/>
-          <p:nvPr/>
-        </p:nvSpPr>
-        <p:spPr>
-          <a:xfrm>
-            <a:off x="8138160" y="1737360"/>
-            <a:ext cx="3520440" cy="3520440"/>
-          </a:xfrm>
-          <a:prstGeom prst="roundRect">
-            <a:avLst>
-              <a:gd name="adj" fmla="val 8000"/>
-            </a:avLst>
-          </a:prstGeom>
-          <a:solidFill>
-            <a:srgbClr val="EAF2FF"/>
-          </a:solidFill>
-          <a:ln>
-            <a:noFill/>
-          </a:ln>
-          <a:effectLst/>
-        </p:spPr>
-        <p:style>
-          <a:lnRef idx="1">
-            <a:schemeClr val="accent1"/>
-          </a:lnRef>
-          <a:fillRef idx="3">
-            <a:schemeClr val="accent1"/>
-          </a:fillRef>
-          <a:effectRef idx="2">
-            <a:schemeClr val="accent1"/>
-          </a:effectRef>
-          <a:fontRef idx="minor">
-            <a:schemeClr val="lt1"/>
-          </a:fontRef>
-        </p:style>
-        <p:txBody>
-          <a:bodyPr rtlCol="0" anchor="ctr"/>
-          <a:lstStyle/>
-          <a:p>
-            <a:pPr algn="ctr"/>
-          </a:p>
-        </p:txBody>
-      </p:sp>
-      <p:sp>
-        <p:nvSpPr>
-          <p:cNvPr id="13" name="TextBox 12"/>
-          <p:cNvSpPr txBox="1"/>
-          <p:nvPr/>
-        </p:nvSpPr>
-        <p:spPr>
-          <a:xfrm>
-            <a:off x="8366760" y="1901952"/>
-            <a:ext cx="3063240" cy="502920"/>
-          </a:xfrm>
-          <a:prstGeom prst="rect">
-            <a:avLst/>
-          </a:prstGeom>
-          <a:noFill/>
-        </p:spPr>
-        <p:txBody>
-          <a:bodyPr wrap="square" anchor="t" lIns="45720" rIns="45720" tIns="27432" bIns="27432">
-            <a:spAutoFit/>
-          </a:bodyPr>
-          <a:lstStyle/>
-          <a:p>
-            <a:pPr algn="l">
-              <a:lnSpc>
-                <a:spcPct val="110000"/>
-              </a:lnSpc>
-            </a:pPr>
-            <a:r>
-              <a:rPr sz="2200" b="1" i="0">
-                <a:solidFill>
-                  <a:srgbClr val="144FB0"/>
-                </a:solidFill>
-                <a:latin typeface="Helvetica"/>
-              </a:rPr>
-              <a:t>Kết quả bài báo</a:t>
-            </a:r>
-          </a:p>
-        </p:txBody>
-      </p:sp>
-      <p:sp>
-        <p:nvSpPr>
-          <p:cNvPr id="14" name="TextBox 13"/>
-          <p:cNvSpPr txBox="1"/>
-          <p:nvPr/>
-        </p:nvSpPr>
-        <p:spPr>
-          <a:xfrm>
-            <a:off x="8366760" y="2468880"/>
-            <a:ext cx="3063240" cy="2331720"/>
-          </a:xfrm>
-          <a:prstGeom prst="rect">
-            <a:avLst/>
-          </a:prstGeom>
-          <a:noFill/>
-        </p:spPr>
-        <p:txBody>
-          <a:bodyPr wrap="square">
-            <a:spAutoFit/>
-          </a:bodyPr>
-          <a:lstStyle/>
-          <a:p>
-            <a:pPr marL="292608" indent="-292608">
-              <a:lnSpc>
-                <a:spcPct val="108000"/>
-              </a:lnSpc>
-              <a:spcAft>
-                <a:spcPts val="600"/>
-              </a:spcAft>
-              <a:buClr>
-                <a:srgbClr val="1E6FE8"/>
-              </a:buClr>
-              <a:buFont typeface="Helvetica"/>
-              <a:buChar char="•"/>
-            </a:pPr>
-            <a:r>
-              <a:rPr sz="2000" b="0" i="0">
-                <a:solidFill>
-                  <a:srgbClr val="0F1C3F"/>
-                </a:solidFill>
-                <a:latin typeface="Helvetica"/>
-              </a:rPr>
-              <a:t>Tốt nhất trên 4 bộ đánh giá</a:t>
-            </a:r>
-          </a:p>
-          <a:p>
-            <a:pPr marL="292608" indent="-292608">
-              <a:lnSpc>
-                <a:spcPct val="108000"/>
-              </a:lnSpc>
-              <a:spcAft>
-                <a:spcPts val="600"/>
-              </a:spcAft>
-              <a:buClr>
-                <a:srgbClr val="1E6FE8"/>
-              </a:buClr>
-              <a:buFont typeface="Helvetica"/>
-              <a:buChar char="•"/>
-            </a:pPr>
-            <a:r>
-              <a:rPr sz="2000" b="0" i="0">
-                <a:solidFill>
-                  <a:srgbClr val="0F1C3F"/>
-                </a:solidFill>
-                <a:latin typeface="Helvetica"/>
-              </a:rPr>
-              <a:t>Huấn luyện nhanh hơn Pic2Word 6 lần, SEARLE 8,4 lần</a:t>
-            </a:r>
-          </a:p>
-          <a:p>
-            <a:pPr marL="292608" indent="-292608">
-              <a:lnSpc>
-                <a:spcPct val="108000"/>
-              </a:lnSpc>
-              <a:spcAft>
-                <a:spcPts val="600"/>
-              </a:spcAft>
-              <a:buClr>
-                <a:srgbClr val="1E6FE8"/>
-              </a:buClr>
-              <a:buFont typeface="Helvetica"/>
-              <a:buChar char="•"/>
-            </a:pPr>
-            <a:r>
-              <a:rPr sz="2000" b="0" i="0">
-                <a:solidFill>
-                  <a:srgbClr val="0F1C3F"/>
-                </a:solidFill>
-                <a:latin typeface="Helvetica"/>
-              </a:rPr>
-              <a:t>Vượt cả phương pháp có giám sát (FashionIQ)</a:t>
-            </a:r>
-          </a:p>
-        </p:txBody>
-      </p:sp>
-      <p:sp>
-        <p:nvSpPr>
-          <p:cNvPr id="15" name="TextBox 14"/>
-          <p:cNvSpPr txBox="1"/>
-          <p:nvPr/>
-        </p:nvSpPr>
-        <p:spPr>
-          <a:xfrm>
-            <a:off x="548640" y="5394960"/>
-            <a:ext cx="11064240" cy="914400"/>
-          </a:xfrm>
-          <a:prstGeom prst="rect">
-            <a:avLst/>
-          </a:prstGeom>
-          <a:noFill/>
-        </p:spPr>
-        <p:txBody>
-          <a:bodyPr wrap="square" anchor="t" lIns="45720" rIns="45720" tIns="27432" bIns="27432">
-            <a:spAutoFit/>
-          </a:bodyPr>
-          <a:lstStyle/>
-          <a:p>
-            <a:pPr algn="l">
-              <a:lnSpc>
-                <a:spcPct val="110000"/>
-              </a:lnSpc>
-            </a:pPr>
-            <a:r>
-              <a:rPr sz="2000" b="0" i="0">
-                <a:solidFill>
-                  <a:srgbClr val="5B6B82"/>
-                </a:solidFill>
-                <a:latin typeface="Helvetica"/>
-              </a:rPr>
-              <a:t>Gu et al. (NAVER), CVPR 2024, mã nguồn công khai. </a:t>
-            </a:r>
-            <a:r>
-              <a:rPr sz="2000" b="1" i="0">
-                <a:solidFill>
-                  <a:srgbClr val="144FB0"/>
-                </a:solidFill>
-                <a:latin typeface="Helvetica"/>
-              </a:rPr>
-              <a:t>Nhóm dựng lại mã, tái hiện kết quả, chạy baseline, A, B, A+B trên Kaggle, kiểm định và phân tích nguyên nhân</a:t>
-            </a:r>
-          </a:p>
-        </p:txBody>
-      </p:sp>
+      <p:graphicFrame>
+        <p:nvGraphicFramePr>
+          <p:cNvPr id="6" name="Table 5"/>
+          <p:cNvGraphicFramePr>
+            <a:graphicFrameLocks noGrp="1"/>
+          </p:cNvGraphicFramePr>
+          <p:nvPr>
+            <p:extLst>
+              <p:ext uri="{D42A27DB-BD31-4B8C-83A1-F6EECF244321}">
+                <p14:modId xmlns:p14="http://schemas.microsoft.com/office/powerpoint/2010/main" val="535376325"/>
+              </p:ext>
+            </p:extLst>
+          </p:nvPr>
+        </p:nvGraphicFramePr>
+        <p:xfrm>
+          <a:off x="641131" y="1554480"/>
+          <a:ext cx="10836166" cy="3419856"/>
+        </p:xfrm>
+        <a:graphic>
+          <a:graphicData uri="http://schemas.openxmlformats.org/drawingml/2006/table">
+            <a:tbl>
+              <a:tblPr firstRow="1" bandRow="1">
+                <a:tableStyleId>{5C22544A-7EE6-4342-B048-85BDC9FD1C3A}</a:tableStyleId>
+              </a:tblPr>
+              <a:tblGrid>
+                <a:gridCol w="3974946">
+                  <a:extLst>
+                    <a:ext uri="{9D8B030D-6E8A-4147-A177-3AD203B41FA5}">
+                      <a16:colId xmlns:a16="http://schemas.microsoft.com/office/drawing/2014/main" val="20000"/>
+                    </a:ext>
+                  </a:extLst>
+                </a:gridCol>
+                <a:gridCol w="6861220">
+                  <a:extLst>
+                    <a:ext uri="{9D8B030D-6E8A-4147-A177-3AD203B41FA5}">
+                      <a16:colId xmlns:a16="http://schemas.microsoft.com/office/drawing/2014/main" val="20001"/>
+                    </a:ext>
+                  </a:extLst>
+                </a:gridCol>
+              </a:tblGrid>
+              <a:tr h="457200">
+                <a:tc>
+                  <a:txBody>
+                    <a:bodyPr/>
+                    <a:lstStyle/>
+                    <a:p>
+                      <a:pPr algn="l"/>
+                      <a:r>
+                        <a:rPr sz="2000" b="1" i="0">
+                          <a:solidFill>
+                            <a:srgbClr val="FFFFFF"/>
+                          </a:solidFill>
+                          <a:latin typeface="Helvetica"/>
+                        </a:rPr>
+                        <a:t>Thành viên</a:t>
+                      </a:r>
+                    </a:p>
+                  </a:txBody>
+                  <a:tcPr marL="73152" marR="73152" marT="36576" marB="36576" anchor="ctr">
+                    <a:solidFill>
+                      <a:srgbClr val="1E6FE8"/>
+                    </a:solidFill>
+                  </a:tcPr>
+                </a:tc>
+                <a:tc>
+                  <a:txBody>
+                    <a:bodyPr/>
+                    <a:lstStyle/>
+                    <a:p>
+                      <a:pPr algn="l"/>
+                      <a:r>
+                        <a:rPr sz="2000" b="1" i="0" dirty="0">
+                          <a:solidFill>
+                            <a:srgbClr val="FFFFFF"/>
+                          </a:solidFill>
+                          <a:latin typeface="Helvetica"/>
+                        </a:rPr>
+                        <a:t>Công </a:t>
+                      </a:r>
+                      <a:r>
+                        <a:rPr sz="2000" b="1" i="0" dirty="0" err="1">
+                          <a:solidFill>
+                            <a:srgbClr val="FFFFFF"/>
+                          </a:solidFill>
+                          <a:latin typeface="Helvetica"/>
+                        </a:rPr>
+                        <a:t>việc</a:t>
+                      </a:r>
+                      <a:r>
+                        <a:rPr sz="2000" b="1" i="0" dirty="0">
+                          <a:solidFill>
+                            <a:srgbClr val="FFFFFF"/>
+                          </a:solidFill>
+                          <a:latin typeface="Helvetica"/>
+                        </a:rPr>
+                        <a:t> </a:t>
+                      </a:r>
+                      <a:r>
+                        <a:rPr sz="2000" b="1" i="0" dirty="0" err="1">
+                          <a:solidFill>
+                            <a:srgbClr val="FFFFFF"/>
+                          </a:solidFill>
+                          <a:latin typeface="Helvetica"/>
+                        </a:rPr>
+                        <a:t>chính</a:t>
+                      </a:r>
+                      <a:endParaRPr sz="2000" b="1" i="0" dirty="0">
+                        <a:solidFill>
+                          <a:srgbClr val="FFFFFF"/>
+                        </a:solidFill>
+                        <a:latin typeface="Helvetica"/>
+                      </a:endParaRPr>
+                    </a:p>
+                  </a:txBody>
+                  <a:tcPr marL="73152" marR="73152" marT="36576" marB="36576" anchor="ctr">
+                    <a:solidFill>
+                      <a:srgbClr val="1E6FE8"/>
+                    </a:solidFill>
+                  </a:tcPr>
+                </a:tc>
+                <a:extLst>
+                  <a:ext uri="{0D108BD9-81ED-4DB2-BD59-A6C34878D82A}">
+                    <a16:rowId xmlns:a16="http://schemas.microsoft.com/office/drawing/2014/main" val="10000"/>
+                  </a:ext>
+                </a:extLst>
+              </a:tr>
+              <a:tr h="457200">
+                <a:tc>
+                  <a:txBody>
+                    <a:bodyPr/>
+                    <a:lstStyle/>
+                    <a:p>
+                      <a:pPr algn="l"/>
+                      <a:r>
+                        <a:rPr sz="2000" b="0" i="0" dirty="0">
+                          <a:solidFill>
+                            <a:srgbClr val="0F1C3F"/>
+                          </a:solidFill>
+                          <a:latin typeface="Helvetica"/>
+                        </a:rPr>
+                        <a:t>Đào Văn Tâm (</a:t>
+                      </a:r>
+                      <a:r>
+                        <a:rPr sz="2000" b="0" i="0" dirty="0" err="1">
+                          <a:solidFill>
+                            <a:srgbClr val="0F1C3F"/>
+                          </a:solidFill>
+                          <a:latin typeface="Helvetica"/>
+                        </a:rPr>
+                        <a:t>trưởng</a:t>
+                      </a:r>
+                      <a:r>
+                        <a:rPr sz="2000" b="0" i="0" dirty="0">
+                          <a:solidFill>
+                            <a:srgbClr val="0F1C3F"/>
+                          </a:solidFill>
+                          <a:latin typeface="Helvetica"/>
+                        </a:rPr>
+                        <a:t> </a:t>
+                      </a:r>
+                      <a:r>
+                        <a:rPr sz="2000" b="0" i="0" dirty="0" err="1">
+                          <a:solidFill>
+                            <a:srgbClr val="0F1C3F"/>
+                          </a:solidFill>
+                          <a:latin typeface="Helvetica"/>
+                        </a:rPr>
+                        <a:t>nhóm</a:t>
+                      </a:r>
+                      <a:r>
+                        <a:rPr sz="2000" b="0" i="0" dirty="0">
+                          <a:solidFill>
+                            <a:srgbClr val="0F1C3F"/>
+                          </a:solidFill>
+                          <a:latin typeface="Helvetica"/>
+                        </a:rPr>
+                        <a:t>)</a:t>
+                      </a:r>
+                    </a:p>
+                  </a:txBody>
+                  <a:tcPr marL="73152" marR="73152" marT="36576" marB="36576" anchor="ctr">
+                    <a:solidFill>
+                      <a:srgbClr val="FFFFFF"/>
+                    </a:solidFill>
+                  </a:tcPr>
+                </a:tc>
+                <a:tc>
+                  <a:txBody>
+                    <a:bodyPr/>
+                    <a:lstStyle/>
+                    <a:p>
+                      <a:pPr algn="l"/>
+                      <a:r>
+                        <a:rPr sz="2000" b="0" i="0">
+                          <a:solidFill>
+                            <a:srgbClr val="0F1C3F"/>
+                          </a:solidFill>
+                          <a:latin typeface="Helvetica"/>
+                        </a:rPr>
+                        <a:t>Chuyển đổi mã nguồn, kiểm chứng tương đương; chạy thực nghiệm trên Kaggle; trình bày</a:t>
+                      </a:r>
+                    </a:p>
+                  </a:txBody>
+                  <a:tcPr marL="73152" marR="73152" marT="36576" marB="36576" anchor="ctr">
+                    <a:solidFill>
+                      <a:srgbClr val="FFFFFF"/>
+                    </a:solidFill>
+                  </a:tcPr>
+                </a:tc>
+                <a:extLst>
+                  <a:ext uri="{0D108BD9-81ED-4DB2-BD59-A6C34878D82A}">
+                    <a16:rowId xmlns:a16="http://schemas.microsoft.com/office/drawing/2014/main" val="10001"/>
+                  </a:ext>
+                </a:extLst>
+              </a:tr>
+              <a:tr h="457200">
+                <a:tc>
+                  <a:txBody>
+                    <a:bodyPr/>
+                    <a:lstStyle/>
+                    <a:p>
+                      <a:pPr algn="l"/>
+                      <a:r>
+                        <a:rPr sz="2000" b="0" i="0">
+                          <a:solidFill>
+                            <a:srgbClr val="0F1C3F"/>
+                          </a:solidFill>
+                          <a:latin typeface="Helvetica"/>
+                        </a:rPr>
+                        <a:t>Lâm Thành Trung</a:t>
+                      </a:r>
+                    </a:p>
+                  </a:txBody>
+                  <a:tcPr marL="73152" marR="73152" marT="36576" marB="36576" anchor="ctr">
+                    <a:solidFill>
+                      <a:srgbClr val="FFFFFF"/>
+                    </a:solidFill>
+                  </a:tcPr>
+                </a:tc>
+                <a:tc>
+                  <a:txBody>
+                    <a:bodyPr/>
+                    <a:lstStyle/>
+                    <a:p>
+                      <a:pPr algn="l"/>
+                      <a:r>
+                        <a:rPr sz="2000" b="0" i="0">
+                          <a:solidFill>
+                            <a:srgbClr val="0F1C3F"/>
+                          </a:solidFill>
+                          <a:latin typeface="Helvetica"/>
+                        </a:rPr>
+                        <a:t>Cải tiến A (InfoNCE); phân tích đường học</a:t>
+                      </a:r>
+                    </a:p>
+                  </a:txBody>
+                  <a:tcPr marL="73152" marR="73152" marT="36576" marB="36576" anchor="ctr">
+                    <a:solidFill>
+                      <a:srgbClr val="FFFFFF"/>
+                    </a:solidFill>
+                  </a:tcPr>
+                </a:tc>
+                <a:extLst>
+                  <a:ext uri="{0D108BD9-81ED-4DB2-BD59-A6C34878D82A}">
+                    <a16:rowId xmlns:a16="http://schemas.microsoft.com/office/drawing/2014/main" val="10002"/>
+                  </a:ext>
+                </a:extLst>
+              </a:tr>
+              <a:tr h="457200">
+                <a:tc>
+                  <a:txBody>
+                    <a:bodyPr/>
+                    <a:lstStyle/>
+                    <a:p>
+                      <a:pPr algn="l"/>
+                      <a:r>
+                        <a:rPr sz="2000" b="0" i="0">
+                          <a:solidFill>
+                            <a:srgbClr val="0F1C3F"/>
+                          </a:solidFill>
+                          <a:latin typeface="Helvetica"/>
+                        </a:rPr>
+                        <a:t>Nguyễn Xuân Tùng</a:t>
+                      </a:r>
+                    </a:p>
+                  </a:txBody>
+                  <a:tcPr marL="73152" marR="73152" marT="36576" marB="36576" anchor="ctr">
+                    <a:solidFill>
+                      <a:srgbClr val="FFFFFF"/>
+                    </a:solidFill>
+                  </a:tcPr>
+                </a:tc>
+                <a:tc>
+                  <a:txBody>
+                    <a:bodyPr/>
+                    <a:lstStyle/>
+                    <a:p>
+                      <a:pPr algn="l"/>
+                      <a:r>
+                        <a:rPr sz="2000" b="0" i="0">
+                          <a:solidFill>
+                            <a:srgbClr val="0F1C3F"/>
+                          </a:solidFill>
+                          <a:latin typeface="Helvetica"/>
+                        </a:rPr>
+                        <a:t>Tái hiện checkpoint chính thức; khác biệt bài báo – mã nguồn</a:t>
+                      </a:r>
+                    </a:p>
+                  </a:txBody>
+                  <a:tcPr marL="73152" marR="73152" marT="36576" marB="36576" anchor="ctr">
+                    <a:solidFill>
+                      <a:srgbClr val="FFFFFF"/>
+                    </a:solidFill>
+                  </a:tcPr>
+                </a:tc>
+                <a:extLst>
+                  <a:ext uri="{0D108BD9-81ED-4DB2-BD59-A6C34878D82A}">
+                    <a16:rowId xmlns:a16="http://schemas.microsoft.com/office/drawing/2014/main" val="10003"/>
+                  </a:ext>
+                </a:extLst>
+              </a:tr>
+              <a:tr h="457200">
+                <a:tc>
+                  <a:txBody>
+                    <a:bodyPr/>
+                    <a:lstStyle/>
+                    <a:p>
+                      <a:pPr algn="l"/>
+                      <a:r>
+                        <a:rPr sz="2000" b="0" i="0">
+                          <a:solidFill>
+                            <a:srgbClr val="0F1C3F"/>
+                          </a:solidFill>
+                          <a:latin typeface="Helvetica"/>
+                        </a:rPr>
+                        <a:t>Trần Quang Đức Dũng</a:t>
+                      </a:r>
+                    </a:p>
+                  </a:txBody>
+                  <a:tcPr marL="73152" marR="73152" marT="36576" marB="36576" anchor="ctr">
+                    <a:solidFill>
+                      <a:srgbClr val="FFFFFF"/>
+                    </a:solidFill>
+                  </a:tcPr>
+                </a:tc>
+                <a:tc>
+                  <a:txBody>
+                    <a:bodyPr/>
+                    <a:lstStyle/>
+                    <a:p>
+                      <a:pPr algn="l"/>
+                      <a:r>
+                        <a:rPr sz="2000" b="0" i="0">
+                          <a:solidFill>
+                            <a:srgbClr val="0F1C3F"/>
+                          </a:solidFill>
+                          <a:latin typeface="Helvetica"/>
+                        </a:rPr>
+                        <a:t>Giao thức đánh giá, kiểm định thống kê; cải tiến B; modality gap</a:t>
+                      </a:r>
+                    </a:p>
+                  </a:txBody>
+                  <a:tcPr marL="73152" marR="73152" marT="36576" marB="36576" anchor="ctr">
+                    <a:solidFill>
+                      <a:srgbClr val="FFFFFF"/>
+                    </a:solidFill>
+                  </a:tcPr>
+                </a:tc>
+                <a:extLst>
+                  <a:ext uri="{0D108BD9-81ED-4DB2-BD59-A6C34878D82A}">
+                    <a16:rowId xmlns:a16="http://schemas.microsoft.com/office/drawing/2014/main" val="10004"/>
+                  </a:ext>
+                </a:extLst>
+              </a:tr>
+              <a:tr h="457200">
+                <a:tc>
+                  <a:txBody>
+                    <a:bodyPr/>
+                    <a:lstStyle/>
+                    <a:p>
+                      <a:pPr algn="l"/>
+                      <a:r>
+                        <a:rPr sz="2000" b="0" i="0">
+                          <a:solidFill>
+                            <a:srgbClr val="0F1C3F"/>
+                          </a:solidFill>
+                          <a:latin typeface="Helvetica"/>
+                        </a:rPr>
+                        <a:t>Mekdala Nounou</a:t>
+                      </a:r>
+                    </a:p>
+                  </a:txBody>
+                  <a:tcPr marL="73152" marR="73152" marT="36576" marB="36576" anchor="ctr">
+                    <a:solidFill>
+                      <a:srgbClr val="FFFFFF"/>
+                    </a:solidFill>
+                  </a:tcPr>
+                </a:tc>
+                <a:tc>
+                  <a:txBody>
+                    <a:bodyPr/>
+                    <a:lstStyle/>
+                    <a:p>
+                      <a:pPr algn="l"/>
+                      <a:r>
+                        <a:rPr sz="2000" b="0" i="0" dirty="0" err="1">
+                          <a:solidFill>
+                            <a:srgbClr val="0F1C3F"/>
+                          </a:solidFill>
+                          <a:latin typeface="Helvetica"/>
+                        </a:rPr>
+                        <a:t>Tổng</a:t>
+                      </a:r>
+                      <a:r>
+                        <a:rPr sz="2000" b="0" i="0" dirty="0">
+                          <a:solidFill>
+                            <a:srgbClr val="0F1C3F"/>
+                          </a:solidFill>
+                          <a:latin typeface="Helvetica"/>
+                        </a:rPr>
+                        <a:t> </a:t>
+                      </a:r>
+                      <a:r>
+                        <a:rPr sz="2000" b="0" i="0" dirty="0" err="1">
+                          <a:solidFill>
+                            <a:srgbClr val="0F1C3F"/>
+                          </a:solidFill>
+                          <a:latin typeface="Helvetica"/>
+                        </a:rPr>
+                        <a:t>quan</a:t>
+                      </a:r>
+                      <a:r>
+                        <a:rPr sz="2000" b="0" i="0" dirty="0">
+                          <a:solidFill>
+                            <a:srgbClr val="0F1C3F"/>
+                          </a:solidFill>
+                          <a:latin typeface="Helvetica"/>
+                        </a:rPr>
+                        <a:t> </a:t>
+                      </a:r>
+                      <a:r>
+                        <a:rPr sz="2000" b="0" i="0" dirty="0" err="1">
+                          <a:solidFill>
+                            <a:srgbClr val="0F1C3F"/>
+                          </a:solidFill>
+                          <a:latin typeface="Helvetica"/>
+                        </a:rPr>
+                        <a:t>lý</a:t>
+                      </a:r>
+                      <a:r>
+                        <a:rPr sz="2000" b="0" i="0" dirty="0">
+                          <a:solidFill>
+                            <a:srgbClr val="0F1C3F"/>
+                          </a:solidFill>
+                          <a:latin typeface="Helvetica"/>
+                        </a:rPr>
+                        <a:t> </a:t>
+                      </a:r>
+                      <a:r>
+                        <a:rPr sz="2000" b="0" i="0" dirty="0" err="1">
+                          <a:solidFill>
+                            <a:srgbClr val="0F1C3F"/>
+                          </a:solidFill>
+                          <a:latin typeface="Helvetica"/>
+                        </a:rPr>
+                        <a:t>thuyết</a:t>
+                      </a:r>
+                      <a:r>
+                        <a:rPr sz="2000" b="0" i="0" dirty="0">
+                          <a:solidFill>
+                            <a:srgbClr val="0F1C3F"/>
+                          </a:solidFill>
+                          <a:latin typeface="Helvetica"/>
+                        </a:rPr>
+                        <a:t>; </a:t>
+                      </a:r>
+                      <a:r>
+                        <a:rPr sz="2000" b="0" i="0" dirty="0" err="1">
+                          <a:solidFill>
+                            <a:srgbClr val="0F1C3F"/>
+                          </a:solidFill>
+                          <a:latin typeface="Helvetica"/>
+                        </a:rPr>
+                        <a:t>phân</a:t>
+                      </a:r>
+                      <a:r>
+                        <a:rPr sz="2000" b="0" i="0" dirty="0">
+                          <a:solidFill>
+                            <a:srgbClr val="0F1C3F"/>
+                          </a:solidFill>
+                          <a:latin typeface="Helvetica"/>
+                        </a:rPr>
+                        <a:t> </a:t>
+                      </a:r>
+                      <a:r>
+                        <a:rPr sz="2000" b="0" i="0" dirty="0" err="1">
+                          <a:solidFill>
+                            <a:srgbClr val="0F1C3F"/>
+                          </a:solidFill>
+                          <a:latin typeface="Helvetica"/>
+                        </a:rPr>
+                        <a:t>tích</a:t>
+                      </a:r>
+                      <a:r>
+                        <a:rPr sz="2000" b="0" i="0" dirty="0">
+                          <a:solidFill>
+                            <a:srgbClr val="0F1C3F"/>
+                          </a:solidFill>
+                          <a:latin typeface="Helvetica"/>
+                        </a:rPr>
+                        <a:t> </a:t>
+                      </a:r>
+                      <a:r>
+                        <a:rPr sz="2000" b="0" i="0" dirty="0" err="1">
+                          <a:solidFill>
+                            <a:srgbClr val="0F1C3F"/>
+                          </a:solidFill>
+                          <a:latin typeface="Helvetica"/>
+                        </a:rPr>
+                        <a:t>định</a:t>
+                      </a:r>
+                      <a:r>
+                        <a:rPr sz="2000" b="0" i="0" dirty="0">
+                          <a:solidFill>
+                            <a:srgbClr val="0F1C3F"/>
+                          </a:solidFill>
+                          <a:latin typeface="Helvetica"/>
+                        </a:rPr>
+                        <a:t> </a:t>
+                      </a:r>
+                      <a:r>
+                        <a:rPr sz="2000" b="0" i="0" dirty="0" err="1">
+                          <a:solidFill>
+                            <a:srgbClr val="0F1C3F"/>
+                          </a:solidFill>
+                          <a:latin typeface="Helvetica"/>
+                        </a:rPr>
+                        <a:t>tính</a:t>
+                      </a:r>
+                      <a:r>
+                        <a:rPr sz="2000" b="0" i="0" dirty="0">
+                          <a:solidFill>
+                            <a:srgbClr val="0F1C3F"/>
+                          </a:solidFill>
+                          <a:latin typeface="Helvetica"/>
+                        </a:rPr>
+                        <a:t>; </a:t>
+                      </a:r>
+                      <a:r>
+                        <a:rPr sz="2000" b="0" i="0" dirty="0" err="1">
+                          <a:solidFill>
+                            <a:srgbClr val="0F1C3F"/>
+                          </a:solidFill>
+                          <a:latin typeface="Helvetica"/>
+                        </a:rPr>
+                        <a:t>thiết</a:t>
+                      </a:r>
+                      <a:r>
+                        <a:rPr sz="2000" b="0" i="0" dirty="0">
+                          <a:solidFill>
+                            <a:srgbClr val="0F1C3F"/>
+                          </a:solidFill>
+                          <a:latin typeface="Helvetica"/>
+                        </a:rPr>
+                        <a:t> </a:t>
+                      </a:r>
+                      <a:r>
+                        <a:rPr sz="2000" b="0" i="0" dirty="0" err="1">
+                          <a:solidFill>
+                            <a:srgbClr val="0F1C3F"/>
+                          </a:solidFill>
+                          <a:latin typeface="Helvetica"/>
+                        </a:rPr>
+                        <a:t>kế</a:t>
+                      </a:r>
+                      <a:r>
+                        <a:rPr sz="2000" b="0" i="0" dirty="0">
+                          <a:solidFill>
+                            <a:srgbClr val="0F1C3F"/>
+                          </a:solidFill>
+                          <a:latin typeface="Helvetica"/>
+                        </a:rPr>
+                        <a:t> slides</a:t>
+                      </a:r>
+                    </a:p>
+                  </a:txBody>
+                  <a:tcPr marL="73152" marR="73152" marT="36576" marB="36576" anchor="ctr">
+                    <a:solidFill>
+                      <a:srgbClr val="FFFFFF"/>
+                    </a:solidFill>
+                  </a:tcPr>
+                </a:tc>
+                <a:extLst>
+                  <a:ext uri="{0D108BD9-81ED-4DB2-BD59-A6C34878D82A}">
+                    <a16:rowId xmlns:a16="http://schemas.microsoft.com/office/drawing/2014/main" val="10005"/>
+                  </a:ext>
+                </a:extLst>
+              </a:tr>
+            </a:tbl>
+          </a:graphicData>
+        </a:graphic>
+      </p:graphicFrame>
     </p:spTree>
   </p:cSld>
   <p:clrMapOvr>
     <a:masterClrMapping/>
   </p:clrMapOvr>
-  <mc:AlternateContent xmlns:mc="http://schemas.openxmlformats.org/markup-compatibility/2006">
-    <mc:Choice xmlns:p159="http://schemas.microsoft.com/office/powerpoint/2015/09/main" xmlns:p14="http://schemas.microsoft.com/office/powerpoint/2010/main" Requires="p159">
-      <p:transition spd="slow" p14:dur="1200">
+  <mc:AlternateContent xmlns:mc="http://schemas.openxmlformats.org/markup-compatibility/2006" xmlns:p159="http://schemas.microsoft.com/office/powerpoint/2015/09/main">
+    <mc:Choice Requires="p159">
+      <p:transition xmlns:p14="http://schemas.microsoft.com/office/powerpoint/2010/main" spd="slow" p14:dur="1200">
         <p159:morph option="byObject"/>
       </p:transition>
     </mc:Choice>
-    <mc:Fallback>
+    <mc:Fallback xmlns="">
       <p:transition spd="slow">
         <p:fade/>
       </p:transition>
@@ -10343,6 +11991,79 @@
                 <a:latin typeface="Helvetica"/>
               </a:rPr>
               <a:t>Trả về danh sách ảnh xếp hạng, đo bằng R@K và mAP@K</a:t>
+            </a:r>
+          </a:p>
+        </p:txBody>
+      </p:sp>
+      <p:sp>
+        <p:nvSpPr>
+          <p:cNvPr id="10" name="TextBox 9"/>
+          <p:cNvSpPr txBox="1"/>
+          <p:nvPr/>
+        </p:nvSpPr>
+        <p:spPr>
+          <a:xfrm>
+            <a:off x="548640" y="4526280"/>
+            <a:ext cx="7589520" cy="1600200"/>
+          </a:xfrm>
+          <a:prstGeom prst="rect">
+            <a:avLst/>
+          </a:prstGeom>
+          <a:noFill/>
+        </p:spPr>
+        <p:txBody>
+          <a:bodyPr wrap="square" lIns="45720" tIns="27432" rIns="45720" bIns="27432" anchor="t">
+            <a:spAutoFit/>
+          </a:bodyPr>
+          <a:lstStyle/>
+          <a:p>
+            <a:pPr algn="l">
+              <a:lnSpc>
+                <a:spcPct val="105000"/>
+              </a:lnSpc>
+            </a:pPr>
+            <a:r>
+              <a:rPr sz="2000" b="1" i="0">
+                <a:solidFill>
+                  <a:srgbClr val="144FB0"/>
+                </a:solidFill>
+                <a:latin typeface="Helvetica"/>
+              </a:rPr>
+              <a:t>Bài báo LinCIR </a:t>
+            </a:r>
+            <a:r>
+              <a:rPr sz="2000" b="0" i="0">
+                <a:solidFill>
+                  <a:srgbClr val="0F1C3F"/>
+                </a:solidFill>
+                <a:latin typeface="Helvetica"/>
+              </a:rPr>
+              <a:t>(CVPR 2024) giải bài toán này mà không cần bộ ba gán nhãn: chỉ huấn luyện bằng văn bản.</a:t>
+            </a:r>
+          </a:p>
+          <a:p>
+            <a:pPr algn="l">
+              <a:lnSpc>
+                <a:spcPct val="105000"/>
+              </a:lnSpc>
+            </a:pPr>
+            <a:r>
+              <a:rPr sz="2000" b="1" i="0">
+                <a:solidFill>
+                  <a:srgbClr val="144FB0"/>
+                </a:solidFill>
+                <a:latin typeface="Helvetica"/>
+              </a:rPr>
+              <a:t>Câu hỏi của nhóm: </a:t>
+            </a:r>
+            <a:r>
+              <a:rPr sz="2000" b="0" i="0">
+                <a:solidFill>
+                  <a:srgbClr val="0F1C3F"/>
+                </a:solidFill>
+                <a:latin typeface="Helvetica"/>
+              </a:rPr>
+              <a:t>sửa hàm mất mát (A) hoặc sửa nhiễu (B) có giúp LinCIR truy xuất tốt hơn không?</a:t>
             </a:r>
           </a:p>
         </p:txBody>
@@ -10400,8 +12121,8 @@
         </p:nvSpPr>
         <p:spPr>
           <a:xfrm>
-            <a:off x="9692640" y="-2194560"/>
-            <a:ext cx="4206240" cy="4206240"/>
+            <a:off x="9966960" y="4206240"/>
+            <a:ext cx="3657600" cy="3657600"/>
           </a:xfrm>
           <a:prstGeom prst="ellipse">
             <a:avLst/>
@@ -10445,7 +12166,7 @@
         </p:nvSpPr>
         <p:spPr>
           <a:xfrm>
-            <a:off x="11201400" y="502920"/>
+            <a:off x="11704320" y="3291840"/>
             <a:ext cx="411480" cy="411480"/>
           </a:xfrm>
           <a:prstGeom prst="ellipse">
@@ -10516,7 +12237,7 @@
                 </a:solidFill>
                 <a:latin typeface="Helvetica"/>
               </a:rPr>
-              <a:t>Ảnh được biến thành một “từ giả” [$] trong câu truy vấn</a:t>
+              <a:t>CIR là truy xuất có xếp hạng, đo bằng R@K và mAP@K</a:t>
             </a:r>
           </a:p>
         </p:txBody>
@@ -10560,30 +12281,540 @@
           </a:p>
         </p:txBody>
       </p:sp>
-      <p:pic>
-        <p:nvPicPr>
-          <p:cNvPr id="6" name="Picture 5" descr="lincir_infer_slide.png"/>
-          <p:cNvPicPr>
-            <a:picLocks noChangeAspect="1"/>
-          </p:cNvPicPr>
+      <p:sp>
+        <p:nvSpPr>
+          <p:cNvPr id="6" name="Rounded Rectangle 5"/>
+          <p:cNvSpPr/>
           <p:nvPr/>
-        </p:nvPicPr>
-        <p:blipFill>
-          <a:blip r:embed="rId3"/>
-          <a:stretch>
-            <a:fillRect/>
-          </a:stretch>
-        </p:blipFill>
-        <p:spPr>
-          <a:xfrm>
-            <a:off x="548640" y="1828800"/>
-            <a:ext cx="11064240" cy="3512236"/>
+        </p:nvSpPr>
+        <p:spPr>
+          <a:xfrm>
+            <a:off x="548640" y="1737360"/>
+            <a:ext cx="3566160" cy="3520440"/>
+          </a:xfrm>
+          <a:prstGeom prst="roundRect">
+            <a:avLst>
+              <a:gd name="adj" fmla="val 8000"/>
+            </a:avLst>
+          </a:prstGeom>
+          <a:solidFill>
+            <a:srgbClr val="EAF2FF"/>
+          </a:solidFill>
+          <a:ln>
+            <a:noFill/>
+          </a:ln>
+          <a:effectLst/>
+        </p:spPr>
+        <p:style>
+          <a:lnRef idx="1">
+            <a:schemeClr val="accent1"/>
+          </a:lnRef>
+          <a:fillRef idx="3">
+            <a:schemeClr val="accent1"/>
+          </a:fillRef>
+          <a:effectRef idx="2">
+            <a:schemeClr val="accent1"/>
+          </a:effectRef>
+          <a:fontRef idx="minor">
+            <a:schemeClr val="lt1"/>
+          </a:fontRef>
+        </p:style>
+        <p:txBody>
+          <a:bodyPr rtlCol="0" anchor="ctr"/>
+          <a:lstStyle/>
+          <a:p>
+            <a:pPr algn="ctr"/>
+            <a:endParaRPr/>
+          </a:p>
+        </p:txBody>
+      </p:sp>
+      <p:sp>
+        <p:nvSpPr>
+          <p:cNvPr id="7" name="TextBox 6"/>
+          <p:cNvSpPr txBox="1"/>
+          <p:nvPr/>
+        </p:nvSpPr>
+        <p:spPr>
+          <a:xfrm>
+            <a:off x="777240" y="1901952"/>
+            <a:ext cx="3108960" cy="502920"/>
           </a:xfrm>
           <a:prstGeom prst="rect">
             <a:avLst/>
           </a:prstGeom>
-        </p:spPr>
-      </p:pic>
+          <a:noFill/>
+        </p:spPr>
+        <p:txBody>
+          <a:bodyPr wrap="square" lIns="45720" tIns="27432" rIns="45720" bIns="27432" anchor="t">
+            <a:spAutoFit/>
+          </a:bodyPr>
+          <a:lstStyle/>
+          <a:p>
+            <a:pPr algn="l">
+              <a:lnSpc>
+                <a:spcPct val="110000"/>
+              </a:lnSpc>
+            </a:pPr>
+            <a:r>
+              <a:rPr sz="2200" b="1" i="0">
+                <a:solidFill>
+                  <a:srgbClr val="144FB0"/>
+                </a:solidFill>
+                <a:latin typeface="Helvetica"/>
+              </a:rPr>
+              <a:t>Chương I</a:t>
+            </a:r>
+          </a:p>
+        </p:txBody>
+      </p:sp>
+      <p:sp>
+        <p:nvSpPr>
+          <p:cNvPr id="8" name="TextBox 7"/>
+          <p:cNvSpPr txBox="1"/>
+          <p:nvPr/>
+        </p:nvSpPr>
+        <p:spPr>
+          <a:xfrm>
+            <a:off x="777240" y="2468880"/>
+            <a:ext cx="3108960" cy="2423160"/>
+          </a:xfrm>
+          <a:prstGeom prst="rect">
+            <a:avLst/>
+          </a:prstGeom>
+          <a:noFill/>
+        </p:spPr>
+        <p:txBody>
+          <a:bodyPr wrap="square">
+            <a:spAutoFit/>
+          </a:bodyPr>
+          <a:lstStyle/>
+          <a:p>
+            <a:pPr marL="292608" indent="-292608">
+              <a:lnSpc>
+                <a:spcPct val="108000"/>
+              </a:lnSpc>
+              <a:spcAft>
+                <a:spcPts val="600"/>
+              </a:spcAft>
+              <a:buClr>
+                <a:srgbClr val="1E6FE8"/>
+              </a:buClr>
+              <a:buFont typeface="Helvetica"/>
+              <a:buChar char="•"/>
+            </a:pPr>
+            <a:r>
+              <a:rPr sz="2100" b="0" i="0">
+                <a:solidFill>
+                  <a:srgbClr val="0F1C3F"/>
+                </a:solidFill>
+                <a:latin typeface="Helvetica"/>
+              </a:rPr>
+              <a:t>Nhu cầu › truy vấn › danh sách xếp hạng</a:t>
+            </a:r>
+          </a:p>
+          <a:p>
+            <a:pPr marL="292608" indent="-292608">
+              <a:lnSpc>
+                <a:spcPct val="108000"/>
+              </a:lnSpc>
+              <a:spcAft>
+                <a:spcPts val="600"/>
+              </a:spcAft>
+              <a:buClr>
+                <a:srgbClr val="1E6FE8"/>
+              </a:buClr>
+              <a:buFont typeface="Helvetica"/>
+              <a:buChar char="•"/>
+            </a:pPr>
+            <a:r>
+              <a:rPr sz="2100" b="0" i="0">
+                <a:solidFill>
+                  <a:srgbClr val="0F1C3F"/>
+                </a:solidFill>
+                <a:latin typeface="Helvetica"/>
+              </a:rPr>
+              <a:t>Đánh giá: Precision, Recall</a:t>
+            </a:r>
+          </a:p>
+          <a:p>
+            <a:pPr marL="292608" indent="-292608">
+              <a:lnSpc>
+                <a:spcPct val="108000"/>
+              </a:lnSpc>
+              <a:spcAft>
+                <a:spcPts val="600"/>
+              </a:spcAft>
+              <a:buClr>
+                <a:srgbClr val="1E6FE8"/>
+              </a:buClr>
+              <a:buFont typeface="Helvetica"/>
+              <a:buChar char="•"/>
+            </a:pPr>
+            <a:r>
+              <a:rPr sz="2100" b="0" i="0">
+                <a:solidFill>
+                  <a:srgbClr val="0F1C3F"/>
+                </a:solidFill>
+                <a:latin typeface="Helvetica"/>
+              </a:rPr>
+              <a:t>Boolean, chỉ mục ngược: khớp từ chính xác</a:t>
+            </a:r>
+          </a:p>
+        </p:txBody>
+      </p:sp>
+      <p:sp>
+        <p:nvSpPr>
+          <p:cNvPr id="9" name="Rounded Rectangle 8"/>
+          <p:cNvSpPr/>
+          <p:nvPr/>
+        </p:nvSpPr>
+        <p:spPr>
+          <a:xfrm>
+            <a:off x="4343400" y="1737360"/>
+            <a:ext cx="3566160" cy="3520440"/>
+          </a:xfrm>
+          <a:prstGeom prst="roundRect">
+            <a:avLst>
+              <a:gd name="adj" fmla="val 8000"/>
+            </a:avLst>
+          </a:prstGeom>
+          <a:solidFill>
+            <a:srgbClr val="EAF2FF"/>
+          </a:solidFill>
+          <a:ln>
+            <a:noFill/>
+          </a:ln>
+          <a:effectLst/>
+        </p:spPr>
+        <p:style>
+          <a:lnRef idx="1">
+            <a:schemeClr val="accent1"/>
+          </a:lnRef>
+          <a:fillRef idx="3">
+            <a:schemeClr val="accent1"/>
+          </a:fillRef>
+          <a:effectRef idx="2">
+            <a:schemeClr val="accent1"/>
+          </a:effectRef>
+          <a:fontRef idx="minor">
+            <a:schemeClr val="lt1"/>
+          </a:fontRef>
+        </p:style>
+        <p:txBody>
+          <a:bodyPr rtlCol="0" anchor="ctr"/>
+          <a:lstStyle/>
+          <a:p>
+            <a:pPr algn="ctr"/>
+            <a:endParaRPr/>
+          </a:p>
+        </p:txBody>
+      </p:sp>
+      <p:sp>
+        <p:nvSpPr>
+          <p:cNvPr id="10" name="TextBox 9"/>
+          <p:cNvSpPr txBox="1"/>
+          <p:nvPr/>
+        </p:nvSpPr>
+        <p:spPr>
+          <a:xfrm>
+            <a:off x="4572000" y="1901952"/>
+            <a:ext cx="3108960" cy="502920"/>
+          </a:xfrm>
+          <a:prstGeom prst="rect">
+            <a:avLst/>
+          </a:prstGeom>
+          <a:noFill/>
+        </p:spPr>
+        <p:txBody>
+          <a:bodyPr wrap="square" lIns="45720" tIns="27432" rIns="45720" bIns="27432" anchor="t">
+            <a:spAutoFit/>
+          </a:bodyPr>
+          <a:lstStyle/>
+          <a:p>
+            <a:pPr algn="l">
+              <a:lnSpc>
+                <a:spcPct val="110000"/>
+              </a:lnSpc>
+            </a:pPr>
+            <a:r>
+              <a:rPr sz="2200" b="1" i="0">
+                <a:solidFill>
+                  <a:srgbClr val="144FB0"/>
+                </a:solidFill>
+                <a:latin typeface="Helvetica"/>
+              </a:rPr>
+              <a:t>Độ đo của CIR</a:t>
+            </a:r>
+          </a:p>
+        </p:txBody>
+      </p:sp>
+      <p:sp>
+        <p:nvSpPr>
+          <p:cNvPr id="11" name="TextBox 10"/>
+          <p:cNvSpPr txBox="1"/>
+          <p:nvPr/>
+        </p:nvSpPr>
+        <p:spPr>
+          <a:xfrm>
+            <a:off x="4572000" y="2468880"/>
+            <a:ext cx="3108960" cy="2423160"/>
+          </a:xfrm>
+          <a:prstGeom prst="rect">
+            <a:avLst/>
+          </a:prstGeom>
+          <a:noFill/>
+        </p:spPr>
+        <p:txBody>
+          <a:bodyPr wrap="square">
+            <a:spAutoFit/>
+          </a:bodyPr>
+          <a:lstStyle/>
+          <a:p>
+            <a:pPr marL="292608" indent="-292608">
+              <a:lnSpc>
+                <a:spcPct val="108000"/>
+              </a:lnSpc>
+              <a:spcAft>
+                <a:spcPts val="600"/>
+              </a:spcAft>
+              <a:buClr>
+                <a:srgbClr val="1E6FE8"/>
+              </a:buClr>
+              <a:buFont typeface="Helvetica"/>
+              <a:buChar char="•"/>
+            </a:pPr>
+            <a:r>
+              <a:rPr sz="2000" b="0" i="0">
+                <a:solidFill>
+                  <a:srgbClr val="0F1C3F"/>
+                </a:solidFill>
+                <a:latin typeface="Helvetica"/>
+              </a:rPr>
+              <a:t>R@K = số truy vấn có ảnh đích trong top-K / tổng số truy vấn</a:t>
+            </a:r>
+          </a:p>
+          <a:p>
+            <a:pPr marL="292608" indent="-292608">
+              <a:lnSpc>
+                <a:spcPct val="108000"/>
+              </a:lnSpc>
+              <a:spcAft>
+                <a:spcPts val="600"/>
+              </a:spcAft>
+              <a:buClr>
+                <a:srgbClr val="1E6FE8"/>
+              </a:buClr>
+              <a:buFont typeface="Helvetica"/>
+              <a:buChar char="•"/>
+            </a:pPr>
+            <a:r>
+              <a:rPr sz="2000" b="0" i="0">
+                <a:solidFill>
+                  <a:srgbClr val="0F1C3F"/>
+                </a:solidFill>
+                <a:latin typeface="Helvetica"/>
+              </a:rPr>
+              <a:t>mAP@K = trung bình AP@K, với AP@K = Σ P@k·rel(k) / min(K, số ảnh đúng)</a:t>
+            </a:r>
+          </a:p>
+        </p:txBody>
+      </p:sp>
+      <p:sp>
+        <p:nvSpPr>
+          <p:cNvPr id="12" name="Rounded Rectangle 11"/>
+          <p:cNvSpPr/>
+          <p:nvPr/>
+        </p:nvSpPr>
+        <p:spPr>
+          <a:xfrm>
+            <a:off x="8138160" y="1737360"/>
+            <a:ext cx="3566160" cy="3520440"/>
+          </a:xfrm>
+          <a:prstGeom prst="roundRect">
+            <a:avLst>
+              <a:gd name="adj" fmla="val 8000"/>
+            </a:avLst>
+          </a:prstGeom>
+          <a:solidFill>
+            <a:srgbClr val="D6E6FF"/>
+          </a:solidFill>
+          <a:ln>
+            <a:noFill/>
+          </a:ln>
+          <a:effectLst/>
+        </p:spPr>
+        <p:style>
+          <a:lnRef idx="1">
+            <a:schemeClr val="accent1"/>
+          </a:lnRef>
+          <a:fillRef idx="3">
+            <a:schemeClr val="accent1"/>
+          </a:fillRef>
+          <a:effectRef idx="2">
+            <a:schemeClr val="accent1"/>
+          </a:effectRef>
+          <a:fontRef idx="minor">
+            <a:schemeClr val="lt1"/>
+          </a:fontRef>
+        </p:style>
+        <p:txBody>
+          <a:bodyPr rtlCol="0" anchor="ctr"/>
+          <a:lstStyle/>
+          <a:p>
+            <a:pPr algn="ctr"/>
+            <a:endParaRPr/>
+          </a:p>
+        </p:txBody>
+      </p:sp>
+      <p:sp>
+        <p:nvSpPr>
+          <p:cNvPr id="13" name="TextBox 12"/>
+          <p:cNvSpPr txBox="1"/>
+          <p:nvPr/>
+        </p:nvSpPr>
+        <p:spPr>
+          <a:xfrm>
+            <a:off x="8366760" y="1901952"/>
+            <a:ext cx="3108960" cy="502920"/>
+          </a:xfrm>
+          <a:prstGeom prst="rect">
+            <a:avLst/>
+          </a:prstGeom>
+          <a:noFill/>
+        </p:spPr>
+        <p:txBody>
+          <a:bodyPr wrap="square" lIns="45720" tIns="27432" rIns="45720" bIns="27432" anchor="t">
+            <a:spAutoFit/>
+          </a:bodyPr>
+          <a:lstStyle/>
+          <a:p>
+            <a:pPr algn="l">
+              <a:lnSpc>
+                <a:spcPct val="110000"/>
+              </a:lnSpc>
+            </a:pPr>
+            <a:r>
+              <a:rPr sz="2200" b="1" i="0">
+                <a:solidFill>
+                  <a:srgbClr val="144FB0"/>
+                </a:solidFill>
+                <a:latin typeface="Helvetica"/>
+              </a:rPr>
+              <a:t>Tìm kiếm vector</a:t>
+            </a:r>
+          </a:p>
+        </p:txBody>
+      </p:sp>
+      <p:sp>
+        <p:nvSpPr>
+          <p:cNvPr id="14" name="TextBox 13"/>
+          <p:cNvSpPr txBox="1"/>
+          <p:nvPr/>
+        </p:nvSpPr>
+        <p:spPr>
+          <a:xfrm>
+            <a:off x="8366760" y="2468880"/>
+            <a:ext cx="3108960" cy="2423160"/>
+          </a:xfrm>
+          <a:prstGeom prst="rect">
+            <a:avLst/>
+          </a:prstGeom>
+          <a:noFill/>
+        </p:spPr>
+        <p:txBody>
+          <a:bodyPr wrap="square">
+            <a:spAutoFit/>
+          </a:bodyPr>
+          <a:lstStyle/>
+          <a:p>
+            <a:pPr marL="292608" indent="-292608">
+              <a:lnSpc>
+                <a:spcPct val="108000"/>
+              </a:lnSpc>
+              <a:spcAft>
+                <a:spcPts val="600"/>
+              </a:spcAft>
+              <a:buClr>
+                <a:srgbClr val="1E6FE8"/>
+              </a:buClr>
+              <a:buFont typeface="Helvetica"/>
+              <a:buChar char="•"/>
+            </a:pPr>
+            <a:r>
+              <a:rPr sz="2100" b="0" i="0">
+                <a:solidFill>
+                  <a:srgbClr val="0F1C3F"/>
+                </a:solidFill>
+                <a:latin typeface="Helvetica"/>
+              </a:rPr>
+              <a:t>Ảnh và truy vấn được mã hóa thành vector CLIP</a:t>
+            </a:r>
+          </a:p>
+          <a:p>
+            <a:pPr marL="292608" indent="-292608">
+              <a:lnSpc>
+                <a:spcPct val="108000"/>
+              </a:lnSpc>
+              <a:spcAft>
+                <a:spcPts val="600"/>
+              </a:spcAft>
+              <a:buClr>
+                <a:srgbClr val="1E6FE8"/>
+              </a:buClr>
+              <a:buFont typeface="Helvetica"/>
+              <a:buChar char="•"/>
+            </a:pPr>
+            <a:r>
+              <a:rPr sz="2100" b="0" i="0">
+                <a:solidFill>
+                  <a:srgbClr val="0F1C3F"/>
+                </a:solidFill>
+                <a:latin typeface="Helvetica"/>
+              </a:rPr>
+              <a:t>Xếp hạng ảnh theo độ tương đồng cosine</a:t>
+            </a:r>
+          </a:p>
+        </p:txBody>
+      </p:sp>
+      <p:sp>
+        <p:nvSpPr>
+          <p:cNvPr id="15" name="TextBox 14"/>
+          <p:cNvSpPr txBox="1"/>
+          <p:nvPr/>
+        </p:nvSpPr>
+        <p:spPr>
+          <a:xfrm>
+            <a:off x="548640" y="5440680"/>
+            <a:ext cx="11064240" cy="548640"/>
+          </a:xfrm>
+          <a:prstGeom prst="rect">
+            <a:avLst/>
+          </a:prstGeom>
+          <a:noFill/>
+        </p:spPr>
+        <p:txBody>
+          <a:bodyPr wrap="square" lIns="45720" tIns="27432" rIns="45720" bIns="27432" anchor="t">
+            <a:spAutoFit/>
+          </a:bodyPr>
+          <a:lstStyle/>
+          <a:p>
+            <a:pPr algn="l">
+              <a:lnSpc>
+                <a:spcPct val="110000"/>
+              </a:lnSpc>
+            </a:pPr>
+            <a:r>
+              <a:rPr sz="2200" b="1" i="0">
+                <a:solidFill>
+                  <a:srgbClr val="144FB0"/>
+                </a:solidFill>
+                <a:latin typeface="Helvetica"/>
+              </a:rPr>
+              <a:t>Nhóm đánh giá trên FashionIQ val (R@10, R@50) và CIRCO val (mAP@K), kiểm định bootstrap và Wilcoxon theo từng truy vấn</a:t>
+            </a:r>
+          </a:p>
+        </p:txBody>
+      </p:sp>
     </p:spTree>
   </p:cSld>
   <p:clrMapOvr>
@@ -10637,8 +12868,8 @@
         </p:nvSpPr>
         <p:spPr>
           <a:xfrm>
-            <a:off x="9966960" y="4389120"/>
-            <a:ext cx="3474720" cy="3474720"/>
+            <a:off x="9692640" y="-2194560"/>
+            <a:ext cx="4206240" cy="4206240"/>
           </a:xfrm>
           <a:prstGeom prst="ellipse">
             <a:avLst/>
@@ -10682,7 +12913,7 @@
         </p:nvSpPr>
         <p:spPr>
           <a:xfrm>
-            <a:off x="11704320" y="3840480"/>
+            <a:off x="11201400" y="502920"/>
             <a:ext cx="411480" cy="411480"/>
           </a:xfrm>
           <a:prstGeom prst="ellipse">
@@ -10753,7 +12984,7 @@
                 </a:solidFill>
                 <a:latin typeface="Helvetica"/>
               </a:rPr>
-              <a:t>LinCIR học từ giả chỉ bằng văn bản nhờ Self-Masking Projection</a:t>
+              <a:t>Ảnh được biến thành một “từ giả” [$] trong câu truy vấn</a:t>
             </a:r>
           </a:p>
         </p:txBody>
@@ -10799,7 +13030,7 @@
       </p:sp>
       <p:pic>
         <p:nvPicPr>
-          <p:cNvPr id="6" name="Picture 5" descr="lincir_train_slide.png"/>
+          <p:cNvPr id="6" name="Picture 5" descr="lincir_infer_slide.png"/>
           <p:cNvPicPr>
             <a:picLocks noChangeAspect="1"/>
           </p:cNvPicPr>
@@ -10813,14 +13044,62 @@
         </p:blipFill>
         <p:spPr>
           <a:xfrm>
-            <a:off x="1097280" y="1600200"/>
-            <a:ext cx="9966960" cy="4705404"/>
+            <a:off x="548640" y="1828800"/>
+            <a:ext cx="11064240" cy="3512236"/>
           </a:xfrm>
           <a:prstGeom prst="rect">
             <a:avLst/>
           </a:prstGeom>
         </p:spPr>
       </p:pic>
+      <p:sp>
+        <p:nvSpPr>
+          <p:cNvPr id="7" name="TextBox 6"/>
+          <p:cNvSpPr txBox="1"/>
+          <p:nvPr/>
+        </p:nvSpPr>
+        <p:spPr>
+          <a:xfrm>
+            <a:off x="548640" y="5486400"/>
+            <a:ext cx="10241280" cy="548640"/>
+          </a:xfrm>
+          <a:prstGeom prst="rect">
+            <a:avLst/>
+          </a:prstGeom>
+          <a:noFill/>
+        </p:spPr>
+        <p:txBody>
+          <a:bodyPr wrap="square" lIns="45720" tIns="27432" rIns="45720" bIns="27432" anchor="t">
+            <a:spAutoFit/>
+          </a:bodyPr>
+          <a:lstStyle/>
+          <a:p>
+            <a:pPr algn="l">
+              <a:lnSpc>
+                <a:spcPct val="110000"/>
+              </a:lnSpc>
+            </a:pPr>
+            <a:r>
+              <a:rPr sz="2000" b="1" i="0">
+                <a:solidFill>
+                  <a:srgbClr val="144FB0"/>
+                </a:solidFill>
+                <a:latin typeface="Helvetica"/>
+              </a:rPr>
+              <a:t>Chỉ học mạng chiếu φ; </a:t>
+            </a:r>
+            <a:r>
+              <a:rPr sz="2000" b="0" i="0">
+                <a:solidFill>
+                  <a:srgbClr val="0F1C3F"/>
+                </a:solidFill>
+                <a:latin typeface="Helvetica"/>
+              </a:rPr>
+              <a:t>bộ mã hóa ảnh và văn bản của CLIP giữ nguyên</a:t>
+            </a:r>
+          </a:p>
+        </p:txBody>
+      </p:sp>
     </p:spTree>
   </p:cSld>
   <p:clrMapOvr>
@@ -10874,8 +13153,8 @@
         </p:nvSpPr>
         <p:spPr>
           <a:xfrm>
-            <a:off x="10058400" y="-2103120"/>
-            <a:ext cx="4023360" cy="4023360"/>
+            <a:off x="-1645920" y="4206240"/>
+            <a:ext cx="3657600" cy="3657600"/>
           </a:xfrm>
           <a:prstGeom prst="ellipse">
             <a:avLst/>
@@ -10919,7 +13198,7 @@
         </p:nvSpPr>
         <p:spPr>
           <a:xfrm>
-            <a:off x="11247120" y="502920"/>
+            <a:off x="54864" y="3108960"/>
             <a:ext cx="411480" cy="411480"/>
           </a:xfrm>
           <a:prstGeom prst="ellipse">
@@ -10990,7 +13269,7 @@
                 </a:solidFill>
                 <a:latin typeface="Helvetica"/>
               </a:rPr>
-              <a:t>Cải tiến A: thêm InfoNCE để từ giả phân biệt được các câu</a:t>
+              <a:t>Bài báo LinCIR: huấn luyện truy xuất ảnh kết hợp chỉ bằng văn bản</a:t>
             </a:r>
           </a:p>
         </p:txBody>
@@ -11043,7 +13322,7 @@
         <p:spPr>
           <a:xfrm>
             <a:off x="548640" y="1737360"/>
-            <a:ext cx="5577840" cy="2011680"/>
+            <a:ext cx="3520440" cy="3520440"/>
           </a:xfrm>
           <a:prstGeom prst="roundRect">
             <a:avLst>
@@ -11090,7 +13369,7 @@
         <p:spPr>
           <a:xfrm>
             <a:off x="777240" y="1901952"/>
-            <a:ext cx="5120640" cy="502920"/>
+            <a:ext cx="3063240" cy="502920"/>
           </a:xfrm>
           <a:prstGeom prst="rect">
             <a:avLst/>
@@ -11129,7 +13408,7 @@
         <p:spPr>
           <a:xfrm>
             <a:off x="777240" y="2468880"/>
-            <a:ext cx="5120640" cy="1143000"/>
+            <a:ext cx="3063240" cy="2331720"/>
           </a:xfrm>
           <a:prstGeom prst="rect">
             <a:avLst/>
@@ -11156,13 +13435,13 @@
               <a:buChar char="•"/>
             </a:pPr>
             <a:r>
-              <a:rPr sz="2100" b="0" i="0">
+              <a:rPr sz="2000" b="0" i="0">
                 <a:solidFill>
                   <a:srgbClr val="0F1C3F"/>
                 </a:solidFill>
                 <a:latin typeface="Helvetica"/>
               </a:rPr>
-              <a:t>MSE không phạt khi câu đã che gần cả các câu khác</a:t>
+              <a:t>Bộ ba ảnh – câu – ảnh đích phải gán nhãn tay: đắt và ít</a:t>
             </a:r>
           </a:p>
           <a:p>
@@ -11180,13 +13459,13 @@
               <a:buChar char="•"/>
             </a:pPr>
             <a:r>
-              <a:rPr sz="2100" b="0" i="0">
+              <a:rPr sz="2000" b="0" i="0">
                 <a:solidFill>
                   <a:srgbClr val="0F1C3F"/>
                 </a:solidFill>
                 <a:latin typeface="Helvetica"/>
               </a:rPr>
-              <a:t>Nhưng đánh giá là bài toán xếp hạng</a:t>
+              <a:t>Pic2Word, SEARLE cần ảnh khi huấn luyện, chỉ học câu mẫu cố định</a:t>
             </a:r>
           </a:p>
         </p:txBody>
@@ -11199,8 +13478,8 @@
         </p:nvSpPr>
         <p:spPr>
           <a:xfrm>
-            <a:off x="548640" y="3931920"/>
-            <a:ext cx="5577840" cy="2011680"/>
+            <a:off x="4343400" y="1737360"/>
+            <a:ext cx="3520440" cy="3520440"/>
           </a:xfrm>
           <a:prstGeom prst="roundRect">
             <a:avLst>
@@ -11208,7 +13487,7 @@
             </a:avLst>
           </a:prstGeom>
           <a:solidFill>
-            <a:srgbClr val="D6E6FF"/>
+            <a:srgbClr val="EAF2FF"/>
           </a:solidFill>
           <a:ln>
             <a:noFill/>
@@ -11246,8 +13525,8 @@
         </p:nvSpPr>
         <p:spPr>
           <a:xfrm>
-            <a:off x="777240" y="4096511"/>
-            <a:ext cx="5120640" cy="502920"/>
+            <a:off x="4572000" y="1901952"/>
+            <a:ext cx="3063240" cy="502920"/>
           </a:xfrm>
           <a:prstGeom prst="rect">
             <a:avLst/>
@@ -11272,7 +13551,7 @@
                 </a:solidFill>
                 <a:latin typeface="Helvetica"/>
               </a:rPr>
-              <a:t>Giải pháp</a:t>
+              <a:t>Ý tưởng LinCIR</a:t>
             </a:r>
           </a:p>
         </p:txBody>
@@ -11285,8 +13564,8 @@
         </p:nvSpPr>
         <p:spPr>
           <a:xfrm>
-            <a:off x="777240" y="4663440"/>
-            <a:ext cx="5120640" cy="1143000"/>
+            <a:off x="4572000" y="2468880"/>
+            <a:ext cx="3063240" cy="2331720"/>
           </a:xfrm>
           <a:prstGeom prst="rect">
             <a:avLst/>
@@ -11313,13 +13592,13 @@
               <a:buChar char="•"/>
             </a:pPr>
             <a:r>
-              <a:rPr sz="2100" b="1" i="0">
+              <a:rPr sz="2000" b="0" i="0">
                 <a:solidFill>
                   <a:srgbClr val="0F1C3F"/>
                 </a:solidFill>
                 <a:latin typeface="Helvetica"/>
               </a:rPr>
-              <a:t>L = L_SMP + 0,5 · InfoNCE</a:t>
+              <a:t>Self-Masking Projection: học φ chỉ từ văn bản, không cần ảnh</a:t>
             </a:r>
           </a:p>
           <a:p>
@@ -11337,27 +13616,74 @@
               <a:buChar char="•"/>
             </a:pPr>
             <a:r>
-              <a:rPr sz="2100" b="0" i="0">
+              <a:rPr sz="2000" b="0" i="0">
                 <a:solidFill>
                   <a:srgbClr val="0F1C3F"/>
                 </a:solidFill>
                 <a:latin typeface="Helvetica"/>
               </a:rPr>
-              <a:t>InfoNCE kéo về câu gốc, đẩy xa 511 câu khác (τ = 0,07)</a:t>
-            </a:r>
-          </a:p>
-        </p:txBody>
-      </p:sp>
-      <p:sp>
-        <p:nvSpPr>
-          <p:cNvPr id="12" name="TextBox 11"/>
+              <a:t>Thêm nhiễu khi huấn luyện để φ dùng được cho vector ảnh</a:t>
+            </a:r>
+          </a:p>
+        </p:txBody>
+      </p:sp>
+      <p:sp>
+        <p:nvSpPr>
+          <p:cNvPr id="12" name="Rounded Rectangle 11"/>
+          <p:cNvSpPr/>
+          <p:nvPr/>
+        </p:nvSpPr>
+        <p:spPr>
+          <a:xfrm>
+            <a:off x="8138160" y="1737360"/>
+            <a:ext cx="3520440" cy="3520440"/>
+          </a:xfrm>
+          <a:prstGeom prst="roundRect">
+            <a:avLst>
+              <a:gd name="adj" fmla="val 8000"/>
+            </a:avLst>
+          </a:prstGeom>
+          <a:solidFill>
+            <a:srgbClr val="EAF2FF"/>
+          </a:solidFill>
+          <a:ln>
+            <a:noFill/>
+          </a:ln>
+          <a:effectLst/>
+        </p:spPr>
+        <p:style>
+          <a:lnRef idx="1">
+            <a:schemeClr val="accent1"/>
+          </a:lnRef>
+          <a:fillRef idx="3">
+            <a:schemeClr val="accent1"/>
+          </a:fillRef>
+          <a:effectRef idx="2">
+            <a:schemeClr val="accent1"/>
+          </a:effectRef>
+          <a:fontRef idx="minor">
+            <a:schemeClr val="lt1"/>
+          </a:fontRef>
+        </p:style>
+        <p:txBody>
+          <a:bodyPr rtlCol="0" anchor="ctr"/>
+          <a:lstStyle/>
+          <a:p>
+            <a:pPr algn="ctr"/>
+            <a:endParaRPr/>
+          </a:p>
+        </p:txBody>
+      </p:sp>
+      <p:sp>
+        <p:nvSpPr>
+          <p:cNvPr id="13" name="TextBox 12"/>
           <p:cNvSpPr txBox="1"/>
           <p:nvPr/>
         </p:nvSpPr>
         <p:spPr>
           <a:xfrm>
-            <a:off x="6675120" y="1828800"/>
-            <a:ext cx="4754880" cy="868680"/>
+            <a:off x="8366760" y="1901952"/>
+            <a:ext cx="3063240" cy="502920"/>
           </a:xfrm>
           <a:prstGeom prst="rect">
             <a:avLst/>
@@ -11376,27 +13702,122 @@
               </a:lnSpc>
             </a:pPr>
             <a:r>
-              <a:rPr sz="4800" b="1" i="0">
-                <a:solidFill>
-                  <a:srgbClr val="1E6FE8"/>
-                </a:solidFill>
-                <a:latin typeface="Helvetica"/>
-              </a:rPr>
-              <a:t>+2%</a:t>
-            </a:r>
-          </a:p>
-        </p:txBody>
-      </p:sp>
-      <p:sp>
-        <p:nvSpPr>
-          <p:cNvPr id="13" name="TextBox 12"/>
+              <a:rPr sz="2200" b="1" i="0">
+                <a:solidFill>
+                  <a:srgbClr val="144FB0"/>
+                </a:solidFill>
+                <a:latin typeface="Helvetica"/>
+              </a:rPr>
+              <a:t>Kết quả bài báo</a:t>
+            </a:r>
+          </a:p>
+        </p:txBody>
+      </p:sp>
+      <p:sp>
+        <p:nvSpPr>
+          <p:cNvPr id="14" name="TextBox 13"/>
           <p:cNvSpPr txBox="1"/>
           <p:nvPr/>
         </p:nvSpPr>
         <p:spPr>
           <a:xfrm>
-            <a:off x="6675120" y="2697480"/>
-            <a:ext cx="4754880" cy="777240"/>
+            <a:off x="8366760" y="2468880"/>
+            <a:ext cx="3063240" cy="2331720"/>
+          </a:xfrm>
+          <a:prstGeom prst="rect">
+            <a:avLst/>
+          </a:prstGeom>
+          <a:noFill/>
+        </p:spPr>
+        <p:txBody>
+          <a:bodyPr wrap="square">
+            <a:spAutoFit/>
+          </a:bodyPr>
+          <a:lstStyle/>
+          <a:p>
+            <a:pPr marL="292608" indent="-292608">
+              <a:lnSpc>
+                <a:spcPct val="108000"/>
+              </a:lnSpc>
+              <a:spcAft>
+                <a:spcPts val="600"/>
+              </a:spcAft>
+              <a:buClr>
+                <a:srgbClr val="1E6FE8"/>
+              </a:buClr>
+              <a:buFont typeface="Helvetica"/>
+              <a:buChar char="•"/>
+            </a:pPr>
+            <a:r>
+              <a:rPr sz="2000" b="0" i="0">
+                <a:solidFill>
+                  <a:srgbClr val="0F1C3F"/>
+                </a:solidFill>
+                <a:latin typeface="Helvetica"/>
+              </a:rPr>
+              <a:t>Tốt nhất trên 4 bộ đánh giá</a:t>
+            </a:r>
+          </a:p>
+          <a:p>
+            <a:pPr marL="292608" indent="-292608">
+              <a:lnSpc>
+                <a:spcPct val="108000"/>
+              </a:lnSpc>
+              <a:spcAft>
+                <a:spcPts val="600"/>
+              </a:spcAft>
+              <a:buClr>
+                <a:srgbClr val="1E6FE8"/>
+              </a:buClr>
+              <a:buFont typeface="Helvetica"/>
+              <a:buChar char="•"/>
+            </a:pPr>
+            <a:r>
+              <a:rPr sz="2000" b="0" i="0">
+                <a:solidFill>
+                  <a:srgbClr val="0F1C3F"/>
+                </a:solidFill>
+                <a:latin typeface="Helvetica"/>
+              </a:rPr>
+              <a:t>Huấn luyện nhanh hơn Pic2Word 6 lần, SEARLE 8,4 lần</a:t>
+            </a:r>
+          </a:p>
+          <a:p>
+            <a:pPr marL="292608" indent="-292608">
+              <a:lnSpc>
+                <a:spcPct val="108000"/>
+              </a:lnSpc>
+              <a:spcAft>
+                <a:spcPts val="600"/>
+              </a:spcAft>
+              <a:buClr>
+                <a:srgbClr val="1E6FE8"/>
+              </a:buClr>
+              <a:buFont typeface="Helvetica"/>
+              <a:buChar char="•"/>
+            </a:pPr>
+            <a:r>
+              <a:rPr sz="2000" b="0" i="0">
+                <a:solidFill>
+                  <a:srgbClr val="0F1C3F"/>
+                </a:solidFill>
+                <a:latin typeface="Helvetica"/>
+              </a:rPr>
+              <a:t>Vượt cả phương pháp có giám sát (FashionIQ)</a:t>
+            </a:r>
+          </a:p>
+        </p:txBody>
+      </p:sp>
+      <p:sp>
+        <p:nvSpPr>
+          <p:cNvPr id="15" name="TextBox 14"/>
+          <p:cNvSpPr txBox="1"/>
+          <p:nvPr/>
+        </p:nvSpPr>
+        <p:spPr>
+          <a:xfrm>
+            <a:off x="548640" y="5394960"/>
+            <a:ext cx="11064240" cy="914400"/>
           </a:xfrm>
           <a:prstGeom prst="rect">
             <a:avLst/>
@@ -11421,85 +13842,16 @@
                 </a:solidFill>
                 <a:latin typeface="Helvetica"/>
               </a:rPr>
-              <a:t>thời gian mỗi bước tăng 2% (1,474 so với 1,448 giây)</a:t>
-            </a:r>
-          </a:p>
-        </p:txBody>
-      </p:sp>
-      <p:sp>
-        <p:nvSpPr>
-          <p:cNvPr id="14" name="TextBox 13"/>
-          <p:cNvSpPr txBox="1"/>
-          <p:nvPr/>
-        </p:nvSpPr>
-        <p:spPr>
-          <a:xfrm>
-            <a:off x="6675120" y="3931920"/>
-            <a:ext cx="4754880" cy="868680"/>
-          </a:xfrm>
-          <a:prstGeom prst="rect">
-            <a:avLst/>
-          </a:prstGeom>
-          <a:noFill/>
-        </p:spPr>
-        <p:txBody>
-          <a:bodyPr wrap="square" lIns="45720" tIns="27432" rIns="45720" bIns="27432" anchor="t">
-            <a:spAutoFit/>
-          </a:bodyPr>
-          <a:lstStyle/>
-          <a:p>
-            <a:pPr algn="l">
-              <a:lnSpc>
-                <a:spcPct val="110000"/>
-              </a:lnSpc>
-            </a:pPr>
-            <a:r>
-              <a:rPr sz="4800" b="1" i="0">
-                <a:solidFill>
-                  <a:srgbClr val="1E6FE8"/>
-                </a:solidFill>
-                <a:latin typeface="Helvetica"/>
-              </a:rPr>
-              <a:t>25,54</a:t>
-            </a:r>
-          </a:p>
-        </p:txBody>
-      </p:sp>
-      <p:sp>
-        <p:nvSpPr>
-          <p:cNvPr id="15" name="TextBox 14"/>
-          <p:cNvSpPr txBox="1"/>
-          <p:nvPr/>
-        </p:nvSpPr>
-        <p:spPr>
-          <a:xfrm>
-            <a:off x="6675120" y="4800600"/>
-            <a:ext cx="4754880" cy="777240"/>
-          </a:xfrm>
-          <a:prstGeom prst="rect">
-            <a:avLst/>
-          </a:prstGeom>
-          <a:noFill/>
-        </p:spPr>
-        <p:txBody>
-          <a:bodyPr wrap="square" lIns="45720" tIns="27432" rIns="45720" bIns="27432" anchor="t">
-            <a:spAutoFit/>
-          </a:bodyPr>
-          <a:lstStyle/>
-          <a:p>
-            <a:pPr algn="l">
-              <a:lnSpc>
-                <a:spcPct val="110000"/>
-              </a:lnSpc>
-            </a:pPr>
-            <a:r>
-              <a:rPr sz="2000" b="0" i="0">
-                <a:solidFill>
-                  <a:srgbClr val="5B6B82"/>
-                </a:solidFill>
-                <a:latin typeface="Helvetica"/>
-              </a:rPr>
-              <a:t>FashionIQ R@10 trung bình của A, thấp hơn baseline 25,90</a:t>
+              <a:t>Gu et al. (NAVER), CVPR 2024, mã nguồn công khai. </a:t>
+            </a:r>
+            <a:r>
+              <a:rPr sz="2000" b="1" i="0">
+                <a:solidFill>
+                  <a:srgbClr val="144FB0"/>
+                </a:solidFill>
+                <a:latin typeface="Helvetica"/>
+              </a:rPr>
+              <a:t>Hai thành phần chính: Self-Masking Projection và nhiễu khi huấn luyện</a:t>
             </a:r>
           </a:p>
         </p:txBody>
@@ -11557,8 +13909,8 @@
         </p:nvSpPr>
         <p:spPr>
           <a:xfrm>
-            <a:off x="-1828800" y="4114800"/>
-            <a:ext cx="3840480" cy="3840480"/>
+            <a:off x="9966960" y="4389120"/>
+            <a:ext cx="3474720" cy="3474720"/>
           </a:xfrm>
           <a:prstGeom prst="ellipse">
             <a:avLst/>
@@ -11602,7 +13954,7 @@
         </p:nvSpPr>
         <p:spPr>
           <a:xfrm>
-            <a:off x="54864" y="6035040"/>
+            <a:off x="11704320" y="3840480"/>
             <a:ext cx="411480" cy="411480"/>
           </a:xfrm>
           <a:prstGeom prst="ellipse">
@@ -11673,7 +14025,7 @@
                 </a:solidFill>
                 <a:latin typeface="Helvetica"/>
               </a:rPr>
-              <a:t>Cải tiến B: dịch nhiễu theo hướng của modality gap</a:t>
+              <a:t>LinCIR học từ giả chỉ bằng văn bản nhờ Self-Masking Projection</a:t>
             </a:r>
           </a:p>
         </p:txBody>
@@ -11717,476 +14069,30 @@
           </a:p>
         </p:txBody>
       </p:sp>
-      <p:sp>
-        <p:nvSpPr>
-          <p:cNvPr id="6" name="Rounded Rectangle 5"/>
-          <p:cNvSpPr/>
+      <p:pic>
+        <p:nvPicPr>
+          <p:cNvPr id="7" name="Picture 6" descr="lincir_train_base_slide.png"/>
+          <p:cNvPicPr>
+            <a:picLocks noChangeAspect="1"/>
+          </p:cNvPicPr>
           <p:nvPr/>
-        </p:nvSpPr>
-        <p:spPr>
-          <a:xfrm>
-            <a:off x="548640" y="1737360"/>
-            <a:ext cx="5577840" cy="2011680"/>
-          </a:xfrm>
-          <a:prstGeom prst="roundRect">
-            <a:avLst>
-              <a:gd name="adj" fmla="val 8000"/>
-            </a:avLst>
-          </a:prstGeom>
-          <a:solidFill>
-            <a:srgbClr val="EAF2FF"/>
-          </a:solidFill>
-          <a:ln>
-            <a:noFill/>
-          </a:ln>
-          <a:effectLst/>
-        </p:spPr>
-        <p:style>
-          <a:lnRef idx="1">
-            <a:schemeClr val="accent1"/>
-          </a:lnRef>
-          <a:fillRef idx="3">
-            <a:schemeClr val="accent1"/>
-          </a:fillRef>
-          <a:effectRef idx="2">
-            <a:schemeClr val="accent1"/>
-          </a:effectRef>
-          <a:fontRef idx="minor">
-            <a:schemeClr val="lt1"/>
-          </a:fontRef>
-        </p:style>
-        <p:txBody>
-          <a:bodyPr rtlCol="0" anchor="ctr"/>
-          <a:lstStyle/>
-          <a:p>
-            <a:pPr algn="ctr"/>
-            <a:endParaRPr/>
-          </a:p>
-        </p:txBody>
-      </p:sp>
-      <p:sp>
-        <p:nvSpPr>
-          <p:cNvPr id="7" name="TextBox 6"/>
-          <p:cNvSpPr txBox="1"/>
-          <p:nvPr/>
-        </p:nvSpPr>
-        <p:spPr>
-          <a:xfrm>
-            <a:off x="777240" y="1901952"/>
-            <a:ext cx="5120640" cy="502920"/>
+        </p:nvPicPr>
+        <p:blipFill>
+          <a:blip r:embed="rId3"/>
+          <a:stretch>
+            <a:fillRect/>
+          </a:stretch>
+        </p:blipFill>
+        <p:spPr>
+          <a:xfrm>
+            <a:off x="1238568" y="1600200"/>
+            <a:ext cx="9684382" cy="4572000"/>
           </a:xfrm>
           <a:prstGeom prst="rect">
             <a:avLst/>
           </a:prstGeom>
-          <a:noFill/>
-        </p:spPr>
-        <p:txBody>
-          <a:bodyPr wrap="square" lIns="45720" tIns="27432" rIns="45720" bIns="27432" anchor="t">
-            <a:spAutoFit/>
-          </a:bodyPr>
-          <a:lstStyle/>
-          <a:p>
-            <a:pPr algn="l">
-              <a:lnSpc>
-                <a:spcPct val="110000"/>
-              </a:lnSpc>
-            </a:pPr>
-            <a:r>
-              <a:rPr sz="2200" b="1" i="0">
-                <a:solidFill>
-                  <a:srgbClr val="144FB0"/>
-                </a:solidFill>
-                <a:latin typeface="Helvetica"/>
-              </a:rPr>
-              <a:t>Nhiễu của LinCIR</a:t>
-            </a:r>
-          </a:p>
-        </p:txBody>
-      </p:sp>
-      <p:sp>
-        <p:nvSpPr>
-          <p:cNvPr id="8" name="TextBox 7"/>
-          <p:cNvSpPr txBox="1"/>
-          <p:nvPr/>
-        </p:nvSpPr>
-        <p:spPr>
-          <a:xfrm>
-            <a:off x="777240" y="2468880"/>
-            <a:ext cx="5120640" cy="1143000"/>
-          </a:xfrm>
-          <a:prstGeom prst="rect">
-            <a:avLst/>
-          </a:prstGeom>
-          <a:noFill/>
-        </p:spPr>
-        <p:txBody>
-          <a:bodyPr wrap="square">
-            <a:spAutoFit/>
-          </a:bodyPr>
-          <a:lstStyle/>
-          <a:p>
-            <a:pPr marL="292608" indent="-292608">
-              <a:lnSpc>
-                <a:spcPct val="108000"/>
-              </a:lnSpc>
-              <a:spcAft>
-                <a:spcPts val="600"/>
-              </a:spcAft>
-              <a:buClr>
-                <a:srgbClr val="1E6FE8"/>
-              </a:buClr>
-              <a:buFont typeface="Helvetica"/>
-              <a:buChar char="•"/>
-            </a:pPr>
-            <a:r>
-              <a:rPr sz="2100" b="0" i="0">
-                <a:solidFill>
-                  <a:srgbClr val="0F1C3F"/>
-                </a:solidFill>
-                <a:latin typeface="Helvetica"/>
-              </a:rPr>
-              <a:t>Nhiễu đều theo mọi hướng</a:t>
-            </a:r>
-          </a:p>
-          <a:p>
-            <a:pPr marL="292608" indent="-292608">
-              <a:lnSpc>
-                <a:spcPct val="108000"/>
-              </a:lnSpc>
-              <a:spcAft>
-                <a:spcPts val="600"/>
-              </a:spcAft>
-              <a:buClr>
-                <a:srgbClr val="1E6FE8"/>
-              </a:buClr>
-              <a:buFont typeface="Helvetica"/>
-              <a:buChar char="•"/>
-            </a:pPr>
-            <a:r>
-              <a:rPr sz="2100" b="0" i="0">
-                <a:solidFill>
-                  <a:srgbClr val="0F1C3F"/>
-                </a:solidFill>
-                <a:latin typeface="Helvetica"/>
-              </a:rPr>
-              <a:t>Không dịch về phía vùng ảnh</a:t>
-            </a:r>
-          </a:p>
-        </p:txBody>
-      </p:sp>
-      <p:sp>
-        <p:nvSpPr>
-          <p:cNvPr id="9" name="Rounded Rectangle 8"/>
-          <p:cNvSpPr/>
-          <p:nvPr/>
-        </p:nvSpPr>
-        <p:spPr>
-          <a:xfrm>
-            <a:off x="548640" y="3931920"/>
-            <a:ext cx="5577840" cy="2011680"/>
-          </a:xfrm>
-          <a:prstGeom prst="roundRect">
-            <a:avLst>
-              <a:gd name="adj" fmla="val 8000"/>
-            </a:avLst>
-          </a:prstGeom>
-          <a:solidFill>
-            <a:srgbClr val="D6E6FF"/>
-          </a:solidFill>
-          <a:ln>
-            <a:noFill/>
-          </a:ln>
-          <a:effectLst/>
-        </p:spPr>
-        <p:style>
-          <a:lnRef idx="1">
-            <a:schemeClr val="accent1"/>
-          </a:lnRef>
-          <a:fillRef idx="3">
-            <a:schemeClr val="accent1"/>
-          </a:fillRef>
-          <a:effectRef idx="2">
-            <a:schemeClr val="accent1"/>
-          </a:effectRef>
-          <a:fontRef idx="minor">
-            <a:schemeClr val="lt1"/>
-          </a:fontRef>
-        </p:style>
-        <p:txBody>
-          <a:bodyPr rtlCol="0" anchor="ctr"/>
-          <a:lstStyle/>
-          <a:p>
-            <a:pPr algn="ctr"/>
-            <a:endParaRPr/>
-          </a:p>
-        </p:txBody>
-      </p:sp>
-      <p:sp>
-        <p:nvSpPr>
-          <p:cNvPr id="10" name="TextBox 9"/>
-          <p:cNvSpPr txBox="1"/>
-          <p:nvPr/>
-        </p:nvSpPr>
-        <p:spPr>
-          <a:xfrm>
-            <a:off x="777240" y="4096511"/>
-            <a:ext cx="5120640" cy="502920"/>
-          </a:xfrm>
-          <a:prstGeom prst="rect">
-            <a:avLst/>
-          </a:prstGeom>
-          <a:noFill/>
-        </p:spPr>
-        <p:txBody>
-          <a:bodyPr wrap="square" lIns="45720" tIns="27432" rIns="45720" bIns="27432" anchor="t">
-            <a:spAutoFit/>
-          </a:bodyPr>
-          <a:lstStyle/>
-          <a:p>
-            <a:pPr algn="l">
-              <a:lnSpc>
-                <a:spcPct val="110000"/>
-              </a:lnSpc>
-            </a:pPr>
-            <a:r>
-              <a:rPr sz="2200" b="1" i="0">
-                <a:solidFill>
-                  <a:srgbClr val="144FB0"/>
-                </a:solidFill>
-                <a:latin typeface="Helvetica"/>
-              </a:rPr>
-              <a:t>Nhiễu có hướng</a:t>
-            </a:r>
-          </a:p>
-        </p:txBody>
-      </p:sp>
-      <p:sp>
-        <p:nvSpPr>
-          <p:cNvPr id="11" name="TextBox 10"/>
-          <p:cNvSpPr txBox="1"/>
-          <p:nvPr/>
-        </p:nvSpPr>
-        <p:spPr>
-          <a:xfrm>
-            <a:off x="777240" y="4663440"/>
-            <a:ext cx="5120640" cy="1143000"/>
-          </a:xfrm>
-          <a:prstGeom prst="rect">
-            <a:avLst/>
-          </a:prstGeom>
-          <a:noFill/>
-        </p:spPr>
-        <p:txBody>
-          <a:bodyPr wrap="square">
-            <a:spAutoFit/>
-          </a:bodyPr>
-          <a:lstStyle/>
-          <a:p>
-            <a:pPr marL="292608" indent="-292608">
-              <a:lnSpc>
-                <a:spcPct val="108000"/>
-              </a:lnSpc>
-              <a:spcAft>
-                <a:spcPts val="600"/>
-              </a:spcAft>
-              <a:buClr>
-                <a:srgbClr val="1E6FE8"/>
-              </a:buClr>
-              <a:buFont typeface="Helvetica"/>
-              <a:buChar char="•"/>
-            </a:pPr>
-            <a:r>
-              <a:rPr sz="2100" b="1" i="0">
-                <a:solidFill>
-                  <a:srgbClr val="0F1C3F"/>
-                </a:solidFill>
-                <a:latin typeface="Helvetica"/>
-              </a:rPr>
-              <a:t>n = 0,5 · Δ + u · ε</a:t>
-            </a:r>
-          </a:p>
-          <a:p>
-            <a:pPr marL="292608" indent="-292608">
-              <a:lnSpc>
-                <a:spcPct val="108000"/>
-              </a:lnSpc>
-              <a:spcAft>
-                <a:spcPts val="600"/>
-              </a:spcAft>
-              <a:buClr>
-                <a:srgbClr val="1E6FE8"/>
-              </a:buClr>
-              <a:buFont typeface="Helvetica"/>
-              <a:buChar char="•"/>
-            </a:pPr>
-            <a:r>
-              <a:rPr sz="2100" b="0" i="0">
-                <a:solidFill>
-                  <a:srgbClr val="0F1C3F"/>
-                </a:solidFill>
-                <a:latin typeface="Helvetica"/>
-              </a:rPr>
-              <a:t>Δ = tâm ảnh − tâm văn bản</a:t>
-            </a:r>
-          </a:p>
-        </p:txBody>
-      </p:sp>
-      <p:sp>
-        <p:nvSpPr>
-          <p:cNvPr id="12" name="TextBox 11"/>
-          <p:cNvSpPr txBox="1"/>
-          <p:nvPr/>
-        </p:nvSpPr>
-        <p:spPr>
-          <a:xfrm>
-            <a:off x="6675120" y="1828800"/>
-            <a:ext cx="4754880" cy="868680"/>
-          </a:xfrm>
-          <a:prstGeom prst="rect">
-            <a:avLst/>
-          </a:prstGeom>
-          <a:noFill/>
-        </p:spPr>
-        <p:txBody>
-          <a:bodyPr wrap="square" lIns="45720" tIns="27432" rIns="45720" bIns="27432" anchor="t">
-            <a:spAutoFit/>
-          </a:bodyPr>
-          <a:lstStyle/>
-          <a:p>
-            <a:pPr algn="l">
-              <a:lnSpc>
-                <a:spcPct val="110000"/>
-              </a:lnSpc>
-            </a:pPr>
-            <a:r>
-              <a:rPr sz="4800" b="1" i="0">
-                <a:solidFill>
-                  <a:srgbClr val="1E6FE8"/>
-                </a:solidFill>
-                <a:latin typeface="Helvetica"/>
-              </a:rPr>
-              <a:t>13,87</a:t>
-            </a:r>
-          </a:p>
-        </p:txBody>
-      </p:sp>
-      <p:sp>
-        <p:nvSpPr>
-          <p:cNvPr id="13" name="TextBox 12"/>
-          <p:cNvSpPr txBox="1"/>
-          <p:nvPr/>
-        </p:nvSpPr>
-        <p:spPr>
-          <a:xfrm>
-            <a:off x="6675120" y="2697480"/>
-            <a:ext cx="4754880" cy="777240"/>
-          </a:xfrm>
-          <a:prstGeom prst="rect">
-            <a:avLst/>
-          </a:prstGeom>
-          <a:noFill/>
-        </p:spPr>
-        <p:txBody>
-          <a:bodyPr wrap="square" lIns="45720" tIns="27432" rIns="45720" bIns="27432" anchor="t">
-            <a:spAutoFit/>
-          </a:bodyPr>
-          <a:lstStyle/>
-          <a:p>
-            <a:pPr algn="l">
-              <a:lnSpc>
-                <a:spcPct val="110000"/>
-              </a:lnSpc>
-            </a:pPr>
-            <a:r>
-              <a:rPr sz="2000" b="0" i="0">
-                <a:solidFill>
-                  <a:srgbClr val="5B6B82"/>
-                </a:solidFill>
-                <a:latin typeface="Helvetica"/>
-              </a:rPr>
-              <a:t>độ lớn của Δ, tính trên 5.000 cặp ảnh – chú thích COCO</a:t>
-            </a:r>
-          </a:p>
-        </p:txBody>
-      </p:sp>
-      <p:sp>
-        <p:nvSpPr>
-          <p:cNvPr id="14" name="TextBox 13"/>
-          <p:cNvSpPr txBox="1"/>
-          <p:nvPr/>
-        </p:nvSpPr>
-        <p:spPr>
-          <a:xfrm>
-            <a:off x="6675120" y="3931920"/>
-            <a:ext cx="4754880" cy="868680"/>
-          </a:xfrm>
-          <a:prstGeom prst="rect">
-            <a:avLst/>
-          </a:prstGeom>
-          <a:noFill/>
-        </p:spPr>
-        <p:txBody>
-          <a:bodyPr wrap="square" lIns="45720" tIns="27432" rIns="45720" bIns="27432" anchor="t">
-            <a:spAutoFit/>
-          </a:bodyPr>
-          <a:lstStyle/>
-          <a:p>
-            <a:pPr algn="l">
-              <a:lnSpc>
-                <a:spcPct val="110000"/>
-              </a:lnSpc>
-            </a:pPr>
-            <a:r>
-              <a:rPr sz="4800" b="1" i="0">
-                <a:solidFill>
-                  <a:srgbClr val="1E6FE8"/>
-                </a:solidFill>
-                <a:latin typeface="Helvetica"/>
-              </a:rPr>
-              <a:t>COCO val</a:t>
-            </a:r>
-          </a:p>
-        </p:txBody>
-      </p:sp>
-      <p:sp>
-        <p:nvSpPr>
-          <p:cNvPr id="15" name="TextBox 14"/>
-          <p:cNvSpPr txBox="1"/>
-          <p:nvPr/>
-        </p:nvSpPr>
-        <p:spPr>
-          <a:xfrm>
-            <a:off x="6675120" y="4800600"/>
-            <a:ext cx="4754880" cy="777240"/>
-          </a:xfrm>
-          <a:prstGeom prst="rect">
-            <a:avLst/>
-          </a:prstGeom>
-          <a:noFill/>
-        </p:spPr>
-        <p:txBody>
-          <a:bodyPr wrap="square" lIns="45720" tIns="27432" rIns="45720" bIns="27432" anchor="t">
-            <a:spAutoFit/>
-          </a:bodyPr>
-          <a:lstStyle/>
-          <a:p>
-            <a:pPr algn="l">
-              <a:lnSpc>
-                <a:spcPct val="110000"/>
-              </a:lnSpc>
-            </a:pPr>
-            <a:r>
-              <a:rPr sz="2000" b="0" i="0">
-                <a:solidFill>
-                  <a:srgbClr val="5B6B82"/>
-                </a:solidFill>
-                <a:latin typeface="Helvetica"/>
-              </a:rPr>
-              <a:t>tập ảnh khác hẳn ảnh dùng để đánh giá (FashionIQ, CIRCO)</a:t>
-            </a:r>
-          </a:p>
-        </p:txBody>
-      </p:sp>
+        </p:spPr>
+      </p:pic>
     </p:spTree>
   </p:cSld>
   <p:clrMapOvr>
@@ -12240,7 +14146,7 @@
         </p:nvSpPr>
         <p:spPr>
           <a:xfrm>
-            <a:off x="9966960" y="4206240"/>
+            <a:off x="-1645920" y="4206240"/>
             <a:ext cx="3657600" cy="3657600"/>
           </a:xfrm>
           <a:prstGeom prst="ellipse">
@@ -12285,7 +14191,7 @@
         </p:nvSpPr>
         <p:spPr>
           <a:xfrm>
-            <a:off x="11704320" y="3291840"/>
+            <a:off x="54864" y="3108960"/>
             <a:ext cx="411480" cy="411480"/>
           </a:xfrm>
           <a:prstGeom prst="ellipse">
@@ -12356,7 +14262,7 @@
                 </a:solidFill>
                 <a:latin typeface="Helvetica"/>
               </a:rPr>
-              <a:t>CIR là truy xuất có xếp hạng, đo bằng R@K và mAP@K</a:t>
+              <a:t>Nhiễu giúp φ dùng được vector ảnh dù hai miền lệch nhau</a:t>
             </a:r>
           </a:p>
         </p:txBody>
@@ -12409,7 +14315,7 @@
         <p:spPr>
           <a:xfrm>
             <a:off x="548640" y="1737360"/>
-            <a:ext cx="3566160" cy="3520440"/>
+            <a:ext cx="5577840" cy="2011680"/>
           </a:xfrm>
           <a:prstGeom prst="roundRect">
             <a:avLst>
@@ -12456,7 +14362,7 @@
         <p:spPr>
           <a:xfrm>
             <a:off x="777240" y="1901952"/>
-            <a:ext cx="3108960" cy="502920"/>
+            <a:ext cx="5120640" cy="502920"/>
           </a:xfrm>
           <a:prstGeom prst="rect">
             <a:avLst/>
@@ -12481,7 +14387,7 @@
                 </a:solidFill>
                 <a:latin typeface="Helvetica"/>
               </a:rPr>
-              <a:t>Chương I</a:t>
+              <a:t>Modality gap của CLIP</a:t>
             </a:r>
           </a:p>
         </p:txBody>
@@ -12495,7 +14401,7 @@
         <p:spPr>
           <a:xfrm>
             <a:off x="777240" y="2468880"/>
-            <a:ext cx="3108960" cy="2423160"/>
+            <a:ext cx="5120640" cy="1143000"/>
           </a:xfrm>
           <a:prstGeom prst="rect">
             <a:avLst/>
@@ -12528,7 +14434,7 @@
                 </a:solidFill>
                 <a:latin typeface="Helvetica"/>
               </a:rPr>
-              <a:t>Nhu cầu › truy vấn › danh sách xếp hạng</a:t>
+              <a:t>Ảnh, văn bản ở hai vùng tách biệt</a:t>
             </a:r>
           </a:p>
           <a:p>
@@ -12552,31 +14458,7 @@
                 </a:solidFill>
                 <a:latin typeface="Helvetica"/>
               </a:rPr>
-              <a:t>Đánh giá: Precision, Recall</a:t>
-            </a:r>
-          </a:p>
-          <a:p>
-            <a:pPr marL="292608" indent="-292608">
-              <a:lnSpc>
-                <a:spcPct val="108000"/>
-              </a:lnSpc>
-              <a:spcAft>
-                <a:spcPts val="600"/>
-              </a:spcAft>
-              <a:buClr>
-                <a:srgbClr val="1E6FE8"/>
-              </a:buClr>
-              <a:buFont typeface="Helvetica"/>
-              <a:buChar char="•"/>
-            </a:pPr>
-            <a:r>
-              <a:rPr sz="2100" b="0" i="0">
-                <a:solidFill>
-                  <a:srgbClr val="0F1C3F"/>
-                </a:solidFill>
-                <a:latin typeface="Helvetica"/>
-              </a:rPr>
-              <a:t>Boolean, chỉ mục ngược: khớp từ chính xác</a:t>
+              <a:t>φ học trên văn bản, dùng cho ảnh</a:t>
             </a:r>
           </a:p>
         </p:txBody>
@@ -12589,8 +14471,8 @@
         </p:nvSpPr>
         <p:spPr>
           <a:xfrm>
-            <a:off x="4343400" y="1737360"/>
-            <a:ext cx="3566160" cy="3520440"/>
+            <a:off x="548640" y="3931920"/>
+            <a:ext cx="5577840" cy="2011680"/>
           </a:xfrm>
           <a:prstGeom prst="roundRect">
             <a:avLst>
@@ -12636,8 +14518,8 @@
         </p:nvSpPr>
         <p:spPr>
           <a:xfrm>
-            <a:off x="4572000" y="1901952"/>
-            <a:ext cx="3108960" cy="502920"/>
+            <a:off x="777240" y="4096511"/>
+            <a:ext cx="5120640" cy="502920"/>
           </a:xfrm>
           <a:prstGeom prst="rect">
             <a:avLst/>
@@ -12662,7 +14544,7 @@
                 </a:solidFill>
                 <a:latin typeface="Helvetica"/>
               </a:rPr>
-              <a:t>Độ đo của CIR</a:t>
+              <a:t>Nhiễu của LinCIR</a:t>
             </a:r>
           </a:p>
         </p:txBody>
@@ -12675,8 +14557,8 @@
         </p:nvSpPr>
         <p:spPr>
           <a:xfrm>
-            <a:off x="4572000" y="2468880"/>
-            <a:ext cx="3108960" cy="2423160"/>
+            <a:off x="777240" y="4663440"/>
+            <a:ext cx="5120640" cy="1143000"/>
           </a:xfrm>
           <a:prstGeom prst="rect">
             <a:avLst/>
@@ -12709,7 +14591,7 @@
                 </a:solidFill>
                 <a:latin typeface="Helvetica"/>
               </a:rPr>
-              <a:t>R@K: tỉ lệ truy vấn có ảnh đích trong K kết quả đầu</a:t>
+              <a:t>Huấn luyện: φ nhận z_c + u · ε</a:t>
             </a:r>
           </a:p>
           <a:p>
@@ -12733,68 +14615,21 @@
                 </a:solidFill>
                 <a:latin typeface="Helvetica"/>
               </a:rPr>
-              <a:t>mAP@K: có nhiều ảnh đúng, thưởng ảnh đúng xếp cao</a:t>
-            </a:r>
-          </a:p>
-        </p:txBody>
-      </p:sp>
-      <p:sp>
-        <p:nvSpPr>
-          <p:cNvPr id="12" name="Rounded Rectangle 11"/>
-          <p:cNvSpPr/>
-          <p:nvPr/>
-        </p:nvSpPr>
-        <p:spPr>
-          <a:xfrm>
-            <a:off x="8138160" y="1737360"/>
-            <a:ext cx="3566160" cy="3520440"/>
-          </a:xfrm>
-          <a:prstGeom prst="roundRect">
-            <a:avLst>
-              <a:gd name="adj" fmla="val 8000"/>
-            </a:avLst>
-          </a:prstGeom>
-          <a:solidFill>
-            <a:srgbClr val="D6E6FF"/>
-          </a:solidFill>
-          <a:ln>
-            <a:noFill/>
-          </a:ln>
-          <a:effectLst/>
-        </p:spPr>
-        <p:style>
-          <a:lnRef idx="1">
-            <a:schemeClr val="accent1"/>
-          </a:lnRef>
-          <a:fillRef idx="3">
-            <a:schemeClr val="accent1"/>
-          </a:fillRef>
-          <a:effectRef idx="2">
-            <a:schemeClr val="accent1"/>
-          </a:effectRef>
-          <a:fontRef idx="minor">
-            <a:schemeClr val="lt1"/>
-          </a:fontRef>
-        </p:style>
-        <p:txBody>
-          <a:bodyPr rtlCol="0" anchor="ctr"/>
-          <a:lstStyle/>
-          <a:p>
-            <a:pPr algn="ctr"/>
-            <a:endParaRPr/>
-          </a:p>
-        </p:txBody>
-      </p:sp>
-      <p:sp>
-        <p:nvSpPr>
-          <p:cNvPr id="13" name="TextBox 12"/>
+              <a:t>u ~ U(0, 1), ε ~ N(0, I)</a:t>
+            </a:r>
+          </a:p>
+        </p:txBody>
+      </p:sp>
+      <p:sp>
+        <p:nvSpPr>
+          <p:cNvPr id="12" name="TextBox 11"/>
           <p:cNvSpPr txBox="1"/>
           <p:nvPr/>
         </p:nvSpPr>
         <p:spPr>
           <a:xfrm>
-            <a:off x="8366760" y="1901952"/>
-            <a:ext cx="3108960" cy="502920"/>
+            <a:off x="6675120" y="1828800"/>
+            <a:ext cx="4754880" cy="868680"/>
           </a:xfrm>
           <a:prstGeom prst="rect">
             <a:avLst/>
@@ -12813,98 +14648,27 @@
               </a:lnSpc>
             </a:pPr>
             <a:r>
-              <a:rPr sz="2200" b="1" i="0">
-                <a:solidFill>
-                  <a:srgbClr val="144FB0"/>
-                </a:solidFill>
-                <a:latin typeface="Helvetica"/>
-              </a:rPr>
-              <a:t>Tìm kiếm vector</a:t>
-            </a:r>
-          </a:p>
-        </p:txBody>
-      </p:sp>
-      <p:sp>
-        <p:nvSpPr>
-          <p:cNvPr id="14" name="TextBox 13"/>
+              <a:rPr sz="4800" b="1" i="0">
+                <a:solidFill>
+                  <a:srgbClr val="1E6FE8"/>
+                </a:solidFill>
+                <a:latin typeface="Helvetica"/>
+              </a:rPr>
+              <a:t>0,82</a:t>
+            </a:r>
+          </a:p>
+        </p:txBody>
+      </p:sp>
+      <p:sp>
+        <p:nvSpPr>
+          <p:cNvPr id="13" name="TextBox 12"/>
           <p:cNvSpPr txBox="1"/>
           <p:nvPr/>
         </p:nvSpPr>
         <p:spPr>
           <a:xfrm>
-            <a:off x="8366760" y="2468880"/>
-            <a:ext cx="3108960" cy="2423160"/>
-          </a:xfrm>
-          <a:prstGeom prst="rect">
-            <a:avLst/>
-          </a:prstGeom>
-          <a:noFill/>
-        </p:spPr>
-        <p:txBody>
-          <a:bodyPr wrap="square">
-            <a:spAutoFit/>
-          </a:bodyPr>
-          <a:lstStyle/>
-          <a:p>
-            <a:pPr marL="292608" indent="-292608">
-              <a:lnSpc>
-                <a:spcPct val="108000"/>
-              </a:lnSpc>
-              <a:spcAft>
-                <a:spcPts val="600"/>
-              </a:spcAft>
-              <a:buClr>
-                <a:srgbClr val="1E6FE8"/>
-              </a:buClr>
-              <a:buFont typeface="Helvetica"/>
-              <a:buChar char="•"/>
-            </a:pPr>
-            <a:r>
-              <a:rPr sz="2100" b="0" i="0">
-                <a:solidFill>
-                  <a:srgbClr val="0F1C3F"/>
-                </a:solidFill>
-                <a:latin typeface="Helvetica"/>
-              </a:rPr>
-              <a:t>Ảnh và truy vấn được mã hóa thành vector CLIP</a:t>
-            </a:r>
-          </a:p>
-          <a:p>
-            <a:pPr marL="292608" indent="-292608">
-              <a:lnSpc>
-                <a:spcPct val="108000"/>
-              </a:lnSpc>
-              <a:spcAft>
-                <a:spcPts val="600"/>
-              </a:spcAft>
-              <a:buClr>
-                <a:srgbClr val="1E6FE8"/>
-              </a:buClr>
-              <a:buFont typeface="Helvetica"/>
-              <a:buChar char="•"/>
-            </a:pPr>
-            <a:r>
-              <a:rPr sz="2100" b="0" i="0">
-                <a:solidFill>
-                  <a:srgbClr val="0F1C3F"/>
-                </a:solidFill>
-                <a:latin typeface="Helvetica"/>
-              </a:rPr>
-              <a:t>Xếp hạng ảnh theo độ tương đồng cosine</a:t>
-            </a:r>
-          </a:p>
-        </p:txBody>
-      </p:sp>
-      <p:sp>
-        <p:nvSpPr>
-          <p:cNvPr id="15" name="TextBox 14"/>
-          <p:cNvSpPr txBox="1"/>
-          <p:nvPr/>
-        </p:nvSpPr>
-        <p:spPr>
-          <a:xfrm>
-            <a:off x="548640" y="5440680"/>
-            <a:ext cx="11064240" cy="548640"/>
+            <a:off x="6675120" y="2697480"/>
+            <a:ext cx="4754880" cy="777240"/>
           </a:xfrm>
           <a:prstGeom prst="rect">
             <a:avLst/>
@@ -12923,13 +14687,91 @@
               </a:lnSpc>
             </a:pPr>
             <a:r>
-              <a:rPr sz="2200" b="1" i="0">
-                <a:solidFill>
-                  <a:srgbClr val="144FB0"/>
-                </a:solidFill>
-                <a:latin typeface="Helvetica"/>
-              </a:rPr>
-              <a:t>Nhóm báo cáo R@10, R@50 trên FashionIQ và mAP@K trên CIRCO</a:t>
+              <a:rPr sz="2000" b="0" i="0">
+                <a:solidFill>
+                  <a:srgbClr val="5B6B82"/>
+                </a:solidFill>
+                <a:latin typeface="Helvetica"/>
+              </a:rPr>
+              <a:t>khoảng cách giữa tâm vector ảnh và tâm vector văn bản (5.000 cặp COCO)</a:t>
+            </a:r>
+          </a:p>
+        </p:txBody>
+      </p:sp>
+      <p:sp>
+        <p:nvSpPr>
+          <p:cNvPr id="14" name="TextBox 13"/>
+          <p:cNvSpPr txBox="1"/>
+          <p:nvPr/>
+        </p:nvSpPr>
+        <p:spPr>
+          <a:xfrm>
+            <a:off x="6675120" y="3931920"/>
+            <a:ext cx="4754880" cy="868680"/>
+          </a:xfrm>
+          <a:prstGeom prst="rect">
+            <a:avLst/>
+          </a:prstGeom>
+          <a:noFill/>
+        </p:spPr>
+        <p:txBody>
+          <a:bodyPr wrap="square" lIns="45720" tIns="27432" rIns="45720" bIns="27432" anchor="t">
+            <a:spAutoFit/>
+          </a:bodyPr>
+          <a:lstStyle/>
+          <a:p>
+            <a:pPr algn="l">
+              <a:lnSpc>
+                <a:spcPct val="110000"/>
+              </a:lnSpc>
+            </a:pPr>
+            <a:r>
+              <a:rPr sz="4800" b="1" i="0">
+                <a:solidFill>
+                  <a:srgbClr val="1E6FE8"/>
+                </a:solidFill>
+                <a:latin typeface="Helvetica"/>
+              </a:rPr>
+              <a:t>0,26</a:t>
+            </a:r>
+          </a:p>
+        </p:txBody>
+      </p:sp>
+      <p:sp>
+        <p:nvSpPr>
+          <p:cNvPr id="15" name="TextBox 14"/>
+          <p:cNvSpPr txBox="1"/>
+          <p:nvPr/>
+        </p:nvSpPr>
+        <p:spPr>
+          <a:xfrm>
+            <a:off x="6675120" y="4800600"/>
+            <a:ext cx="4754880" cy="777240"/>
+          </a:xfrm>
+          <a:prstGeom prst="rect">
+            <a:avLst/>
+          </a:prstGeom>
+          <a:noFill/>
+        </p:spPr>
+        <p:txBody>
+          <a:bodyPr wrap="square" lIns="45720" tIns="27432" rIns="45720" bIns="27432" anchor="t">
+            <a:spAutoFit/>
+          </a:bodyPr>
+          <a:lstStyle/>
+          <a:p>
+            <a:pPr algn="l">
+              <a:lnSpc>
+                <a:spcPct val="110000"/>
+              </a:lnSpc>
+            </a:pPr>
+            <a:r>
+              <a:rPr sz="2000" b="0" i="0">
+                <a:solidFill>
+                  <a:srgbClr val="5B6B82"/>
+                </a:solidFill>
+                <a:latin typeface="Helvetica"/>
+              </a:rPr>
+              <a:t>cosine trung bình giữa một ảnh và chú thích của chính nó</a:t>
             </a:r>
           </a:p>
         </p:txBody>
@@ -12987,8 +14829,8 @@
         </p:nvSpPr>
         <p:spPr>
           <a:xfrm>
-            <a:off x="-1645920" y="4206240"/>
-            <a:ext cx="3657600" cy="3657600"/>
+            <a:off x="10058400" y="-2103120"/>
+            <a:ext cx="4023360" cy="4023360"/>
           </a:xfrm>
           <a:prstGeom prst="ellipse">
             <a:avLst/>
@@ -13032,7 +14874,7 @@
         </p:nvSpPr>
         <p:spPr>
           <a:xfrm>
-            <a:off x="54864" y="6035040"/>
+            <a:off x="11247120" y="502920"/>
             <a:ext cx="411480" cy="411480"/>
           </a:xfrm>
           <a:prstGeom prst="ellipse">
@@ -13103,7 +14945,7 @@
                 </a:solidFill>
                 <a:latin typeface="Helvetica"/>
               </a:rPr>
-              <a:t>Mã nguồn chạy trên môi trường mới với sai lệch bằng 0</a:t>
+              <a:t>Cải tiến A: thêm InfoNCE để từ giả phân biệt được các câu</a:t>
             </a:r>
           </a:p>
         </p:txBody>
@@ -13149,170 +14991,14 @@
       </p:sp>
       <p:sp>
         <p:nvSpPr>
-          <p:cNvPr id="6" name="TextBox 5"/>
-          <p:cNvSpPr txBox="1"/>
-          <p:nvPr/>
-        </p:nvSpPr>
-        <p:spPr>
-          <a:xfrm>
-            <a:off x="731520" y="1783080"/>
-            <a:ext cx="3291840" cy="868680"/>
-          </a:xfrm>
-          <a:prstGeom prst="rect">
-            <a:avLst/>
-          </a:prstGeom>
-          <a:noFill/>
-        </p:spPr>
-        <p:txBody>
-          <a:bodyPr wrap="square" lIns="45720" tIns="27432" rIns="45720" bIns="27432" anchor="t">
-            <a:spAutoFit/>
-          </a:bodyPr>
-          <a:lstStyle/>
-          <a:p>
-            <a:pPr algn="l">
-              <a:lnSpc>
-                <a:spcPct val="110000"/>
-              </a:lnSpc>
-            </a:pPr>
-            <a:r>
-              <a:rPr sz="4800" b="1" i="0">
-                <a:solidFill>
-                  <a:srgbClr val="1E6FE8"/>
-                </a:solidFill>
-                <a:latin typeface="Helvetica"/>
-              </a:rPr>
-              <a:t>0,00</a:t>
-            </a:r>
-          </a:p>
-        </p:txBody>
-      </p:sp>
-      <p:sp>
-        <p:nvSpPr>
-          <p:cNvPr id="7" name="TextBox 6"/>
-          <p:cNvSpPr txBox="1"/>
-          <p:nvPr/>
-        </p:nvSpPr>
-        <p:spPr>
-          <a:xfrm>
-            <a:off x="731520" y="2651760"/>
-            <a:ext cx="3291840" cy="777240"/>
-          </a:xfrm>
-          <a:prstGeom prst="rect">
-            <a:avLst/>
-          </a:prstGeom>
-          <a:noFill/>
-        </p:spPr>
-        <p:txBody>
-          <a:bodyPr wrap="square" lIns="45720" tIns="27432" rIns="45720" bIns="27432" anchor="t">
-            <a:spAutoFit/>
-          </a:bodyPr>
-          <a:lstStyle/>
-          <a:p>
-            <a:pPr algn="l">
-              <a:lnSpc>
-                <a:spcPct val="110000"/>
-              </a:lnSpc>
-            </a:pPr>
-            <a:r>
-              <a:rPr sz="2000" b="0" i="0">
-                <a:solidFill>
-                  <a:srgbClr val="5B6B82"/>
-                </a:solidFill>
-                <a:latin typeface="Helvetica"/>
-              </a:rPr>
-              <a:t>sai lệch giữa encoder viết lại và CLIP gốc</a:t>
-            </a:r>
-          </a:p>
-        </p:txBody>
-      </p:sp>
-      <p:sp>
-        <p:nvSpPr>
-          <p:cNvPr id="8" name="TextBox 7"/>
-          <p:cNvSpPr txBox="1"/>
-          <p:nvPr/>
-        </p:nvSpPr>
-        <p:spPr>
-          <a:xfrm>
-            <a:off x="731520" y="3703320"/>
-            <a:ext cx="3291840" cy="868680"/>
-          </a:xfrm>
-          <a:prstGeom prst="rect">
-            <a:avLst/>
-          </a:prstGeom>
-          <a:noFill/>
-        </p:spPr>
-        <p:txBody>
-          <a:bodyPr wrap="square" lIns="45720" tIns="27432" rIns="45720" bIns="27432" anchor="t">
-            <a:spAutoFit/>
-          </a:bodyPr>
-          <a:lstStyle/>
-          <a:p>
-            <a:pPr algn="l">
-              <a:lnSpc>
-                <a:spcPct val="110000"/>
-              </a:lnSpc>
-            </a:pPr>
-            <a:r>
-              <a:rPr sz="4800" b="1" i="0">
-                <a:solidFill>
-                  <a:srgbClr val="1E6FE8"/>
-                </a:solidFill>
-                <a:latin typeface="Helvetica"/>
-              </a:rPr>
-              <a:t>4</a:t>
-            </a:r>
-          </a:p>
-        </p:txBody>
-      </p:sp>
-      <p:sp>
-        <p:nvSpPr>
-          <p:cNvPr id="9" name="TextBox 8"/>
-          <p:cNvSpPr txBox="1"/>
-          <p:nvPr/>
-        </p:nvSpPr>
-        <p:spPr>
-          <a:xfrm>
-            <a:off x="731520" y="4572000"/>
-            <a:ext cx="3291840" cy="777240"/>
-          </a:xfrm>
-          <a:prstGeom prst="rect">
-            <a:avLst/>
-          </a:prstGeom>
-          <a:noFill/>
-        </p:spPr>
-        <p:txBody>
-          <a:bodyPr wrap="square" lIns="45720" tIns="27432" rIns="45720" bIns="27432" anchor="t">
-            <a:spAutoFit/>
-          </a:bodyPr>
-          <a:lstStyle/>
-          <a:p>
-            <a:pPr algn="l">
-              <a:lnSpc>
-                <a:spcPct val="110000"/>
-              </a:lnSpc>
-            </a:pPr>
-            <a:r>
-              <a:rPr sz="2000" b="0" i="0">
-                <a:solidFill>
-                  <a:srgbClr val="5B6B82"/>
-                </a:solidFill>
-                <a:latin typeface="Helvetica"/>
-              </a:rPr>
-              <a:t>lỗi trong mã gốc đã được sửa</a:t>
-            </a:r>
-          </a:p>
-        </p:txBody>
-      </p:sp>
-      <p:sp>
-        <p:nvSpPr>
-          <p:cNvPr id="10" name="Rounded Rectangle 9"/>
+          <p:cNvPr id="6" name="Rounded Rectangle 5"/>
           <p:cNvSpPr/>
           <p:nvPr/>
         </p:nvSpPr>
         <p:spPr>
           <a:xfrm>
-            <a:off x="4297680" y="1737360"/>
-            <a:ext cx="3566160" cy="3566160"/>
+            <a:off x="548640" y="1737360"/>
+            <a:ext cx="5577840" cy="2011680"/>
           </a:xfrm>
           <a:prstGeom prst="roundRect">
             <a:avLst>
@@ -13352,14 +15038,14 @@
       </p:sp>
       <p:sp>
         <p:nvSpPr>
-          <p:cNvPr id="11" name="TextBox 10"/>
+          <p:cNvPr id="7" name="TextBox 6"/>
           <p:cNvSpPr txBox="1"/>
           <p:nvPr/>
         </p:nvSpPr>
         <p:spPr>
           <a:xfrm>
-            <a:off x="4526280" y="1901952"/>
-            <a:ext cx="3108960" cy="502920"/>
+            <a:off x="777240" y="1901952"/>
+            <a:ext cx="5120640" cy="502920"/>
           </a:xfrm>
           <a:prstGeom prst="rect">
             <a:avLst/>
@@ -13384,21 +15070,21 @@
                 </a:solidFill>
                 <a:latin typeface="Helvetica"/>
               </a:rPr>
-              <a:t>Đã làm</a:t>
-            </a:r>
-          </a:p>
-        </p:txBody>
-      </p:sp>
-      <p:sp>
-        <p:nvSpPr>
-          <p:cNvPr id="12" name="TextBox 11"/>
+              <a:t>Vấn đề</a:t>
+            </a:r>
+          </a:p>
+        </p:txBody>
+      </p:sp>
+      <p:sp>
+        <p:nvSpPr>
+          <p:cNvPr id="8" name="TextBox 7"/>
           <p:cNvSpPr txBox="1"/>
           <p:nvPr/>
         </p:nvSpPr>
         <p:spPr>
           <a:xfrm>
-            <a:off x="4526280" y="2468880"/>
-            <a:ext cx="3108960" cy="2697480"/>
+            <a:off x="777240" y="2468880"/>
+            <a:ext cx="5120640" cy="1143000"/>
           </a:xfrm>
           <a:prstGeom prst="rect">
             <a:avLst/>
@@ -13431,7 +15117,7 @@
                 </a:solidFill>
                 <a:latin typeface="Helvetica"/>
               </a:rPr>
-              <a:t>Viết lại encoder văn bản cho thư viện mới</a:t>
+              <a:t>MSE không phạt khi câu đã che gần cả các câu khác</a:t>
             </a:r>
           </a:p>
           <a:p>
@@ -13455,45 +15141,21 @@
                 </a:solidFill>
                 <a:latin typeface="Helvetica"/>
               </a:rPr>
-              <a:t>Thay tokenizer; token “$” có mã 259</a:t>
-            </a:r>
-          </a:p>
-          <a:p>
-            <a:pPr marL="292608" indent="-292608">
-              <a:lnSpc>
-                <a:spcPct val="108000"/>
-              </a:lnSpc>
-              <a:spcAft>
-                <a:spcPts val="600"/>
-              </a:spcAft>
-              <a:buClr>
-                <a:srgbClr val="1E6FE8"/>
-              </a:buClr>
-              <a:buFont typeface="Helvetica"/>
-              <a:buChar char="•"/>
-            </a:pPr>
-            <a:r>
-              <a:rPr sz="2100" b="0" i="0">
-                <a:solidFill>
-                  <a:srgbClr val="0F1C3F"/>
-                </a:solidFill>
-                <a:latin typeface="Helvetica"/>
-              </a:rPr>
-              <a:t>Kiểm chứng trên ViT-B/32 và ViT-L/14</a:t>
-            </a:r>
-          </a:p>
-        </p:txBody>
-      </p:sp>
-      <p:sp>
-        <p:nvSpPr>
-          <p:cNvPr id="13" name="Rounded Rectangle 12"/>
+              <a:t>Nhưng đánh giá là bài toán xếp hạng</a:t>
+            </a:r>
+          </a:p>
+        </p:txBody>
+      </p:sp>
+      <p:sp>
+        <p:nvSpPr>
+          <p:cNvPr id="9" name="Rounded Rectangle 8"/>
           <p:cNvSpPr/>
           <p:nvPr/>
         </p:nvSpPr>
         <p:spPr>
           <a:xfrm>
-            <a:off x="8092440" y="1737360"/>
-            <a:ext cx="3566160" cy="3566160"/>
+            <a:off x="548640" y="3931920"/>
+            <a:ext cx="5577840" cy="2011680"/>
           </a:xfrm>
           <a:prstGeom prst="roundRect">
             <a:avLst>
@@ -13533,14 +15195,14 @@
       </p:sp>
       <p:sp>
         <p:nvSpPr>
-          <p:cNvPr id="14" name="TextBox 13"/>
+          <p:cNvPr id="10" name="TextBox 9"/>
           <p:cNvSpPr txBox="1"/>
           <p:nvPr/>
         </p:nvSpPr>
         <p:spPr>
           <a:xfrm>
-            <a:off x="8321040" y="1901952"/>
-            <a:ext cx="3108960" cy="502920"/>
+            <a:off x="777240" y="4096511"/>
+            <a:ext cx="5120640" cy="502920"/>
           </a:xfrm>
           <a:prstGeom prst="rect">
             <a:avLst/>
@@ -13565,21 +15227,21 @@
                 </a:solidFill>
                 <a:latin typeface="Helvetica"/>
               </a:rPr>
-              <a:t>Bài báo ≠ mã nguồn</a:t>
-            </a:r>
-          </a:p>
-        </p:txBody>
-      </p:sp>
-      <p:sp>
-        <p:nvSpPr>
-          <p:cNvPr id="15" name="TextBox 14"/>
+              <a:t>Giải pháp</a:t>
+            </a:r>
+          </a:p>
+        </p:txBody>
+      </p:sp>
+      <p:sp>
+        <p:nvSpPr>
+          <p:cNvPr id="11" name="TextBox 10"/>
           <p:cNvSpPr txBox="1"/>
           <p:nvPr/>
         </p:nvSpPr>
         <p:spPr>
           <a:xfrm>
-            <a:off x="8321040" y="2468880"/>
-            <a:ext cx="3108960" cy="2697480"/>
+            <a:off x="777240" y="4663440"/>
+            <a:ext cx="5120640" cy="1143000"/>
           </a:xfrm>
           <a:prstGeom prst="rect">
             <a:avLst/>
@@ -13606,13 +15268,13 @@
               <a:buChar char="•"/>
             </a:pPr>
             <a:r>
-              <a:rPr sz="2100" b="0" i="0">
+              <a:rPr sz="2100" b="1" i="0">
                 <a:solidFill>
                   <a:srgbClr val="0F1C3F"/>
                 </a:solidFill>
                 <a:latin typeface="Helvetica"/>
               </a:rPr>
-              <a:t>Mạng φ trong mã không có LayerNorm</a:t>
+              <a:t>L = L_SMP + 0,5 · InfoNCE</a:t>
             </a:r>
           </a:p>
           <a:p>
@@ -13636,31 +15298,163 @@
                 </a:solidFill>
                 <a:latin typeface="Helvetica"/>
               </a:rPr>
-              <a:t>Dữ liệu có thêm câu prompt Midjourney</a:t>
-            </a:r>
-          </a:p>
-          <a:p>
-            <a:pPr marL="292608" indent="-292608">
+              <a:t>InfoNCE kéo về câu gốc, đẩy xa 511 câu khác (τ = 0,07)</a:t>
+            </a:r>
+          </a:p>
+        </p:txBody>
+      </p:sp>
+      <p:sp>
+        <p:nvSpPr>
+          <p:cNvPr id="12" name="TextBox 11"/>
+          <p:cNvSpPr txBox="1"/>
+          <p:nvPr/>
+        </p:nvSpPr>
+        <p:spPr>
+          <a:xfrm>
+            <a:off x="6675120" y="1828800"/>
+            <a:ext cx="4754880" cy="868680"/>
+          </a:xfrm>
+          <a:prstGeom prst="rect">
+            <a:avLst/>
+          </a:prstGeom>
+          <a:noFill/>
+        </p:spPr>
+        <p:txBody>
+          <a:bodyPr wrap="square" lIns="45720" tIns="27432" rIns="45720" bIns="27432" anchor="t">
+            <a:spAutoFit/>
+          </a:bodyPr>
+          <a:lstStyle/>
+          <a:p>
+            <a:pPr algn="l">
               <a:lnSpc>
-                <a:spcPct val="108000"/>
+                <a:spcPct val="110000"/>
               </a:lnSpc>
-              <a:spcAft>
-                <a:spcPts val="600"/>
-              </a:spcAft>
-              <a:buClr>
-                <a:srgbClr val="1E6FE8"/>
-              </a:buClr>
-              <a:buFont typeface="Helvetica"/>
-              <a:buChar char="•"/>
             </a:pPr>
             <a:r>
-              <a:rPr sz="2100" b="0" i="0">
-                <a:solidFill>
-                  <a:srgbClr val="0F1C3F"/>
-                </a:solidFill>
-                <a:latin typeface="Helvetica"/>
-              </a:rPr>
-              <a:t>Cụm từ khóa bị che gồm cả từ hạn định</a:t>
+              <a:rPr sz="4800" b="1" i="0">
+                <a:solidFill>
+                  <a:srgbClr val="1E6FE8"/>
+                </a:solidFill>
+                <a:latin typeface="Helvetica"/>
+              </a:rPr>
+              <a:t>+2%</a:t>
+            </a:r>
+          </a:p>
+        </p:txBody>
+      </p:sp>
+      <p:sp>
+        <p:nvSpPr>
+          <p:cNvPr id="13" name="TextBox 12"/>
+          <p:cNvSpPr txBox="1"/>
+          <p:nvPr/>
+        </p:nvSpPr>
+        <p:spPr>
+          <a:xfrm>
+            <a:off x="6675120" y="2697480"/>
+            <a:ext cx="4754880" cy="777240"/>
+          </a:xfrm>
+          <a:prstGeom prst="rect">
+            <a:avLst/>
+          </a:prstGeom>
+          <a:noFill/>
+        </p:spPr>
+        <p:txBody>
+          <a:bodyPr wrap="square" lIns="45720" tIns="27432" rIns="45720" bIns="27432" anchor="t">
+            <a:spAutoFit/>
+          </a:bodyPr>
+          <a:lstStyle/>
+          <a:p>
+            <a:pPr algn="l">
+              <a:lnSpc>
+                <a:spcPct val="110000"/>
+              </a:lnSpc>
+            </a:pPr>
+            <a:r>
+              <a:rPr sz="2000" b="0" i="0">
+                <a:solidFill>
+                  <a:srgbClr val="5B6B82"/>
+                </a:solidFill>
+                <a:latin typeface="Helvetica"/>
+              </a:rPr>
+              <a:t>thời gian mỗi bước tăng 2% (1,474 so với 1,448 giây)</a:t>
+            </a:r>
+          </a:p>
+        </p:txBody>
+      </p:sp>
+      <p:sp>
+        <p:nvSpPr>
+          <p:cNvPr id="14" name="TextBox 13"/>
+          <p:cNvSpPr txBox="1"/>
+          <p:nvPr/>
+        </p:nvSpPr>
+        <p:spPr>
+          <a:xfrm>
+            <a:off x="6675120" y="3931920"/>
+            <a:ext cx="4754880" cy="868680"/>
+          </a:xfrm>
+          <a:prstGeom prst="rect">
+            <a:avLst/>
+          </a:prstGeom>
+          <a:noFill/>
+        </p:spPr>
+        <p:txBody>
+          <a:bodyPr wrap="square" lIns="45720" tIns="27432" rIns="45720" bIns="27432" anchor="t">
+            <a:spAutoFit/>
+          </a:bodyPr>
+          <a:lstStyle/>
+          <a:p>
+            <a:pPr algn="l">
+              <a:lnSpc>
+                <a:spcPct val="110000"/>
+              </a:lnSpc>
+            </a:pPr>
+            <a:r>
+              <a:rPr sz="4800" b="1" i="0">
+                <a:solidFill>
+                  <a:srgbClr val="1E6FE8"/>
+                </a:solidFill>
+                <a:latin typeface="Helvetica"/>
+              </a:rPr>
+              <a:t>H1</a:t>
+            </a:r>
+          </a:p>
+        </p:txBody>
+      </p:sp>
+      <p:sp>
+        <p:nvSpPr>
+          <p:cNvPr id="15" name="TextBox 14"/>
+          <p:cNvSpPr txBox="1"/>
+          <p:nvPr/>
+        </p:nvSpPr>
+        <p:spPr>
+          <a:xfrm>
+            <a:off x="6675120" y="4800600"/>
+            <a:ext cx="4754880" cy="777240"/>
+          </a:xfrm>
+          <a:prstGeom prst="rect">
+            <a:avLst/>
+          </a:prstGeom>
+          <a:noFill/>
+        </p:spPr>
+        <p:txBody>
+          <a:bodyPr wrap="square" lIns="45720" tIns="27432" rIns="45720" bIns="27432" anchor="t">
+            <a:spAutoFit/>
+          </a:bodyPr>
+          <a:lstStyle/>
+          <a:p>
+            <a:pPr algn="l">
+              <a:lnSpc>
+                <a:spcPct val="110000"/>
+              </a:lnSpc>
+            </a:pPr>
+            <a:r>
+              <a:rPr sz="2000" b="0" i="0">
+                <a:solidFill>
+                  <a:srgbClr val="5B6B82"/>
+                </a:solidFill>
+                <a:latin typeface="Helvetica"/>
+              </a:rPr>
+              <a:t>giả thuyết: A tăng R@K, mAP@K so với baseline</a:t>
             </a:r>
           </a:p>
         </p:txBody>

--- a/slides/Slides_Nhom8_LinCIR.pptx
+++ b/slides/Slides_Nhom8_LinCIR.pptx
@@ -311,152 +311,12 @@
           <a:lstStyle/>
           <a:p>
             <a:r>
-              <a:rPr dirty="0"/>
-              <a:t>[Tâm] </a:t>
-            </a:r>
-            <a:r>
-              <a:rPr dirty="0" err="1"/>
-              <a:t>Giới</a:t>
-            </a:r>
-            <a:r>
-              <a:rPr dirty="0"/>
-              <a:t> </a:t>
-            </a:r>
-            <a:r>
-              <a:rPr dirty="0" err="1"/>
-              <a:t>thiệu</a:t>
-            </a:r>
-            <a:r>
-              <a:rPr dirty="0"/>
-              <a:t> </a:t>
-            </a:r>
-            <a:r>
-              <a:rPr dirty="0" err="1"/>
-              <a:t>đề</a:t>
-            </a:r>
-            <a:r>
-              <a:rPr dirty="0"/>
-              <a:t> </a:t>
-            </a:r>
-            <a:r>
-              <a:rPr dirty="0" err="1"/>
-              <a:t>tài</a:t>
-            </a:r>
-            <a:r>
-              <a:rPr dirty="0"/>
-              <a:t>, </a:t>
-            </a:r>
-            <a:r>
-              <a:rPr dirty="0" err="1"/>
-              <a:t>giảng</a:t>
-            </a:r>
-            <a:r>
-              <a:rPr dirty="0"/>
-              <a:t> </a:t>
-            </a:r>
-            <a:r>
-              <a:rPr dirty="0" err="1"/>
-              <a:t>viên</a:t>
-            </a:r>
-            <a:r>
-              <a:rPr dirty="0"/>
-              <a:t> </a:t>
-            </a:r>
-            <a:r>
-              <a:rPr dirty="0" err="1"/>
-              <a:t>và</a:t>
-            </a:r>
-            <a:r>
-              <a:rPr dirty="0"/>
-              <a:t> 5 </a:t>
-            </a:r>
-            <a:r>
-              <a:rPr dirty="0" err="1"/>
-              <a:t>thành</a:t>
-            </a:r>
-            <a:r>
-              <a:rPr dirty="0"/>
-              <a:t> </a:t>
-            </a:r>
-            <a:r>
-              <a:rPr dirty="0" err="1"/>
-              <a:t>viên</a:t>
-            </a:r>
-            <a:r>
-              <a:rPr dirty="0"/>
-              <a:t>. Tâm </a:t>
-            </a:r>
-            <a:r>
-              <a:rPr dirty="0" err="1"/>
-              <a:t>trình</a:t>
-            </a:r>
-            <a:r>
-              <a:rPr dirty="0"/>
-              <a:t> </a:t>
-            </a:r>
-            <a:r>
-              <a:rPr dirty="0" err="1"/>
-              <a:t>bày</a:t>
-            </a:r>
-            <a:r>
-              <a:rPr dirty="0"/>
-              <a:t>, </a:t>
-            </a:r>
-            <a:r>
-              <a:rPr dirty="0" err="1"/>
-              <a:t>cả</a:t>
-            </a:r>
-            <a:r>
-              <a:rPr dirty="0"/>
-              <a:t> </a:t>
-            </a:r>
-            <a:r>
-              <a:rPr dirty="0" err="1"/>
-              <a:t>nhóm</a:t>
-            </a:r>
-            <a:r>
-              <a:rPr dirty="0"/>
-              <a:t> </a:t>
-            </a:r>
-            <a:r>
-              <a:rPr dirty="0" err="1"/>
-              <a:t>cùng</a:t>
-            </a:r>
-            <a:r>
-              <a:rPr dirty="0"/>
-              <a:t> </a:t>
-            </a:r>
-            <a:r>
-              <a:rPr dirty="0" err="1"/>
-              <a:t>trả</a:t>
-            </a:r>
-            <a:r>
-              <a:rPr dirty="0"/>
-              <a:t> </a:t>
-            </a:r>
-            <a:r>
-              <a:rPr dirty="0" err="1"/>
-              <a:t>lời</a:t>
-            </a:r>
-            <a:r>
-              <a:rPr dirty="0"/>
-              <a:t> </a:t>
-            </a:r>
-            <a:r>
-              <a:rPr dirty="0" err="1"/>
-              <a:t>câu</a:t>
-            </a:r>
-            <a:r>
-              <a:rPr dirty="0"/>
-              <a:t> </a:t>
-            </a:r>
-            <a:r>
-              <a:rPr dirty="0" err="1"/>
-              <a:t>hỏi</a:t>
-            </a:r>
-            <a:r>
-              <a:rPr dirty="0"/>
-              <a:t>.</a:t>
+              <a:t>[Tâm] Giới thiệu đề tài, rồi tóm tắt bằng ví dụ chiếc váy: bài toán tìm ảnh theo ảnh và câu sửa đổi; LinCIR dạy máy chỉ bằng văn bản, không cần ảnh và người gán nhãn; nhóm dựng lại mã, thử hai cải tiến: B tốt hơn có ý nghĩa thống kê, A làm kết quả kém đi. Nêu lộ trình: bài toán, phương pháp, hai cải tiến, thực nghiệm, lý do của kết quả.</a:t>
+            </a:r>
+          </a:p>
+          <a:p>
+            <a:r>
+              <a:t>Con số cần nêu: Huấn luyện nhanh hơn các cách trước 6 đến 8 lần; B tăng FashionIQ R@10 từ 25,90 lên 26,50.</a:t>
             </a:r>
           </a:p>
         </p:txBody>
@@ -601,12 +461,406 @@
           <a:lstStyle/>
           <a:p>
             <a:r>
-              <a:t>[Tâm] Mã gốc không chạy với thư viện hiện tại; nhóm viết lại encoder văn bản, thay tokenizer, sửa 4 lỗi và kiểm chứng sai lệch bằng 0. Thực nghiệm: 4 biến thể × 3 seed, 5.000 bước, chỉ khác thành phần cải tiến, chạy trên 2 GPU T4 của Kaggle.</a:t>
-            </a:r>
-          </a:p>
-          <a:p>
-            <a:r>
-              <a:t>Con số cần nêu: Sai lệch 0,00 so với CLIP gốc; nạp dữ liệu nhanh gấp 3,1 lần.</a:t>
+              <a:rPr dirty="0"/>
+              <a:t>[Tâm] </a:t>
+            </a:r>
+            <a:r>
+              <a:rPr dirty="0" err="1"/>
+              <a:t>Mã</a:t>
+            </a:r>
+            <a:r>
+              <a:rPr dirty="0"/>
+              <a:t> </a:t>
+            </a:r>
+            <a:r>
+              <a:rPr dirty="0" err="1"/>
+              <a:t>gốc</a:t>
+            </a:r>
+            <a:r>
+              <a:rPr dirty="0"/>
+              <a:t> </a:t>
+            </a:r>
+            <a:r>
+              <a:rPr dirty="0" err="1"/>
+              <a:t>không</a:t>
+            </a:r>
+            <a:r>
+              <a:rPr dirty="0"/>
+              <a:t> </a:t>
+            </a:r>
+            <a:r>
+              <a:rPr dirty="0" err="1"/>
+              <a:t>chạy</a:t>
+            </a:r>
+            <a:r>
+              <a:rPr dirty="0"/>
+              <a:t> </a:t>
+            </a:r>
+            <a:r>
+              <a:rPr dirty="0" err="1"/>
+              <a:t>với</a:t>
+            </a:r>
+            <a:r>
+              <a:rPr dirty="0"/>
+              <a:t> </a:t>
+            </a:r>
+            <a:r>
+              <a:rPr dirty="0" err="1"/>
+              <a:t>thư</a:t>
+            </a:r>
+            <a:r>
+              <a:rPr dirty="0"/>
+              <a:t> </a:t>
+            </a:r>
+            <a:r>
+              <a:rPr dirty="0" err="1"/>
+              <a:t>viện</a:t>
+            </a:r>
+            <a:r>
+              <a:rPr dirty="0"/>
+              <a:t> </a:t>
+            </a:r>
+            <a:r>
+              <a:rPr dirty="0" err="1"/>
+              <a:t>hiện</a:t>
+            </a:r>
+            <a:r>
+              <a:rPr dirty="0"/>
+              <a:t> </a:t>
+            </a:r>
+            <a:r>
+              <a:rPr dirty="0" err="1"/>
+              <a:t>tại</a:t>
+            </a:r>
+            <a:r>
+              <a:rPr dirty="0"/>
+              <a:t>; </a:t>
+            </a:r>
+            <a:r>
+              <a:rPr dirty="0" err="1"/>
+              <a:t>nhóm</a:t>
+            </a:r>
+            <a:r>
+              <a:rPr dirty="0"/>
+              <a:t> </a:t>
+            </a:r>
+            <a:r>
+              <a:rPr dirty="0" err="1"/>
+              <a:t>viết</a:t>
+            </a:r>
+            <a:r>
+              <a:rPr dirty="0"/>
+              <a:t> </a:t>
+            </a:r>
+            <a:r>
+              <a:rPr dirty="0" err="1"/>
+              <a:t>lại</a:t>
+            </a:r>
+            <a:r>
+              <a:rPr dirty="0"/>
+              <a:t> encoder </a:t>
+            </a:r>
+            <a:r>
+              <a:rPr dirty="0" err="1"/>
+              <a:t>văn</a:t>
+            </a:r>
+            <a:r>
+              <a:rPr dirty="0"/>
+              <a:t> </a:t>
+            </a:r>
+            <a:r>
+              <a:rPr dirty="0" err="1"/>
+              <a:t>bản</a:t>
+            </a:r>
+            <a:r>
+              <a:rPr dirty="0"/>
+              <a:t>, </a:t>
+            </a:r>
+            <a:r>
+              <a:rPr dirty="0" err="1"/>
+              <a:t>thay</a:t>
+            </a:r>
+            <a:r>
+              <a:rPr dirty="0"/>
+              <a:t> tokenizer, </a:t>
+            </a:r>
+            <a:r>
+              <a:rPr dirty="0" err="1"/>
+              <a:t>sửa</a:t>
+            </a:r>
+            <a:r>
+              <a:rPr dirty="0"/>
+              <a:t> 4 </a:t>
+            </a:r>
+            <a:r>
+              <a:rPr dirty="0" err="1"/>
+              <a:t>lỗi</a:t>
+            </a:r>
+            <a:r>
+              <a:rPr dirty="0"/>
+              <a:t> </a:t>
+            </a:r>
+            <a:r>
+              <a:rPr dirty="0" err="1"/>
+              <a:t>và</a:t>
+            </a:r>
+            <a:r>
+              <a:rPr dirty="0"/>
+              <a:t> </a:t>
+            </a:r>
+            <a:r>
+              <a:rPr dirty="0" err="1"/>
+              <a:t>kiểm</a:t>
+            </a:r>
+            <a:r>
+              <a:rPr dirty="0"/>
+              <a:t> </a:t>
+            </a:r>
+            <a:r>
+              <a:rPr dirty="0" err="1"/>
+              <a:t>chứng</a:t>
+            </a:r>
+            <a:r>
+              <a:rPr dirty="0"/>
+              <a:t> </a:t>
+            </a:r>
+            <a:r>
+              <a:rPr dirty="0" err="1"/>
+              <a:t>sai</a:t>
+            </a:r>
+            <a:r>
+              <a:rPr dirty="0"/>
+              <a:t> </a:t>
+            </a:r>
+            <a:r>
+              <a:rPr dirty="0" err="1"/>
+              <a:t>lệch</a:t>
+            </a:r>
+            <a:r>
+              <a:rPr dirty="0"/>
+              <a:t> </a:t>
+            </a:r>
+            <a:r>
+              <a:rPr dirty="0" err="1"/>
+              <a:t>bằng</a:t>
+            </a:r>
+            <a:r>
+              <a:rPr dirty="0"/>
+              <a:t> 0. </a:t>
+            </a:r>
+            <a:r>
+              <a:rPr dirty="0" err="1"/>
+              <a:t>Thực</a:t>
+            </a:r>
+            <a:r>
+              <a:rPr dirty="0"/>
+              <a:t> </a:t>
+            </a:r>
+            <a:r>
+              <a:rPr dirty="0" err="1"/>
+              <a:t>nghiệm</a:t>
+            </a:r>
+            <a:r>
+              <a:rPr dirty="0"/>
+              <a:t>: 4 </a:t>
+            </a:r>
+            <a:r>
+              <a:rPr dirty="0" err="1"/>
+              <a:t>biến</a:t>
+            </a:r>
+            <a:r>
+              <a:rPr dirty="0"/>
+              <a:t> </a:t>
+            </a:r>
+            <a:r>
+              <a:rPr dirty="0" err="1"/>
+              <a:t>thể</a:t>
+            </a:r>
+            <a:r>
+              <a:rPr dirty="0"/>
+              <a:t> × 3 seed, 5.000 </a:t>
+            </a:r>
+            <a:r>
+              <a:rPr dirty="0" err="1"/>
+              <a:t>bước</a:t>
+            </a:r>
+            <a:r>
+              <a:rPr dirty="0"/>
+              <a:t>, </a:t>
+            </a:r>
+            <a:r>
+              <a:rPr dirty="0" err="1"/>
+              <a:t>chỉ</a:t>
+            </a:r>
+            <a:r>
+              <a:rPr dirty="0"/>
+              <a:t> </a:t>
+            </a:r>
+            <a:r>
+              <a:rPr dirty="0" err="1"/>
+              <a:t>khác</a:t>
+            </a:r>
+            <a:r>
+              <a:rPr dirty="0"/>
+              <a:t> </a:t>
+            </a:r>
+            <a:r>
+              <a:rPr dirty="0" err="1"/>
+              <a:t>thành</a:t>
+            </a:r>
+            <a:r>
+              <a:rPr dirty="0"/>
+              <a:t> </a:t>
+            </a:r>
+            <a:r>
+              <a:rPr dirty="0" err="1"/>
+              <a:t>phần</a:t>
+            </a:r>
+            <a:r>
+              <a:rPr dirty="0"/>
+              <a:t> </a:t>
+            </a:r>
+            <a:r>
+              <a:rPr dirty="0" err="1"/>
+              <a:t>cải</a:t>
+            </a:r>
+            <a:r>
+              <a:rPr dirty="0"/>
+              <a:t> </a:t>
+            </a:r>
+            <a:r>
+              <a:rPr dirty="0" err="1"/>
+              <a:t>tiến</a:t>
+            </a:r>
+            <a:r>
+              <a:rPr dirty="0"/>
+              <a:t>, </a:t>
+            </a:r>
+            <a:r>
+              <a:rPr dirty="0" err="1"/>
+              <a:t>chạy</a:t>
+            </a:r>
+            <a:r>
+              <a:rPr dirty="0"/>
+              <a:t> </a:t>
+            </a:r>
+            <a:r>
+              <a:rPr dirty="0" err="1"/>
+              <a:t>trên</a:t>
+            </a:r>
+            <a:r>
+              <a:rPr dirty="0"/>
+              <a:t> 2 GPU T4 </a:t>
+            </a:r>
+            <a:r>
+              <a:rPr dirty="0" err="1"/>
+              <a:t>của</a:t>
+            </a:r>
+            <a:r>
+              <a:rPr dirty="0"/>
+              <a:t> Kaggle.</a:t>
+            </a:r>
+          </a:p>
+          <a:p>
+            <a:r>
+              <a:rPr dirty="0"/>
+              <a:t>Con </a:t>
+            </a:r>
+            <a:r>
+              <a:rPr dirty="0" err="1"/>
+              <a:t>số</a:t>
+            </a:r>
+            <a:r>
+              <a:rPr dirty="0"/>
+              <a:t> </a:t>
+            </a:r>
+            <a:r>
+              <a:rPr dirty="0" err="1"/>
+              <a:t>cần</a:t>
+            </a:r>
+            <a:r>
+              <a:rPr dirty="0"/>
+              <a:t> </a:t>
+            </a:r>
+            <a:r>
+              <a:rPr dirty="0" err="1"/>
+              <a:t>nêu</a:t>
+            </a:r>
+            <a:r>
+              <a:rPr dirty="0"/>
+              <a:t>: Sai </a:t>
+            </a:r>
+            <a:r>
+              <a:rPr dirty="0" err="1"/>
+              <a:t>lệch</a:t>
+            </a:r>
+            <a:r>
+              <a:rPr dirty="0"/>
+              <a:t> 0,00 so </a:t>
+            </a:r>
+            <a:r>
+              <a:rPr dirty="0" err="1"/>
+              <a:t>với</a:t>
+            </a:r>
+            <a:r>
+              <a:rPr dirty="0"/>
+              <a:t> CLIP </a:t>
+            </a:r>
+            <a:r>
+              <a:rPr dirty="0" err="1"/>
+              <a:t>gốc</a:t>
+            </a:r>
+            <a:r>
+              <a:rPr dirty="0"/>
+              <a:t>; </a:t>
+            </a:r>
+            <a:r>
+              <a:rPr dirty="0" err="1"/>
+              <a:t>nạp</a:t>
+            </a:r>
+            <a:r>
+              <a:rPr dirty="0"/>
+              <a:t> </a:t>
+            </a:r>
+            <a:r>
+              <a:rPr dirty="0" err="1"/>
+              <a:t>dữ</a:t>
+            </a:r>
+            <a:r>
+              <a:rPr dirty="0"/>
+              <a:t> </a:t>
+            </a:r>
+            <a:r>
+              <a:rPr dirty="0" err="1"/>
+              <a:t>liệu</a:t>
+            </a:r>
+            <a:r>
+              <a:rPr dirty="0"/>
+              <a:t> </a:t>
+            </a:r>
+            <a:r>
+              <a:rPr dirty="0" err="1"/>
+              <a:t>nhanh</a:t>
+            </a:r>
+            <a:r>
+              <a:rPr dirty="0"/>
+              <a:t> </a:t>
+            </a:r>
+            <a:r>
+              <a:rPr dirty="0" err="1"/>
+              <a:t>gấp</a:t>
+            </a:r>
+            <a:r>
+              <a:rPr dirty="0"/>
+              <a:t> 3,1 </a:t>
+            </a:r>
+            <a:r>
+              <a:rPr dirty="0" err="1"/>
+              <a:t>lần</a:t>
+            </a:r>
+            <a:r>
+              <a:rPr dirty="0"/>
+              <a:t>.</a:t>
             </a:r>
           </a:p>
         </p:txBody>
@@ -1039,504 +1293,7 @@
           <a:lstStyle/>
           <a:p>
             <a:r>
-              <a:rPr dirty="0"/>
-              <a:t>[Tâm] </a:t>
-            </a:r>
-            <a:r>
-              <a:rPr dirty="0" err="1"/>
-              <a:t>Phân</a:t>
-            </a:r>
-            <a:r>
-              <a:rPr dirty="0"/>
-              <a:t> </a:t>
-            </a:r>
-            <a:r>
-              <a:rPr dirty="0" err="1"/>
-              <a:t>công</a:t>
-            </a:r>
-            <a:r>
-              <a:rPr dirty="0"/>
-              <a:t>: Tâm </a:t>
-            </a:r>
-            <a:r>
-              <a:rPr dirty="0" err="1"/>
-              <a:t>chuyển</a:t>
-            </a:r>
-            <a:r>
-              <a:rPr dirty="0"/>
-              <a:t> </a:t>
-            </a:r>
-            <a:r>
-              <a:rPr dirty="0" err="1"/>
-              <a:t>đổi</a:t>
-            </a:r>
-            <a:r>
-              <a:rPr dirty="0"/>
-              <a:t> </a:t>
-            </a:r>
-            <a:r>
-              <a:rPr dirty="0" err="1"/>
-              <a:t>mã</a:t>
-            </a:r>
-            <a:r>
-              <a:rPr dirty="0"/>
-              <a:t> </a:t>
-            </a:r>
-            <a:r>
-              <a:rPr dirty="0" err="1"/>
-              <a:t>nguồn</a:t>
-            </a:r>
-            <a:r>
-              <a:rPr dirty="0"/>
-              <a:t> </a:t>
-            </a:r>
-            <a:r>
-              <a:rPr dirty="0" err="1"/>
-              <a:t>và</a:t>
-            </a:r>
-            <a:r>
-              <a:rPr dirty="0"/>
-              <a:t> </a:t>
-            </a:r>
-            <a:r>
-              <a:rPr dirty="0" err="1"/>
-              <a:t>chạy</a:t>
-            </a:r>
-            <a:r>
-              <a:rPr dirty="0"/>
-              <a:t> </a:t>
-            </a:r>
-            <a:r>
-              <a:rPr dirty="0" err="1"/>
-              <a:t>thực</a:t>
-            </a:r>
-            <a:r>
-              <a:rPr dirty="0"/>
-              <a:t> </a:t>
-            </a:r>
-            <a:r>
-              <a:rPr dirty="0" err="1"/>
-              <a:t>nghiệm</a:t>
-            </a:r>
-            <a:r>
-              <a:rPr dirty="0"/>
-              <a:t> </a:t>
-            </a:r>
-            <a:r>
-              <a:rPr dirty="0" err="1"/>
-              <a:t>trên</a:t>
-            </a:r>
-            <a:r>
-              <a:rPr dirty="0"/>
-              <a:t> Kaggle; Trung </a:t>
-            </a:r>
-            <a:r>
-              <a:rPr dirty="0" err="1"/>
-              <a:t>làm</a:t>
-            </a:r>
-            <a:r>
-              <a:rPr dirty="0"/>
-              <a:t> </a:t>
-            </a:r>
-            <a:r>
-              <a:rPr dirty="0" err="1"/>
-              <a:t>cải</a:t>
-            </a:r>
-            <a:r>
-              <a:rPr dirty="0"/>
-              <a:t> </a:t>
-            </a:r>
-            <a:r>
-              <a:rPr dirty="0" err="1"/>
-              <a:t>tiến</a:t>
-            </a:r>
-            <a:r>
-              <a:rPr dirty="0"/>
-              <a:t> A </a:t>
-            </a:r>
-            <a:r>
-              <a:rPr dirty="0" err="1"/>
-              <a:t>và</a:t>
-            </a:r>
-            <a:r>
-              <a:rPr dirty="0"/>
-              <a:t> </a:t>
-            </a:r>
-            <a:r>
-              <a:rPr dirty="0" err="1"/>
-              <a:t>đường</a:t>
-            </a:r>
-            <a:r>
-              <a:rPr dirty="0"/>
-              <a:t> </a:t>
-            </a:r>
-            <a:r>
-              <a:rPr dirty="0" err="1"/>
-              <a:t>học</a:t>
-            </a:r>
-            <a:r>
-              <a:rPr dirty="0"/>
-              <a:t>; Tùng </a:t>
-            </a:r>
-            <a:r>
-              <a:rPr dirty="0" err="1"/>
-              <a:t>tái</a:t>
-            </a:r>
-            <a:r>
-              <a:rPr dirty="0"/>
-              <a:t> </a:t>
-            </a:r>
-            <a:r>
-              <a:rPr dirty="0" err="1"/>
-              <a:t>hiện</a:t>
-            </a:r>
-            <a:r>
-              <a:rPr dirty="0"/>
-              <a:t> </a:t>
-            </a:r>
-            <a:r>
-              <a:rPr dirty="0" err="1"/>
-              <a:t>và</a:t>
-            </a:r>
-            <a:r>
-              <a:rPr dirty="0"/>
-              <a:t> </a:t>
-            </a:r>
-            <a:r>
-              <a:rPr dirty="0" err="1"/>
-              <a:t>đối</a:t>
-            </a:r>
-            <a:r>
-              <a:rPr dirty="0"/>
-              <a:t> </a:t>
-            </a:r>
-            <a:r>
-              <a:rPr dirty="0" err="1"/>
-              <a:t>chiếu</a:t>
-            </a:r>
-            <a:r>
-              <a:rPr dirty="0"/>
-              <a:t> </a:t>
-            </a:r>
-            <a:r>
-              <a:rPr dirty="0" err="1"/>
-              <a:t>bài</a:t>
-            </a:r>
-            <a:r>
-              <a:rPr dirty="0"/>
-              <a:t> </a:t>
-            </a:r>
-            <a:r>
-              <a:rPr dirty="0" err="1"/>
-              <a:t>báo</a:t>
-            </a:r>
-            <a:r>
-              <a:rPr dirty="0"/>
-              <a:t> – </a:t>
-            </a:r>
-            <a:r>
-              <a:rPr dirty="0" err="1"/>
-              <a:t>mã</a:t>
-            </a:r>
-            <a:r>
-              <a:rPr dirty="0"/>
-              <a:t> </a:t>
-            </a:r>
-            <a:r>
-              <a:rPr dirty="0" err="1"/>
-              <a:t>nguồn</a:t>
-            </a:r>
-            <a:r>
-              <a:rPr dirty="0"/>
-              <a:t>; Dũng </a:t>
-            </a:r>
-            <a:r>
-              <a:rPr dirty="0" err="1"/>
-              <a:t>làm</a:t>
-            </a:r>
-            <a:r>
-              <a:rPr dirty="0"/>
-              <a:t> </a:t>
-            </a:r>
-            <a:r>
-              <a:rPr dirty="0" err="1"/>
-              <a:t>giao</a:t>
-            </a:r>
-            <a:r>
-              <a:rPr dirty="0"/>
-              <a:t> </a:t>
-            </a:r>
-            <a:r>
-              <a:rPr dirty="0" err="1"/>
-              <a:t>thức</a:t>
-            </a:r>
-            <a:r>
-              <a:rPr dirty="0"/>
-              <a:t> </a:t>
-            </a:r>
-            <a:r>
-              <a:rPr dirty="0" err="1"/>
-              <a:t>đánh</a:t>
-            </a:r>
-            <a:r>
-              <a:rPr dirty="0"/>
-              <a:t> </a:t>
-            </a:r>
-            <a:r>
-              <a:rPr dirty="0" err="1"/>
-              <a:t>giá</a:t>
-            </a:r>
-            <a:r>
-              <a:rPr dirty="0"/>
-              <a:t>, </a:t>
-            </a:r>
-            <a:r>
-              <a:rPr dirty="0" err="1"/>
-              <a:t>kiểm</a:t>
-            </a:r>
-            <a:r>
-              <a:rPr dirty="0"/>
-              <a:t> </a:t>
-            </a:r>
-            <a:r>
-              <a:rPr dirty="0" err="1"/>
-              <a:t>định</a:t>
-            </a:r>
-            <a:r>
-              <a:rPr dirty="0"/>
-              <a:t> </a:t>
-            </a:r>
-            <a:r>
-              <a:rPr dirty="0" err="1"/>
-              <a:t>và</a:t>
-            </a:r>
-            <a:r>
-              <a:rPr dirty="0"/>
-              <a:t> </a:t>
-            </a:r>
-            <a:r>
-              <a:rPr dirty="0" err="1"/>
-              <a:t>cải</a:t>
-            </a:r>
-            <a:r>
-              <a:rPr dirty="0"/>
-              <a:t> </a:t>
-            </a:r>
-            <a:r>
-              <a:rPr dirty="0" err="1"/>
-              <a:t>tiến</a:t>
-            </a:r>
-            <a:r>
-              <a:rPr dirty="0"/>
-              <a:t> B; Nou </a:t>
-            </a:r>
-            <a:r>
-              <a:rPr dirty="0" err="1"/>
-              <a:t>làm</a:t>
-            </a:r>
-            <a:r>
-              <a:rPr dirty="0"/>
-              <a:t> </a:t>
-            </a:r>
-            <a:r>
-              <a:rPr dirty="0" err="1"/>
-              <a:t>tổng</a:t>
-            </a:r>
-            <a:r>
-              <a:rPr dirty="0"/>
-              <a:t> </a:t>
-            </a:r>
-            <a:r>
-              <a:rPr dirty="0" err="1"/>
-              <a:t>quan</a:t>
-            </a:r>
-            <a:r>
-              <a:rPr dirty="0"/>
-              <a:t> </a:t>
-            </a:r>
-            <a:r>
-              <a:rPr dirty="0" err="1"/>
-              <a:t>lý</a:t>
-            </a:r>
-            <a:r>
-              <a:rPr dirty="0"/>
-              <a:t> </a:t>
-            </a:r>
-            <a:r>
-              <a:rPr dirty="0" err="1"/>
-              <a:t>thuyết</a:t>
-            </a:r>
-            <a:r>
-              <a:rPr dirty="0"/>
-              <a:t>, </a:t>
-            </a:r>
-            <a:r>
-              <a:rPr dirty="0" err="1"/>
-              <a:t>phân</a:t>
-            </a:r>
-            <a:r>
-              <a:rPr dirty="0"/>
-              <a:t> </a:t>
-            </a:r>
-            <a:r>
-              <a:rPr dirty="0" err="1"/>
-              <a:t>tích</a:t>
-            </a:r>
-            <a:r>
-              <a:rPr dirty="0"/>
-              <a:t> </a:t>
-            </a:r>
-            <a:r>
-              <a:rPr dirty="0" err="1"/>
-              <a:t>định</a:t>
-            </a:r>
-            <a:r>
-              <a:rPr dirty="0"/>
-              <a:t> </a:t>
-            </a:r>
-            <a:r>
-              <a:rPr dirty="0" err="1"/>
-              <a:t>tính</a:t>
-            </a:r>
-            <a:r>
-              <a:rPr dirty="0"/>
-              <a:t> </a:t>
-            </a:r>
-            <a:r>
-              <a:rPr dirty="0" err="1"/>
-              <a:t>và</a:t>
-            </a:r>
-            <a:r>
-              <a:rPr dirty="0"/>
-              <a:t> </a:t>
-            </a:r>
-            <a:r>
-              <a:rPr dirty="0" err="1"/>
-              <a:t>thiết</a:t>
-            </a:r>
-            <a:r>
-              <a:rPr dirty="0"/>
-              <a:t> </a:t>
-            </a:r>
-            <a:r>
-              <a:rPr dirty="0" err="1"/>
-              <a:t>kế</a:t>
-            </a:r>
-            <a:r>
-              <a:rPr dirty="0"/>
-              <a:t> slides. Tâm </a:t>
-            </a:r>
-            <a:r>
-              <a:rPr dirty="0" err="1"/>
-              <a:t>trình</a:t>
-            </a:r>
-            <a:r>
-              <a:rPr dirty="0"/>
-              <a:t> </a:t>
-            </a:r>
-            <a:r>
-              <a:rPr dirty="0" err="1"/>
-              <a:t>bày</a:t>
-            </a:r>
-            <a:r>
-              <a:rPr dirty="0"/>
-              <a:t>, </a:t>
-            </a:r>
-            <a:r>
-              <a:rPr dirty="0" err="1"/>
-              <a:t>khi</a:t>
-            </a:r>
-            <a:r>
-              <a:rPr dirty="0"/>
-              <a:t> </a:t>
-            </a:r>
-            <a:r>
-              <a:rPr dirty="0" err="1"/>
-              <a:t>hỏi</a:t>
-            </a:r>
-            <a:r>
-              <a:rPr dirty="0"/>
-              <a:t> </a:t>
-            </a:r>
-            <a:r>
-              <a:rPr dirty="0" err="1"/>
-              <a:t>đáp</a:t>
-            </a:r>
-            <a:r>
-              <a:rPr dirty="0"/>
-              <a:t> </a:t>
-            </a:r>
-            <a:r>
-              <a:rPr dirty="0" err="1"/>
-              <a:t>thành</a:t>
-            </a:r>
-            <a:r>
-              <a:rPr dirty="0"/>
-              <a:t> </a:t>
-            </a:r>
-            <a:r>
-              <a:rPr dirty="0" err="1"/>
-              <a:t>viên</a:t>
-            </a:r>
-            <a:r>
-              <a:rPr dirty="0"/>
-              <a:t> </a:t>
-            </a:r>
-            <a:r>
-              <a:rPr dirty="0" err="1"/>
-              <a:t>phụ</a:t>
-            </a:r>
-            <a:r>
-              <a:rPr dirty="0"/>
-              <a:t> </a:t>
-            </a:r>
-            <a:r>
-              <a:rPr dirty="0" err="1"/>
-              <a:t>trách</a:t>
-            </a:r>
-            <a:r>
-              <a:rPr dirty="0"/>
-              <a:t> </a:t>
-            </a:r>
-            <a:r>
-              <a:rPr dirty="0" err="1"/>
-              <a:t>trả</a:t>
-            </a:r>
-            <a:r>
-              <a:rPr dirty="0"/>
-              <a:t> </a:t>
-            </a:r>
-            <a:r>
-              <a:rPr dirty="0" err="1"/>
-              <a:t>lời</a:t>
-            </a:r>
-            <a:r>
-              <a:rPr dirty="0"/>
-              <a:t> </a:t>
-            </a:r>
-            <a:r>
-              <a:rPr dirty="0" err="1"/>
-              <a:t>phần</a:t>
-            </a:r>
-            <a:r>
-              <a:rPr dirty="0"/>
-              <a:t> </a:t>
-            </a:r>
-            <a:r>
-              <a:rPr dirty="0" err="1"/>
-              <a:t>của</a:t>
-            </a:r>
-            <a:r>
-              <a:rPr dirty="0"/>
-              <a:t> </a:t>
-            </a:r>
-            <a:r>
-              <a:rPr dirty="0" err="1"/>
-              <a:t>mình</a:t>
-            </a:r>
-            <a:r>
-              <a:rPr dirty="0"/>
-              <a:t>.</a:t>
+              <a:t>[Tâm] Phân công: Tâm chuyển đổi mã nguồn và chạy thực nghiệm trên Kaggle; Trung làm cải tiến A và đường học; Tùng tái hiện và đối chiếu bài báo – mã nguồn; Dũng làm giao thức đánh giá, kiểm định và cải tiến B; Nou làm tổng quan lý thuyết, phân tích định tính và thiết kế slides. Tâm trình bày, khi hỏi đáp thành viên phụ trách trả lời phần của mình.</a:t>
             </a:r>
           </a:p>
         </p:txBody>
@@ -6754,7 +6511,7 @@
         <p:spPr>
           <a:xfrm>
             <a:off x="4297680" y="1737360"/>
-            <a:ext cx="3566160" cy="3566160"/>
+            <a:ext cx="3566160" cy="3959246"/>
           </a:xfrm>
           <a:prstGeom prst="roundRect">
             <a:avLst>
@@ -6934,8 +6691,8 @@
         </p:nvSpPr>
         <p:spPr>
           <a:xfrm>
-            <a:off x="8092440" y="1737360"/>
-            <a:ext cx="3566160" cy="3566160"/>
+            <a:off x="8092440" y="1737359"/>
+            <a:ext cx="3566160" cy="3959247"/>
           </a:xfrm>
           <a:prstGeom prst="roundRect">
             <a:avLst>
